--- a/BMO-Projekt.pptx
+++ b/BMO-Projekt.pptx
@@ -5,17 +5,20 @@
     <p:sldMasterId id="2147483677" r:id="rId1"/>
   </p:sldMasterIdLst>
   <p:notesMasterIdLst>
-    <p:notesMasterId r:id="rId10"/>
+    <p:notesMasterId r:id="rId13"/>
   </p:notesMasterIdLst>
   <p:sldIdLst>
     <p:sldId id="256" r:id="rId2"/>
     <p:sldId id="257" r:id="rId3"/>
     <p:sldId id="258" r:id="rId4"/>
-    <p:sldId id="260" r:id="rId5"/>
-    <p:sldId id="261" r:id="rId6"/>
-    <p:sldId id="262" r:id="rId7"/>
-    <p:sldId id="264" r:id="rId8"/>
-    <p:sldId id="263" r:id="rId9"/>
+    <p:sldId id="261" r:id="rId5"/>
+    <p:sldId id="266" r:id="rId6"/>
+    <p:sldId id="263" r:id="rId7"/>
+    <p:sldId id="260" r:id="rId8"/>
+    <p:sldId id="265" r:id="rId9"/>
+    <p:sldId id="267" r:id="rId10"/>
+    <p:sldId id="268" r:id="rId11"/>
+    <p:sldId id="269" r:id="rId12"/>
   </p:sldIdLst>
   <p:sldSz cx="12192000" cy="6858000"/>
   <p:notesSz cx="6858000" cy="9144000"/>
@@ -125,7 +128,7 @@
 <file path=ppt/revisionInfo.xml><?xml version="1.0" encoding="utf-8"?>
 <p1510:revInfo xmlns:a="http://schemas.openxmlformats.org/drawingml/2006/main" xmlns:r="http://schemas.openxmlformats.org/officeDocument/2006/relationships" xmlns:p1510="http://schemas.microsoft.com/office/powerpoint/2015/10/main">
   <p1510:revLst>
-    <p1510:client id="{83CBDACE-3A84-4186-B9A6-AE47CA0CDA88}" v="88" dt="2026-06-20T10:22:50.765"/>
+    <p1510:client id="{83CBDACE-3A84-4186-B9A6-AE47CA0CDA88}" v="212" dt="2026-06-21T14:20:12.567"/>
   </p1510:revLst>
 </p1510:revInfo>
 </file>
@@ -135,7 +138,7 @@
   <pc:docChgLst>
     <pc:chgData name="Niko Kläsener" userId="b3580cb7-15ad-4c2f-be10-30939a475464" providerId="ADAL" clId="{36612FA6-6914-4267-9ADB-97F4291D668E}"/>
     <pc:docChg chg="undo custSel addSld delSld modSld sldOrd">
-      <pc:chgData name="Niko Kläsener" userId="b3580cb7-15ad-4c2f-be10-30939a475464" providerId="ADAL" clId="{36612FA6-6914-4267-9ADB-97F4291D668E}" dt="2026-06-20T10:23:12.042" v="514" actId="1440"/>
+      <pc:chgData name="Niko Kläsener" userId="b3580cb7-15ad-4c2f-be10-30939a475464" providerId="ADAL" clId="{36612FA6-6914-4267-9ADB-97F4291D668E}" dt="2026-06-21T14:21:08.454" v="2204" actId="20577"/>
       <pc:docMkLst>
         <pc:docMk/>
       </pc:docMkLst>
@@ -203,11 +206,19 @@
         </pc:picChg>
       </pc:sldChg>
       <pc:sldChg chg="addSp modSp mod">
-        <pc:chgData name="Niko Kläsener" userId="b3580cb7-15ad-4c2f-be10-30939a475464" providerId="ADAL" clId="{36612FA6-6914-4267-9ADB-97F4291D668E}" dt="2026-06-19T12:41:31.040" v="264" actId="17032"/>
+        <pc:chgData name="Niko Kläsener" userId="b3580cb7-15ad-4c2f-be10-30939a475464" providerId="ADAL" clId="{36612FA6-6914-4267-9ADB-97F4291D668E}" dt="2026-06-20T11:06:40.427" v="522" actId="20577"/>
         <pc:sldMkLst>
           <pc:docMk/>
           <pc:sldMk cId="313630166" sldId="257"/>
         </pc:sldMkLst>
+        <pc:spChg chg="mod">
+          <ac:chgData name="Niko Kläsener" userId="b3580cb7-15ad-4c2f-be10-30939a475464" providerId="ADAL" clId="{36612FA6-6914-4267-9ADB-97F4291D668E}" dt="2026-06-20T11:06:40.427" v="522" actId="20577"/>
+          <ac:spMkLst>
+            <pc:docMk/>
+            <pc:sldMk cId="313630166" sldId="257"/>
+            <ac:spMk id="4" creationId="{1419ED52-81D0-EE21-5D00-FADC1EFF0FD8}"/>
+          </ac:spMkLst>
+        </pc:spChg>
         <pc:spChg chg="mod">
           <ac:chgData name="Niko Kläsener" userId="b3580cb7-15ad-4c2f-be10-30939a475464" providerId="ADAL" clId="{36612FA6-6914-4267-9ADB-97F4291D668E}" dt="2026-06-19T12:26:02.010" v="144" actId="1076"/>
           <ac:spMkLst>
@@ -298,25 +309,17 @@
         </pc:cxnChg>
       </pc:sldChg>
       <pc:sldChg chg="addSp delSp modSp mod">
-        <pc:chgData name="Niko Kläsener" userId="b3580cb7-15ad-4c2f-be10-30939a475464" providerId="ADAL" clId="{36612FA6-6914-4267-9ADB-97F4291D668E}" dt="2026-06-20T10:16:37.071" v="506" actId="1076"/>
+        <pc:chgData name="Niko Kläsener" userId="b3580cb7-15ad-4c2f-be10-30939a475464" providerId="ADAL" clId="{36612FA6-6914-4267-9ADB-97F4291D668E}" dt="2026-06-21T14:02:31.331" v="1681" actId="20577"/>
         <pc:sldMkLst>
           <pc:docMk/>
           <pc:sldMk cId="1562465697" sldId="258"/>
         </pc:sldMkLst>
         <pc:spChg chg="mod">
-          <ac:chgData name="Niko Kläsener" userId="b3580cb7-15ad-4c2f-be10-30939a475464" providerId="ADAL" clId="{36612FA6-6914-4267-9ADB-97F4291D668E}" dt="2026-06-20T08:58:39.287" v="269" actId="20577"/>
+          <ac:chgData name="Niko Kläsener" userId="b3580cb7-15ad-4c2f-be10-30939a475464" providerId="ADAL" clId="{36612FA6-6914-4267-9ADB-97F4291D668E}" dt="2026-06-21T14:02:31.331" v="1681" actId="20577"/>
           <ac:spMkLst>
             <pc:docMk/>
             <pc:sldMk cId="1562465697" sldId="258"/>
             <ac:spMk id="2" creationId="{211B614C-40F6-C498-5107-17FB1AFB2B8A}"/>
-          </ac:spMkLst>
-        </pc:spChg>
-        <pc:spChg chg="del mod">
-          <ac:chgData name="Niko Kläsener" userId="b3580cb7-15ad-4c2f-be10-30939a475464" providerId="ADAL" clId="{36612FA6-6914-4267-9ADB-97F4291D668E}" dt="2026-06-19T10:47:45.152" v="26" actId="22"/>
-          <ac:spMkLst>
-            <pc:docMk/>
-            <pc:sldMk cId="1562465697" sldId="258"/>
-            <ac:spMk id="3" creationId="{9B3FC2DD-A92B-B9BD-2834-E5F4E1D8BD2D}"/>
           </ac:spMkLst>
         </pc:spChg>
         <pc:spChg chg="add mod">
@@ -327,22 +330,6 @@
             <ac:spMk id="3" creationId="{F984959B-3B96-707C-C5CF-921F9260BFDE}"/>
           </ac:spMkLst>
         </pc:spChg>
-        <pc:spChg chg="add del mod">
-          <ac:chgData name="Niko Kläsener" userId="b3580cb7-15ad-4c2f-be10-30939a475464" providerId="ADAL" clId="{36612FA6-6914-4267-9ADB-97F4291D668E}" dt="2026-06-19T15:39:33.338" v="266" actId="931"/>
-          <ac:spMkLst>
-            <pc:docMk/>
-            <pc:sldMk cId="1562465697" sldId="258"/>
-            <ac:spMk id="7" creationId="{AF6D7D65-F16E-92D0-31BE-EEDCDC63F32A}"/>
-          </ac:spMkLst>
-        </pc:spChg>
-        <pc:picChg chg="add del mod ord">
-          <ac:chgData name="Niko Kläsener" userId="b3580cb7-15ad-4c2f-be10-30939a475464" providerId="ADAL" clId="{36612FA6-6914-4267-9ADB-97F4291D668E}" dt="2026-06-19T15:38:57.529" v="265" actId="478"/>
-          <ac:picMkLst>
-            <pc:docMk/>
-            <pc:sldMk cId="1562465697" sldId="258"/>
-            <ac:picMk id="8" creationId="{28F060EB-3C4B-26C4-6CC8-CA46B6313F5B}"/>
-          </ac:picMkLst>
-        </pc:picChg>
         <pc:picChg chg="add mod ord">
           <ac:chgData name="Niko Kläsener" userId="b3580cb7-15ad-4c2f-be10-30939a475464" providerId="ADAL" clId="{36612FA6-6914-4267-9ADB-97F4291D668E}" dt="2026-06-20T10:09:03.294" v="351" actId="1076"/>
           <ac:picMkLst>
@@ -352,23 +339,8 @@
           </ac:picMkLst>
         </pc:picChg>
       </pc:sldChg>
-      <pc:sldChg chg="modSp new del mod">
-        <pc:chgData name="Niko Kläsener" userId="b3580cb7-15ad-4c2f-be10-30939a475464" providerId="ADAL" clId="{36612FA6-6914-4267-9ADB-97F4291D668E}" dt="2026-06-19T10:52:29.739" v="67" actId="47"/>
-        <pc:sldMkLst>
-          <pc:docMk/>
-          <pc:sldMk cId="746984907" sldId="259"/>
-        </pc:sldMkLst>
-        <pc:spChg chg="mod">
-          <ac:chgData name="Niko Kläsener" userId="b3580cb7-15ad-4c2f-be10-30939a475464" providerId="ADAL" clId="{36612FA6-6914-4267-9ADB-97F4291D668E}" dt="2026-06-19T10:49:35.187" v="61" actId="21"/>
-          <ac:spMkLst>
-            <pc:docMk/>
-            <pc:sldMk cId="746984907" sldId="259"/>
-            <ac:spMk id="2" creationId="{80B43282-9030-BFCE-6BD0-1526FD110A6A}"/>
-          </ac:spMkLst>
-        </pc:spChg>
-      </pc:sldChg>
-      <pc:sldChg chg="addSp delSp modSp new mod">
-        <pc:chgData name="Niko Kläsener" userId="b3580cb7-15ad-4c2f-be10-30939a475464" providerId="ADAL" clId="{36612FA6-6914-4267-9ADB-97F4291D668E}" dt="2026-06-19T10:50:28.310" v="66" actId="931"/>
+      <pc:sldChg chg="addSp delSp modSp new mod ord">
+        <pc:chgData name="Niko Kläsener" userId="b3580cb7-15ad-4c2f-be10-30939a475464" providerId="ADAL" clId="{36612FA6-6914-4267-9ADB-97F4291D668E}" dt="2026-06-21T12:28:34.308" v="530"/>
         <pc:sldMkLst>
           <pc:docMk/>
           <pc:sldMk cId="2830380807" sldId="260"/>
@@ -381,40 +353,16 @@
             <ac:spMk id="2" creationId="{4DC433D2-17BA-BB4F-88B0-0F9E964EEB21}"/>
           </ac:spMkLst>
         </pc:spChg>
-        <pc:spChg chg="del">
-          <ac:chgData name="Niko Kläsener" userId="b3580cb7-15ad-4c2f-be10-30939a475464" providerId="ADAL" clId="{36612FA6-6914-4267-9ADB-97F4291D668E}" dt="2026-06-19T10:50:01.681" v="63" actId="931"/>
-          <ac:spMkLst>
-            <pc:docMk/>
-            <pc:sldMk cId="2830380807" sldId="260"/>
-            <ac:spMk id="3" creationId="{AE507860-BF51-9992-18DF-106E6C4C923A}"/>
-          </ac:spMkLst>
-        </pc:spChg>
-        <pc:spChg chg="add del">
-          <ac:chgData name="Niko Kläsener" userId="b3580cb7-15ad-4c2f-be10-30939a475464" providerId="ADAL" clId="{36612FA6-6914-4267-9ADB-97F4291D668E}" dt="2026-06-19T10:50:28.310" v="66" actId="931"/>
-          <ac:spMkLst>
-            <pc:docMk/>
-            <pc:sldMk cId="2830380807" sldId="260"/>
-            <ac:spMk id="4" creationId="{385250F3-A37D-7ADE-19C9-371FDC47EA04}"/>
-          </ac:spMkLst>
-        </pc:spChg>
         <pc:picChg chg="add mod ord">
-          <ac:chgData name="Niko Kläsener" userId="b3580cb7-15ad-4c2f-be10-30939a475464" providerId="ADAL" clId="{36612FA6-6914-4267-9ADB-97F4291D668E}" dt="2026-06-19T10:50:01.681" v="63" actId="931"/>
+          <ac:chgData name="Niko Kläsener" userId="b3580cb7-15ad-4c2f-be10-30939a475464" providerId="ADAL" clId="{36612FA6-6914-4267-9ADB-97F4291D668E}" dt="2026-06-21T12:23:23.584" v="523" actId="14826"/>
           <ac:picMkLst>
             <pc:docMk/>
             <pc:sldMk cId="2830380807" sldId="260"/>
             <ac:picMk id="9" creationId="{B328A8BF-6F71-6DE1-E847-0E993C071748}"/>
           </ac:picMkLst>
         </pc:picChg>
-        <pc:picChg chg="add del mod ord">
-          <ac:chgData name="Niko Kläsener" userId="b3580cb7-15ad-4c2f-be10-30939a475464" providerId="ADAL" clId="{36612FA6-6914-4267-9ADB-97F4291D668E}" dt="2026-06-19T10:50:20.291" v="65" actId="931"/>
-          <ac:picMkLst>
-            <pc:docMk/>
-            <pc:sldMk cId="2830380807" sldId="260"/>
-            <ac:picMk id="11" creationId="{D9F64A39-B0E0-C0D0-1C68-4EBF29009D20}"/>
-          </ac:picMkLst>
-        </pc:picChg>
         <pc:picChg chg="add mod ord">
-          <ac:chgData name="Niko Kläsener" userId="b3580cb7-15ad-4c2f-be10-30939a475464" providerId="ADAL" clId="{36612FA6-6914-4267-9ADB-97F4291D668E}" dt="2026-06-19T10:50:28.310" v="66" actId="931"/>
+          <ac:chgData name="Niko Kläsener" userId="b3580cb7-15ad-4c2f-be10-30939a475464" providerId="ADAL" clId="{36612FA6-6914-4267-9ADB-97F4291D668E}" dt="2026-06-21T12:23:43.789" v="524" actId="14826"/>
           <ac:picMkLst>
             <pc:docMk/>
             <pc:sldMk cId="2830380807" sldId="260"/>
@@ -422,30 +370,38 @@
           </ac:picMkLst>
         </pc:picChg>
       </pc:sldChg>
-      <pc:sldChg chg="addSp delSp modSp new mod">
-        <pc:chgData name="Niko Kläsener" userId="b3580cb7-15ad-4c2f-be10-30939a475464" providerId="ADAL" clId="{36612FA6-6914-4267-9ADB-97F4291D668E}" dt="2026-06-19T10:53:54.635" v="86" actId="931"/>
+      <pc:sldChg chg="addSp delSp modSp new mod ord">
+        <pc:chgData name="Niko Kläsener" userId="b3580cb7-15ad-4c2f-be10-30939a475464" providerId="ADAL" clId="{36612FA6-6914-4267-9ADB-97F4291D668E}" dt="2026-06-21T12:44:44.495" v="714" actId="20577"/>
         <pc:sldMkLst>
           <pc:docMk/>
           <pc:sldMk cId="1179084943" sldId="261"/>
         </pc:sldMkLst>
         <pc:spChg chg="mod">
-          <ac:chgData name="Niko Kläsener" userId="b3580cb7-15ad-4c2f-be10-30939a475464" providerId="ADAL" clId="{36612FA6-6914-4267-9ADB-97F4291D668E}" dt="2026-06-19T10:53:03.614" v="85" actId="20577"/>
+          <ac:chgData name="Niko Kläsener" userId="b3580cb7-15ad-4c2f-be10-30939a475464" providerId="ADAL" clId="{36612FA6-6914-4267-9ADB-97F4291D668E}" dt="2026-06-21T12:44:44.495" v="714" actId="20577"/>
           <ac:spMkLst>
             <pc:docMk/>
             <pc:sldMk cId="1179084943" sldId="261"/>
             <ac:spMk id="2" creationId="{1E94E426-77E3-D9B2-5685-3FEAC25AD1A5}"/>
           </ac:spMkLst>
         </pc:spChg>
-        <pc:spChg chg="del">
-          <ac:chgData name="Niko Kläsener" userId="b3580cb7-15ad-4c2f-be10-30939a475464" providerId="ADAL" clId="{36612FA6-6914-4267-9ADB-97F4291D668E}" dt="2026-06-19T10:53:54.635" v="86" actId="931"/>
+        <pc:spChg chg="add mod">
+          <ac:chgData name="Niko Kläsener" userId="b3580cb7-15ad-4c2f-be10-30939a475464" providerId="ADAL" clId="{36612FA6-6914-4267-9ADB-97F4291D668E}" dt="2026-06-21T12:42:43.156" v="692" actId="113"/>
           <ac:spMkLst>
             <pc:docMk/>
             <pc:sldMk cId="1179084943" sldId="261"/>
-            <ac:spMk id="3" creationId="{2D08F052-674F-EFA1-EB75-5747051809E7}"/>
+            <ac:spMk id="3" creationId="{03B229CE-C208-3B6E-0937-5F9A9A7AA444}"/>
+          </ac:spMkLst>
+        </pc:spChg>
+        <pc:spChg chg="add mod">
+          <ac:chgData name="Niko Kläsener" userId="b3580cb7-15ad-4c2f-be10-30939a475464" providerId="ADAL" clId="{36612FA6-6914-4267-9ADB-97F4291D668E}" dt="2026-06-21T12:42:46.285" v="693" actId="113"/>
+          <ac:spMkLst>
+            <pc:docMk/>
+            <pc:sldMk cId="1179084943" sldId="261"/>
+            <ac:spMk id="7" creationId="{6FF04FC2-856E-1509-998A-C8DF92BD91DF}"/>
           </ac:spMkLst>
         </pc:spChg>
         <pc:picChg chg="add mod ord">
-          <ac:chgData name="Niko Kläsener" userId="b3580cb7-15ad-4c2f-be10-30939a475464" providerId="ADAL" clId="{36612FA6-6914-4267-9ADB-97F4291D668E}" dt="2026-06-19T10:53:54.635" v="86" actId="931"/>
+          <ac:chgData name="Niko Kläsener" userId="b3580cb7-15ad-4c2f-be10-30939a475464" providerId="ADAL" clId="{36612FA6-6914-4267-9ADB-97F4291D668E}" dt="2026-06-21T12:26:50.326" v="528" actId="1076"/>
           <ac:picMkLst>
             <pc:docMk/>
             <pc:sldMk cId="1179084943" sldId="261"/>
@@ -453,30 +409,22 @@
           </ac:picMkLst>
         </pc:picChg>
       </pc:sldChg>
-      <pc:sldChg chg="addSp delSp modSp new mod ord">
-        <pc:chgData name="Niko Kläsener" userId="b3580cb7-15ad-4c2f-be10-30939a475464" providerId="ADAL" clId="{36612FA6-6914-4267-9ADB-97F4291D668E}" dt="2026-06-19T10:58:05.492" v="123"/>
+      <pc:sldChg chg="addSp delSp modSp new add del mod ord">
+        <pc:chgData name="Niko Kläsener" userId="b3580cb7-15ad-4c2f-be10-30939a475464" providerId="ADAL" clId="{36612FA6-6914-4267-9ADB-97F4291D668E}" dt="2026-06-21T12:56:20.769" v="768" actId="47"/>
         <pc:sldMkLst>
           <pc:docMk/>
           <pc:sldMk cId="2368679576" sldId="262"/>
         </pc:sldMkLst>
         <pc:spChg chg="mod">
-          <ac:chgData name="Niko Kläsener" userId="b3580cb7-15ad-4c2f-be10-30939a475464" providerId="ADAL" clId="{36612FA6-6914-4267-9ADB-97F4291D668E}" dt="2026-06-19T10:55:04.400" v="105" actId="20577"/>
+          <ac:chgData name="Niko Kläsener" userId="b3580cb7-15ad-4c2f-be10-30939a475464" providerId="ADAL" clId="{36612FA6-6914-4267-9ADB-97F4291D668E}" dt="2026-06-21T12:56:11.809" v="766" actId="20577"/>
           <ac:spMkLst>
             <pc:docMk/>
             <pc:sldMk cId="2368679576" sldId="262"/>
             <ac:spMk id="2" creationId="{2944ED13-FD2C-1619-5816-65507A0AA985}"/>
           </ac:spMkLst>
         </pc:spChg>
-        <pc:spChg chg="del">
-          <ac:chgData name="Niko Kläsener" userId="b3580cb7-15ad-4c2f-be10-30939a475464" providerId="ADAL" clId="{36612FA6-6914-4267-9ADB-97F4291D668E}" dt="2026-06-19T10:54:53.339" v="102" actId="931"/>
-          <ac:spMkLst>
-            <pc:docMk/>
-            <pc:sldMk cId="2368679576" sldId="262"/>
-            <ac:spMk id="3" creationId="{2F562802-86AB-44D8-8F3E-18CADBC47516}"/>
-          </ac:spMkLst>
-        </pc:spChg>
         <pc:picChg chg="add mod ord">
-          <ac:chgData name="Niko Kläsener" userId="b3580cb7-15ad-4c2f-be10-30939a475464" providerId="ADAL" clId="{36612FA6-6914-4267-9ADB-97F4291D668E}" dt="2026-06-19T10:54:53.339" v="102" actId="931"/>
+          <ac:chgData name="Niko Kläsener" userId="b3580cb7-15ad-4c2f-be10-30939a475464" providerId="ADAL" clId="{36612FA6-6914-4267-9ADB-97F4291D668E}" dt="2026-06-21T12:43:35.510" v="696" actId="14826"/>
           <ac:picMkLst>
             <pc:docMk/>
             <pc:sldMk cId="2368679576" sldId="262"/>
@@ -484,30 +432,22 @@
           </ac:picMkLst>
         </pc:picChg>
       </pc:sldChg>
-      <pc:sldChg chg="addSp delSp modSp new mod">
-        <pc:chgData name="Niko Kläsener" userId="b3580cb7-15ad-4c2f-be10-30939a475464" providerId="ADAL" clId="{36612FA6-6914-4267-9ADB-97F4291D668E}" dt="2026-06-19T10:57:09.107" v="121" actId="20577"/>
+      <pc:sldChg chg="addSp delSp modSp new mod ord">
+        <pc:chgData name="Niko Kläsener" userId="b3580cb7-15ad-4c2f-be10-30939a475464" providerId="ADAL" clId="{36612FA6-6914-4267-9ADB-97F4291D668E}" dt="2026-06-21T12:44:59.951" v="718"/>
         <pc:sldMkLst>
           <pc:docMk/>
           <pc:sldMk cId="937536178" sldId="263"/>
         </pc:sldMkLst>
         <pc:spChg chg="mod">
-          <ac:chgData name="Niko Kläsener" userId="b3580cb7-15ad-4c2f-be10-30939a475464" providerId="ADAL" clId="{36612FA6-6914-4267-9ADB-97F4291D668E}" dt="2026-06-19T10:57:09.107" v="121" actId="20577"/>
+          <ac:chgData name="Niko Kläsener" userId="b3580cb7-15ad-4c2f-be10-30939a475464" providerId="ADAL" clId="{36612FA6-6914-4267-9ADB-97F4291D668E}" dt="2026-06-21T12:44:59.951" v="718"/>
           <ac:spMkLst>
             <pc:docMk/>
             <pc:sldMk cId="937536178" sldId="263"/>
             <ac:spMk id="2" creationId="{DE86CDD5-F3A8-1E49-03B4-ABAC4E69630F}"/>
           </ac:spMkLst>
         </pc:spChg>
-        <pc:spChg chg="del">
-          <ac:chgData name="Niko Kläsener" userId="b3580cb7-15ad-4c2f-be10-30939a475464" providerId="ADAL" clId="{36612FA6-6914-4267-9ADB-97F4291D668E}" dt="2026-06-19T10:56:21.822" v="117" actId="931"/>
-          <ac:spMkLst>
-            <pc:docMk/>
-            <pc:sldMk cId="937536178" sldId="263"/>
-            <ac:spMk id="3" creationId="{2FB2CE08-A8E1-8EF8-2CF5-0992FB0A6BCE}"/>
-          </ac:spMkLst>
-        </pc:spChg>
         <pc:picChg chg="add mod ord">
-          <ac:chgData name="Niko Kläsener" userId="b3580cb7-15ad-4c2f-be10-30939a475464" providerId="ADAL" clId="{36612FA6-6914-4267-9ADB-97F4291D668E}" dt="2026-06-19T10:56:21.822" v="117" actId="931"/>
+          <ac:chgData name="Niko Kläsener" userId="b3580cb7-15ad-4c2f-be10-30939a475464" providerId="ADAL" clId="{36612FA6-6914-4267-9ADB-97F4291D668E}" dt="2026-06-21T12:43:47.697" v="697" actId="14826"/>
           <ac:picMkLst>
             <pc:docMk/>
             <pc:sldMk cId="937536178" sldId="263"/>
@@ -515,34 +455,57 @@
           </ac:picMkLst>
         </pc:picChg>
       </pc:sldChg>
-      <pc:sldChg chg="addSp delSp modSp new mod">
-        <pc:chgData name="Niko Kläsener" userId="b3580cb7-15ad-4c2f-be10-30939a475464" providerId="ADAL" clId="{36612FA6-6914-4267-9ADB-97F4291D668E}" dt="2026-06-19T10:58:38.882" v="134" actId="931"/>
+      <pc:sldChg chg="addSp delSp modSp new del mod">
+        <pc:chgData name="Niko Kläsener" userId="b3580cb7-15ad-4c2f-be10-30939a475464" providerId="ADAL" clId="{36612FA6-6914-4267-9ADB-97F4291D668E}" dt="2026-06-21T12:48:17.446" v="731" actId="47"/>
         <pc:sldMkLst>
           <pc:docMk/>
           <pc:sldMk cId="673205838" sldId="264"/>
         </pc:sldMkLst>
-        <pc:spChg chg="mod">
-          <ac:chgData name="Niko Kläsener" userId="b3580cb7-15ad-4c2f-be10-30939a475464" providerId="ADAL" clId="{36612FA6-6914-4267-9ADB-97F4291D668E}" dt="2026-06-19T10:58:16.346" v="133" actId="20577"/>
-          <ac:spMkLst>
-            <pc:docMk/>
-            <pc:sldMk cId="673205838" sldId="264"/>
-            <ac:spMk id="2" creationId="{BC69C5CF-E326-767F-82D8-BC1769BEB0EA}"/>
-          </ac:spMkLst>
-        </pc:spChg>
-        <pc:spChg chg="del">
-          <ac:chgData name="Niko Kläsener" userId="b3580cb7-15ad-4c2f-be10-30939a475464" providerId="ADAL" clId="{36612FA6-6914-4267-9ADB-97F4291D668E}" dt="2026-06-19T10:58:38.882" v="134" actId="931"/>
-          <ac:spMkLst>
-            <pc:docMk/>
-            <pc:sldMk cId="673205838" sldId="264"/>
-            <ac:spMk id="3" creationId="{73810979-3BDF-194B-1F6A-B6ED29B4EE57}"/>
-          </ac:spMkLst>
-        </pc:spChg>
         <pc:picChg chg="add mod ord">
-          <ac:chgData name="Niko Kläsener" userId="b3580cb7-15ad-4c2f-be10-30939a475464" providerId="ADAL" clId="{36612FA6-6914-4267-9ADB-97F4291D668E}" dt="2026-06-19T10:58:38.882" v="134" actId="931"/>
+          <ac:chgData name="Niko Kläsener" userId="b3580cb7-15ad-4c2f-be10-30939a475464" providerId="ADAL" clId="{36612FA6-6914-4267-9ADB-97F4291D668E}" dt="2026-06-21T12:47:28.855" v="719" actId="14826"/>
           <ac:picMkLst>
             <pc:docMk/>
             <pc:sldMk cId="673205838" sldId="264"/>
             <ac:picMk id="8" creationId="{3F65DE01-F495-3DDF-820D-2838164A1E75}"/>
+          </ac:picMkLst>
+        </pc:picChg>
+      </pc:sldChg>
+      <pc:sldChg chg="modSp add mod ord">
+        <pc:chgData name="Niko Kläsener" userId="b3580cb7-15ad-4c2f-be10-30939a475464" providerId="ADAL" clId="{36612FA6-6914-4267-9ADB-97F4291D668E}" dt="2026-06-21T13:03:01.017" v="882" actId="20577"/>
+        <pc:sldMkLst>
+          <pc:docMk/>
+          <pc:sldMk cId="284479213" sldId="265"/>
+        </pc:sldMkLst>
+        <pc:spChg chg="mod">
+          <ac:chgData name="Niko Kläsener" userId="b3580cb7-15ad-4c2f-be10-30939a475464" providerId="ADAL" clId="{36612FA6-6914-4267-9ADB-97F4291D668E}" dt="2026-06-21T12:48:11.357" v="730" actId="20577"/>
+          <ac:spMkLst>
+            <pc:docMk/>
+            <pc:sldMk cId="284479213" sldId="265"/>
+            <ac:spMk id="2" creationId="{CE19303A-6C64-B42A-B22E-C575DA323E4E}"/>
+          </ac:spMkLst>
+        </pc:spChg>
+        <pc:spChg chg="mod">
+          <ac:chgData name="Niko Kläsener" userId="b3580cb7-15ad-4c2f-be10-30939a475464" providerId="ADAL" clId="{36612FA6-6914-4267-9ADB-97F4291D668E}" dt="2026-06-21T13:03:01.017" v="882" actId="20577"/>
+          <ac:spMkLst>
+            <pc:docMk/>
+            <pc:sldMk cId="284479213" sldId="265"/>
+            <ac:spMk id="3" creationId="{63281457-D136-1A63-F2D7-B4801B290DB8}"/>
+          </ac:spMkLst>
+        </pc:spChg>
+        <pc:spChg chg="mod">
+          <ac:chgData name="Niko Kläsener" userId="b3580cb7-15ad-4c2f-be10-30939a475464" providerId="ADAL" clId="{36612FA6-6914-4267-9ADB-97F4291D668E}" dt="2026-06-21T12:51:16.673" v="759" actId="20577"/>
+          <ac:spMkLst>
+            <pc:docMk/>
+            <pc:sldMk cId="284479213" sldId="265"/>
+            <ac:spMk id="7" creationId="{95B4E1EB-B5BB-3FBA-04AE-035423E7056E}"/>
+          </ac:spMkLst>
+        </pc:spChg>
+        <pc:picChg chg="mod">
+          <ac:chgData name="Niko Kläsener" userId="b3580cb7-15ad-4c2f-be10-30939a475464" providerId="ADAL" clId="{36612FA6-6914-4267-9ADB-97F4291D668E}" dt="2026-06-21T12:48:26.417" v="732" actId="14826"/>
+          <ac:picMkLst>
+            <pc:docMk/>
+            <pc:sldMk cId="284479213" sldId="265"/>
+            <ac:picMk id="8" creationId="{8BBCFB51-2DA5-DE7E-6860-BB3D133BB932}"/>
           </ac:picMkLst>
         </pc:picChg>
       </pc:sldChg>
@@ -681,6 +644,217 @@
           </ac:picMkLst>
         </pc:picChg>
       </pc:sldChg>
+      <pc:sldChg chg="delSp modSp add mod">
+        <pc:chgData name="Niko Kläsener" userId="b3580cb7-15ad-4c2f-be10-30939a475464" providerId="ADAL" clId="{36612FA6-6914-4267-9ADB-97F4291D668E}" dt="2026-06-21T13:01:29.732" v="874" actId="14100"/>
+        <pc:sldMkLst>
+          <pc:docMk/>
+          <pc:sldMk cId="1467630395" sldId="266"/>
+        </pc:sldMkLst>
+        <pc:spChg chg="mod">
+          <ac:chgData name="Niko Kläsener" userId="b3580cb7-15ad-4c2f-be10-30939a475464" providerId="ADAL" clId="{36612FA6-6914-4267-9ADB-97F4291D668E}" dt="2026-06-21T12:56:18.619" v="767"/>
+          <ac:spMkLst>
+            <pc:docMk/>
+            <pc:sldMk cId="1467630395" sldId="266"/>
+            <ac:spMk id="2" creationId="{7646B6E2-F0CF-300A-B970-C7A9A45AB3BF}"/>
+          </ac:spMkLst>
+        </pc:spChg>
+        <pc:spChg chg="mod">
+          <ac:chgData name="Niko Kläsener" userId="b3580cb7-15ad-4c2f-be10-30939a475464" providerId="ADAL" clId="{36612FA6-6914-4267-9ADB-97F4291D668E}" dt="2026-06-21T13:01:29.732" v="874" actId="14100"/>
+          <ac:spMkLst>
+            <pc:docMk/>
+            <pc:sldMk cId="1467630395" sldId="266"/>
+            <ac:spMk id="3" creationId="{BAC82BD4-2A43-8BFA-68CA-8A66C04C309B}"/>
+          </ac:spMkLst>
+        </pc:spChg>
+        <pc:spChg chg="del">
+          <ac:chgData name="Niko Kläsener" userId="b3580cb7-15ad-4c2f-be10-30939a475464" providerId="ADAL" clId="{36612FA6-6914-4267-9ADB-97F4291D668E}" dt="2026-06-21T12:56:26.621" v="769" actId="478"/>
+          <ac:spMkLst>
+            <pc:docMk/>
+            <pc:sldMk cId="1467630395" sldId="266"/>
+            <ac:spMk id="7" creationId="{657AEC3C-8D01-45F6-E8C3-FCDF8F737DEE}"/>
+          </ac:spMkLst>
+        </pc:spChg>
+        <pc:picChg chg="mod">
+          <ac:chgData name="Niko Kläsener" userId="b3580cb7-15ad-4c2f-be10-30939a475464" providerId="ADAL" clId="{36612FA6-6914-4267-9ADB-97F4291D668E}" dt="2026-06-21T12:55:59.946" v="761" actId="14826"/>
+          <ac:picMkLst>
+            <pc:docMk/>
+            <pc:sldMk cId="1467630395" sldId="266"/>
+            <ac:picMk id="8" creationId="{A712138D-C74F-6410-9202-AD79ED5D372E}"/>
+          </ac:picMkLst>
+        </pc:picChg>
+      </pc:sldChg>
+      <pc:sldChg chg="modSp new mod modClrScheme chgLayout">
+        <pc:chgData name="Niko Kläsener" userId="b3580cb7-15ad-4c2f-be10-30939a475464" providerId="ADAL" clId="{36612FA6-6914-4267-9ADB-97F4291D668E}" dt="2026-06-21T14:05:18.535" v="1732" actId="313"/>
+        <pc:sldMkLst>
+          <pc:docMk/>
+          <pc:sldMk cId="3694890744" sldId="267"/>
+        </pc:sldMkLst>
+        <pc:spChg chg="mod ord">
+          <ac:chgData name="Niko Kläsener" userId="b3580cb7-15ad-4c2f-be10-30939a475464" providerId="ADAL" clId="{36612FA6-6914-4267-9ADB-97F4291D668E}" dt="2026-06-21T14:00:29.970" v="1610" actId="700"/>
+          <ac:spMkLst>
+            <pc:docMk/>
+            <pc:sldMk cId="3694890744" sldId="267"/>
+            <ac:spMk id="2" creationId="{6BB030AB-786E-C531-12A7-749F70850164}"/>
+          </ac:spMkLst>
+        </pc:spChg>
+        <pc:spChg chg="mod ord">
+          <ac:chgData name="Niko Kläsener" userId="b3580cb7-15ad-4c2f-be10-30939a475464" providerId="ADAL" clId="{36612FA6-6914-4267-9ADB-97F4291D668E}" dt="2026-06-21T14:00:29.970" v="1610" actId="700"/>
+          <ac:spMkLst>
+            <pc:docMk/>
+            <pc:sldMk cId="3694890744" sldId="267"/>
+            <ac:spMk id="3" creationId="{F05D5584-C5F5-B21E-C1D6-CE5472F6A3BE}"/>
+          </ac:spMkLst>
+        </pc:spChg>
+        <pc:spChg chg="mod ord">
+          <ac:chgData name="Niko Kläsener" userId="b3580cb7-15ad-4c2f-be10-30939a475464" providerId="ADAL" clId="{36612FA6-6914-4267-9ADB-97F4291D668E}" dt="2026-06-21T14:04:55.247" v="1683" actId="27636"/>
+          <ac:spMkLst>
+            <pc:docMk/>
+            <pc:sldMk cId="3694890744" sldId="267"/>
+            <ac:spMk id="4" creationId="{69979646-04D1-7A25-F6AA-E780620BB2CB}"/>
+          </ac:spMkLst>
+        </pc:spChg>
+        <pc:spChg chg="mod ord">
+          <ac:chgData name="Niko Kläsener" userId="b3580cb7-15ad-4c2f-be10-30939a475464" providerId="ADAL" clId="{36612FA6-6914-4267-9ADB-97F4291D668E}" dt="2026-06-21T14:00:29.970" v="1610" actId="700"/>
+          <ac:spMkLst>
+            <pc:docMk/>
+            <pc:sldMk cId="3694890744" sldId="267"/>
+            <ac:spMk id="5" creationId="{874A7A65-C7F4-F6C9-5AE4-858DEE4E2960}"/>
+          </ac:spMkLst>
+        </pc:spChg>
+        <pc:spChg chg="mod ord">
+          <ac:chgData name="Niko Kläsener" userId="b3580cb7-15ad-4c2f-be10-30939a475464" providerId="ADAL" clId="{36612FA6-6914-4267-9ADB-97F4291D668E}" dt="2026-06-21T14:05:18.535" v="1732" actId="313"/>
+          <ac:spMkLst>
+            <pc:docMk/>
+            <pc:sldMk cId="3694890744" sldId="267"/>
+            <ac:spMk id="6" creationId="{27CF4302-EE10-DEB8-57DC-0DE63F780452}"/>
+          </ac:spMkLst>
+        </pc:spChg>
+        <pc:spChg chg="mod ord">
+          <ac:chgData name="Niko Kläsener" userId="b3580cb7-15ad-4c2f-be10-30939a475464" providerId="ADAL" clId="{36612FA6-6914-4267-9ADB-97F4291D668E}" dt="2026-06-21T14:00:29.970" v="1610" actId="700"/>
+          <ac:spMkLst>
+            <pc:docMk/>
+            <pc:sldMk cId="3694890744" sldId="267"/>
+            <ac:spMk id="7" creationId="{6B894B29-7047-1ACA-3353-24BCA1F292EB}"/>
+          </ac:spMkLst>
+        </pc:spChg>
+        <pc:spChg chg="mod ord">
+          <ac:chgData name="Niko Kläsener" userId="b3580cb7-15ad-4c2f-be10-30939a475464" providerId="ADAL" clId="{36612FA6-6914-4267-9ADB-97F4291D668E}" dt="2026-06-21T14:00:29.970" v="1610" actId="700"/>
+          <ac:spMkLst>
+            <pc:docMk/>
+            <pc:sldMk cId="3694890744" sldId="267"/>
+            <ac:spMk id="8" creationId="{5981A085-1E07-22DC-7050-E4D89C38BAD6}"/>
+          </ac:spMkLst>
+        </pc:spChg>
+        <pc:spChg chg="mod ord">
+          <ac:chgData name="Niko Kläsener" userId="b3580cb7-15ad-4c2f-be10-30939a475464" providerId="ADAL" clId="{36612FA6-6914-4267-9ADB-97F4291D668E}" dt="2026-06-21T14:00:29.970" v="1610" actId="700"/>
+          <ac:spMkLst>
+            <pc:docMk/>
+            <pc:sldMk cId="3694890744" sldId="267"/>
+            <ac:spMk id="9" creationId="{86C91C11-4729-3014-9DB3-AC8059C85536}"/>
+          </ac:spMkLst>
+        </pc:spChg>
+      </pc:sldChg>
+      <pc:sldChg chg="addSp delSp modSp new mod modClrScheme chgLayout">
+        <pc:chgData name="Niko Kläsener" userId="b3580cb7-15ad-4c2f-be10-30939a475464" providerId="ADAL" clId="{36612FA6-6914-4267-9ADB-97F4291D668E}" dt="2026-06-21T14:20:21.248" v="2172" actId="20577"/>
+        <pc:sldMkLst>
+          <pc:docMk/>
+          <pc:sldMk cId="1820629519" sldId="268"/>
+        </pc:sldMkLst>
+        <pc:spChg chg="mod ord">
+          <ac:chgData name="Niko Kläsener" userId="b3580cb7-15ad-4c2f-be10-30939a475464" providerId="ADAL" clId="{36612FA6-6914-4267-9ADB-97F4291D668E}" dt="2026-06-21T14:07:26.271" v="1734" actId="700"/>
+          <ac:spMkLst>
+            <pc:docMk/>
+            <pc:sldMk cId="1820629519" sldId="268"/>
+            <ac:spMk id="2" creationId="{F9D8922C-F139-2635-23A2-E1682F48C7CF}"/>
+          </ac:spMkLst>
+        </pc:spChg>
+        <pc:spChg chg="del mod ord">
+          <ac:chgData name="Niko Kläsener" userId="b3580cb7-15ad-4c2f-be10-30939a475464" providerId="ADAL" clId="{36612FA6-6914-4267-9ADB-97F4291D668E}" dt="2026-06-21T14:07:26.271" v="1734" actId="700"/>
+          <ac:spMkLst>
+            <pc:docMk/>
+            <pc:sldMk cId="1820629519" sldId="268"/>
+            <ac:spMk id="3" creationId="{7354009A-F498-E81D-F2D3-5E359A2B6766}"/>
+          </ac:spMkLst>
+        </pc:spChg>
+        <pc:spChg chg="mod ord">
+          <ac:chgData name="Niko Kläsener" userId="b3580cb7-15ad-4c2f-be10-30939a475464" providerId="ADAL" clId="{36612FA6-6914-4267-9ADB-97F4291D668E}" dt="2026-06-21T14:07:26.271" v="1734" actId="700"/>
+          <ac:spMkLst>
+            <pc:docMk/>
+            <pc:sldMk cId="1820629519" sldId="268"/>
+            <ac:spMk id="4" creationId="{6F5E474E-4BFF-84E5-D4B8-3A17C8B468BF}"/>
+          </ac:spMkLst>
+        </pc:spChg>
+        <pc:spChg chg="mod ord">
+          <ac:chgData name="Niko Kläsener" userId="b3580cb7-15ad-4c2f-be10-30939a475464" providerId="ADAL" clId="{36612FA6-6914-4267-9ADB-97F4291D668E}" dt="2026-06-21T14:07:26.271" v="1734" actId="700"/>
+          <ac:spMkLst>
+            <pc:docMk/>
+            <pc:sldMk cId="1820629519" sldId="268"/>
+            <ac:spMk id="5" creationId="{9424D1F4-0CF5-19F0-91ED-BF0150B57DC0}"/>
+          </ac:spMkLst>
+        </pc:spChg>
+        <pc:spChg chg="mod ord">
+          <ac:chgData name="Niko Kläsener" userId="b3580cb7-15ad-4c2f-be10-30939a475464" providerId="ADAL" clId="{36612FA6-6914-4267-9ADB-97F4291D668E}" dt="2026-06-21T14:07:26.271" v="1734" actId="700"/>
+          <ac:spMkLst>
+            <pc:docMk/>
+            <pc:sldMk cId="1820629519" sldId="268"/>
+            <ac:spMk id="6" creationId="{DA108B1F-6875-7417-1127-D7C2D703F69C}"/>
+          </ac:spMkLst>
+        </pc:spChg>
+        <pc:spChg chg="add mod ord">
+          <ac:chgData name="Niko Kläsener" userId="b3580cb7-15ad-4c2f-be10-30939a475464" providerId="ADAL" clId="{36612FA6-6914-4267-9ADB-97F4291D668E}" dt="2026-06-21T14:08:09.955" v="1765" actId="20577"/>
+          <ac:spMkLst>
+            <pc:docMk/>
+            <pc:sldMk cId="1820629519" sldId="268"/>
+            <ac:spMk id="7" creationId="{DCDECE8F-E45D-D58C-86F5-3A38622EBC18}"/>
+          </ac:spMkLst>
+        </pc:spChg>
+        <pc:spChg chg="add mod ord">
+          <ac:chgData name="Niko Kläsener" userId="b3580cb7-15ad-4c2f-be10-30939a475464" providerId="ADAL" clId="{36612FA6-6914-4267-9ADB-97F4291D668E}" dt="2026-06-21T14:14:17.066" v="1917" actId="20577"/>
+          <ac:spMkLst>
+            <pc:docMk/>
+            <pc:sldMk cId="1820629519" sldId="268"/>
+            <ac:spMk id="8" creationId="{C80A4A1F-23F8-21DA-7B98-58E1B7AA06B2}"/>
+          </ac:spMkLst>
+        </pc:spChg>
+        <pc:spChg chg="add mod ord">
+          <ac:chgData name="Niko Kläsener" userId="b3580cb7-15ad-4c2f-be10-30939a475464" providerId="ADAL" clId="{36612FA6-6914-4267-9ADB-97F4291D668E}" dt="2026-06-21T14:16:03.870" v="1959" actId="20577"/>
+          <ac:spMkLst>
+            <pc:docMk/>
+            <pc:sldMk cId="1820629519" sldId="268"/>
+            <ac:spMk id="9" creationId="{F48C21F7-4F1F-A9CE-D706-AE55B1A6DC33}"/>
+          </ac:spMkLst>
+        </pc:spChg>
+        <pc:spChg chg="add mod ord">
+          <ac:chgData name="Niko Kläsener" userId="b3580cb7-15ad-4c2f-be10-30939a475464" providerId="ADAL" clId="{36612FA6-6914-4267-9ADB-97F4291D668E}" dt="2026-06-21T14:20:21.248" v="2172" actId="20577"/>
+          <ac:spMkLst>
+            <pc:docMk/>
+            <pc:sldMk cId="1820629519" sldId="268"/>
+            <ac:spMk id="10" creationId="{806CD854-4D48-D8EB-C77B-1219067A1A42}"/>
+          </ac:spMkLst>
+        </pc:spChg>
+      </pc:sldChg>
+      <pc:sldChg chg="new del">
+        <pc:chgData name="Niko Kläsener" userId="b3580cb7-15ad-4c2f-be10-30939a475464" providerId="ADAL" clId="{36612FA6-6914-4267-9ADB-97F4291D668E}" dt="2026-06-21T13:59:58.858" v="1604" actId="47"/>
+        <pc:sldMkLst>
+          <pc:docMk/>
+          <pc:sldMk cId="2200412688" sldId="268"/>
+        </pc:sldMkLst>
+      </pc:sldChg>
+      <pc:sldChg chg="modSp new mod">
+        <pc:chgData name="Niko Kläsener" userId="b3580cb7-15ad-4c2f-be10-30939a475464" providerId="ADAL" clId="{36612FA6-6914-4267-9ADB-97F4291D668E}" dt="2026-06-21T14:21:08.454" v="2204" actId="20577"/>
+        <pc:sldMkLst>
+          <pc:docMk/>
+          <pc:sldMk cId="4209989287" sldId="269"/>
+        </pc:sldMkLst>
+        <pc:spChg chg="mod">
+          <ac:chgData name="Niko Kläsener" userId="b3580cb7-15ad-4c2f-be10-30939a475464" providerId="ADAL" clId="{36612FA6-6914-4267-9ADB-97F4291D668E}" dt="2026-06-21T14:21:08.454" v="2204" actId="20577"/>
+          <ac:spMkLst>
+            <pc:docMk/>
+            <pc:sldMk cId="4209989287" sldId="269"/>
+            <ac:spMk id="2" creationId="{9988B2A7-DB4B-CC41-E4E2-5984756E1A44}"/>
+          </ac:spMkLst>
+        </pc:spChg>
+      </pc:sldChg>
     </pc:docChg>
   </pc:docChgLst>
 </pc:chgInfo>
@@ -768,7 +942,7 @@
           <a:p>
             <a:fld id="{8BB88B2D-3E06-4D7C-A936-365E30E787AF}" type="datetimeFigureOut">
               <a:rPr lang="de-DE" smtClean="0"/>
-              <a:t>20.06.2026</a:t>
+              <a:t>21.06.2026</a:t>
             </a:fld>
             <a:endParaRPr lang="de-DE"/>
           </a:p>
@@ -4479,6 +4653,629 @@
 </p:sld>
 </file>
 
+<file path=ppt/slides/slide10.xml><?xml version="1.0" encoding="utf-8"?>
+<p:sld xmlns:a="http://schemas.openxmlformats.org/drawingml/2006/main" xmlns:r="http://schemas.openxmlformats.org/officeDocument/2006/relationships" xmlns:p="http://schemas.openxmlformats.org/presentationml/2006/main">
+  <p:cSld>
+    <p:spTree>
+      <p:nvGrpSpPr>
+        <p:cNvPr id="1" name=""/>
+        <p:cNvGrpSpPr/>
+        <p:nvPr/>
+      </p:nvGrpSpPr>
+      <p:grpSpPr>
+        <a:xfrm>
+          <a:off x="0" y="0"/>
+          <a:ext cx="0" cy="0"/>
+          <a:chOff x="0" y="0"/>
+          <a:chExt cx="0" cy="0"/>
+        </a:xfrm>
+      </p:grpSpPr>
+      <p:sp>
+        <p:nvSpPr>
+          <p:cNvPr id="2" name="Titel 1">
+            <a:extLst>
+              <a:ext uri="{FF2B5EF4-FFF2-40B4-BE49-F238E27FC236}">
+                <a16:creationId xmlns:a16="http://schemas.microsoft.com/office/drawing/2014/main" id="{F9D8922C-F139-2635-23A2-E1682F48C7CF}"/>
+              </a:ext>
+            </a:extLst>
+          </p:cNvPr>
+          <p:cNvSpPr>
+            <a:spLocks noGrp="1"/>
+          </p:cNvSpPr>
+          <p:nvPr>
+            <p:ph type="title"/>
+          </p:nvPr>
+        </p:nvSpPr>
+        <p:spPr/>
+        <p:txBody>
+          <a:bodyPr/>
+          <a:lstStyle/>
+          <a:p>
+            <a:r>
+              <a:rPr lang="de-DE" dirty="0"/>
+              <a:t>Parameter-Leitfaden für die Praxis</a:t>
+            </a:r>
+          </a:p>
+        </p:txBody>
+      </p:sp>
+      <mc:AlternateContent xmlns:mc="http://schemas.openxmlformats.org/markup-compatibility/2006">
+        <mc:Choice xmlns:a14="http://schemas.microsoft.com/office/drawing/2010/main" Requires="a14">
+          <p:sp>
+            <p:nvSpPr>
+              <p:cNvPr id="7" name="Textplatzhalter 6">
+                <a:extLst>
+                  <a:ext uri="{FF2B5EF4-FFF2-40B4-BE49-F238E27FC236}">
+                    <a16:creationId xmlns:a16="http://schemas.microsoft.com/office/drawing/2014/main" id="{DCDECE8F-E45D-D58C-86F5-3A38622EBC18}"/>
+                  </a:ext>
+                </a:extLst>
+              </p:cNvPr>
+              <p:cNvSpPr>
+                <a:spLocks noGrp="1"/>
+              </p:cNvSpPr>
+              <p:nvPr>
+                <p:ph type="body" idx="1"/>
+              </p:nvPr>
+            </p:nvSpPr>
+            <p:spPr/>
+            <p:txBody>
+              <a:bodyPr/>
+              <a:lstStyle/>
+              <a:p>
+                <a:r>
+                  <a:rPr lang="de-DE" dirty="0">
+                    <a:ea typeface="Cambria Math" panose="02040503050406030204" pitchFamily="18" charset="0"/>
+                  </a:rPr>
+                  <a:t>Wahl von </a:t>
+                </a:r>
+                <a14:m>
+                  <m:oMath xmlns:m="http://schemas.openxmlformats.org/officeDocument/2006/math">
+                    <m:r>
+                      <a:rPr lang="de-DE" i="1" smtClean="0">
+                        <a:latin typeface="Cambria Math" panose="02040503050406030204" pitchFamily="18" charset="0"/>
+                        <a:ea typeface="Cambria Math" panose="02040503050406030204" pitchFamily="18" charset="0"/>
+                      </a:rPr>
+                      <m:t>𝜶</m:t>
+                    </m:r>
+                  </m:oMath>
+                </a14:m>
+                <a:r>
+                  <a:rPr lang="de-DE" dirty="0"/>
+                  <a:t> und </a:t>
+                </a:r>
+                <a14:m>
+                  <m:oMath xmlns:m="http://schemas.openxmlformats.org/officeDocument/2006/math">
+                    <m:r>
+                      <a:rPr lang="de-DE" i="1" smtClean="0">
+                        <a:latin typeface="Cambria Math" panose="02040503050406030204" pitchFamily="18" charset="0"/>
+                        <a:ea typeface="Cambria Math" panose="02040503050406030204" pitchFamily="18" charset="0"/>
+                      </a:rPr>
+                      <m:t>𝜷</m:t>
+                    </m:r>
+                  </m:oMath>
+                </a14:m>
+                <a:endParaRPr lang="de-DE" dirty="0"/>
+              </a:p>
+            </p:txBody>
+          </p:sp>
+        </mc:Choice>
+        <mc:Fallback>
+          <p:sp>
+            <p:nvSpPr>
+              <p:cNvPr id="7" name="Textplatzhalter 6">
+                <a:extLst>
+                  <a:ext uri="{FF2B5EF4-FFF2-40B4-BE49-F238E27FC236}">
+                    <a16:creationId xmlns:a16="http://schemas.microsoft.com/office/drawing/2014/main" id="{DCDECE8F-E45D-D58C-86F5-3A38622EBC18}"/>
+                  </a:ext>
+                </a:extLst>
+              </p:cNvPr>
+              <p:cNvSpPr>
+                <a:spLocks noGrp="1" noRot="1" noChangeAspect="1" noMove="1" noResize="1" noEditPoints="1" noAdjustHandles="1" noChangeArrowheads="1" noChangeShapeType="1" noTextEdit="1"/>
+              </p:cNvSpPr>
+              <p:nvPr>
+                <p:ph type="body" idx="1"/>
+              </p:nvPr>
+            </p:nvSpPr>
+            <p:spPr>
+              <a:blipFill>
+                <a:blip r:embed="rId2"/>
+                <a:stretch>
+                  <a:fillRect l="-1891" b="-17778"/>
+                </a:stretch>
+              </a:blipFill>
+            </p:spPr>
+            <p:txBody>
+              <a:bodyPr/>
+              <a:lstStyle/>
+              <a:p>
+                <a:r>
+                  <a:rPr lang="de-DE">
+                    <a:noFill/>
+                  </a:rPr>
+                  <a:t> </a:t>
+                </a:r>
+              </a:p>
+            </p:txBody>
+          </p:sp>
+        </mc:Fallback>
+      </mc:AlternateContent>
+      <mc:AlternateContent xmlns:mc="http://schemas.openxmlformats.org/markup-compatibility/2006">
+        <mc:Choice xmlns:a14="http://schemas.microsoft.com/office/drawing/2010/main" Requires="a14">
+          <p:sp>
+            <p:nvSpPr>
+              <p:cNvPr id="8" name="Inhaltsplatzhalter 7">
+                <a:extLst>
+                  <a:ext uri="{FF2B5EF4-FFF2-40B4-BE49-F238E27FC236}">
+                    <a16:creationId xmlns:a16="http://schemas.microsoft.com/office/drawing/2014/main" id="{C80A4A1F-23F8-21DA-7B98-58E1B7AA06B2}"/>
+                  </a:ext>
+                </a:extLst>
+              </p:cNvPr>
+              <p:cNvSpPr>
+                <a:spLocks noGrp="1"/>
+              </p:cNvSpPr>
+              <p:nvPr>
+                <p:ph sz="half" idx="2"/>
+              </p:nvPr>
+            </p:nvSpPr>
+            <p:spPr/>
+            <p:txBody>
+              <a:bodyPr/>
+              <a:lstStyle/>
+              <a:p>
+                <a:pPr>
+                  <a:buFont typeface="Wingdings" panose="05000000000000000000" pitchFamily="2" charset="2"/>
+                  <a:buChar char="§"/>
+                </a:pPr>
+                <a14:m>
+                  <m:oMath xmlns:m="http://schemas.openxmlformats.org/officeDocument/2006/math">
+                    <m:r>
+                      <a:rPr lang="de-DE" i="1" smtClean="0">
+                        <a:latin typeface="Cambria Math" panose="02040503050406030204" pitchFamily="18" charset="0"/>
+                        <a:ea typeface="Cambria Math" panose="02040503050406030204" pitchFamily="18" charset="0"/>
+                      </a:rPr>
+                      <m:t>𝜶</m:t>
+                    </m:r>
+                  </m:oMath>
+                </a14:m>
+                <a:r>
+                  <a:rPr lang="de-DE" dirty="0"/>
+                  <a:t> Bereiche [1 bis 2]</a:t>
+                </a:r>
+              </a:p>
+              <a:p>
+                <a:pPr lvl="1">
+                  <a:buFont typeface="Wingdings" panose="05000000000000000000" pitchFamily="2" charset="2"/>
+                  <a:buChar char="§"/>
+                </a:pPr>
+                <a:r>
+                  <a:rPr lang="de-DE" dirty="0"/>
+                  <a:t>Groß </a:t>
+                </a:r>
+                <a:r>
+                  <a:rPr lang="de-DE" dirty="0">
+                    <a:cs typeface="Courier New" panose="02070309020205020404" pitchFamily="49" charset="0"/>
+                  </a:rPr>
+                  <a:t>→ </a:t>
+                </a:r>
+                <a:r>
+                  <a:rPr lang="de-DE" dirty="0"/>
+                  <a:t>Schnelle Konvergenz (einfache Probleme)</a:t>
+                </a:r>
+              </a:p>
+              <a:p>
+                <a:pPr lvl="1">
+                  <a:buFont typeface="Wingdings" panose="05000000000000000000" pitchFamily="2" charset="2"/>
+                  <a:buChar char="§"/>
+                </a:pPr>
+                <a:r>
+                  <a:rPr lang="de-DE" dirty="0"/>
+                  <a:t>Klein </a:t>
+                </a:r>
+                <a:r>
+                  <a:rPr lang="de-DE" dirty="0">
+                    <a:cs typeface="Courier New" panose="02070309020205020404" pitchFamily="49" charset="0"/>
+                  </a:rPr>
+                  <a:t>→ </a:t>
+                </a:r>
+                <a:r>
+                  <a:rPr lang="de-DE" dirty="0"/>
+                  <a:t>mehr Exploration (komplexer Probleme)</a:t>
+                </a:r>
+              </a:p>
+              <a:p>
+                <a:pPr>
+                  <a:buFont typeface="Wingdings" panose="05000000000000000000" pitchFamily="2" charset="2"/>
+                  <a:buChar char="§"/>
+                </a:pPr>
+                <a14:m>
+                  <m:oMath xmlns:m="http://schemas.openxmlformats.org/officeDocument/2006/math">
+                    <m:r>
+                      <a:rPr lang="de-DE" i="1">
+                        <a:latin typeface="Cambria Math" panose="02040503050406030204" pitchFamily="18" charset="0"/>
+                        <a:ea typeface="Cambria Math" panose="02040503050406030204" pitchFamily="18" charset="0"/>
+                      </a:rPr>
+                      <m:t>𝜷</m:t>
+                    </m:r>
+                  </m:oMath>
+                </a14:m>
+                <a:r>
+                  <a:rPr lang="de-DE" dirty="0"/>
+                  <a:t> Bereiche [2 bis 5]</a:t>
+                </a:r>
+              </a:p>
+              <a:p>
+                <a:pPr lvl="1">
+                  <a:buFont typeface="Wingdings" panose="05000000000000000000" pitchFamily="2" charset="2"/>
+                  <a:buChar char="§"/>
+                </a:pPr>
+                <a:r>
+                  <a:rPr lang="de-DE" dirty="0"/>
+                  <a:t>Groß </a:t>
+                </a:r>
+                <a:r>
+                  <a:rPr lang="de-DE" dirty="0">
+                    <a:cs typeface="Courier New" panose="02070309020205020404" pitchFamily="49" charset="0"/>
+                  </a:rPr>
+                  <a:t>→  </a:t>
+                </a:r>
+                <a:r>
+                  <a:rPr lang="de-DE" dirty="0"/>
+                  <a:t>Hoher Selektionsdruck (kleine Effizienzunterschieden)</a:t>
+                </a:r>
+              </a:p>
+              <a:p>
+                <a:pPr lvl="1">
+                  <a:buFont typeface="Wingdings" panose="05000000000000000000" pitchFamily="2" charset="2"/>
+                  <a:buChar char="§"/>
+                </a:pPr>
+                <a:r>
+                  <a:rPr lang="de-DE" dirty="0"/>
+                  <a:t>Klein </a:t>
+                </a:r>
+                <a:r>
+                  <a:rPr lang="de-DE" dirty="0">
+                    <a:cs typeface="Courier New" panose="02070309020205020404" pitchFamily="49" charset="0"/>
+                  </a:rPr>
+                  <a:t>→</a:t>
+                </a:r>
+                <a:r>
+                  <a:rPr lang="de-DE" dirty="0"/>
+                  <a:t> mehr Exploration</a:t>
+                </a:r>
+              </a:p>
+            </p:txBody>
+          </p:sp>
+        </mc:Choice>
+        <mc:Fallback>
+          <p:sp>
+            <p:nvSpPr>
+              <p:cNvPr id="8" name="Inhaltsplatzhalter 7">
+                <a:extLst>
+                  <a:ext uri="{FF2B5EF4-FFF2-40B4-BE49-F238E27FC236}">
+                    <a16:creationId xmlns:a16="http://schemas.microsoft.com/office/drawing/2014/main" id="{C80A4A1F-23F8-21DA-7B98-58E1B7AA06B2}"/>
+                  </a:ext>
+                </a:extLst>
+              </p:cNvPr>
+              <p:cNvSpPr>
+                <a:spLocks noGrp="1" noRot="1" noChangeAspect="1" noMove="1" noResize="1" noEditPoints="1" noAdjustHandles="1" noChangeArrowheads="1" noChangeShapeType="1" noTextEdit="1"/>
+              </p:cNvSpPr>
+              <p:nvPr>
+                <p:ph sz="half" idx="2"/>
+              </p:nvPr>
+            </p:nvSpPr>
+            <p:spPr>
+              <a:blipFill>
+                <a:blip r:embed="rId3"/>
+                <a:stretch>
+                  <a:fillRect t="-2980" b="-166"/>
+                </a:stretch>
+              </a:blipFill>
+            </p:spPr>
+            <p:txBody>
+              <a:bodyPr/>
+              <a:lstStyle/>
+              <a:p>
+                <a:r>
+                  <a:rPr lang="de-DE">
+                    <a:noFill/>
+                  </a:rPr>
+                  <a:t> </a:t>
+                </a:r>
+              </a:p>
+            </p:txBody>
+          </p:sp>
+        </mc:Fallback>
+      </mc:AlternateContent>
+      <p:sp>
+        <p:nvSpPr>
+          <p:cNvPr id="9" name="Textplatzhalter 8">
+            <a:extLst>
+              <a:ext uri="{FF2B5EF4-FFF2-40B4-BE49-F238E27FC236}">
+                <a16:creationId xmlns:a16="http://schemas.microsoft.com/office/drawing/2014/main" id="{F48C21F7-4F1F-A9CE-D706-AE55B1A6DC33}"/>
+              </a:ext>
+            </a:extLst>
+          </p:cNvPr>
+          <p:cNvSpPr>
+            <a:spLocks noGrp="1"/>
+          </p:cNvSpPr>
+          <p:nvPr>
+            <p:ph type="body" sz="quarter" idx="3"/>
+          </p:nvPr>
+        </p:nvSpPr>
+        <p:spPr/>
+        <p:txBody>
+          <a:bodyPr/>
+          <a:lstStyle/>
+          <a:p>
+            <a:r>
+              <a:rPr lang="de-DE" dirty="0"/>
+              <a:t>Wahl von Gruppengröße und Verdunstungsrate</a:t>
+            </a:r>
+          </a:p>
+        </p:txBody>
+      </p:sp>
+      <p:sp>
+        <p:nvSpPr>
+          <p:cNvPr id="10" name="Inhaltsplatzhalter 9">
+            <a:extLst>
+              <a:ext uri="{FF2B5EF4-FFF2-40B4-BE49-F238E27FC236}">
+                <a16:creationId xmlns:a16="http://schemas.microsoft.com/office/drawing/2014/main" id="{806CD854-4D48-D8EB-C77B-1219067A1A42}"/>
+              </a:ext>
+            </a:extLst>
+          </p:cNvPr>
+          <p:cNvSpPr>
+            <a:spLocks noGrp="1"/>
+          </p:cNvSpPr>
+          <p:nvPr>
+            <p:ph sz="quarter" idx="4"/>
+          </p:nvPr>
+        </p:nvSpPr>
+        <p:spPr/>
+        <p:txBody>
+          <a:bodyPr/>
+          <a:lstStyle/>
+          <a:p>
+            <a:pPr>
+              <a:buFont typeface="Wingdings" panose="05000000000000000000" pitchFamily="2" charset="2"/>
+              <a:buChar char="§"/>
+            </a:pPr>
+            <a:r>
+              <a:rPr lang="de-DE" dirty="0"/>
+              <a:t>Gruppengröße</a:t>
+            </a:r>
+          </a:p>
+          <a:p>
+            <a:pPr lvl="1">
+              <a:buFont typeface="Wingdings" panose="05000000000000000000" pitchFamily="2" charset="2"/>
+              <a:buChar char="§"/>
+            </a:pPr>
+            <a:r>
+              <a:rPr lang="de-DE" dirty="0"/>
+              <a:t>Große Gruppen bringen </a:t>
+            </a:r>
+            <a:r>
+              <a:rPr lang="de-DE" dirty="0">
+                <a:cs typeface="Courier New" panose="02070309020205020404" pitchFamily="49" charset="0"/>
+              </a:rPr>
+              <a:t>mehr Varianz pro Iteration aber Rechenintensiver</a:t>
+            </a:r>
+          </a:p>
+          <a:p>
+            <a:pPr>
+              <a:buFont typeface="Wingdings" panose="05000000000000000000" pitchFamily="2" charset="2"/>
+              <a:buChar char="§"/>
+            </a:pPr>
+            <a:r>
+              <a:rPr lang="de-DE" dirty="0"/>
+              <a:t>Verdunstungsrate</a:t>
+            </a:r>
+          </a:p>
+          <a:p>
+            <a:pPr lvl="1">
+              <a:buFont typeface="Wingdings" panose="05000000000000000000" pitchFamily="2" charset="2"/>
+              <a:buChar char="§"/>
+            </a:pPr>
+            <a:r>
+              <a:rPr lang="de-DE" dirty="0">
+                <a:cs typeface="Courier New" panose="02070309020205020404" pitchFamily="49" charset="0"/>
+              </a:rPr>
+              <a:t>Groß → mehr Exploration</a:t>
+            </a:r>
+          </a:p>
+          <a:p>
+            <a:pPr lvl="1">
+              <a:buFont typeface="Wingdings" panose="05000000000000000000" pitchFamily="2" charset="2"/>
+              <a:buChar char="§"/>
+            </a:pPr>
+            <a:r>
+              <a:rPr lang="de-DE" dirty="0">
+                <a:cs typeface="Courier New" panose="02070309020205020404" pitchFamily="49" charset="0"/>
+              </a:rPr>
+              <a:t>Klein → schnellere Konvergenz</a:t>
+            </a:r>
+          </a:p>
+        </p:txBody>
+      </p:sp>
+      <p:sp>
+        <p:nvSpPr>
+          <p:cNvPr id="4" name="Datumsplatzhalter 3">
+            <a:extLst>
+              <a:ext uri="{FF2B5EF4-FFF2-40B4-BE49-F238E27FC236}">
+                <a16:creationId xmlns:a16="http://schemas.microsoft.com/office/drawing/2014/main" id="{6F5E474E-4BFF-84E5-D4B8-3A17C8B468BF}"/>
+              </a:ext>
+            </a:extLst>
+          </p:cNvPr>
+          <p:cNvSpPr>
+            <a:spLocks noGrp="1"/>
+          </p:cNvSpPr>
+          <p:nvPr>
+            <p:ph type="dt" sz="half" idx="10"/>
+          </p:nvPr>
+        </p:nvSpPr>
+        <p:spPr/>
+        <p:txBody>
+          <a:bodyPr/>
+          <a:lstStyle/>
+          <a:p>
+            <a:r>
+              <a:rPr lang="de-DE"/>
+              <a:t>22.03.2025</a:t>
+            </a:r>
+          </a:p>
+        </p:txBody>
+      </p:sp>
+      <p:sp>
+        <p:nvSpPr>
+          <p:cNvPr id="5" name="Fußzeilenplatzhalter 4">
+            <a:extLst>
+              <a:ext uri="{FF2B5EF4-FFF2-40B4-BE49-F238E27FC236}">
+                <a16:creationId xmlns:a16="http://schemas.microsoft.com/office/drawing/2014/main" id="{9424D1F4-0CF5-19F0-91ED-BF0150B57DC0}"/>
+              </a:ext>
+            </a:extLst>
+          </p:cNvPr>
+          <p:cNvSpPr>
+            <a:spLocks noGrp="1"/>
+          </p:cNvSpPr>
+          <p:nvPr>
+            <p:ph type="ftr" sz="quarter" idx="11"/>
+          </p:nvPr>
+        </p:nvSpPr>
+        <p:spPr/>
+        <p:txBody>
+          <a:bodyPr/>
+          <a:lstStyle/>
+          <a:p>
+            <a:r>
+              <a:rPr lang="de-DE"/>
+              <a:t>Niko Kläsener</a:t>
+            </a:r>
+          </a:p>
+        </p:txBody>
+      </p:sp>
+      <p:sp>
+        <p:nvSpPr>
+          <p:cNvPr id="6" name="Foliennummernplatzhalter 5">
+            <a:extLst>
+              <a:ext uri="{FF2B5EF4-FFF2-40B4-BE49-F238E27FC236}">
+                <a16:creationId xmlns:a16="http://schemas.microsoft.com/office/drawing/2014/main" id="{DA108B1F-6875-7417-1127-D7C2D703F69C}"/>
+              </a:ext>
+            </a:extLst>
+          </p:cNvPr>
+          <p:cNvSpPr>
+            <a:spLocks noGrp="1"/>
+          </p:cNvSpPr>
+          <p:nvPr>
+            <p:ph type="sldNum" sz="quarter" idx="12"/>
+          </p:nvPr>
+        </p:nvSpPr>
+        <p:spPr/>
+        <p:txBody>
+          <a:bodyPr/>
+          <a:lstStyle/>
+          <a:p>
+            <a:fld id="{F20E45F0-5197-4D99-A0B0-CC09E9235134}" type="slidenum">
+              <a:rPr lang="de-DE" smtClean="0"/>
+              <a:t>10</a:t>
+            </a:fld>
+            <a:endParaRPr lang="de-DE"/>
+          </a:p>
+        </p:txBody>
+      </p:sp>
+    </p:spTree>
+    <p:extLst>
+      <p:ext uri="{BB962C8B-B14F-4D97-AF65-F5344CB8AC3E}">
+        <p14:creationId xmlns:p14="http://schemas.microsoft.com/office/powerpoint/2010/main" val="1820629519"/>
+      </p:ext>
+    </p:extLst>
+  </p:cSld>
+  <p:clrMapOvr>
+    <a:masterClrMapping/>
+  </p:clrMapOvr>
+</p:sld>
+</file>
+
+<file path=ppt/slides/slide11.xml><?xml version="1.0" encoding="utf-8"?>
+<p:sld xmlns:a="http://schemas.openxmlformats.org/drawingml/2006/main" xmlns:r="http://schemas.openxmlformats.org/officeDocument/2006/relationships" xmlns:p="http://schemas.openxmlformats.org/presentationml/2006/main">
+  <p:cSld>
+    <p:spTree>
+      <p:nvGrpSpPr>
+        <p:cNvPr id="1" name=""/>
+        <p:cNvGrpSpPr/>
+        <p:nvPr/>
+      </p:nvGrpSpPr>
+      <p:grpSpPr>
+        <a:xfrm>
+          <a:off x="0" y="0"/>
+          <a:ext cx="0" cy="0"/>
+          <a:chOff x="0" y="0"/>
+          <a:chExt cx="0" cy="0"/>
+        </a:xfrm>
+      </p:grpSpPr>
+      <p:sp>
+        <p:nvSpPr>
+          <p:cNvPr id="2" name="Titel 1">
+            <a:extLst>
+              <a:ext uri="{FF2B5EF4-FFF2-40B4-BE49-F238E27FC236}">
+                <a16:creationId xmlns:a16="http://schemas.microsoft.com/office/drawing/2014/main" id="{9988B2A7-DB4B-CC41-E4E2-5984756E1A44}"/>
+              </a:ext>
+            </a:extLst>
+          </p:cNvPr>
+          <p:cNvSpPr>
+            <a:spLocks noGrp="1"/>
+          </p:cNvSpPr>
+          <p:nvPr>
+            <p:ph type="ctrTitle"/>
+          </p:nvPr>
+        </p:nvSpPr>
+        <p:spPr/>
+        <p:txBody>
+          <a:bodyPr/>
+          <a:lstStyle/>
+          <a:p>
+            <a:r>
+              <a:rPr lang="de-DE" dirty="0"/>
+              <a:t>Danke für eure Aufmerksamkeit</a:t>
+            </a:r>
+          </a:p>
+        </p:txBody>
+      </p:sp>
+      <p:sp>
+        <p:nvSpPr>
+          <p:cNvPr id="3" name="Untertitel 2">
+            <a:extLst>
+              <a:ext uri="{FF2B5EF4-FFF2-40B4-BE49-F238E27FC236}">
+                <a16:creationId xmlns:a16="http://schemas.microsoft.com/office/drawing/2014/main" id="{6F32734D-9E88-F3F9-5F07-603128EBE54B}"/>
+              </a:ext>
+            </a:extLst>
+          </p:cNvPr>
+          <p:cNvSpPr>
+            <a:spLocks noGrp="1"/>
+          </p:cNvSpPr>
+          <p:nvPr>
+            <p:ph type="subTitle" idx="1"/>
+          </p:nvPr>
+        </p:nvSpPr>
+        <p:spPr/>
+        <p:txBody>
+          <a:bodyPr/>
+          <a:lstStyle/>
+          <a:p>
+            <a:endParaRPr lang="de-DE"/>
+          </a:p>
+        </p:txBody>
+      </p:sp>
+    </p:spTree>
+    <p:extLst>
+      <p:ext uri="{BB962C8B-B14F-4D97-AF65-F5344CB8AC3E}">
+        <p14:creationId xmlns:p14="http://schemas.microsoft.com/office/powerpoint/2010/main" val="4209989287"/>
+      </p:ext>
+    </p:extLst>
+  </p:cSld>
+  <p:clrMapOvr>
+    <a:masterClrMapping/>
+  </p:clrMapOvr>
+</p:sld>
+</file>
+
 <file path=ppt/slides/slide2.xml><?xml version="1.0" encoding="utf-8"?>
 <p:sld xmlns:a="http://schemas.openxmlformats.org/drawingml/2006/main" xmlns:r="http://schemas.openxmlformats.org/officeDocument/2006/relationships" xmlns:p="http://schemas.openxmlformats.org/presentationml/2006/main">
   <p:cSld>
@@ -4547,8 +5344,9 @@
           <a:p>
             <a:r>
               <a:rPr lang="de-DE"/>
-              <a:t>22.03.2025</a:t>
-            </a:r>
+              <a:t>20.06.2026</a:t>
+            </a:r>
+            <a:endParaRPr lang="de-DE" dirty="0"/>
           </a:p>
         </p:txBody>
       </p:sp>
@@ -6256,7 +7054,7 @@
           <a:p>
             <a:r>
               <a:rPr lang="de-DE" dirty="0"/>
-              <a:t>NMGE-Generator</a:t>
+              <a:t>Problem-Generator</a:t>
             </a:r>
           </a:p>
         </p:txBody>
@@ -6488,7 +7286,7 @@
           <p:cNvPr id="2" name="Titel 1">
             <a:extLst>
               <a:ext uri="{FF2B5EF4-FFF2-40B4-BE49-F238E27FC236}">
-                <a16:creationId xmlns:a16="http://schemas.microsoft.com/office/drawing/2014/main" id="{4DC433D2-17BA-BB4F-88B0-0F9E964EEB21}"/>
+                <a16:creationId xmlns:a16="http://schemas.microsoft.com/office/drawing/2014/main" id="{1E94E426-77E3-D9B2-5685-3FEAC25AD1A5}"/>
               </a:ext>
             </a:extLst>
           </p:cNvPr>
@@ -6506,17 +7304,17 @@
           <a:p>
             <a:r>
               <a:rPr lang="de-DE" dirty="0"/>
-              <a:t>Haupteffekt und Wechselwirkung</a:t>
+              <a:t>Nutzwertvergleich Hard-Problem</a:t>
             </a:r>
           </a:p>
         </p:txBody>
       </p:sp>
       <p:pic>
         <p:nvPicPr>
-          <p:cNvPr id="9" name="Inhaltsplatzhalter 8">
-            <a:extLst>
-              <a:ext uri="{FF2B5EF4-FFF2-40B4-BE49-F238E27FC236}">
-                <a16:creationId xmlns:a16="http://schemas.microsoft.com/office/drawing/2014/main" id="{B328A8BF-6F71-6DE1-E847-0E993C071748}"/>
+          <p:cNvPr id="8" name="Inhaltsplatzhalter 7">
+            <a:extLst>
+              <a:ext uri="{FF2B5EF4-FFF2-40B4-BE49-F238E27FC236}">
+                <a16:creationId xmlns:a16="http://schemas.microsoft.com/office/drawing/2014/main" id="{4DAC7E66-EB2C-45E1-5D4F-7CAE9DCE4400}"/>
               </a:ext>
             </a:extLst>
           </p:cNvPr>
@@ -6524,7 +7322,7 @@
             <a:picLocks noGrp="1" noChangeAspect="1"/>
           </p:cNvPicPr>
           <p:nvPr>
-            <p:ph sz="half" idx="1"/>
+            <p:ph idx="1"/>
           </p:nvPr>
         </p:nvPicPr>
         <p:blipFill>
@@ -6535,64 +7333,25 @@
               </a:ext>
             </a:extLst>
           </a:blip>
-          <a:stretch>
-            <a:fillRect/>
-          </a:stretch>
+          <a:srcRect/>
+          <a:stretch/>
         </p:blipFill>
         <p:spPr>
           <a:xfrm>
-            <a:off x="838200" y="2117449"/>
-            <a:ext cx="5181600" cy="3767689"/>
+            <a:off x="838200" y="1847850"/>
+            <a:ext cx="6834718" cy="4351338"/>
           </a:xfrm>
           <a:prstGeom prst="rect">
             <a:avLst/>
           </a:prstGeom>
         </p:spPr>
       </p:pic>
-      <p:pic>
-        <p:nvPicPr>
-          <p:cNvPr id="13" name="Inhaltsplatzhalter 12">
-            <a:extLst>
-              <a:ext uri="{FF2B5EF4-FFF2-40B4-BE49-F238E27FC236}">
-                <a16:creationId xmlns:a16="http://schemas.microsoft.com/office/drawing/2014/main" id="{60767B9F-4700-514B-860F-8A88677FBA11}"/>
-              </a:ext>
-            </a:extLst>
-          </p:cNvPr>
-          <p:cNvPicPr>
-            <a:picLocks noGrp="1" noChangeAspect="1"/>
-          </p:cNvPicPr>
-          <p:nvPr>
-            <p:ph sz="half" idx="2"/>
-          </p:nvPr>
-        </p:nvPicPr>
-        <p:blipFill>
-          <a:blip r:embed="rId3">
-            <a:extLst>
-              <a:ext uri="{28A0092B-C50C-407E-A947-70E740481C1C}">
-                <a14:useLocalDpi xmlns:a14="http://schemas.microsoft.com/office/drawing/2010/main" val="0"/>
-              </a:ext>
-            </a:extLst>
-          </a:blip>
-          <a:stretch>
-            <a:fillRect/>
-          </a:stretch>
-        </p:blipFill>
-        <p:spPr>
-          <a:xfrm>
-            <a:off x="6458667" y="1825625"/>
-            <a:ext cx="4608666" cy="4351338"/>
-          </a:xfrm>
-          <a:prstGeom prst="rect">
-            <a:avLst/>
-          </a:prstGeom>
-        </p:spPr>
-      </p:pic>
-      <p:sp>
-        <p:nvSpPr>
-          <p:cNvPr id="5" name="Datumsplatzhalter 4">
-            <a:extLst>
-              <a:ext uri="{FF2B5EF4-FFF2-40B4-BE49-F238E27FC236}">
-                <a16:creationId xmlns:a16="http://schemas.microsoft.com/office/drawing/2014/main" id="{49DDB7FE-35AB-EF95-B844-395AC8BC38E1}"/>
+      <p:sp>
+        <p:nvSpPr>
+          <p:cNvPr id="4" name="Datumsplatzhalter 3">
+            <a:extLst>
+              <a:ext uri="{FF2B5EF4-FFF2-40B4-BE49-F238E27FC236}">
+                <a16:creationId xmlns:a16="http://schemas.microsoft.com/office/drawing/2014/main" id="{C4D0D370-05E6-ED99-91A0-C31BE3C76117}"/>
               </a:ext>
             </a:extLst>
           </p:cNvPr>
@@ -6617,10 +7376,10 @@
       </p:sp>
       <p:sp>
         <p:nvSpPr>
-          <p:cNvPr id="6" name="Fußzeilenplatzhalter 5">
-            <a:extLst>
-              <a:ext uri="{FF2B5EF4-FFF2-40B4-BE49-F238E27FC236}">
-                <a16:creationId xmlns:a16="http://schemas.microsoft.com/office/drawing/2014/main" id="{51E9CE6C-8D9D-6C84-AF97-59F2D4CA9933}"/>
+          <p:cNvPr id="5" name="Fußzeilenplatzhalter 4">
+            <a:extLst>
+              <a:ext uri="{FF2B5EF4-FFF2-40B4-BE49-F238E27FC236}">
+                <a16:creationId xmlns:a16="http://schemas.microsoft.com/office/drawing/2014/main" id="{EE5A90F7-118B-2BCF-4C7E-E756DF23D5F5}"/>
               </a:ext>
             </a:extLst>
           </p:cNvPr>
@@ -6645,10 +7404,10 @@
       </p:sp>
       <p:sp>
         <p:nvSpPr>
-          <p:cNvPr id="7" name="Foliennummernplatzhalter 6">
-            <a:extLst>
-              <a:ext uri="{FF2B5EF4-FFF2-40B4-BE49-F238E27FC236}">
-                <a16:creationId xmlns:a16="http://schemas.microsoft.com/office/drawing/2014/main" id="{04D53141-76EE-66A9-336D-DEC63BE99CDE}"/>
+          <p:cNvPr id="6" name="Foliennummernplatzhalter 5">
+            <a:extLst>
+              <a:ext uri="{FF2B5EF4-FFF2-40B4-BE49-F238E27FC236}">
+                <a16:creationId xmlns:a16="http://schemas.microsoft.com/office/drawing/2014/main" id="{22096C79-41ED-F127-04E6-1D1CB2E4DA20}"/>
               </a:ext>
             </a:extLst>
           </p:cNvPr>
@@ -6672,10 +7431,147 @@
           </a:p>
         </p:txBody>
       </p:sp>
+      <p:sp>
+        <p:nvSpPr>
+          <p:cNvPr id="3" name="Textfeld 2">
+            <a:extLst>
+              <a:ext uri="{FF2B5EF4-FFF2-40B4-BE49-F238E27FC236}">
+                <a16:creationId xmlns:a16="http://schemas.microsoft.com/office/drawing/2014/main" id="{03B229CE-C208-3B6E-0937-5F9A9A7AA444}"/>
+              </a:ext>
+            </a:extLst>
+          </p:cNvPr>
+          <p:cNvSpPr txBox="1"/>
+          <p:nvPr/>
+        </p:nvSpPr>
+        <p:spPr>
+          <a:xfrm>
+            <a:off x="8153400" y="2606109"/>
+            <a:ext cx="2990850" cy="1200329"/>
+          </a:xfrm>
+          <a:prstGeom prst="rect">
+            <a:avLst/>
+          </a:prstGeom>
+          <a:noFill/>
+        </p:spPr>
+        <p:txBody>
+          <a:bodyPr wrap="square" rtlCol="0">
+            <a:spAutoFit/>
+          </a:bodyPr>
+          <a:lstStyle/>
+          <a:p>
+            <a:r>
+              <a:rPr lang="de-DE" b="1" dirty="0"/>
+              <a:t>Hard-Problem:</a:t>
+            </a:r>
+          </a:p>
+          <a:p>
+            <a:pPr marL="285750" indent="-285750">
+              <a:buFont typeface="Wingdings" panose="05000000000000000000" pitchFamily="2" charset="2"/>
+              <a:buChar char="§"/>
+            </a:pPr>
+            <a:r>
+              <a:rPr lang="de-DE" b="1" dirty="0"/>
+              <a:t>800 Items</a:t>
+            </a:r>
+          </a:p>
+          <a:p>
+            <a:pPr marL="285750" indent="-285750">
+              <a:buFont typeface="Wingdings" panose="05000000000000000000" pitchFamily="2" charset="2"/>
+              <a:buChar char="§"/>
+            </a:pPr>
+            <a:r>
+              <a:rPr lang="de-DE" b="1" dirty="0"/>
+              <a:t>1.000.000 Kapazität</a:t>
+            </a:r>
+          </a:p>
+          <a:p>
+            <a:pPr marL="285750" indent="-285750">
+              <a:buFont typeface="Wingdings" panose="05000000000000000000" pitchFamily="2" charset="2"/>
+              <a:buChar char="§"/>
+            </a:pPr>
+            <a:r>
+              <a:rPr lang="de-DE" b="1" dirty="0"/>
+              <a:t>14 Gruppen</a:t>
+            </a:r>
+          </a:p>
+        </p:txBody>
+      </p:sp>
+      <p:sp>
+        <p:nvSpPr>
+          <p:cNvPr id="7" name="Textfeld 6">
+            <a:extLst>
+              <a:ext uri="{FF2B5EF4-FFF2-40B4-BE49-F238E27FC236}">
+                <a16:creationId xmlns:a16="http://schemas.microsoft.com/office/drawing/2014/main" id="{6FF04FC2-856E-1509-998A-C8DF92BD91DF}"/>
+              </a:ext>
+            </a:extLst>
+          </p:cNvPr>
+          <p:cNvSpPr txBox="1"/>
+          <p:nvPr/>
+        </p:nvSpPr>
+        <p:spPr>
+          <a:xfrm>
+            <a:off x="8153400" y="4240600"/>
+            <a:ext cx="3409950" cy="1477328"/>
+          </a:xfrm>
+          <a:prstGeom prst="rect">
+            <a:avLst/>
+          </a:prstGeom>
+          <a:noFill/>
+        </p:spPr>
+        <p:txBody>
+          <a:bodyPr wrap="square" rtlCol="0">
+            <a:spAutoFit/>
+          </a:bodyPr>
+          <a:lstStyle/>
+          <a:p>
+            <a:r>
+              <a:rPr lang="de-DE" b="1" dirty="0"/>
+              <a:t>Ergebnis:</a:t>
+            </a:r>
+          </a:p>
+          <a:p>
+            <a:pPr marL="285750" indent="-285750">
+              <a:buFont typeface="Wingdings" panose="05000000000000000000" pitchFamily="2" charset="2"/>
+              <a:buChar char="§"/>
+            </a:pPr>
+            <a:r>
+              <a:rPr lang="de-DE" b="1" dirty="0"/>
+              <a:t>Beste: 	99,91%</a:t>
+            </a:r>
+          </a:p>
+          <a:p>
+            <a:pPr marL="285750" indent="-285750">
+              <a:buFont typeface="Wingdings" panose="05000000000000000000" pitchFamily="2" charset="2"/>
+              <a:buChar char="§"/>
+            </a:pPr>
+            <a:r>
+              <a:rPr lang="de-DE" b="1" dirty="0"/>
+              <a:t>Mittlere: 	99,76%</a:t>
+            </a:r>
+          </a:p>
+          <a:p>
+            <a:pPr marL="285750" indent="-285750">
+              <a:buFont typeface="Wingdings" panose="05000000000000000000" pitchFamily="2" charset="2"/>
+              <a:buChar char="§"/>
+            </a:pPr>
+            <a:r>
+              <a:rPr lang="de-DE" b="1" dirty="0"/>
+              <a:t>Schlechteste:	99,61%</a:t>
+            </a:r>
+          </a:p>
+          <a:p>
+            <a:pPr marL="285750" indent="-285750">
+              <a:buFont typeface="Wingdings" panose="05000000000000000000" pitchFamily="2" charset="2"/>
+              <a:buChar char="§"/>
+            </a:pPr>
+            <a:endParaRPr lang="de-DE" dirty="0"/>
+          </a:p>
+        </p:txBody>
+      </p:sp>
     </p:spTree>
     <p:extLst>
       <p:ext uri="{BB962C8B-B14F-4D97-AF65-F5344CB8AC3E}">
-        <p14:creationId xmlns:p14="http://schemas.microsoft.com/office/powerpoint/2010/main" val="2830380807"/>
+        <p14:creationId xmlns:p14="http://schemas.microsoft.com/office/powerpoint/2010/main" val="1179084943"/>
       </p:ext>
     </p:extLst>
   </p:cSld>
@@ -6690,7 +7586,13 @@
   <p:cSld>
     <p:spTree>
       <p:nvGrpSpPr>
-        <p:cNvPr id="1" name=""/>
+        <p:cNvPr id="1" name="">
+          <a:extLst>
+            <a:ext uri="{FF2B5EF4-FFF2-40B4-BE49-F238E27FC236}">
+              <a16:creationId xmlns:a16="http://schemas.microsoft.com/office/drawing/2014/main" id="{539A691F-89F8-9257-7DFE-81993F064A02}"/>
+            </a:ext>
+          </a:extLst>
+        </p:cNvPr>
         <p:cNvGrpSpPr/>
         <p:nvPr/>
       </p:nvGrpSpPr>
@@ -6707,7 +7609,7 @@
           <p:cNvPr id="2" name="Titel 1">
             <a:extLst>
               <a:ext uri="{FF2B5EF4-FFF2-40B4-BE49-F238E27FC236}">
-                <a16:creationId xmlns:a16="http://schemas.microsoft.com/office/drawing/2014/main" id="{1E94E426-77E3-D9B2-5685-3FEAC25AD1A5}"/>
+                <a16:creationId xmlns:a16="http://schemas.microsoft.com/office/drawing/2014/main" id="{7646B6E2-F0CF-300A-B970-C7A9A45AB3BF}"/>
               </a:ext>
             </a:extLst>
           </p:cNvPr>
@@ -6724,8 +7626,12 @@
           <a:lstStyle/>
           <a:p>
             <a:r>
+              <a:rPr lang="de-DE" dirty="0" err="1"/>
+              <a:t>Pheromonspur</a:t>
+            </a:r>
+            <a:r>
               <a:rPr lang="de-DE" dirty="0"/>
-              <a:t>Nutzwertvergleich</a:t>
+              <a:t> Hard-Problem</a:t>
             </a:r>
           </a:p>
         </p:txBody>
@@ -6735,7 +7641,7 @@
           <p:cNvPr id="8" name="Inhaltsplatzhalter 7">
             <a:extLst>
               <a:ext uri="{FF2B5EF4-FFF2-40B4-BE49-F238E27FC236}">
-                <a16:creationId xmlns:a16="http://schemas.microsoft.com/office/drawing/2014/main" id="{4DAC7E66-EB2C-45E1-5D4F-7CAE9DCE4400}"/>
+                <a16:creationId xmlns:a16="http://schemas.microsoft.com/office/drawing/2014/main" id="{A712138D-C74F-6410-9202-AD79ED5D372E}"/>
               </a:ext>
             </a:extLst>
           </p:cNvPr>
@@ -6754,13 +7660,12 @@
               </a:ext>
             </a:extLst>
           </a:blip>
-          <a:stretch>
-            <a:fillRect/>
-          </a:stretch>
+          <a:srcRect/>
+          <a:stretch/>
         </p:blipFill>
         <p:spPr>
           <a:xfrm>
-            <a:off x="2678641" y="1825625"/>
+            <a:off x="838200" y="1847850"/>
             <a:ext cx="6834718" cy="4351338"/>
           </a:xfrm>
           <a:prstGeom prst="rect">
@@ -6773,7 +7678,7 @@
           <p:cNvPr id="4" name="Datumsplatzhalter 3">
             <a:extLst>
               <a:ext uri="{FF2B5EF4-FFF2-40B4-BE49-F238E27FC236}">
-                <a16:creationId xmlns:a16="http://schemas.microsoft.com/office/drawing/2014/main" id="{C4D0D370-05E6-ED99-91A0-C31BE3C76117}"/>
+                <a16:creationId xmlns:a16="http://schemas.microsoft.com/office/drawing/2014/main" id="{E1CB6DE3-71E5-AD25-8856-D7436362A2D0}"/>
               </a:ext>
             </a:extLst>
           </p:cNvPr>
@@ -6801,7 +7706,7 @@
           <p:cNvPr id="5" name="Fußzeilenplatzhalter 4">
             <a:extLst>
               <a:ext uri="{FF2B5EF4-FFF2-40B4-BE49-F238E27FC236}">
-                <a16:creationId xmlns:a16="http://schemas.microsoft.com/office/drawing/2014/main" id="{EE5A90F7-118B-2BCF-4C7E-E756DF23D5F5}"/>
+                <a16:creationId xmlns:a16="http://schemas.microsoft.com/office/drawing/2014/main" id="{3BF510ED-BBA5-8623-B450-6B31E67874B1}"/>
               </a:ext>
             </a:extLst>
           </p:cNvPr>
@@ -6829,7 +7734,7 @@
           <p:cNvPr id="6" name="Foliennummernplatzhalter 5">
             <a:extLst>
               <a:ext uri="{FF2B5EF4-FFF2-40B4-BE49-F238E27FC236}">
-                <a16:creationId xmlns:a16="http://schemas.microsoft.com/office/drawing/2014/main" id="{22096C79-41ED-F127-04E6-1D1CB2E4DA20}"/>
+                <a16:creationId xmlns:a16="http://schemas.microsoft.com/office/drawing/2014/main" id="{E317FD82-72F2-654A-06E1-930DE87D5D56}"/>
               </a:ext>
             </a:extLst>
           </p:cNvPr>
@@ -6853,10 +7758,98 @@
           </a:p>
         </p:txBody>
       </p:sp>
+      <p:sp>
+        <p:nvSpPr>
+          <p:cNvPr id="3" name="Textfeld 2">
+            <a:extLst>
+              <a:ext uri="{FF2B5EF4-FFF2-40B4-BE49-F238E27FC236}">
+                <a16:creationId xmlns:a16="http://schemas.microsoft.com/office/drawing/2014/main" id="{BAC82BD4-2A43-8BFA-68CA-8A66C04C309B}"/>
+              </a:ext>
+            </a:extLst>
+          </p:cNvPr>
+          <p:cNvSpPr txBox="1"/>
+          <p:nvPr/>
+        </p:nvSpPr>
+        <p:spPr>
+          <a:xfrm>
+            <a:off x="8153400" y="2606109"/>
+            <a:ext cx="3200400" cy="2308324"/>
+          </a:xfrm>
+          <a:prstGeom prst="rect">
+            <a:avLst/>
+          </a:prstGeom>
+          <a:noFill/>
+        </p:spPr>
+        <p:txBody>
+          <a:bodyPr wrap="square" rtlCol="0">
+            <a:spAutoFit/>
+          </a:bodyPr>
+          <a:lstStyle/>
+          <a:p>
+            <a:r>
+              <a:rPr lang="de-DE" b="1" dirty="0"/>
+              <a:t>Beste: </a:t>
+            </a:r>
+          </a:p>
+          <a:p>
+            <a:pPr marL="285750" indent="-285750">
+              <a:buFont typeface="Wingdings" panose="05000000000000000000" pitchFamily="2" charset="2"/>
+              <a:buChar char="§"/>
+            </a:pPr>
+            <a:r>
+              <a:rPr lang="de-DE" b="1" dirty="0"/>
+              <a:t>Fokussiert auf die Kleinstgegenstände</a:t>
+            </a:r>
+          </a:p>
+          <a:p>
+            <a:pPr marL="285750" indent="-285750">
+              <a:buFont typeface="Wingdings" panose="05000000000000000000" pitchFamily="2" charset="2"/>
+              <a:buChar char="§"/>
+            </a:pPr>
+            <a:r>
+              <a:rPr lang="de-DE" b="1" dirty="0"/>
+              <a:t>hohes Stagnationsrisiko</a:t>
+            </a:r>
+          </a:p>
+          <a:p>
+            <a:endParaRPr lang="de-DE" b="1" dirty="0"/>
+          </a:p>
+          <a:p>
+            <a:r>
+              <a:rPr lang="de-DE" b="1" dirty="0"/>
+              <a:t>Schlechteste:</a:t>
+            </a:r>
+          </a:p>
+          <a:p>
+            <a:pPr marL="285750" indent="-285750">
+              <a:buFont typeface="Wingdings" panose="05000000000000000000" pitchFamily="2" charset="2"/>
+              <a:buChar char="§"/>
+            </a:pPr>
+            <a:r>
+              <a:rPr lang="de-DE" b="1" dirty="0"/>
+              <a:t> mehr Exploration</a:t>
+            </a:r>
+          </a:p>
+          <a:p>
+            <a:pPr marL="285750" indent="-285750">
+              <a:buFont typeface="Wingdings" panose="05000000000000000000" pitchFamily="2" charset="2"/>
+              <a:buChar char="§"/>
+            </a:pPr>
+            <a:r>
+              <a:rPr lang="de-DE" dirty="0"/>
+              <a:t> </a:t>
+            </a:r>
+            <a:r>
+              <a:rPr lang="de-DE" b="1" dirty="0"/>
+              <a:t>stabileres Suchverhalten</a:t>
+            </a:r>
+          </a:p>
+        </p:txBody>
+      </p:sp>
     </p:spTree>
     <p:extLst>
       <p:ext uri="{BB962C8B-B14F-4D97-AF65-F5344CB8AC3E}">
-        <p14:creationId xmlns:p14="http://schemas.microsoft.com/office/powerpoint/2010/main" val="1179084943"/>
+        <p14:creationId xmlns:p14="http://schemas.microsoft.com/office/powerpoint/2010/main" val="1467630395"/>
       </p:ext>
     </p:extLst>
   </p:cSld>
@@ -6888,7 +7881,7 @@
           <p:cNvPr id="2" name="Titel 1">
             <a:extLst>
               <a:ext uri="{FF2B5EF4-FFF2-40B4-BE49-F238E27FC236}">
-                <a16:creationId xmlns:a16="http://schemas.microsoft.com/office/drawing/2014/main" id="{2944ED13-FD2C-1619-5816-65507A0AA985}"/>
+                <a16:creationId xmlns:a16="http://schemas.microsoft.com/office/drawing/2014/main" id="{DE86CDD5-F3A8-1E49-03B4-ABAC4E69630F}"/>
               </a:ext>
             </a:extLst>
           </p:cNvPr>
@@ -6906,7 +7899,7 @@
           <a:p>
             <a:r>
               <a:rPr lang="de-DE" dirty="0"/>
-              <a:t>Pheromon-Spur</a:t>
+              <a:t>Item-Auswahl Hard-Problem</a:t>
             </a:r>
           </a:p>
         </p:txBody>
@@ -6916,7 +7909,7 @@
           <p:cNvPr id="8" name="Inhaltsplatzhalter 7">
             <a:extLst>
               <a:ext uri="{FF2B5EF4-FFF2-40B4-BE49-F238E27FC236}">
-                <a16:creationId xmlns:a16="http://schemas.microsoft.com/office/drawing/2014/main" id="{AD463835-8BB8-FEE2-98D6-EA9C01C3A6A5}"/>
+                <a16:creationId xmlns:a16="http://schemas.microsoft.com/office/drawing/2014/main" id="{CCD849A5-AE97-5B6A-16ED-2BC4C72CF5BC}"/>
               </a:ext>
             </a:extLst>
           </p:cNvPr>
@@ -6935,14 +7928,13 @@
               </a:ext>
             </a:extLst>
           </a:blip>
-          <a:stretch>
-            <a:fillRect/>
-          </a:stretch>
+          <a:srcRect/>
+          <a:stretch/>
         </p:blipFill>
         <p:spPr>
           <a:xfrm>
-            <a:off x="2462690" y="1825625"/>
-            <a:ext cx="7266620" cy="4351338"/>
+            <a:off x="1059100" y="1825625"/>
+            <a:ext cx="10073799" cy="4351338"/>
           </a:xfrm>
           <a:prstGeom prst="rect">
             <a:avLst/>
@@ -6954,7 +7946,7 @@
           <p:cNvPr id="4" name="Datumsplatzhalter 3">
             <a:extLst>
               <a:ext uri="{FF2B5EF4-FFF2-40B4-BE49-F238E27FC236}">
-                <a16:creationId xmlns:a16="http://schemas.microsoft.com/office/drawing/2014/main" id="{0FD0B66D-B1AF-FF2B-AA67-0A44FCED8CB2}"/>
+                <a16:creationId xmlns:a16="http://schemas.microsoft.com/office/drawing/2014/main" id="{E50407AF-A5BD-50CE-FDF3-BF40706A411F}"/>
               </a:ext>
             </a:extLst>
           </p:cNvPr>
@@ -6982,7 +7974,7 @@
           <p:cNvPr id="5" name="Fußzeilenplatzhalter 4">
             <a:extLst>
               <a:ext uri="{FF2B5EF4-FFF2-40B4-BE49-F238E27FC236}">
-                <a16:creationId xmlns:a16="http://schemas.microsoft.com/office/drawing/2014/main" id="{52CE3654-1830-9153-F0BC-119C24F1E811}"/>
+                <a16:creationId xmlns:a16="http://schemas.microsoft.com/office/drawing/2014/main" id="{7411A53B-319E-FD54-9E3B-908627BD44F5}"/>
               </a:ext>
             </a:extLst>
           </p:cNvPr>
@@ -7010,7 +8002,7 @@
           <p:cNvPr id="6" name="Foliennummernplatzhalter 5">
             <a:extLst>
               <a:ext uri="{FF2B5EF4-FFF2-40B4-BE49-F238E27FC236}">
-                <a16:creationId xmlns:a16="http://schemas.microsoft.com/office/drawing/2014/main" id="{2F698665-41AC-4B3F-FB3F-093EF9113738}"/>
+                <a16:creationId xmlns:a16="http://schemas.microsoft.com/office/drawing/2014/main" id="{FE1E8DB6-4C98-C632-D75C-05F38D93E9EB}"/>
               </a:ext>
             </a:extLst>
           </p:cNvPr>
@@ -7037,7 +8029,7 @@
     </p:spTree>
     <p:extLst>
       <p:ext uri="{BB962C8B-B14F-4D97-AF65-F5344CB8AC3E}">
-        <p14:creationId xmlns:p14="http://schemas.microsoft.com/office/powerpoint/2010/main" val="2368679576"/>
+        <p14:creationId xmlns:p14="http://schemas.microsoft.com/office/powerpoint/2010/main" val="937536178"/>
       </p:ext>
     </p:extLst>
   </p:cSld>
@@ -7069,7 +8061,7 @@
           <p:cNvPr id="2" name="Titel 1">
             <a:extLst>
               <a:ext uri="{FF2B5EF4-FFF2-40B4-BE49-F238E27FC236}">
-                <a16:creationId xmlns:a16="http://schemas.microsoft.com/office/drawing/2014/main" id="{BC69C5CF-E326-767F-82D8-BC1769BEB0EA}"/>
+                <a16:creationId xmlns:a16="http://schemas.microsoft.com/office/drawing/2014/main" id="{4DC433D2-17BA-BB4F-88B0-0F9E964EEB21}"/>
               </a:ext>
             </a:extLst>
           </p:cNvPr>
@@ -7087,17 +8079,17 @@
           <a:p>
             <a:r>
               <a:rPr lang="de-DE" dirty="0"/>
-              <a:t>Paradoxon</a:t>
+              <a:t>Haupteffekt und Wechselwirkung</a:t>
             </a:r>
           </a:p>
         </p:txBody>
       </p:sp>
       <p:pic>
         <p:nvPicPr>
-          <p:cNvPr id="8" name="Inhaltsplatzhalter 7">
-            <a:extLst>
-              <a:ext uri="{FF2B5EF4-FFF2-40B4-BE49-F238E27FC236}">
-                <a16:creationId xmlns:a16="http://schemas.microsoft.com/office/drawing/2014/main" id="{3F65DE01-F495-3DDF-820D-2838164A1E75}"/>
+          <p:cNvPr id="9" name="Inhaltsplatzhalter 8">
+            <a:extLst>
+              <a:ext uri="{FF2B5EF4-FFF2-40B4-BE49-F238E27FC236}">
+                <a16:creationId xmlns:a16="http://schemas.microsoft.com/office/drawing/2014/main" id="{B328A8BF-6F71-6DE1-E847-0E993C071748}"/>
               </a:ext>
             </a:extLst>
           </p:cNvPr>
@@ -7105,7 +8097,7 @@
             <a:picLocks noGrp="1" noChangeAspect="1"/>
           </p:cNvPicPr>
           <p:nvPr>
-            <p:ph idx="1"/>
+            <p:ph sz="half" idx="1"/>
           </p:nvPr>
         </p:nvPicPr>
         <p:blipFill>
@@ -7116,26 +8108,62 @@
               </a:ext>
             </a:extLst>
           </a:blip>
-          <a:stretch>
-            <a:fillRect/>
-          </a:stretch>
+          <a:srcRect/>
+          <a:stretch/>
         </p:blipFill>
         <p:spPr>
           <a:xfrm>
-            <a:off x="2678641" y="1825625"/>
-            <a:ext cx="6834718" cy="4351338"/>
+            <a:off x="838200" y="2117449"/>
+            <a:ext cx="5181600" cy="3767689"/>
           </a:xfrm>
           <a:prstGeom prst="rect">
             <a:avLst/>
           </a:prstGeom>
         </p:spPr>
       </p:pic>
-      <p:sp>
-        <p:nvSpPr>
-          <p:cNvPr id="4" name="Datumsplatzhalter 3">
-            <a:extLst>
-              <a:ext uri="{FF2B5EF4-FFF2-40B4-BE49-F238E27FC236}">
-                <a16:creationId xmlns:a16="http://schemas.microsoft.com/office/drawing/2014/main" id="{B4719940-190C-899F-641A-5583A2F374FA}"/>
+      <p:pic>
+        <p:nvPicPr>
+          <p:cNvPr id="13" name="Inhaltsplatzhalter 12">
+            <a:extLst>
+              <a:ext uri="{FF2B5EF4-FFF2-40B4-BE49-F238E27FC236}">
+                <a16:creationId xmlns:a16="http://schemas.microsoft.com/office/drawing/2014/main" id="{60767B9F-4700-514B-860F-8A88677FBA11}"/>
+              </a:ext>
+            </a:extLst>
+          </p:cNvPr>
+          <p:cNvPicPr>
+            <a:picLocks noGrp="1" noChangeAspect="1"/>
+          </p:cNvPicPr>
+          <p:nvPr>
+            <p:ph sz="half" idx="2"/>
+          </p:nvPr>
+        </p:nvPicPr>
+        <p:blipFill>
+          <a:blip r:embed="rId3">
+            <a:extLst>
+              <a:ext uri="{28A0092B-C50C-407E-A947-70E740481C1C}">
+                <a14:useLocalDpi xmlns:a14="http://schemas.microsoft.com/office/drawing/2010/main" val="0"/>
+              </a:ext>
+            </a:extLst>
+          </a:blip>
+          <a:srcRect/>
+          <a:stretch/>
+        </p:blipFill>
+        <p:spPr>
+          <a:xfrm>
+            <a:off x="6458667" y="1825625"/>
+            <a:ext cx="4608666" cy="4351338"/>
+          </a:xfrm>
+          <a:prstGeom prst="rect">
+            <a:avLst/>
+          </a:prstGeom>
+        </p:spPr>
+      </p:pic>
+      <p:sp>
+        <p:nvSpPr>
+          <p:cNvPr id="5" name="Datumsplatzhalter 4">
+            <a:extLst>
+              <a:ext uri="{FF2B5EF4-FFF2-40B4-BE49-F238E27FC236}">
+                <a16:creationId xmlns:a16="http://schemas.microsoft.com/office/drawing/2014/main" id="{49DDB7FE-35AB-EF95-B844-395AC8BC38E1}"/>
               </a:ext>
             </a:extLst>
           </p:cNvPr>
@@ -7160,10 +8188,10 @@
       </p:sp>
       <p:sp>
         <p:nvSpPr>
-          <p:cNvPr id="5" name="Fußzeilenplatzhalter 4">
-            <a:extLst>
-              <a:ext uri="{FF2B5EF4-FFF2-40B4-BE49-F238E27FC236}">
-                <a16:creationId xmlns:a16="http://schemas.microsoft.com/office/drawing/2014/main" id="{C8A8E5CA-7FDF-D981-EE10-57056068BB34}"/>
+          <p:cNvPr id="6" name="Fußzeilenplatzhalter 5">
+            <a:extLst>
+              <a:ext uri="{FF2B5EF4-FFF2-40B4-BE49-F238E27FC236}">
+                <a16:creationId xmlns:a16="http://schemas.microsoft.com/office/drawing/2014/main" id="{51E9CE6C-8D9D-6C84-AF97-59F2D4CA9933}"/>
               </a:ext>
             </a:extLst>
           </p:cNvPr>
@@ -7188,10 +8216,10 @@
       </p:sp>
       <p:sp>
         <p:nvSpPr>
-          <p:cNvPr id="6" name="Foliennummernplatzhalter 5">
-            <a:extLst>
-              <a:ext uri="{FF2B5EF4-FFF2-40B4-BE49-F238E27FC236}">
-                <a16:creationId xmlns:a16="http://schemas.microsoft.com/office/drawing/2014/main" id="{BA2FF3FE-05C3-8AAD-B8EC-7D699F867802}"/>
+          <p:cNvPr id="7" name="Foliennummernplatzhalter 6">
+            <a:extLst>
+              <a:ext uri="{FF2B5EF4-FFF2-40B4-BE49-F238E27FC236}">
+                <a16:creationId xmlns:a16="http://schemas.microsoft.com/office/drawing/2014/main" id="{04D53141-76EE-66A9-336D-DEC63BE99CDE}"/>
               </a:ext>
             </a:extLst>
           </p:cNvPr>
@@ -7218,7 +8246,7 @@
     </p:spTree>
     <p:extLst>
       <p:ext uri="{BB962C8B-B14F-4D97-AF65-F5344CB8AC3E}">
-        <p14:creationId xmlns:p14="http://schemas.microsoft.com/office/powerpoint/2010/main" val="673205838"/>
+        <p14:creationId xmlns:p14="http://schemas.microsoft.com/office/powerpoint/2010/main" val="2830380807"/>
       </p:ext>
     </p:extLst>
   </p:cSld>
@@ -7229,6 +8257,329 @@
 </file>
 
 <file path=ppt/slides/slide8.xml><?xml version="1.0" encoding="utf-8"?>
+<p:sld xmlns:a="http://schemas.openxmlformats.org/drawingml/2006/main" xmlns:r="http://schemas.openxmlformats.org/officeDocument/2006/relationships" xmlns:p="http://schemas.openxmlformats.org/presentationml/2006/main">
+  <p:cSld>
+    <p:spTree>
+      <p:nvGrpSpPr>
+        <p:cNvPr id="1" name="">
+          <a:extLst>
+            <a:ext uri="{FF2B5EF4-FFF2-40B4-BE49-F238E27FC236}">
+              <a16:creationId xmlns:a16="http://schemas.microsoft.com/office/drawing/2014/main" id="{D42F7119-24B6-D2DB-BA16-FF8B68E1FE71}"/>
+            </a:ext>
+          </a:extLst>
+        </p:cNvPr>
+        <p:cNvGrpSpPr/>
+        <p:nvPr/>
+      </p:nvGrpSpPr>
+      <p:grpSpPr>
+        <a:xfrm>
+          <a:off x="0" y="0"/>
+          <a:ext cx="0" cy="0"/>
+          <a:chOff x="0" y="0"/>
+          <a:chExt cx="0" cy="0"/>
+        </a:xfrm>
+      </p:grpSpPr>
+      <p:sp>
+        <p:nvSpPr>
+          <p:cNvPr id="2" name="Titel 1">
+            <a:extLst>
+              <a:ext uri="{FF2B5EF4-FFF2-40B4-BE49-F238E27FC236}">
+                <a16:creationId xmlns:a16="http://schemas.microsoft.com/office/drawing/2014/main" id="{CE19303A-6C64-B42A-B22E-C575DA323E4E}"/>
+              </a:ext>
+            </a:extLst>
+          </p:cNvPr>
+          <p:cNvSpPr>
+            <a:spLocks noGrp="1"/>
+          </p:cNvSpPr>
+          <p:nvPr>
+            <p:ph type="title"/>
+          </p:nvPr>
+        </p:nvSpPr>
+        <p:spPr/>
+        <p:txBody>
+          <a:bodyPr/>
+          <a:lstStyle/>
+          <a:p>
+            <a:r>
+              <a:rPr lang="de-DE" dirty="0"/>
+              <a:t>Nutzwertvergleich Easy-Problem</a:t>
+            </a:r>
+          </a:p>
+        </p:txBody>
+      </p:sp>
+      <p:pic>
+        <p:nvPicPr>
+          <p:cNvPr id="8" name="Inhaltsplatzhalter 7">
+            <a:extLst>
+              <a:ext uri="{FF2B5EF4-FFF2-40B4-BE49-F238E27FC236}">
+                <a16:creationId xmlns:a16="http://schemas.microsoft.com/office/drawing/2014/main" id="{8BBCFB51-2DA5-DE7E-6860-BB3D133BB932}"/>
+              </a:ext>
+            </a:extLst>
+          </p:cNvPr>
+          <p:cNvPicPr>
+            <a:picLocks noGrp="1" noChangeAspect="1"/>
+          </p:cNvPicPr>
+          <p:nvPr>
+            <p:ph idx="1"/>
+          </p:nvPr>
+        </p:nvPicPr>
+        <p:blipFill>
+          <a:blip r:embed="rId2">
+            <a:extLst>
+              <a:ext uri="{28A0092B-C50C-407E-A947-70E740481C1C}">
+                <a14:useLocalDpi xmlns:a14="http://schemas.microsoft.com/office/drawing/2010/main" val="0"/>
+              </a:ext>
+            </a:extLst>
+          </a:blip>
+          <a:srcRect/>
+          <a:stretch/>
+        </p:blipFill>
+        <p:spPr>
+          <a:xfrm>
+            <a:off x="838200" y="1847850"/>
+            <a:ext cx="6834718" cy="4351338"/>
+          </a:xfrm>
+          <a:prstGeom prst="rect">
+            <a:avLst/>
+          </a:prstGeom>
+        </p:spPr>
+      </p:pic>
+      <p:sp>
+        <p:nvSpPr>
+          <p:cNvPr id="4" name="Datumsplatzhalter 3">
+            <a:extLst>
+              <a:ext uri="{FF2B5EF4-FFF2-40B4-BE49-F238E27FC236}">
+                <a16:creationId xmlns:a16="http://schemas.microsoft.com/office/drawing/2014/main" id="{73C46C0A-FD65-91E8-4591-86D9036388FA}"/>
+              </a:ext>
+            </a:extLst>
+          </p:cNvPr>
+          <p:cNvSpPr>
+            <a:spLocks noGrp="1"/>
+          </p:cNvSpPr>
+          <p:nvPr>
+            <p:ph type="dt" sz="half" idx="10"/>
+          </p:nvPr>
+        </p:nvSpPr>
+        <p:spPr/>
+        <p:txBody>
+          <a:bodyPr/>
+          <a:lstStyle/>
+          <a:p>
+            <a:r>
+              <a:rPr lang="de-DE"/>
+              <a:t>22.03.2025</a:t>
+            </a:r>
+          </a:p>
+        </p:txBody>
+      </p:sp>
+      <p:sp>
+        <p:nvSpPr>
+          <p:cNvPr id="5" name="Fußzeilenplatzhalter 4">
+            <a:extLst>
+              <a:ext uri="{FF2B5EF4-FFF2-40B4-BE49-F238E27FC236}">
+                <a16:creationId xmlns:a16="http://schemas.microsoft.com/office/drawing/2014/main" id="{8F68C919-4434-1C73-54A5-22FB209F8A4F}"/>
+              </a:ext>
+            </a:extLst>
+          </p:cNvPr>
+          <p:cNvSpPr>
+            <a:spLocks noGrp="1"/>
+          </p:cNvSpPr>
+          <p:nvPr>
+            <p:ph type="ftr" sz="quarter" idx="11"/>
+          </p:nvPr>
+        </p:nvSpPr>
+        <p:spPr/>
+        <p:txBody>
+          <a:bodyPr/>
+          <a:lstStyle/>
+          <a:p>
+            <a:r>
+              <a:rPr lang="de-DE"/>
+              <a:t>Niko Kläsener</a:t>
+            </a:r>
+          </a:p>
+        </p:txBody>
+      </p:sp>
+      <p:sp>
+        <p:nvSpPr>
+          <p:cNvPr id="6" name="Foliennummernplatzhalter 5">
+            <a:extLst>
+              <a:ext uri="{FF2B5EF4-FFF2-40B4-BE49-F238E27FC236}">
+                <a16:creationId xmlns:a16="http://schemas.microsoft.com/office/drawing/2014/main" id="{5405844F-A241-D7B3-B734-DE4A1EE46DE0}"/>
+              </a:ext>
+            </a:extLst>
+          </p:cNvPr>
+          <p:cNvSpPr>
+            <a:spLocks noGrp="1"/>
+          </p:cNvSpPr>
+          <p:nvPr>
+            <p:ph type="sldNum" sz="quarter" idx="12"/>
+          </p:nvPr>
+        </p:nvSpPr>
+        <p:spPr/>
+        <p:txBody>
+          <a:bodyPr/>
+          <a:lstStyle/>
+          <a:p>
+            <a:fld id="{F20E45F0-5197-4D99-A0B0-CC09E9235134}" type="slidenum">
+              <a:rPr lang="de-DE" smtClean="0"/>
+              <a:t>8</a:t>
+            </a:fld>
+            <a:endParaRPr lang="de-DE"/>
+          </a:p>
+        </p:txBody>
+      </p:sp>
+      <p:sp>
+        <p:nvSpPr>
+          <p:cNvPr id="3" name="Textfeld 2">
+            <a:extLst>
+              <a:ext uri="{FF2B5EF4-FFF2-40B4-BE49-F238E27FC236}">
+                <a16:creationId xmlns:a16="http://schemas.microsoft.com/office/drawing/2014/main" id="{63281457-D136-1A63-F2D7-B4801B290DB8}"/>
+              </a:ext>
+            </a:extLst>
+          </p:cNvPr>
+          <p:cNvSpPr txBox="1"/>
+          <p:nvPr/>
+        </p:nvSpPr>
+        <p:spPr>
+          <a:xfrm>
+            <a:off x="8153400" y="2606109"/>
+            <a:ext cx="2990850" cy="1200329"/>
+          </a:xfrm>
+          <a:prstGeom prst="rect">
+            <a:avLst/>
+          </a:prstGeom>
+          <a:noFill/>
+        </p:spPr>
+        <p:txBody>
+          <a:bodyPr wrap="square" rtlCol="0">
+            <a:spAutoFit/>
+          </a:bodyPr>
+          <a:lstStyle/>
+          <a:p>
+            <a:r>
+              <a:rPr lang="de-DE" b="1" dirty="0"/>
+              <a:t>Easy-Problem:</a:t>
+            </a:r>
+          </a:p>
+          <a:p>
+            <a:pPr marL="285750" indent="-285750">
+              <a:buFont typeface="Wingdings" panose="05000000000000000000" pitchFamily="2" charset="2"/>
+              <a:buChar char="§"/>
+            </a:pPr>
+            <a:r>
+              <a:rPr lang="de-DE" b="1" dirty="0"/>
+              <a:t>400 Items</a:t>
+            </a:r>
+          </a:p>
+          <a:p>
+            <a:pPr marL="285750" indent="-285750">
+              <a:buFont typeface="Wingdings" panose="05000000000000000000" pitchFamily="2" charset="2"/>
+              <a:buChar char="§"/>
+            </a:pPr>
+            <a:r>
+              <a:rPr lang="de-DE" b="1" dirty="0"/>
+              <a:t>1.000.000 Kapazität</a:t>
+            </a:r>
+          </a:p>
+          <a:p>
+            <a:pPr marL="285750" indent="-285750">
+              <a:buFont typeface="Wingdings" panose="05000000000000000000" pitchFamily="2" charset="2"/>
+              <a:buChar char="§"/>
+            </a:pPr>
+            <a:r>
+              <a:rPr lang="de-DE" b="1" dirty="0"/>
+              <a:t>4 Gruppen</a:t>
+            </a:r>
+          </a:p>
+        </p:txBody>
+      </p:sp>
+      <p:sp>
+        <p:nvSpPr>
+          <p:cNvPr id="7" name="Textfeld 6">
+            <a:extLst>
+              <a:ext uri="{FF2B5EF4-FFF2-40B4-BE49-F238E27FC236}">
+                <a16:creationId xmlns:a16="http://schemas.microsoft.com/office/drawing/2014/main" id="{95B4E1EB-B5BB-3FBA-04AE-035423E7056E}"/>
+              </a:ext>
+            </a:extLst>
+          </p:cNvPr>
+          <p:cNvSpPr txBox="1"/>
+          <p:nvPr/>
+        </p:nvSpPr>
+        <p:spPr>
+          <a:xfrm>
+            <a:off x="8153400" y="4240600"/>
+            <a:ext cx="3409950" cy="1477328"/>
+          </a:xfrm>
+          <a:prstGeom prst="rect">
+            <a:avLst/>
+          </a:prstGeom>
+          <a:noFill/>
+        </p:spPr>
+        <p:txBody>
+          <a:bodyPr wrap="square" rtlCol="0">
+            <a:spAutoFit/>
+          </a:bodyPr>
+          <a:lstStyle/>
+          <a:p>
+            <a:r>
+              <a:rPr lang="de-DE" b="1" dirty="0"/>
+              <a:t>Ergebnis:</a:t>
+            </a:r>
+          </a:p>
+          <a:p>
+            <a:pPr marL="285750" indent="-285750">
+              <a:buFont typeface="Wingdings" panose="05000000000000000000" pitchFamily="2" charset="2"/>
+              <a:buChar char="§"/>
+            </a:pPr>
+            <a:r>
+              <a:rPr lang="de-DE" b="1" dirty="0"/>
+              <a:t>Beste: 	99,91%</a:t>
+            </a:r>
+          </a:p>
+          <a:p>
+            <a:pPr marL="285750" indent="-285750">
+              <a:buFont typeface="Wingdings" panose="05000000000000000000" pitchFamily="2" charset="2"/>
+              <a:buChar char="§"/>
+            </a:pPr>
+            <a:r>
+              <a:rPr lang="de-DE" b="1" dirty="0"/>
+              <a:t>Mittlere: 	99,96%</a:t>
+            </a:r>
+          </a:p>
+          <a:p>
+            <a:pPr marL="285750" indent="-285750">
+              <a:buFont typeface="Wingdings" panose="05000000000000000000" pitchFamily="2" charset="2"/>
+              <a:buChar char="§"/>
+            </a:pPr>
+            <a:r>
+              <a:rPr lang="de-DE" b="1" dirty="0"/>
+              <a:t>Schlechteste:	99,66%</a:t>
+            </a:r>
+          </a:p>
+          <a:p>
+            <a:pPr marL="285750" indent="-285750">
+              <a:buFont typeface="Wingdings" panose="05000000000000000000" pitchFamily="2" charset="2"/>
+              <a:buChar char="§"/>
+            </a:pPr>
+            <a:endParaRPr lang="de-DE" dirty="0"/>
+          </a:p>
+        </p:txBody>
+      </p:sp>
+    </p:spTree>
+    <p:extLst>
+      <p:ext uri="{BB962C8B-B14F-4D97-AF65-F5344CB8AC3E}">
+        <p14:creationId xmlns:p14="http://schemas.microsoft.com/office/powerpoint/2010/main" val="284479213"/>
+      </p:ext>
+    </p:extLst>
+  </p:cSld>
+  <p:clrMapOvr>
+    <a:masterClrMapping/>
+  </p:clrMapOvr>
+</p:sld>
+</file>
+
+<file path=ppt/slides/slide9.xml><?xml version="1.0" encoding="utf-8"?>
 <p:sld xmlns:a="http://schemas.openxmlformats.org/drawingml/2006/main" xmlns:r="http://schemas.openxmlformats.org/officeDocument/2006/relationships" xmlns:p="http://schemas.openxmlformats.org/presentationml/2006/main">
   <p:cSld>
     <p:spTree>
@@ -7250,7 +8601,7 @@
           <p:cNvPr id="2" name="Titel 1">
             <a:extLst>
               <a:ext uri="{FF2B5EF4-FFF2-40B4-BE49-F238E27FC236}">
-                <a16:creationId xmlns:a16="http://schemas.microsoft.com/office/drawing/2014/main" id="{DE86CDD5-F3A8-1E49-03B4-ABAC4E69630F}"/>
+                <a16:creationId xmlns:a16="http://schemas.microsoft.com/office/drawing/2014/main" id="{6BB030AB-786E-C531-12A7-749F70850164}"/>
               </a:ext>
             </a:extLst>
           </p:cNvPr>
@@ -7268,55 +8619,153 @@
           <a:p>
             <a:r>
               <a:rPr lang="de-DE" dirty="0"/>
-              <a:t>Item-Auswahl</a:t>
-            </a:r>
-          </a:p>
-        </p:txBody>
-      </p:sp>
-      <p:pic>
-        <p:nvPicPr>
-          <p:cNvPr id="8" name="Inhaltsplatzhalter 7">
-            <a:extLst>
-              <a:ext uri="{FF2B5EF4-FFF2-40B4-BE49-F238E27FC236}">
-                <a16:creationId xmlns:a16="http://schemas.microsoft.com/office/drawing/2014/main" id="{CCD849A5-AE97-5B6A-16ED-2BC4C72CF5BC}"/>
-              </a:ext>
-            </a:extLst>
-          </p:cNvPr>
-          <p:cNvPicPr>
-            <a:picLocks noGrp="1" noChangeAspect="1"/>
-          </p:cNvPicPr>
-          <p:nvPr>
-            <p:ph idx="1"/>
-          </p:nvPr>
-        </p:nvPicPr>
-        <p:blipFill>
-          <a:blip r:embed="rId2">
-            <a:extLst>
-              <a:ext uri="{28A0092B-C50C-407E-A947-70E740481C1C}">
-                <a14:useLocalDpi xmlns:a14="http://schemas.microsoft.com/office/drawing/2010/main" val="0"/>
-              </a:ext>
-            </a:extLst>
-          </a:blip>
-          <a:stretch>
-            <a:fillRect/>
-          </a:stretch>
-        </p:blipFill>
-        <p:spPr>
-          <a:xfrm>
-            <a:off x="1059100" y="1825625"/>
-            <a:ext cx="10073799" cy="4351338"/>
-          </a:xfrm>
-          <a:prstGeom prst="rect">
-            <a:avLst/>
-          </a:prstGeom>
-        </p:spPr>
-      </p:pic>
-      <p:sp>
-        <p:nvSpPr>
-          <p:cNvPr id="4" name="Datumsplatzhalter 3">
-            <a:extLst>
-              <a:ext uri="{FF2B5EF4-FFF2-40B4-BE49-F238E27FC236}">
-                <a16:creationId xmlns:a16="http://schemas.microsoft.com/office/drawing/2014/main" id="{E50407AF-A5BD-50CE-FDF3-BF40706A411F}"/>
+              <a:t>Fazit</a:t>
+            </a:r>
+          </a:p>
+        </p:txBody>
+      </p:sp>
+      <mc:AlternateContent xmlns:mc="http://schemas.openxmlformats.org/markup-compatibility/2006">
+        <mc:Choice xmlns:a14="http://schemas.microsoft.com/office/drawing/2010/main" Requires="a14">
+          <p:sp>
+            <p:nvSpPr>
+              <p:cNvPr id="5" name="Textplatzhalter 4">
+                <a:extLst>
+                  <a:ext uri="{FF2B5EF4-FFF2-40B4-BE49-F238E27FC236}">
+                    <a16:creationId xmlns:a16="http://schemas.microsoft.com/office/drawing/2014/main" id="{874A7A65-C7F4-F6C9-5AE4-858DEE4E2960}"/>
+                  </a:ext>
+                </a:extLst>
+              </p:cNvPr>
+              <p:cNvSpPr>
+                <a:spLocks noGrp="1"/>
+              </p:cNvSpPr>
+              <p:nvPr>
+                <p:ph type="body" sz="quarter" idx="3"/>
+              </p:nvPr>
+            </p:nvSpPr>
+            <p:spPr/>
+            <p:txBody>
+              <a:bodyPr/>
+              <a:lstStyle/>
+              <a:p>
+                <a:r>
+                  <a:rPr lang="de-DE" dirty="0"/>
+                  <a:t>Einfluss vom Großen </a:t>
+                </a:r>
+                <a14:m>
+                  <m:oMath xmlns:m="http://schemas.openxmlformats.org/officeDocument/2006/math">
+                    <m:r>
+                      <a:rPr lang="de-DE" i="1">
+                        <a:latin typeface="Cambria Math" panose="02040503050406030204" pitchFamily="18" charset="0"/>
+                        <a:ea typeface="Cambria Math" panose="02040503050406030204" pitchFamily="18" charset="0"/>
+                      </a:rPr>
+                      <m:t>𝛽</m:t>
+                    </m:r>
+                  </m:oMath>
+                </a14:m>
+                <a:endParaRPr lang="de-DE" dirty="0"/>
+              </a:p>
+            </p:txBody>
+          </p:sp>
+        </mc:Choice>
+        <mc:Fallback>
+          <p:sp>
+            <p:nvSpPr>
+              <p:cNvPr id="5" name="Textplatzhalter 4">
+                <a:extLst>
+                  <a:ext uri="{FF2B5EF4-FFF2-40B4-BE49-F238E27FC236}">
+                    <a16:creationId xmlns:a16="http://schemas.microsoft.com/office/drawing/2014/main" id="{874A7A65-C7F4-F6C9-5AE4-858DEE4E2960}"/>
+                  </a:ext>
+                </a:extLst>
+              </p:cNvPr>
+              <p:cNvSpPr>
+                <a:spLocks noGrp="1" noRot="1" noChangeAspect="1" noMove="1" noResize="1" noEditPoints="1" noAdjustHandles="1" noChangeArrowheads="1" noChangeShapeType="1" noTextEdit="1"/>
+              </p:cNvSpPr>
+              <p:nvPr>
+                <p:ph type="body" sz="quarter" idx="3"/>
+              </p:nvPr>
+            </p:nvSpPr>
+            <p:spPr>
+              <a:blipFill>
+                <a:blip r:embed="rId2"/>
+                <a:stretch>
+                  <a:fillRect l="-1882" b="-17778"/>
+                </a:stretch>
+              </a:blipFill>
+            </p:spPr>
+            <p:txBody>
+              <a:bodyPr/>
+              <a:lstStyle/>
+              <a:p>
+                <a:r>
+                  <a:rPr lang="de-DE">
+                    <a:noFill/>
+                  </a:rPr>
+                  <a:t> </a:t>
+                </a:r>
+              </a:p>
+            </p:txBody>
+          </p:sp>
+        </mc:Fallback>
+      </mc:AlternateContent>
+      <p:sp>
+        <p:nvSpPr>
+          <p:cNvPr id="6" name="Inhaltsplatzhalter 5">
+            <a:extLst>
+              <a:ext uri="{FF2B5EF4-FFF2-40B4-BE49-F238E27FC236}">
+                <a16:creationId xmlns:a16="http://schemas.microsoft.com/office/drawing/2014/main" id="{27CF4302-EE10-DEB8-57DC-0DE63F780452}"/>
+              </a:ext>
+            </a:extLst>
+          </p:cNvPr>
+          <p:cNvSpPr>
+            <a:spLocks noGrp="1"/>
+          </p:cNvSpPr>
+          <p:nvPr>
+            <p:ph sz="quarter" idx="4"/>
+          </p:nvPr>
+        </p:nvSpPr>
+        <p:spPr/>
+        <p:txBody>
+          <a:bodyPr>
+            <a:normAutofit lnSpcReduction="10000"/>
+          </a:bodyPr>
+          <a:lstStyle/>
+          <a:p>
+            <a:r>
+              <a:rPr lang="de-DE" dirty="0"/>
+              <a:t>Ermöglicht Selektion zwischen Gegenständen mit minimalen unterschieden (z.B. 1 und 0,999)</a:t>
+            </a:r>
+          </a:p>
+          <a:p>
+            <a:pPr>
+              <a:buFont typeface="Wingdings" panose="05000000000000000000" pitchFamily="2" charset="2"/>
+              <a:buChar char="§"/>
+            </a:pPr>
+            <a:r>
+              <a:rPr lang="de-DE" dirty="0"/>
+              <a:t>Verlust der Selektion Fähigkeit bei allgemein schlechteren Gegenständen (z.B. 0,1 und 0,0999)</a:t>
+            </a:r>
+          </a:p>
+          <a:p>
+            <a:pPr>
+              <a:buFont typeface="Wingdings" panose="05000000000000000000" pitchFamily="2" charset="2"/>
+              <a:buChar char="§"/>
+            </a:pPr>
+            <a:r>
+              <a:rPr lang="de-DE" dirty="0"/>
+              <a:t>Fokussierung auf Gegenständen mit hoher Attraktivität </a:t>
+            </a:r>
+          </a:p>
+          <a:p>
+            <a:endParaRPr lang="de-DE" dirty="0"/>
+          </a:p>
+        </p:txBody>
+      </p:sp>
+      <p:sp>
+        <p:nvSpPr>
+          <p:cNvPr id="7" name="Datumsplatzhalter 6">
+            <a:extLst>
+              <a:ext uri="{FF2B5EF4-FFF2-40B4-BE49-F238E27FC236}">
+                <a16:creationId xmlns:a16="http://schemas.microsoft.com/office/drawing/2014/main" id="{6B894B29-7047-1ACA-3353-24BCA1F292EB}"/>
               </a:ext>
             </a:extLst>
           </p:cNvPr>
@@ -7341,10 +8790,10 @@
       </p:sp>
       <p:sp>
         <p:nvSpPr>
-          <p:cNvPr id="5" name="Fußzeilenplatzhalter 4">
-            <a:extLst>
-              <a:ext uri="{FF2B5EF4-FFF2-40B4-BE49-F238E27FC236}">
-                <a16:creationId xmlns:a16="http://schemas.microsoft.com/office/drawing/2014/main" id="{7411A53B-319E-FD54-9E3B-908627BD44F5}"/>
+          <p:cNvPr id="8" name="Fußzeilenplatzhalter 7">
+            <a:extLst>
+              <a:ext uri="{FF2B5EF4-FFF2-40B4-BE49-F238E27FC236}">
+                <a16:creationId xmlns:a16="http://schemas.microsoft.com/office/drawing/2014/main" id="{5981A085-1E07-22DC-7050-E4D89C38BAD6}"/>
               </a:ext>
             </a:extLst>
           </p:cNvPr>
@@ -7369,10 +8818,10 @@
       </p:sp>
       <p:sp>
         <p:nvSpPr>
-          <p:cNvPr id="6" name="Foliennummernplatzhalter 5">
-            <a:extLst>
-              <a:ext uri="{FF2B5EF4-FFF2-40B4-BE49-F238E27FC236}">
-                <a16:creationId xmlns:a16="http://schemas.microsoft.com/office/drawing/2014/main" id="{FE1E8DB6-4C98-C632-D75C-05F38D93E9EB}"/>
+          <p:cNvPr id="9" name="Foliennummernplatzhalter 8">
+            <a:extLst>
+              <a:ext uri="{FF2B5EF4-FFF2-40B4-BE49-F238E27FC236}">
+                <a16:creationId xmlns:a16="http://schemas.microsoft.com/office/drawing/2014/main" id="{86C91C11-4729-3014-9DB3-AC8059C85536}"/>
               </a:ext>
             </a:extLst>
           </p:cNvPr>
@@ -7390,16 +8839,114 @@
           <a:p>
             <a:fld id="{F20E45F0-5197-4D99-A0B0-CC09E9235134}" type="slidenum">
               <a:rPr lang="de-DE" smtClean="0"/>
-              <a:t>8</a:t>
+              <a:t>9</a:t>
             </a:fld>
-            <a:endParaRPr lang="de-DE"/>
+            <a:endParaRPr lang="de-DE" dirty="0"/>
+          </a:p>
+        </p:txBody>
+      </p:sp>
+      <p:sp>
+        <p:nvSpPr>
+          <p:cNvPr id="3" name="Textplatzhalter 2">
+            <a:extLst>
+              <a:ext uri="{FF2B5EF4-FFF2-40B4-BE49-F238E27FC236}">
+                <a16:creationId xmlns:a16="http://schemas.microsoft.com/office/drawing/2014/main" id="{F05D5584-C5F5-B21E-C1D6-CE5472F6A3BE}"/>
+              </a:ext>
+            </a:extLst>
+          </p:cNvPr>
+          <p:cNvSpPr>
+            <a:spLocks noGrp="1"/>
+          </p:cNvSpPr>
+          <p:nvPr>
+            <p:ph type="body" idx="1"/>
+          </p:nvPr>
+        </p:nvSpPr>
+        <p:spPr/>
+        <p:txBody>
+          <a:bodyPr/>
+          <a:lstStyle/>
+          <a:p>
+            <a:r>
+              <a:rPr lang="de-DE" dirty="0"/>
+              <a:t>Haupterkenntnis</a:t>
+            </a:r>
+          </a:p>
+        </p:txBody>
+      </p:sp>
+      <p:sp>
+        <p:nvSpPr>
+          <p:cNvPr id="4" name="Inhaltsplatzhalter 3">
+            <a:extLst>
+              <a:ext uri="{FF2B5EF4-FFF2-40B4-BE49-F238E27FC236}">
+                <a16:creationId xmlns:a16="http://schemas.microsoft.com/office/drawing/2014/main" id="{69979646-04D1-7A25-F6AA-E780620BB2CB}"/>
+              </a:ext>
+            </a:extLst>
+          </p:cNvPr>
+          <p:cNvSpPr>
+            <a:spLocks noGrp="1"/>
+          </p:cNvSpPr>
+          <p:nvPr>
+            <p:ph sz="half" idx="2"/>
+          </p:nvPr>
+        </p:nvSpPr>
+        <p:spPr/>
+        <p:txBody>
+          <a:bodyPr>
+            <a:normAutofit lnSpcReduction="10000"/>
+          </a:bodyPr>
+          <a:lstStyle/>
+          <a:p>
+            <a:pPr>
+              <a:buFont typeface="Wingdings" panose="05000000000000000000" pitchFamily="2" charset="2"/>
+              <a:buChar char="§"/>
+            </a:pPr>
+            <a:r>
+              <a:rPr lang="de-DE" dirty="0"/>
+              <a:t>Differenz zwischen der besten und schlechtesten Konfiguration 0,3% beim Hard-Problem</a:t>
+            </a:r>
+          </a:p>
+          <a:p>
+            <a:pPr>
+              <a:buFont typeface="Wingdings" panose="05000000000000000000" pitchFamily="2" charset="2"/>
+              <a:buChar char="§"/>
+            </a:pPr>
+            <a:r>
+              <a:rPr lang="de-DE" dirty="0"/>
+              <a:t>Beim Easy Problem Stagnation der besten Konfiguration</a:t>
+            </a:r>
+          </a:p>
+          <a:p>
+            <a:pPr>
+              <a:buFont typeface="Wingdings" panose="05000000000000000000" pitchFamily="2" charset="2"/>
+              <a:buChar char="§"/>
+            </a:pPr>
+            <a:r>
+              <a:rPr lang="de-DE" dirty="0"/>
+              <a:t>Schlechteste Konfiguration zeigt allgemein das beste und stabilste Suchverhalten </a:t>
+            </a:r>
+          </a:p>
+          <a:p>
+            <a:pPr>
+              <a:buFont typeface="Wingdings" panose="05000000000000000000" pitchFamily="2" charset="2"/>
+              <a:buChar char="§"/>
+            </a:pPr>
+            <a:endParaRPr lang="de-DE" b="0" dirty="0">
+              <a:ea typeface="Cambria Math" panose="02040503050406030204" pitchFamily="18" charset="0"/>
+            </a:endParaRPr>
+          </a:p>
+          <a:p>
+            <a:pPr lvl="1">
+              <a:buFont typeface="Wingdings" panose="05000000000000000000" pitchFamily="2" charset="2"/>
+              <a:buChar char="§"/>
+            </a:pPr>
+            <a:endParaRPr lang="de-DE" dirty="0"/>
           </a:p>
         </p:txBody>
       </p:sp>
     </p:spTree>
     <p:extLst>
       <p:ext uri="{BB962C8B-B14F-4D97-AF65-F5344CB8AC3E}">
-        <p14:creationId xmlns:p14="http://schemas.microsoft.com/office/powerpoint/2010/main" val="937536178"/>
+        <p14:creationId xmlns:p14="http://schemas.microsoft.com/office/powerpoint/2010/main" val="3694890744"/>
       </p:ext>
     </p:extLst>
   </p:cSld>

--- a/BMO-Projekt.pptx
+++ b/BMO-Projekt.pptx
@@ -5,20 +5,21 @@
     <p:sldMasterId id="2147483677" r:id="rId1"/>
   </p:sldMasterIdLst>
   <p:notesMasterIdLst>
-    <p:notesMasterId r:id="rId13"/>
+    <p:notesMasterId r:id="rId14"/>
   </p:notesMasterIdLst>
   <p:sldIdLst>
     <p:sldId id="256" r:id="rId2"/>
-    <p:sldId id="257" r:id="rId3"/>
-    <p:sldId id="258" r:id="rId4"/>
-    <p:sldId id="261" r:id="rId5"/>
-    <p:sldId id="266" r:id="rId6"/>
-    <p:sldId id="263" r:id="rId7"/>
-    <p:sldId id="260" r:id="rId8"/>
-    <p:sldId id="265" r:id="rId9"/>
-    <p:sldId id="267" r:id="rId10"/>
-    <p:sldId id="268" r:id="rId11"/>
-    <p:sldId id="269" r:id="rId12"/>
+    <p:sldId id="270" r:id="rId3"/>
+    <p:sldId id="257" r:id="rId4"/>
+    <p:sldId id="258" r:id="rId5"/>
+    <p:sldId id="261" r:id="rId6"/>
+    <p:sldId id="266" r:id="rId7"/>
+    <p:sldId id="263" r:id="rId8"/>
+    <p:sldId id="260" r:id="rId9"/>
+    <p:sldId id="265" r:id="rId10"/>
+    <p:sldId id="267" r:id="rId11"/>
+    <p:sldId id="268" r:id="rId12"/>
+    <p:sldId id="269" r:id="rId13"/>
   </p:sldIdLst>
   <p:sldSz cx="12192000" cy="6858000"/>
   <p:notesSz cx="6858000" cy="9144000"/>
@@ -128,7 +129,7 @@
 <file path=ppt/revisionInfo.xml><?xml version="1.0" encoding="utf-8"?>
 <p1510:revInfo xmlns:a="http://schemas.openxmlformats.org/drawingml/2006/main" xmlns:r="http://schemas.openxmlformats.org/officeDocument/2006/relationships" xmlns:p1510="http://schemas.microsoft.com/office/powerpoint/2015/10/main">
   <p1510:revLst>
-    <p1510:client id="{83CBDACE-3A84-4186-B9A6-AE47CA0CDA88}" v="212" dt="2026-06-21T14:20:12.567"/>
+    <p1510:client id="{83CBDACE-3A84-4186-B9A6-AE47CA0CDA88}" v="422" dt="2026-06-21T16:16:00.445"/>
   </p1510:revLst>
 </p1510:revInfo>
 </file>
@@ -138,7 +139,7 @@
   <pc:docChgLst>
     <pc:chgData name="Niko Kläsener" userId="b3580cb7-15ad-4c2f-be10-30939a475464" providerId="ADAL" clId="{36612FA6-6914-4267-9ADB-97F4291D668E}"/>
     <pc:docChg chg="undo custSel addSld delSld modSld sldOrd">
-      <pc:chgData name="Niko Kläsener" userId="b3580cb7-15ad-4c2f-be10-30939a475464" providerId="ADAL" clId="{36612FA6-6914-4267-9ADB-97F4291D668E}" dt="2026-06-21T14:21:08.454" v="2204" actId="20577"/>
+      <pc:chgData name="Niko Kläsener" userId="b3580cb7-15ad-4c2f-be10-30939a475464" providerId="ADAL" clId="{36612FA6-6914-4267-9ADB-97F4291D668E}" dt="2026-06-21T16:16:35.966" v="2873" actId="20577"/>
       <pc:docMkLst>
         <pc:docMk/>
       </pc:docMkLst>
@@ -206,11 +207,19 @@
         </pc:picChg>
       </pc:sldChg>
       <pc:sldChg chg="addSp modSp mod">
-        <pc:chgData name="Niko Kläsener" userId="b3580cb7-15ad-4c2f-be10-30939a475464" providerId="ADAL" clId="{36612FA6-6914-4267-9ADB-97F4291D668E}" dt="2026-06-20T11:06:40.427" v="522" actId="20577"/>
+        <pc:chgData name="Niko Kläsener" userId="b3580cb7-15ad-4c2f-be10-30939a475464" providerId="ADAL" clId="{36612FA6-6914-4267-9ADB-97F4291D668E}" dt="2026-06-21T16:04:02.732" v="2682" actId="14100"/>
         <pc:sldMkLst>
           <pc:docMk/>
           <pc:sldMk cId="313630166" sldId="257"/>
         </pc:sldMkLst>
+        <pc:spChg chg="mod">
+          <ac:chgData name="Niko Kläsener" userId="b3580cb7-15ad-4c2f-be10-30939a475464" providerId="ADAL" clId="{36612FA6-6914-4267-9ADB-97F4291D668E}" dt="2026-06-21T15:00:19.956" v="2206"/>
+          <ac:spMkLst>
+            <pc:docMk/>
+            <pc:sldMk cId="313630166" sldId="257"/>
+            <ac:spMk id="2" creationId="{24BE5F3B-E5A3-3B61-1565-BD3142A65EE2}"/>
+          </ac:spMkLst>
+        </pc:spChg>
         <pc:spChg chg="mod">
           <ac:chgData name="Niko Kläsener" userId="b3580cb7-15ad-4c2f-be10-30939a475464" providerId="ADAL" clId="{36612FA6-6914-4267-9ADB-97F4291D668E}" dt="2026-06-20T11:06:40.427" v="522" actId="20577"/>
           <ac:spMkLst>
@@ -220,7 +229,7 @@
           </ac:spMkLst>
         </pc:spChg>
         <pc:spChg chg="mod">
-          <ac:chgData name="Niko Kläsener" userId="b3580cb7-15ad-4c2f-be10-30939a475464" providerId="ADAL" clId="{36612FA6-6914-4267-9ADB-97F4291D668E}" dt="2026-06-19T12:26:02.010" v="144" actId="1076"/>
+          <ac:chgData name="Niko Kläsener" userId="b3580cb7-15ad-4c2f-be10-30939a475464" providerId="ADAL" clId="{36612FA6-6914-4267-9ADB-97F4291D668E}" dt="2026-06-21T15:03:27.645" v="2233" actId="1076"/>
           <ac:spMkLst>
             <pc:docMk/>
             <pc:sldMk cId="313630166" sldId="257"/>
@@ -228,7 +237,7 @@
           </ac:spMkLst>
         </pc:spChg>
         <pc:spChg chg="mod">
-          <ac:chgData name="Niko Kläsener" userId="b3580cb7-15ad-4c2f-be10-30939a475464" providerId="ADAL" clId="{36612FA6-6914-4267-9ADB-97F4291D668E}" dt="2026-06-19T12:40:45.371" v="255" actId="1076"/>
+          <ac:chgData name="Niko Kläsener" userId="b3580cb7-15ad-4c2f-be10-30939a475464" providerId="ADAL" clId="{36612FA6-6914-4267-9ADB-97F4291D668E}" dt="2026-06-21T15:03:19.769" v="2232" actId="1076"/>
           <ac:spMkLst>
             <pc:docMk/>
             <pc:sldMk cId="313630166" sldId="257"/>
@@ -244,7 +253,7 @@
           </ac:spMkLst>
         </pc:spChg>
         <pc:spChg chg="mod">
-          <ac:chgData name="Niko Kläsener" userId="b3580cb7-15ad-4c2f-be10-30939a475464" providerId="ADAL" clId="{36612FA6-6914-4267-9ADB-97F4291D668E}" dt="2026-06-19T12:40:40.079" v="254" actId="1076"/>
+          <ac:chgData name="Niko Kläsener" userId="b3580cb7-15ad-4c2f-be10-30939a475464" providerId="ADAL" clId="{36612FA6-6914-4267-9ADB-97F4291D668E}" dt="2026-06-21T16:03:55.384" v="2681" actId="20577"/>
           <ac:spMkLst>
             <pc:docMk/>
             <pc:sldMk cId="313630166" sldId="257"/>
@@ -252,7 +261,7 @@
           </ac:spMkLst>
         </pc:spChg>
         <pc:spChg chg="mod">
-          <ac:chgData name="Niko Kläsener" userId="b3580cb7-15ad-4c2f-be10-30939a475464" providerId="ADAL" clId="{36612FA6-6914-4267-9ADB-97F4291D668E}" dt="2026-06-19T12:40:28.405" v="252" actId="1076"/>
+          <ac:chgData name="Niko Kläsener" userId="b3580cb7-15ad-4c2f-be10-30939a475464" providerId="ADAL" clId="{36612FA6-6914-4267-9ADB-97F4291D668E}" dt="2026-06-21T16:03:31.357" v="2673" actId="20577"/>
           <ac:spMkLst>
             <pc:docMk/>
             <pc:sldMk cId="313630166" sldId="257"/>
@@ -260,7 +269,7 @@
           </ac:spMkLst>
         </pc:spChg>
         <pc:spChg chg="mod">
-          <ac:chgData name="Niko Kläsener" userId="b3580cb7-15ad-4c2f-be10-30939a475464" providerId="ADAL" clId="{36612FA6-6914-4267-9ADB-97F4291D668E}" dt="2026-06-19T12:35:31.574" v="237" actId="1076"/>
+          <ac:chgData name="Niko Kläsener" userId="b3580cb7-15ad-4c2f-be10-30939a475464" providerId="ADAL" clId="{36612FA6-6914-4267-9ADB-97F4291D668E}" dt="2026-06-21T15:59:53.849" v="2644" actId="20577"/>
           <ac:spMkLst>
             <pc:docMk/>
             <pc:sldMk cId="313630166" sldId="257"/>
@@ -268,7 +277,7 @@
           </ac:spMkLst>
         </pc:spChg>
         <pc:cxnChg chg="add mod">
-          <ac:chgData name="Niko Kläsener" userId="b3580cb7-15ad-4c2f-be10-30939a475464" providerId="ADAL" clId="{36612FA6-6914-4267-9ADB-97F4291D668E}" dt="2026-06-19T12:41:15.594" v="260" actId="17032"/>
+          <ac:chgData name="Niko Kläsener" userId="b3580cb7-15ad-4c2f-be10-30939a475464" providerId="ADAL" clId="{36612FA6-6914-4267-9ADB-97F4291D668E}" dt="2026-06-21T15:59:45.896" v="2641" actId="21"/>
           <ac:cxnSpMkLst>
             <pc:docMk/>
             <pc:sldMk cId="313630166" sldId="257"/>
@@ -276,7 +285,7 @@
           </ac:cxnSpMkLst>
         </pc:cxnChg>
         <pc:cxnChg chg="add mod">
-          <ac:chgData name="Niko Kläsener" userId="b3580cb7-15ad-4c2f-be10-30939a475464" providerId="ADAL" clId="{36612FA6-6914-4267-9ADB-97F4291D668E}" dt="2026-06-19T12:41:19.990" v="261" actId="17032"/>
+          <ac:chgData name="Niko Kläsener" userId="b3580cb7-15ad-4c2f-be10-30939a475464" providerId="ADAL" clId="{36612FA6-6914-4267-9ADB-97F4291D668E}" dt="2026-06-21T16:03:27.821" v="2672" actId="14100"/>
           <ac:cxnSpMkLst>
             <pc:docMk/>
             <pc:sldMk cId="313630166" sldId="257"/>
@@ -284,7 +293,7 @@
           </ac:cxnSpMkLst>
         </pc:cxnChg>
         <pc:cxnChg chg="add mod">
-          <ac:chgData name="Niko Kläsener" userId="b3580cb7-15ad-4c2f-be10-30939a475464" providerId="ADAL" clId="{36612FA6-6914-4267-9ADB-97F4291D668E}" dt="2026-06-19T12:41:23.203" v="262" actId="17032"/>
+          <ac:chgData name="Niko Kläsener" userId="b3580cb7-15ad-4c2f-be10-30939a475464" providerId="ADAL" clId="{36612FA6-6914-4267-9ADB-97F4291D668E}" dt="2026-06-21T15:03:57.037" v="2240" actId="14100"/>
           <ac:cxnSpMkLst>
             <pc:docMk/>
             <pc:sldMk cId="313630166" sldId="257"/>
@@ -292,7 +301,7 @@
           </ac:cxnSpMkLst>
         </pc:cxnChg>
         <pc:cxnChg chg="add mod">
-          <ac:chgData name="Niko Kläsener" userId="b3580cb7-15ad-4c2f-be10-30939a475464" providerId="ADAL" clId="{36612FA6-6914-4267-9ADB-97F4291D668E}" dt="2026-06-19T12:41:26.208" v="263" actId="17032"/>
+          <ac:chgData name="Niko Kläsener" userId="b3580cb7-15ad-4c2f-be10-30939a475464" providerId="ADAL" clId="{36612FA6-6914-4267-9ADB-97F4291D668E}" dt="2026-06-21T16:04:02.732" v="2682" actId="14100"/>
           <ac:cxnSpMkLst>
             <pc:docMk/>
             <pc:sldMk cId="313630166" sldId="257"/>
@@ -300,7 +309,7 @@
           </ac:cxnSpMkLst>
         </pc:cxnChg>
         <pc:cxnChg chg="add mod">
-          <ac:chgData name="Niko Kläsener" userId="b3580cb7-15ad-4c2f-be10-30939a475464" providerId="ADAL" clId="{36612FA6-6914-4267-9ADB-97F4291D668E}" dt="2026-06-19T12:41:31.040" v="264" actId="17032"/>
+          <ac:chgData name="Niko Kläsener" userId="b3580cb7-15ad-4c2f-be10-30939a475464" providerId="ADAL" clId="{36612FA6-6914-4267-9ADB-97F4291D668E}" dt="2026-06-21T15:03:34.695" v="2235" actId="14100"/>
           <ac:cxnSpMkLst>
             <pc:docMk/>
             <pc:sldMk cId="313630166" sldId="257"/>
@@ -309,7 +318,7 @@
         </pc:cxnChg>
       </pc:sldChg>
       <pc:sldChg chg="addSp delSp modSp mod">
-        <pc:chgData name="Niko Kläsener" userId="b3580cb7-15ad-4c2f-be10-30939a475464" providerId="ADAL" clId="{36612FA6-6914-4267-9ADB-97F4291D668E}" dt="2026-06-21T14:02:31.331" v="1681" actId="20577"/>
+        <pc:chgData name="Niko Kläsener" userId="b3580cb7-15ad-4c2f-be10-30939a475464" providerId="ADAL" clId="{36612FA6-6914-4267-9ADB-97F4291D668E}" dt="2026-06-21T15:09:53.227" v="2298" actId="1076"/>
         <pc:sldMkLst>
           <pc:docMk/>
           <pc:sldMk cId="1562465697" sldId="258"/>
@@ -323,11 +332,19 @@
           </ac:spMkLst>
         </pc:spChg>
         <pc:spChg chg="add mod">
-          <ac:chgData name="Niko Kläsener" userId="b3580cb7-15ad-4c2f-be10-30939a475464" providerId="ADAL" clId="{36612FA6-6914-4267-9ADB-97F4291D668E}" dt="2026-06-20T10:16:37.071" v="506" actId="1076"/>
+          <ac:chgData name="Niko Kläsener" userId="b3580cb7-15ad-4c2f-be10-30939a475464" providerId="ADAL" clId="{36612FA6-6914-4267-9ADB-97F4291D668E}" dt="2026-06-21T15:09:53.227" v="2298" actId="1076"/>
           <ac:spMkLst>
             <pc:docMk/>
             <pc:sldMk cId="1562465697" sldId="258"/>
             <ac:spMk id="3" creationId="{F984959B-3B96-707C-C5CF-921F9260BFDE}"/>
+          </ac:spMkLst>
+        </pc:spChg>
+        <pc:spChg chg="mod">
+          <ac:chgData name="Niko Kläsener" userId="b3580cb7-15ad-4c2f-be10-30939a475464" providerId="ADAL" clId="{36612FA6-6914-4267-9ADB-97F4291D668E}" dt="2026-06-21T15:00:40.458" v="2207"/>
+          <ac:spMkLst>
+            <pc:docMk/>
+            <pc:sldMk cId="1562465697" sldId="258"/>
+            <ac:spMk id="4" creationId="{5DB3D164-0EB1-FB4B-1102-8F2A17C66EE5}"/>
           </ac:spMkLst>
         </pc:spChg>
         <pc:picChg chg="add mod ord">
@@ -340,17 +357,25 @@
         </pc:picChg>
       </pc:sldChg>
       <pc:sldChg chg="addSp delSp modSp new mod ord">
-        <pc:chgData name="Niko Kläsener" userId="b3580cb7-15ad-4c2f-be10-30939a475464" providerId="ADAL" clId="{36612FA6-6914-4267-9ADB-97F4291D668E}" dt="2026-06-21T12:28:34.308" v="530"/>
+        <pc:chgData name="Niko Kläsener" userId="b3580cb7-15ad-4c2f-be10-30939a475464" providerId="ADAL" clId="{36612FA6-6914-4267-9ADB-97F4291D668E}" dt="2026-06-21T15:11:06.673" v="2300"/>
         <pc:sldMkLst>
           <pc:docMk/>
           <pc:sldMk cId="2830380807" sldId="260"/>
         </pc:sldMkLst>
         <pc:spChg chg="mod">
-          <ac:chgData name="Niko Kläsener" userId="b3580cb7-15ad-4c2f-be10-30939a475464" providerId="ADAL" clId="{36612FA6-6914-4267-9ADB-97F4291D668E}" dt="2026-06-19T10:49:38.671" v="62"/>
+          <ac:chgData name="Niko Kläsener" userId="b3580cb7-15ad-4c2f-be10-30939a475464" providerId="ADAL" clId="{36612FA6-6914-4267-9ADB-97F4291D668E}" dt="2026-06-21T15:11:06.673" v="2300"/>
           <ac:spMkLst>
             <pc:docMk/>
             <pc:sldMk cId="2830380807" sldId="260"/>
             <ac:spMk id="2" creationId="{4DC433D2-17BA-BB4F-88B0-0F9E964EEB21}"/>
+          </ac:spMkLst>
+        </pc:spChg>
+        <pc:spChg chg="mod">
+          <ac:chgData name="Niko Kläsener" userId="b3580cb7-15ad-4c2f-be10-30939a475464" providerId="ADAL" clId="{36612FA6-6914-4267-9ADB-97F4291D668E}" dt="2026-06-21T15:00:55.295" v="2211"/>
+          <ac:spMkLst>
+            <pc:docMk/>
+            <pc:sldMk cId="2830380807" sldId="260"/>
+            <ac:spMk id="5" creationId="{49DDB7FE-35AB-EF95-B844-395AC8BC38E1}"/>
           </ac:spMkLst>
         </pc:spChg>
         <pc:picChg chg="add mod ord">
@@ -371,7 +396,7 @@
         </pc:picChg>
       </pc:sldChg>
       <pc:sldChg chg="addSp delSp modSp new mod ord">
-        <pc:chgData name="Niko Kläsener" userId="b3580cb7-15ad-4c2f-be10-30939a475464" providerId="ADAL" clId="{36612FA6-6914-4267-9ADB-97F4291D668E}" dt="2026-06-21T12:44:44.495" v="714" actId="20577"/>
+        <pc:chgData name="Niko Kläsener" userId="b3580cb7-15ad-4c2f-be10-30939a475464" providerId="ADAL" clId="{36612FA6-6914-4267-9ADB-97F4291D668E}" dt="2026-06-21T16:16:00.445" v="2868" actId="20577"/>
         <pc:sldMkLst>
           <pc:docMk/>
           <pc:sldMk cId="1179084943" sldId="261"/>
@@ -385,23 +410,39 @@
           </ac:spMkLst>
         </pc:spChg>
         <pc:spChg chg="add mod">
-          <ac:chgData name="Niko Kläsener" userId="b3580cb7-15ad-4c2f-be10-30939a475464" providerId="ADAL" clId="{36612FA6-6914-4267-9ADB-97F4291D668E}" dt="2026-06-21T12:42:43.156" v="692" actId="113"/>
+          <ac:chgData name="Niko Kläsener" userId="b3580cb7-15ad-4c2f-be10-30939a475464" providerId="ADAL" clId="{36612FA6-6914-4267-9ADB-97F4291D668E}" dt="2026-06-21T16:16:00.445" v="2868" actId="20577"/>
           <ac:spMkLst>
             <pc:docMk/>
             <pc:sldMk cId="1179084943" sldId="261"/>
             <ac:spMk id="3" creationId="{03B229CE-C208-3B6E-0937-5F9A9A7AA444}"/>
           </ac:spMkLst>
         </pc:spChg>
-        <pc:spChg chg="add mod">
-          <ac:chgData name="Niko Kläsener" userId="b3580cb7-15ad-4c2f-be10-30939a475464" providerId="ADAL" clId="{36612FA6-6914-4267-9ADB-97F4291D668E}" dt="2026-06-21T12:42:46.285" v="693" actId="113"/>
+        <pc:spChg chg="mod">
+          <ac:chgData name="Niko Kläsener" userId="b3580cb7-15ad-4c2f-be10-30939a475464" providerId="ADAL" clId="{36612FA6-6914-4267-9ADB-97F4291D668E}" dt="2026-06-21T15:00:45.379" v="2208"/>
+          <ac:spMkLst>
+            <pc:docMk/>
+            <pc:sldMk cId="1179084943" sldId="261"/>
+            <ac:spMk id="4" creationId="{C4D0D370-05E6-ED99-91A0-C31BE3C76117}"/>
+          </ac:spMkLst>
+        </pc:spChg>
+        <pc:spChg chg="add del mod">
+          <ac:chgData name="Niko Kläsener" userId="b3580cb7-15ad-4c2f-be10-30939a475464" providerId="ADAL" clId="{36612FA6-6914-4267-9ADB-97F4291D668E}" dt="2026-06-21T15:08:33.428" v="2291"/>
           <ac:spMkLst>
             <pc:docMk/>
             <pc:sldMk cId="1179084943" sldId="261"/>
             <ac:spMk id="7" creationId="{6FF04FC2-856E-1509-998A-C8DF92BD91DF}"/>
           </ac:spMkLst>
         </pc:spChg>
+        <pc:spChg chg="add del mod">
+          <ac:chgData name="Niko Kläsener" userId="b3580cb7-15ad-4c2f-be10-30939a475464" providerId="ADAL" clId="{36612FA6-6914-4267-9ADB-97F4291D668E}" dt="2026-06-21T16:09:51.058" v="2771" actId="478"/>
+          <ac:spMkLst>
+            <pc:docMk/>
+            <pc:sldMk cId="1179084943" sldId="261"/>
+            <ac:spMk id="9" creationId="{4DAD1596-766A-4F62-B580-9C1396693562}"/>
+          </ac:spMkLst>
+        </pc:spChg>
         <pc:picChg chg="add mod ord">
-          <ac:chgData name="Niko Kläsener" userId="b3580cb7-15ad-4c2f-be10-30939a475464" providerId="ADAL" clId="{36612FA6-6914-4267-9ADB-97F4291D668E}" dt="2026-06-21T12:26:50.326" v="528" actId="1076"/>
+          <ac:chgData name="Niko Kläsener" userId="b3580cb7-15ad-4c2f-be10-30939a475464" providerId="ADAL" clId="{36612FA6-6914-4267-9ADB-97F4291D668E}" dt="2026-06-21T15:34:25.223" v="2500" actId="14826"/>
           <ac:picMkLst>
             <pc:docMk/>
             <pc:sldMk cId="1179084943" sldId="261"/>
@@ -433,21 +474,29 @@
         </pc:picChg>
       </pc:sldChg>
       <pc:sldChg chg="addSp delSp modSp new mod ord">
-        <pc:chgData name="Niko Kläsener" userId="b3580cb7-15ad-4c2f-be10-30939a475464" providerId="ADAL" clId="{36612FA6-6914-4267-9ADB-97F4291D668E}" dt="2026-06-21T12:44:59.951" v="718"/>
+        <pc:chgData name="Niko Kläsener" userId="b3580cb7-15ad-4c2f-be10-30939a475464" providerId="ADAL" clId="{36612FA6-6914-4267-9ADB-97F4291D668E}" dt="2026-06-21T15:36:15.925" v="2548" actId="14826"/>
         <pc:sldMkLst>
           <pc:docMk/>
           <pc:sldMk cId="937536178" sldId="263"/>
         </pc:sldMkLst>
         <pc:spChg chg="mod">
-          <ac:chgData name="Niko Kläsener" userId="b3580cb7-15ad-4c2f-be10-30939a475464" providerId="ADAL" clId="{36612FA6-6914-4267-9ADB-97F4291D668E}" dt="2026-06-21T12:44:59.951" v="718"/>
+          <ac:chgData name="Niko Kläsener" userId="b3580cb7-15ad-4c2f-be10-30939a475464" providerId="ADAL" clId="{36612FA6-6914-4267-9ADB-97F4291D668E}" dt="2026-06-21T15:10:48.779" v="2299"/>
           <ac:spMkLst>
             <pc:docMk/>
             <pc:sldMk cId="937536178" sldId="263"/>
             <ac:spMk id="2" creationId="{DE86CDD5-F3A8-1E49-03B4-ABAC4E69630F}"/>
           </ac:spMkLst>
         </pc:spChg>
+        <pc:spChg chg="mod">
+          <ac:chgData name="Niko Kläsener" userId="b3580cb7-15ad-4c2f-be10-30939a475464" providerId="ADAL" clId="{36612FA6-6914-4267-9ADB-97F4291D668E}" dt="2026-06-21T15:00:52.138" v="2210"/>
+          <ac:spMkLst>
+            <pc:docMk/>
+            <pc:sldMk cId="937536178" sldId="263"/>
+            <ac:spMk id="4" creationId="{E50407AF-A5BD-50CE-FDF3-BF40706A411F}"/>
+          </ac:spMkLst>
+        </pc:spChg>
         <pc:picChg chg="add mod ord">
-          <ac:chgData name="Niko Kläsener" userId="b3580cb7-15ad-4c2f-be10-30939a475464" providerId="ADAL" clId="{36612FA6-6914-4267-9ADB-97F4291D668E}" dt="2026-06-21T12:43:47.697" v="697" actId="14826"/>
+          <ac:chgData name="Niko Kläsener" userId="b3580cb7-15ad-4c2f-be10-30939a475464" providerId="ADAL" clId="{36612FA6-6914-4267-9ADB-97F4291D668E}" dt="2026-06-21T15:36:15.925" v="2548" actId="14826"/>
           <ac:picMkLst>
             <pc:docMk/>
             <pc:sldMk cId="937536178" sldId="263"/>
@@ -470,8 +519,8 @@
           </ac:picMkLst>
         </pc:picChg>
       </pc:sldChg>
-      <pc:sldChg chg="modSp add mod ord">
-        <pc:chgData name="Niko Kläsener" userId="b3580cb7-15ad-4c2f-be10-30939a475464" providerId="ADAL" clId="{36612FA6-6914-4267-9ADB-97F4291D668E}" dt="2026-06-21T13:03:01.017" v="882" actId="20577"/>
+      <pc:sldChg chg="delSp modSp add mod ord">
+        <pc:chgData name="Niko Kläsener" userId="b3580cb7-15ad-4c2f-be10-30939a475464" providerId="ADAL" clId="{36612FA6-6914-4267-9ADB-97F4291D668E}" dt="2026-06-21T15:37:08.345" v="2558" actId="20577"/>
         <pc:sldMkLst>
           <pc:docMk/>
           <pc:sldMk cId="284479213" sldId="265"/>
@@ -485,7 +534,7 @@
           </ac:spMkLst>
         </pc:spChg>
         <pc:spChg chg="mod">
-          <ac:chgData name="Niko Kläsener" userId="b3580cb7-15ad-4c2f-be10-30939a475464" providerId="ADAL" clId="{36612FA6-6914-4267-9ADB-97F4291D668E}" dt="2026-06-21T13:03:01.017" v="882" actId="20577"/>
+          <ac:chgData name="Niko Kläsener" userId="b3580cb7-15ad-4c2f-be10-30939a475464" providerId="ADAL" clId="{36612FA6-6914-4267-9ADB-97F4291D668E}" dt="2026-06-21T15:37:08.345" v="2558" actId="20577"/>
           <ac:spMkLst>
             <pc:docMk/>
             <pc:sldMk cId="284479213" sldId="265"/>
@@ -493,7 +542,15 @@
           </ac:spMkLst>
         </pc:spChg>
         <pc:spChg chg="mod">
-          <ac:chgData name="Niko Kläsener" userId="b3580cb7-15ad-4c2f-be10-30939a475464" providerId="ADAL" clId="{36612FA6-6914-4267-9ADB-97F4291D668E}" dt="2026-06-21T12:51:16.673" v="759" actId="20577"/>
+          <ac:chgData name="Niko Kläsener" userId="b3580cb7-15ad-4c2f-be10-30939a475464" providerId="ADAL" clId="{36612FA6-6914-4267-9ADB-97F4291D668E}" dt="2026-06-21T15:00:59.269" v="2212"/>
+          <ac:spMkLst>
+            <pc:docMk/>
+            <pc:sldMk cId="284479213" sldId="265"/>
+            <ac:spMk id="4" creationId="{73C46C0A-FD65-91E8-4591-86D9036388FA}"/>
+          </ac:spMkLst>
+        </pc:spChg>
+        <pc:spChg chg="del mod">
+          <ac:chgData name="Niko Kläsener" userId="b3580cb7-15ad-4c2f-be10-30939a475464" providerId="ADAL" clId="{36612FA6-6914-4267-9ADB-97F4291D668E}" dt="2026-06-21T15:12:20.524" v="2303" actId="478"/>
           <ac:spMkLst>
             <pc:docMk/>
             <pc:sldMk cId="284479213" sldId="265"/>
@@ -501,7 +558,7 @@
           </ac:spMkLst>
         </pc:spChg>
         <pc:picChg chg="mod">
-          <ac:chgData name="Niko Kläsener" userId="b3580cb7-15ad-4c2f-be10-30939a475464" providerId="ADAL" clId="{36612FA6-6914-4267-9ADB-97F4291D668E}" dt="2026-06-21T12:48:26.417" v="732" actId="14826"/>
+          <ac:chgData name="Niko Kläsener" userId="b3580cb7-15ad-4c2f-be10-30939a475464" providerId="ADAL" clId="{36612FA6-6914-4267-9ADB-97F4291D668E}" dt="2026-06-21T15:36:47.861" v="2549" actId="14826"/>
           <ac:picMkLst>
             <pc:docMk/>
             <pc:sldMk cId="284479213" sldId="265"/>
@@ -645,7 +702,7 @@
         </pc:picChg>
       </pc:sldChg>
       <pc:sldChg chg="delSp modSp add mod">
-        <pc:chgData name="Niko Kläsener" userId="b3580cb7-15ad-4c2f-be10-30939a475464" providerId="ADAL" clId="{36612FA6-6914-4267-9ADB-97F4291D668E}" dt="2026-06-21T13:01:29.732" v="874" actId="14100"/>
+        <pc:chgData name="Niko Kläsener" userId="b3580cb7-15ad-4c2f-be10-30939a475464" providerId="ADAL" clId="{36612FA6-6914-4267-9ADB-97F4291D668E}" dt="2026-06-21T16:16:20.575" v="2872" actId="1076"/>
         <pc:sldMkLst>
           <pc:docMk/>
           <pc:sldMk cId="1467630395" sldId="266"/>
@@ -659,11 +716,19 @@
           </ac:spMkLst>
         </pc:spChg>
         <pc:spChg chg="mod">
-          <ac:chgData name="Niko Kläsener" userId="b3580cb7-15ad-4c2f-be10-30939a475464" providerId="ADAL" clId="{36612FA6-6914-4267-9ADB-97F4291D668E}" dt="2026-06-21T13:01:29.732" v="874" actId="14100"/>
+          <ac:chgData name="Niko Kläsener" userId="b3580cb7-15ad-4c2f-be10-30939a475464" providerId="ADAL" clId="{36612FA6-6914-4267-9ADB-97F4291D668E}" dt="2026-06-21T16:16:20.575" v="2872" actId="1076"/>
           <ac:spMkLst>
             <pc:docMk/>
             <pc:sldMk cId="1467630395" sldId="266"/>
             <ac:spMk id="3" creationId="{BAC82BD4-2A43-8BFA-68CA-8A66C04C309B}"/>
+          </ac:spMkLst>
+        </pc:spChg>
+        <pc:spChg chg="mod">
+          <ac:chgData name="Niko Kläsener" userId="b3580cb7-15ad-4c2f-be10-30939a475464" providerId="ADAL" clId="{36612FA6-6914-4267-9ADB-97F4291D668E}" dt="2026-06-21T15:00:48.917" v="2209"/>
+          <ac:spMkLst>
+            <pc:docMk/>
+            <pc:sldMk cId="1467630395" sldId="266"/>
+            <ac:spMk id="4" creationId="{E1CB6DE3-71E5-AD25-8856-D7436362A2D0}"/>
           </ac:spMkLst>
         </pc:spChg>
         <pc:spChg chg="del">
@@ -675,7 +740,7 @@
           </ac:spMkLst>
         </pc:spChg>
         <pc:picChg chg="mod">
-          <ac:chgData name="Niko Kläsener" userId="b3580cb7-15ad-4c2f-be10-30939a475464" providerId="ADAL" clId="{36612FA6-6914-4267-9ADB-97F4291D668E}" dt="2026-06-21T12:55:59.946" v="761" actId="14826"/>
+          <ac:chgData name="Niko Kläsener" userId="b3580cb7-15ad-4c2f-be10-30939a475464" providerId="ADAL" clId="{36612FA6-6914-4267-9ADB-97F4291D668E}" dt="2026-06-21T15:35:26.442" v="2539" actId="14826"/>
           <ac:picMkLst>
             <pc:docMk/>
             <pc:sldMk cId="1467630395" sldId="266"/>
@@ -684,7 +749,7 @@
         </pc:picChg>
       </pc:sldChg>
       <pc:sldChg chg="modSp new mod modClrScheme chgLayout">
-        <pc:chgData name="Niko Kläsener" userId="b3580cb7-15ad-4c2f-be10-30939a475464" providerId="ADAL" clId="{36612FA6-6914-4267-9ADB-97F4291D668E}" dt="2026-06-21T14:05:18.535" v="1732" actId="313"/>
+        <pc:chgData name="Niko Kläsener" userId="b3580cb7-15ad-4c2f-be10-30939a475464" providerId="ADAL" clId="{36612FA6-6914-4267-9ADB-97F4291D668E}" dt="2026-06-21T16:02:43.558" v="2652" actId="20577"/>
         <pc:sldMkLst>
           <pc:docMk/>
           <pc:sldMk cId="3694890744" sldId="267"/>
@@ -698,7 +763,7 @@
           </ac:spMkLst>
         </pc:spChg>
         <pc:spChg chg="mod ord">
-          <ac:chgData name="Niko Kläsener" userId="b3580cb7-15ad-4c2f-be10-30939a475464" providerId="ADAL" clId="{36612FA6-6914-4267-9ADB-97F4291D668E}" dt="2026-06-21T14:00:29.970" v="1610" actId="700"/>
+          <ac:chgData name="Niko Kläsener" userId="b3580cb7-15ad-4c2f-be10-30939a475464" providerId="ADAL" clId="{36612FA6-6914-4267-9ADB-97F4291D668E}" dt="2026-06-21T15:47:44.239" v="2615" actId="255"/>
           <ac:spMkLst>
             <pc:docMk/>
             <pc:sldMk cId="3694890744" sldId="267"/>
@@ -706,7 +771,7 @@
           </ac:spMkLst>
         </pc:spChg>
         <pc:spChg chg="mod ord">
-          <ac:chgData name="Niko Kläsener" userId="b3580cb7-15ad-4c2f-be10-30939a475464" providerId="ADAL" clId="{36612FA6-6914-4267-9ADB-97F4291D668E}" dt="2026-06-21T14:04:55.247" v="1683" actId="27636"/>
+          <ac:chgData name="Niko Kläsener" userId="b3580cb7-15ad-4c2f-be10-30939a475464" providerId="ADAL" clId="{36612FA6-6914-4267-9ADB-97F4291D668E}" dt="2026-06-21T15:55:53.277" v="2636" actId="255"/>
           <ac:spMkLst>
             <pc:docMk/>
             <pc:sldMk cId="3694890744" sldId="267"/>
@@ -714,7 +779,7 @@
           </ac:spMkLst>
         </pc:spChg>
         <pc:spChg chg="mod ord">
-          <ac:chgData name="Niko Kläsener" userId="b3580cb7-15ad-4c2f-be10-30939a475464" providerId="ADAL" clId="{36612FA6-6914-4267-9ADB-97F4291D668E}" dt="2026-06-21T14:00:29.970" v="1610" actId="700"/>
+          <ac:chgData name="Niko Kläsener" userId="b3580cb7-15ad-4c2f-be10-30939a475464" providerId="ADAL" clId="{36612FA6-6914-4267-9ADB-97F4291D668E}" dt="2026-06-21T16:02:43.558" v="2652" actId="20577"/>
           <ac:spMkLst>
             <pc:docMk/>
             <pc:sldMk cId="3694890744" sldId="267"/>
@@ -722,7 +787,7 @@
           </ac:spMkLst>
         </pc:spChg>
         <pc:spChg chg="mod ord">
-          <ac:chgData name="Niko Kläsener" userId="b3580cb7-15ad-4c2f-be10-30939a475464" providerId="ADAL" clId="{36612FA6-6914-4267-9ADB-97F4291D668E}" dt="2026-06-21T14:05:18.535" v="1732" actId="313"/>
+          <ac:chgData name="Niko Kläsener" userId="b3580cb7-15ad-4c2f-be10-30939a475464" providerId="ADAL" clId="{36612FA6-6914-4267-9ADB-97F4291D668E}" dt="2026-06-21T15:47:36.002" v="2614" actId="27636"/>
           <ac:spMkLst>
             <pc:docMk/>
             <pc:sldMk cId="3694890744" sldId="267"/>
@@ -730,7 +795,7 @@
           </ac:spMkLst>
         </pc:spChg>
         <pc:spChg chg="mod ord">
-          <ac:chgData name="Niko Kläsener" userId="b3580cb7-15ad-4c2f-be10-30939a475464" providerId="ADAL" clId="{36612FA6-6914-4267-9ADB-97F4291D668E}" dt="2026-06-21T14:00:29.970" v="1610" actId="700"/>
+          <ac:chgData name="Niko Kläsener" userId="b3580cb7-15ad-4c2f-be10-30939a475464" providerId="ADAL" clId="{36612FA6-6914-4267-9ADB-97F4291D668E}" dt="2026-06-21T15:01:31.776" v="2218"/>
           <ac:spMkLst>
             <pc:docMk/>
             <pc:sldMk cId="3694890744" sldId="267"/>
@@ -755,7 +820,7 @@
         </pc:spChg>
       </pc:sldChg>
       <pc:sldChg chg="addSp delSp modSp new mod modClrScheme chgLayout">
-        <pc:chgData name="Niko Kläsener" userId="b3580cb7-15ad-4c2f-be10-30939a475464" providerId="ADAL" clId="{36612FA6-6914-4267-9ADB-97F4291D668E}" dt="2026-06-21T14:20:21.248" v="2172" actId="20577"/>
+        <pc:chgData name="Niko Kläsener" userId="b3580cb7-15ad-4c2f-be10-30939a475464" providerId="ADAL" clId="{36612FA6-6914-4267-9ADB-97F4291D668E}" dt="2026-06-21T16:16:35.966" v="2873" actId="20577"/>
         <pc:sldMkLst>
           <pc:docMk/>
           <pc:sldMk cId="1820629519" sldId="268"/>
@@ -777,7 +842,7 @@
           </ac:spMkLst>
         </pc:spChg>
         <pc:spChg chg="mod ord">
-          <ac:chgData name="Niko Kläsener" userId="b3580cb7-15ad-4c2f-be10-30939a475464" providerId="ADAL" clId="{36612FA6-6914-4267-9ADB-97F4291D668E}" dt="2026-06-21T14:07:26.271" v="1734" actId="700"/>
+          <ac:chgData name="Niko Kläsener" userId="b3580cb7-15ad-4c2f-be10-30939a475464" providerId="ADAL" clId="{36612FA6-6914-4267-9ADB-97F4291D668E}" dt="2026-06-21T15:01:41.001" v="2219"/>
           <ac:spMkLst>
             <pc:docMk/>
             <pc:sldMk cId="1820629519" sldId="268"/>
@@ -801,7 +866,7 @@
           </ac:spMkLst>
         </pc:spChg>
         <pc:spChg chg="add mod ord">
-          <ac:chgData name="Niko Kläsener" userId="b3580cb7-15ad-4c2f-be10-30939a475464" providerId="ADAL" clId="{36612FA6-6914-4267-9ADB-97F4291D668E}" dt="2026-06-21T14:08:09.955" v="1765" actId="20577"/>
+          <ac:chgData name="Niko Kläsener" userId="b3580cb7-15ad-4c2f-be10-30939a475464" providerId="ADAL" clId="{36612FA6-6914-4267-9ADB-97F4291D668E}" dt="2026-06-21T15:48:00.427" v="2618" actId="255"/>
           <ac:spMkLst>
             <pc:docMk/>
             <pc:sldMk cId="1820629519" sldId="268"/>
@@ -809,7 +874,7 @@
           </ac:spMkLst>
         </pc:spChg>
         <pc:spChg chg="add mod ord">
-          <ac:chgData name="Niko Kläsener" userId="b3580cb7-15ad-4c2f-be10-30939a475464" providerId="ADAL" clId="{36612FA6-6914-4267-9ADB-97F4291D668E}" dt="2026-06-21T14:14:17.066" v="1917" actId="20577"/>
+          <ac:chgData name="Niko Kläsener" userId="b3580cb7-15ad-4c2f-be10-30939a475464" providerId="ADAL" clId="{36612FA6-6914-4267-9ADB-97F4291D668E}" dt="2026-06-21T16:16:35.966" v="2873" actId="20577"/>
           <ac:spMkLst>
             <pc:docMk/>
             <pc:sldMk cId="1820629519" sldId="268"/>
@@ -817,7 +882,7 @@
           </ac:spMkLst>
         </pc:spChg>
         <pc:spChg chg="add mod ord">
-          <ac:chgData name="Niko Kläsener" userId="b3580cb7-15ad-4c2f-be10-30939a475464" providerId="ADAL" clId="{36612FA6-6914-4267-9ADB-97F4291D668E}" dt="2026-06-21T14:16:03.870" v="1959" actId="20577"/>
+          <ac:chgData name="Niko Kläsener" userId="b3580cb7-15ad-4c2f-be10-30939a475464" providerId="ADAL" clId="{36612FA6-6914-4267-9ADB-97F4291D668E}" dt="2026-06-21T15:48:04.456" v="2619" actId="255"/>
           <ac:spMkLst>
             <pc:docMk/>
             <pc:sldMk cId="1820629519" sldId="268"/>
@@ -825,7 +890,7 @@
           </ac:spMkLst>
         </pc:spChg>
         <pc:spChg chg="add mod ord">
-          <ac:chgData name="Niko Kläsener" userId="b3580cb7-15ad-4c2f-be10-30939a475464" providerId="ADAL" clId="{36612FA6-6914-4267-9ADB-97F4291D668E}" dt="2026-06-21T14:20:21.248" v="2172" actId="20577"/>
+          <ac:chgData name="Niko Kläsener" userId="b3580cb7-15ad-4c2f-be10-30939a475464" providerId="ADAL" clId="{36612FA6-6914-4267-9ADB-97F4291D668E}" dt="2026-06-21T15:47:05.330" v="2609" actId="14100"/>
           <ac:spMkLst>
             <pc:docMk/>
             <pc:sldMk cId="1820629519" sldId="268"/>
@@ -855,9 +920,3238 @@
           </ac:spMkLst>
         </pc:spChg>
       </pc:sldChg>
+      <pc:sldChg chg="addSp delSp modSp new mod">
+        <pc:chgData name="Niko Kläsener" userId="b3580cb7-15ad-4c2f-be10-30939a475464" providerId="ADAL" clId="{36612FA6-6914-4267-9ADB-97F4291D668E}" dt="2026-06-21T15:33:46.695" v="2499" actId="14100"/>
+        <pc:sldMkLst>
+          <pc:docMk/>
+          <pc:sldMk cId="699465919" sldId="270"/>
+        </pc:sldMkLst>
+        <pc:spChg chg="mod">
+          <ac:chgData name="Niko Kläsener" userId="b3580cb7-15ad-4c2f-be10-30939a475464" providerId="ADAL" clId="{36612FA6-6914-4267-9ADB-97F4291D668E}" dt="2026-06-21T15:30:03.310" v="2411" actId="20577"/>
+          <ac:spMkLst>
+            <pc:docMk/>
+            <pc:sldMk cId="699465919" sldId="270"/>
+            <ac:spMk id="2" creationId="{ABC52B9C-6788-2245-06B9-34B408CC6566}"/>
+          </ac:spMkLst>
+        </pc:spChg>
+        <pc:spChg chg="del mod">
+          <ac:chgData name="Niko Kläsener" userId="b3580cb7-15ad-4c2f-be10-30939a475464" providerId="ADAL" clId="{36612FA6-6914-4267-9ADB-97F4291D668E}" dt="2026-06-21T15:32:46.787" v="2495" actId="12084"/>
+          <ac:spMkLst>
+            <pc:docMk/>
+            <pc:sldMk cId="699465919" sldId="270"/>
+            <ac:spMk id="3" creationId="{97C515FF-CFEF-3E12-8633-6EB510BE0779}"/>
+          </ac:spMkLst>
+        </pc:spChg>
+        <pc:spChg chg="mod">
+          <ac:chgData name="Niko Kläsener" userId="b3580cb7-15ad-4c2f-be10-30939a475464" providerId="ADAL" clId="{36612FA6-6914-4267-9ADB-97F4291D668E}" dt="2026-06-21T15:32:16.374" v="2494"/>
+          <ac:spMkLst>
+            <pc:docMk/>
+            <pc:sldMk cId="699465919" sldId="270"/>
+            <ac:spMk id="4" creationId="{32B41879-BE78-2348-320D-BC8C88A10760}"/>
+          </ac:spMkLst>
+        </pc:spChg>
+        <pc:graphicFrameChg chg="add mod">
+          <ac:chgData name="Niko Kläsener" userId="b3580cb7-15ad-4c2f-be10-30939a475464" providerId="ADAL" clId="{36612FA6-6914-4267-9ADB-97F4291D668E}" dt="2026-06-21T15:33:46.695" v="2499" actId="14100"/>
+          <ac:graphicFrameMkLst>
+            <pc:docMk/>
+            <pc:sldMk cId="699465919" sldId="270"/>
+            <ac:graphicFrameMk id="7" creationId="{15F904F0-89E1-6A1F-16BC-6D123450547E}"/>
+          </ac:graphicFrameMkLst>
+        </pc:graphicFrameChg>
+      </pc:sldChg>
     </pc:docChg>
   </pc:docChgLst>
 </pc:chgInfo>
+</file>
+
+<file path=ppt/diagrams/colors1.xml><?xml version="1.0" encoding="utf-8"?>
+<dgm:colorsDef xmlns:dgm="http://schemas.openxmlformats.org/drawingml/2006/diagram" xmlns:a="http://schemas.openxmlformats.org/drawingml/2006/main" uniqueId="urn:microsoft.com/office/officeart/2005/8/colors/accent0_1">
+  <dgm:title val=""/>
+  <dgm:desc val=""/>
+  <dgm:catLst>
+    <dgm:cat type="mainScheme" pri="10100"/>
+  </dgm:catLst>
+  <dgm:styleLbl name="node0">
+    <dgm:fillClrLst meth="repeat">
+      <a:schemeClr val="lt1"/>
+    </dgm:fillClrLst>
+    <dgm:linClrLst meth="repeat">
+      <a:schemeClr val="dk1">
+        <a:shade val="80000"/>
+      </a:schemeClr>
+    </dgm:linClrLst>
+    <dgm:effectClrLst/>
+    <dgm:txLinClrLst/>
+    <dgm:txFillClrLst meth="repeat">
+      <a:schemeClr val="dk1"/>
+    </dgm:txFillClrLst>
+    <dgm:txEffectClrLst/>
+  </dgm:styleLbl>
+  <dgm:styleLbl name="node1">
+    <dgm:fillClrLst meth="repeat">
+      <a:schemeClr val="lt1"/>
+    </dgm:fillClrLst>
+    <dgm:linClrLst meth="repeat">
+      <a:schemeClr val="dk1">
+        <a:shade val="80000"/>
+      </a:schemeClr>
+    </dgm:linClrLst>
+    <dgm:effectClrLst/>
+    <dgm:txLinClrLst/>
+    <dgm:txFillClrLst meth="repeat">
+      <a:schemeClr val="dk1"/>
+    </dgm:txFillClrLst>
+    <dgm:txEffectClrLst/>
+  </dgm:styleLbl>
+  <dgm:styleLbl name="alignNode1">
+    <dgm:fillClrLst meth="repeat">
+      <a:schemeClr val="lt1"/>
+    </dgm:fillClrLst>
+    <dgm:linClrLst meth="repeat">
+      <a:schemeClr val="dk1">
+        <a:shade val="80000"/>
+      </a:schemeClr>
+    </dgm:linClrLst>
+    <dgm:effectClrLst/>
+    <dgm:txLinClrLst/>
+    <dgm:txFillClrLst meth="repeat">
+      <a:schemeClr val="dk1"/>
+    </dgm:txFillClrLst>
+    <dgm:txEffectClrLst/>
+  </dgm:styleLbl>
+  <dgm:styleLbl name="lnNode1">
+    <dgm:fillClrLst meth="repeat">
+      <a:schemeClr val="lt1"/>
+    </dgm:fillClrLst>
+    <dgm:linClrLst meth="repeat">
+      <a:schemeClr val="dk1">
+        <a:shade val="80000"/>
+      </a:schemeClr>
+    </dgm:linClrLst>
+    <dgm:effectClrLst/>
+    <dgm:txLinClrLst/>
+    <dgm:txFillClrLst meth="repeat">
+      <a:schemeClr val="dk1"/>
+    </dgm:txFillClrLst>
+    <dgm:txEffectClrLst/>
+  </dgm:styleLbl>
+  <dgm:styleLbl name="vennNode1">
+    <dgm:fillClrLst meth="repeat">
+      <a:schemeClr val="lt1">
+        <a:alpha val="50000"/>
+      </a:schemeClr>
+    </dgm:fillClrLst>
+    <dgm:linClrLst meth="repeat">
+      <a:schemeClr val="dk1">
+        <a:shade val="80000"/>
+      </a:schemeClr>
+    </dgm:linClrLst>
+    <dgm:effectClrLst/>
+    <dgm:txLinClrLst/>
+    <dgm:txFillClrLst/>
+    <dgm:txEffectClrLst/>
+  </dgm:styleLbl>
+  <dgm:styleLbl name="node2">
+    <dgm:fillClrLst meth="repeat">
+      <a:schemeClr val="lt1"/>
+    </dgm:fillClrLst>
+    <dgm:linClrLst meth="repeat">
+      <a:schemeClr val="dk1">
+        <a:shade val="80000"/>
+      </a:schemeClr>
+    </dgm:linClrLst>
+    <dgm:effectClrLst/>
+    <dgm:txLinClrLst/>
+    <dgm:txFillClrLst meth="repeat">
+      <a:schemeClr val="dk1"/>
+    </dgm:txFillClrLst>
+    <dgm:txEffectClrLst/>
+  </dgm:styleLbl>
+  <dgm:styleLbl name="node3">
+    <dgm:fillClrLst meth="repeat">
+      <a:schemeClr val="lt1"/>
+    </dgm:fillClrLst>
+    <dgm:linClrLst meth="repeat">
+      <a:schemeClr val="dk1">
+        <a:shade val="80000"/>
+      </a:schemeClr>
+    </dgm:linClrLst>
+    <dgm:effectClrLst/>
+    <dgm:txLinClrLst/>
+    <dgm:txFillClrLst meth="repeat">
+      <a:schemeClr val="dk1"/>
+    </dgm:txFillClrLst>
+    <dgm:txEffectClrLst/>
+  </dgm:styleLbl>
+  <dgm:styleLbl name="node4">
+    <dgm:fillClrLst meth="repeat">
+      <a:schemeClr val="lt1"/>
+    </dgm:fillClrLst>
+    <dgm:linClrLst meth="repeat">
+      <a:schemeClr val="dk1">
+        <a:shade val="80000"/>
+      </a:schemeClr>
+    </dgm:linClrLst>
+    <dgm:effectClrLst/>
+    <dgm:txLinClrLst/>
+    <dgm:txFillClrLst meth="repeat">
+      <a:schemeClr val="dk1"/>
+    </dgm:txFillClrLst>
+    <dgm:txEffectClrLst/>
+  </dgm:styleLbl>
+  <dgm:styleLbl name="fgImgPlace1">
+    <dgm:fillClrLst meth="repeat">
+      <a:schemeClr val="dk1">
+        <a:tint val="40000"/>
+      </a:schemeClr>
+    </dgm:fillClrLst>
+    <dgm:linClrLst meth="repeat">
+      <a:schemeClr val="dk1">
+        <a:shade val="80000"/>
+      </a:schemeClr>
+    </dgm:linClrLst>
+    <dgm:effectClrLst/>
+    <dgm:txLinClrLst/>
+    <dgm:txFillClrLst meth="repeat">
+      <a:schemeClr val="lt1"/>
+    </dgm:txFillClrLst>
+    <dgm:txEffectClrLst/>
+  </dgm:styleLbl>
+  <dgm:styleLbl name="alignImgPlace1">
+    <dgm:fillClrLst meth="repeat">
+      <a:schemeClr val="dk1">
+        <a:tint val="40000"/>
+      </a:schemeClr>
+    </dgm:fillClrLst>
+    <dgm:linClrLst meth="repeat">
+      <a:schemeClr val="dk1">
+        <a:shade val="80000"/>
+      </a:schemeClr>
+    </dgm:linClrLst>
+    <dgm:effectClrLst/>
+    <dgm:txLinClrLst/>
+    <dgm:txFillClrLst meth="repeat">
+      <a:schemeClr val="lt1"/>
+    </dgm:txFillClrLst>
+    <dgm:txEffectClrLst/>
+  </dgm:styleLbl>
+  <dgm:styleLbl name="bgImgPlace1">
+    <dgm:fillClrLst meth="repeat">
+      <a:schemeClr val="dk1">
+        <a:tint val="40000"/>
+      </a:schemeClr>
+    </dgm:fillClrLst>
+    <dgm:linClrLst meth="repeat">
+      <a:schemeClr val="dk1">
+        <a:shade val="80000"/>
+      </a:schemeClr>
+    </dgm:linClrLst>
+    <dgm:effectClrLst/>
+    <dgm:txLinClrLst/>
+    <dgm:txFillClrLst meth="repeat">
+      <a:schemeClr val="lt1"/>
+    </dgm:txFillClrLst>
+    <dgm:txEffectClrLst/>
+  </dgm:styleLbl>
+  <dgm:styleLbl name="sibTrans2D1">
+    <dgm:fillClrLst meth="repeat">
+      <a:schemeClr val="dk1">
+        <a:tint val="60000"/>
+      </a:schemeClr>
+    </dgm:fillClrLst>
+    <dgm:linClrLst meth="repeat">
+      <a:schemeClr val="dk1">
+        <a:tint val="60000"/>
+      </a:schemeClr>
+    </dgm:linClrLst>
+    <dgm:effectClrLst/>
+    <dgm:txLinClrLst/>
+    <dgm:txFillClrLst meth="repeat">
+      <a:schemeClr val="dk1"/>
+    </dgm:txFillClrLst>
+    <dgm:txEffectClrLst/>
+  </dgm:styleLbl>
+  <dgm:styleLbl name="fgSibTrans2D1">
+    <dgm:fillClrLst meth="repeat">
+      <a:schemeClr val="dk1">
+        <a:tint val="60000"/>
+      </a:schemeClr>
+    </dgm:fillClrLst>
+    <dgm:linClrLst meth="repeat">
+      <a:schemeClr val="dk1">
+        <a:tint val="60000"/>
+      </a:schemeClr>
+    </dgm:linClrLst>
+    <dgm:effectClrLst/>
+    <dgm:txLinClrLst/>
+    <dgm:txFillClrLst meth="repeat">
+      <a:schemeClr val="dk1"/>
+    </dgm:txFillClrLst>
+    <dgm:txEffectClrLst/>
+  </dgm:styleLbl>
+  <dgm:styleLbl name="bgSibTrans2D1">
+    <dgm:fillClrLst meth="repeat">
+      <a:schemeClr val="dk1">
+        <a:tint val="60000"/>
+      </a:schemeClr>
+    </dgm:fillClrLst>
+    <dgm:linClrLst meth="repeat">
+      <a:schemeClr val="dk1">
+        <a:tint val="60000"/>
+      </a:schemeClr>
+    </dgm:linClrLst>
+    <dgm:effectClrLst/>
+    <dgm:txLinClrLst/>
+    <dgm:txFillClrLst meth="repeat">
+      <a:schemeClr val="dk1"/>
+    </dgm:txFillClrLst>
+    <dgm:txEffectClrLst/>
+  </dgm:styleLbl>
+  <dgm:styleLbl name="sibTrans1D1">
+    <dgm:fillClrLst meth="repeat">
+      <a:schemeClr val="dk1"/>
+    </dgm:fillClrLst>
+    <dgm:linClrLst meth="repeat">
+      <a:schemeClr val="dk1"/>
+    </dgm:linClrLst>
+    <dgm:effectClrLst/>
+    <dgm:txLinClrLst/>
+    <dgm:txFillClrLst meth="repeat">
+      <a:schemeClr val="tx1"/>
+    </dgm:txFillClrLst>
+    <dgm:txEffectClrLst/>
+  </dgm:styleLbl>
+  <dgm:styleLbl name="callout">
+    <dgm:fillClrLst meth="repeat">
+      <a:schemeClr val="dk1"/>
+    </dgm:fillClrLst>
+    <dgm:linClrLst meth="repeat">
+      <a:schemeClr val="dk1"/>
+    </dgm:linClrLst>
+    <dgm:effectClrLst/>
+    <dgm:txLinClrLst/>
+    <dgm:txFillClrLst meth="repeat">
+      <a:schemeClr val="tx1"/>
+    </dgm:txFillClrLst>
+    <dgm:txEffectClrLst/>
+  </dgm:styleLbl>
+  <dgm:styleLbl name="asst0">
+    <dgm:fillClrLst meth="repeat">
+      <a:schemeClr val="lt1"/>
+    </dgm:fillClrLst>
+    <dgm:linClrLst meth="repeat">
+      <a:schemeClr val="dk1">
+        <a:shade val="80000"/>
+      </a:schemeClr>
+    </dgm:linClrLst>
+    <dgm:effectClrLst/>
+    <dgm:txLinClrLst/>
+    <dgm:txFillClrLst meth="repeat">
+      <a:schemeClr val="dk1"/>
+    </dgm:txFillClrLst>
+    <dgm:txEffectClrLst/>
+  </dgm:styleLbl>
+  <dgm:styleLbl name="asst1">
+    <dgm:fillClrLst meth="repeat">
+      <a:schemeClr val="lt1"/>
+    </dgm:fillClrLst>
+    <dgm:linClrLst meth="repeat">
+      <a:schemeClr val="dk1">
+        <a:shade val="80000"/>
+      </a:schemeClr>
+    </dgm:linClrLst>
+    <dgm:effectClrLst/>
+    <dgm:txLinClrLst/>
+    <dgm:txFillClrLst meth="repeat">
+      <a:schemeClr val="dk1"/>
+    </dgm:txFillClrLst>
+    <dgm:txEffectClrLst/>
+  </dgm:styleLbl>
+  <dgm:styleLbl name="asst2">
+    <dgm:fillClrLst meth="repeat">
+      <a:schemeClr val="lt1"/>
+    </dgm:fillClrLst>
+    <dgm:linClrLst meth="repeat">
+      <a:schemeClr val="dk1">
+        <a:shade val="80000"/>
+      </a:schemeClr>
+    </dgm:linClrLst>
+    <dgm:effectClrLst/>
+    <dgm:txLinClrLst/>
+    <dgm:txFillClrLst meth="repeat">
+      <a:schemeClr val="dk1"/>
+    </dgm:txFillClrLst>
+    <dgm:txEffectClrLst/>
+  </dgm:styleLbl>
+  <dgm:styleLbl name="asst3">
+    <dgm:fillClrLst meth="repeat">
+      <a:schemeClr val="lt1"/>
+    </dgm:fillClrLst>
+    <dgm:linClrLst meth="repeat">
+      <a:schemeClr val="dk1">
+        <a:shade val="80000"/>
+      </a:schemeClr>
+    </dgm:linClrLst>
+    <dgm:effectClrLst/>
+    <dgm:txLinClrLst/>
+    <dgm:txFillClrLst meth="repeat">
+      <a:schemeClr val="dk1"/>
+    </dgm:txFillClrLst>
+    <dgm:txEffectClrLst/>
+  </dgm:styleLbl>
+  <dgm:styleLbl name="asst4">
+    <dgm:fillClrLst meth="repeat">
+      <a:schemeClr val="lt1"/>
+    </dgm:fillClrLst>
+    <dgm:linClrLst meth="repeat">
+      <a:schemeClr val="dk1">
+        <a:shade val="80000"/>
+      </a:schemeClr>
+    </dgm:linClrLst>
+    <dgm:effectClrLst/>
+    <dgm:txLinClrLst/>
+    <dgm:txFillClrLst meth="repeat">
+      <a:schemeClr val="dk1"/>
+    </dgm:txFillClrLst>
+    <dgm:txEffectClrLst/>
+  </dgm:styleLbl>
+  <dgm:styleLbl name="parChTrans2D1">
+    <dgm:fillClrLst meth="repeat">
+      <a:schemeClr val="dk1">
+        <a:tint val="60000"/>
+      </a:schemeClr>
+    </dgm:fillClrLst>
+    <dgm:linClrLst meth="repeat">
+      <a:schemeClr val="dk1">
+        <a:tint val="60000"/>
+      </a:schemeClr>
+    </dgm:linClrLst>
+    <dgm:effectClrLst/>
+    <dgm:txLinClrLst/>
+    <dgm:txFillClrLst/>
+    <dgm:txEffectClrLst/>
+  </dgm:styleLbl>
+  <dgm:styleLbl name="parChTrans2D2">
+    <dgm:fillClrLst meth="repeat">
+      <a:schemeClr val="dk1"/>
+    </dgm:fillClrLst>
+    <dgm:linClrLst meth="repeat">
+      <a:schemeClr val="dk1"/>
+    </dgm:linClrLst>
+    <dgm:effectClrLst/>
+    <dgm:txLinClrLst/>
+    <dgm:txFillClrLst/>
+    <dgm:txEffectClrLst/>
+  </dgm:styleLbl>
+  <dgm:styleLbl name="parChTrans2D3">
+    <dgm:fillClrLst meth="repeat">
+      <a:schemeClr val="dk1"/>
+    </dgm:fillClrLst>
+    <dgm:linClrLst meth="repeat">
+      <a:schemeClr val="dk1"/>
+    </dgm:linClrLst>
+    <dgm:effectClrLst/>
+    <dgm:txLinClrLst/>
+    <dgm:txFillClrLst/>
+    <dgm:txEffectClrLst/>
+  </dgm:styleLbl>
+  <dgm:styleLbl name="parChTrans2D4">
+    <dgm:fillClrLst meth="repeat">
+      <a:schemeClr val="dk1"/>
+    </dgm:fillClrLst>
+    <dgm:linClrLst meth="repeat">
+      <a:schemeClr val="dk1"/>
+    </dgm:linClrLst>
+    <dgm:effectClrLst/>
+    <dgm:txLinClrLst/>
+    <dgm:txFillClrLst meth="repeat">
+      <a:schemeClr val="lt1"/>
+    </dgm:txFillClrLst>
+    <dgm:txEffectClrLst/>
+  </dgm:styleLbl>
+  <dgm:styleLbl name="parChTrans1D1">
+    <dgm:fillClrLst meth="repeat">
+      <a:schemeClr val="dk1"/>
+    </dgm:fillClrLst>
+    <dgm:linClrLst meth="repeat">
+      <a:schemeClr val="dk1">
+        <a:shade val="60000"/>
+      </a:schemeClr>
+    </dgm:linClrLst>
+    <dgm:effectClrLst/>
+    <dgm:txLinClrLst/>
+    <dgm:txFillClrLst meth="repeat">
+      <a:schemeClr val="tx1"/>
+    </dgm:txFillClrLst>
+    <dgm:txEffectClrLst/>
+  </dgm:styleLbl>
+  <dgm:styleLbl name="parChTrans1D2">
+    <dgm:fillClrLst meth="repeat">
+      <a:schemeClr val="dk1"/>
+    </dgm:fillClrLst>
+    <dgm:linClrLst meth="repeat">
+      <a:schemeClr val="dk1">
+        <a:shade val="60000"/>
+      </a:schemeClr>
+    </dgm:linClrLst>
+    <dgm:effectClrLst/>
+    <dgm:txLinClrLst/>
+    <dgm:txFillClrLst meth="repeat">
+      <a:schemeClr val="tx1"/>
+    </dgm:txFillClrLst>
+    <dgm:txEffectClrLst/>
+  </dgm:styleLbl>
+  <dgm:styleLbl name="parChTrans1D3">
+    <dgm:fillClrLst meth="repeat">
+      <a:schemeClr val="dk1"/>
+    </dgm:fillClrLst>
+    <dgm:linClrLst meth="repeat">
+      <a:schemeClr val="dk1">
+        <a:shade val="80000"/>
+      </a:schemeClr>
+    </dgm:linClrLst>
+    <dgm:effectClrLst/>
+    <dgm:txLinClrLst/>
+    <dgm:txFillClrLst meth="repeat">
+      <a:schemeClr val="tx1"/>
+    </dgm:txFillClrLst>
+    <dgm:txEffectClrLst/>
+  </dgm:styleLbl>
+  <dgm:styleLbl name="parChTrans1D4">
+    <dgm:fillClrLst meth="repeat">
+      <a:schemeClr val="dk1"/>
+    </dgm:fillClrLst>
+    <dgm:linClrLst meth="repeat">
+      <a:schemeClr val="dk1">
+        <a:shade val="80000"/>
+      </a:schemeClr>
+    </dgm:linClrLst>
+    <dgm:effectClrLst/>
+    <dgm:txLinClrLst/>
+    <dgm:txFillClrLst meth="repeat">
+      <a:schemeClr val="tx1"/>
+    </dgm:txFillClrLst>
+    <dgm:txEffectClrLst/>
+  </dgm:styleLbl>
+  <dgm:styleLbl name="fgAcc1">
+    <dgm:fillClrLst meth="repeat">
+      <a:schemeClr val="dk1">
+        <a:alpha val="90000"/>
+        <a:tint val="40000"/>
+      </a:schemeClr>
+    </dgm:fillClrLst>
+    <dgm:linClrLst meth="repeat">
+      <a:schemeClr val="dk1"/>
+    </dgm:linClrLst>
+    <dgm:effectClrLst/>
+    <dgm:txLinClrLst/>
+    <dgm:txFillClrLst meth="repeat">
+      <a:schemeClr val="dk1"/>
+    </dgm:txFillClrLst>
+    <dgm:txEffectClrLst/>
+  </dgm:styleLbl>
+  <dgm:styleLbl name="conFgAcc1">
+    <dgm:fillClrLst meth="repeat">
+      <a:schemeClr val="dk1">
+        <a:alpha val="90000"/>
+        <a:tint val="40000"/>
+      </a:schemeClr>
+    </dgm:fillClrLst>
+    <dgm:linClrLst meth="repeat">
+      <a:schemeClr val="dk1"/>
+    </dgm:linClrLst>
+    <dgm:effectClrLst/>
+    <dgm:txLinClrLst/>
+    <dgm:txFillClrLst meth="repeat">
+      <a:schemeClr val="dk1"/>
+    </dgm:txFillClrLst>
+    <dgm:txEffectClrLst/>
+  </dgm:styleLbl>
+  <dgm:styleLbl name="alignAcc1">
+    <dgm:fillClrLst meth="repeat">
+      <a:schemeClr val="dk1">
+        <a:alpha val="90000"/>
+        <a:tint val="40000"/>
+      </a:schemeClr>
+    </dgm:fillClrLst>
+    <dgm:linClrLst meth="repeat">
+      <a:schemeClr val="dk1"/>
+    </dgm:linClrLst>
+    <dgm:effectClrLst/>
+    <dgm:txLinClrLst/>
+    <dgm:txFillClrLst meth="repeat">
+      <a:schemeClr val="dk1"/>
+    </dgm:txFillClrLst>
+    <dgm:txEffectClrLst/>
+  </dgm:styleLbl>
+  <dgm:styleLbl name="trAlignAcc1">
+    <dgm:fillClrLst meth="repeat">
+      <a:schemeClr val="dk1">
+        <a:alpha val="40000"/>
+        <a:tint val="40000"/>
+      </a:schemeClr>
+    </dgm:fillClrLst>
+    <dgm:linClrLst meth="repeat">
+      <a:schemeClr val="dk1"/>
+    </dgm:linClrLst>
+    <dgm:effectClrLst/>
+    <dgm:txLinClrLst/>
+    <dgm:txFillClrLst meth="repeat">
+      <a:schemeClr val="dk1"/>
+    </dgm:txFillClrLst>
+    <dgm:txEffectClrLst/>
+  </dgm:styleLbl>
+  <dgm:styleLbl name="bgAcc1">
+    <dgm:fillClrLst meth="repeat">
+      <a:schemeClr val="dk1">
+        <a:alpha val="90000"/>
+        <a:tint val="40000"/>
+      </a:schemeClr>
+    </dgm:fillClrLst>
+    <dgm:linClrLst meth="repeat">
+      <a:schemeClr val="dk1"/>
+    </dgm:linClrLst>
+    <dgm:effectClrLst/>
+    <dgm:txLinClrLst/>
+    <dgm:txFillClrLst meth="repeat">
+      <a:schemeClr val="dk1"/>
+    </dgm:txFillClrLst>
+    <dgm:txEffectClrLst/>
+  </dgm:styleLbl>
+  <dgm:styleLbl name="solidFgAcc1">
+    <dgm:fillClrLst meth="repeat">
+      <a:schemeClr val="lt1"/>
+    </dgm:fillClrLst>
+    <dgm:linClrLst meth="repeat">
+      <a:schemeClr val="dk1"/>
+    </dgm:linClrLst>
+    <dgm:effectClrLst/>
+    <dgm:txLinClrLst/>
+    <dgm:txFillClrLst meth="repeat">
+      <a:schemeClr val="dk1"/>
+    </dgm:txFillClrLst>
+    <dgm:txEffectClrLst/>
+  </dgm:styleLbl>
+  <dgm:styleLbl name="solidAlignAcc1">
+    <dgm:fillClrLst meth="repeat">
+      <a:schemeClr val="lt1"/>
+    </dgm:fillClrLst>
+    <dgm:linClrLst meth="repeat">
+      <a:schemeClr val="dk1"/>
+    </dgm:linClrLst>
+    <dgm:effectClrLst/>
+    <dgm:txLinClrLst/>
+    <dgm:txFillClrLst meth="repeat">
+      <a:schemeClr val="dk1"/>
+    </dgm:txFillClrLst>
+    <dgm:txEffectClrLst/>
+  </dgm:styleLbl>
+  <dgm:styleLbl name="solidBgAcc1">
+    <dgm:fillClrLst meth="repeat">
+      <a:schemeClr val="lt1"/>
+    </dgm:fillClrLst>
+    <dgm:linClrLst meth="repeat">
+      <a:schemeClr val="dk1"/>
+    </dgm:linClrLst>
+    <dgm:effectClrLst/>
+    <dgm:txLinClrLst/>
+    <dgm:txFillClrLst meth="repeat">
+      <a:schemeClr val="dk1"/>
+    </dgm:txFillClrLst>
+    <dgm:txEffectClrLst/>
+  </dgm:styleLbl>
+  <dgm:styleLbl name="fgAccFollowNode1">
+    <dgm:fillClrLst meth="repeat">
+      <a:schemeClr val="lt1">
+        <a:alpha val="90000"/>
+        <a:tint val="40000"/>
+      </a:schemeClr>
+    </dgm:fillClrLst>
+    <dgm:linClrLst meth="repeat">
+      <a:schemeClr val="dk1">
+        <a:alpha val="90000"/>
+      </a:schemeClr>
+    </dgm:linClrLst>
+    <dgm:effectClrLst/>
+    <dgm:txLinClrLst/>
+    <dgm:txFillClrLst meth="repeat">
+      <a:schemeClr val="dk1"/>
+    </dgm:txFillClrLst>
+    <dgm:txEffectClrLst/>
+  </dgm:styleLbl>
+  <dgm:styleLbl name="alignAccFollowNode1">
+    <dgm:fillClrLst meth="repeat">
+      <a:schemeClr val="lt1">
+        <a:alpha val="90000"/>
+        <a:tint val="40000"/>
+      </a:schemeClr>
+    </dgm:fillClrLst>
+    <dgm:linClrLst meth="repeat">
+      <a:schemeClr val="dk1">
+        <a:alpha val="90000"/>
+      </a:schemeClr>
+    </dgm:linClrLst>
+    <dgm:effectClrLst/>
+    <dgm:txLinClrLst/>
+    <dgm:txFillClrLst meth="repeat">
+      <a:schemeClr val="dk1"/>
+    </dgm:txFillClrLst>
+    <dgm:txEffectClrLst/>
+  </dgm:styleLbl>
+  <dgm:styleLbl name="bgAccFollowNode1">
+    <dgm:fillClrLst meth="repeat">
+      <a:schemeClr val="lt1">
+        <a:alpha val="90000"/>
+        <a:tint val="40000"/>
+      </a:schemeClr>
+    </dgm:fillClrLst>
+    <dgm:linClrLst meth="repeat">
+      <a:schemeClr val="dk1">
+        <a:alpha val="90000"/>
+      </a:schemeClr>
+    </dgm:linClrLst>
+    <dgm:effectClrLst/>
+    <dgm:txLinClrLst/>
+    <dgm:txFillClrLst meth="repeat">
+      <a:schemeClr val="dk1"/>
+    </dgm:txFillClrLst>
+    <dgm:txEffectClrLst/>
+  </dgm:styleLbl>
+  <dgm:styleLbl name="fgAcc0">
+    <dgm:fillClrLst meth="repeat">
+      <a:schemeClr val="dk1">
+        <a:alpha val="90000"/>
+        <a:tint val="40000"/>
+      </a:schemeClr>
+    </dgm:fillClrLst>
+    <dgm:linClrLst meth="repeat">
+      <a:schemeClr val="dk1"/>
+    </dgm:linClrLst>
+    <dgm:effectClrLst/>
+    <dgm:txLinClrLst/>
+    <dgm:txFillClrLst meth="repeat">
+      <a:schemeClr val="dk1"/>
+    </dgm:txFillClrLst>
+    <dgm:txEffectClrLst/>
+  </dgm:styleLbl>
+  <dgm:styleLbl name="fgAcc2">
+    <dgm:fillClrLst meth="repeat">
+      <a:schemeClr val="dk1">
+        <a:alpha val="90000"/>
+        <a:tint val="40000"/>
+      </a:schemeClr>
+    </dgm:fillClrLst>
+    <dgm:linClrLst meth="repeat">
+      <a:schemeClr val="dk1"/>
+    </dgm:linClrLst>
+    <dgm:effectClrLst/>
+    <dgm:txLinClrLst/>
+    <dgm:txFillClrLst meth="repeat">
+      <a:schemeClr val="dk1"/>
+    </dgm:txFillClrLst>
+    <dgm:txEffectClrLst/>
+  </dgm:styleLbl>
+  <dgm:styleLbl name="fgAcc3">
+    <dgm:fillClrLst meth="repeat">
+      <a:schemeClr val="dk1">
+        <a:alpha val="90000"/>
+        <a:tint val="40000"/>
+      </a:schemeClr>
+    </dgm:fillClrLst>
+    <dgm:linClrLst meth="repeat">
+      <a:schemeClr val="dk1"/>
+    </dgm:linClrLst>
+    <dgm:effectClrLst/>
+    <dgm:txLinClrLst/>
+    <dgm:txFillClrLst meth="repeat">
+      <a:schemeClr val="dk1"/>
+    </dgm:txFillClrLst>
+    <dgm:txEffectClrLst/>
+  </dgm:styleLbl>
+  <dgm:styleLbl name="fgAcc4">
+    <dgm:fillClrLst meth="repeat">
+      <a:schemeClr val="dk1">
+        <a:alpha val="90000"/>
+        <a:tint val="40000"/>
+      </a:schemeClr>
+    </dgm:fillClrLst>
+    <dgm:linClrLst meth="repeat">
+      <a:schemeClr val="dk1"/>
+    </dgm:linClrLst>
+    <dgm:effectClrLst/>
+    <dgm:txLinClrLst/>
+    <dgm:txFillClrLst meth="repeat">
+      <a:schemeClr val="dk1"/>
+    </dgm:txFillClrLst>
+    <dgm:txEffectClrLst/>
+  </dgm:styleLbl>
+  <dgm:styleLbl name="bgShp">
+    <dgm:fillClrLst meth="repeat">
+      <a:schemeClr val="dk1">
+        <a:tint val="40000"/>
+      </a:schemeClr>
+    </dgm:fillClrLst>
+    <dgm:linClrLst meth="repeat">
+      <a:schemeClr val="dk1"/>
+    </dgm:linClrLst>
+    <dgm:effectClrLst/>
+    <dgm:txLinClrLst/>
+    <dgm:txFillClrLst meth="repeat">
+      <a:schemeClr val="dk1"/>
+    </dgm:txFillClrLst>
+    <dgm:txEffectClrLst/>
+  </dgm:styleLbl>
+  <dgm:styleLbl name="dkBgShp">
+    <dgm:fillClrLst meth="repeat">
+      <a:schemeClr val="dk1">
+        <a:shade val="80000"/>
+      </a:schemeClr>
+    </dgm:fillClrLst>
+    <dgm:linClrLst meth="repeat">
+      <a:schemeClr val="dk1"/>
+    </dgm:linClrLst>
+    <dgm:effectClrLst/>
+    <dgm:txLinClrLst/>
+    <dgm:txFillClrLst meth="repeat">
+      <a:schemeClr val="lt1"/>
+    </dgm:txFillClrLst>
+    <dgm:txEffectClrLst/>
+  </dgm:styleLbl>
+  <dgm:styleLbl name="trBgShp">
+    <dgm:fillClrLst meth="repeat">
+      <a:schemeClr val="dk1">
+        <a:tint val="50000"/>
+        <a:alpha val="40000"/>
+      </a:schemeClr>
+    </dgm:fillClrLst>
+    <dgm:linClrLst meth="repeat">
+      <a:schemeClr val="dk1"/>
+    </dgm:linClrLst>
+    <dgm:effectClrLst/>
+    <dgm:txLinClrLst/>
+    <dgm:txFillClrLst meth="repeat">
+      <a:schemeClr val="lt1"/>
+    </dgm:txFillClrLst>
+    <dgm:txEffectClrLst/>
+  </dgm:styleLbl>
+  <dgm:styleLbl name="fgShp">
+    <dgm:fillClrLst meth="repeat">
+      <a:schemeClr val="dk1">
+        <a:tint val="60000"/>
+      </a:schemeClr>
+    </dgm:fillClrLst>
+    <dgm:linClrLst meth="repeat">
+      <a:schemeClr val="lt1"/>
+    </dgm:linClrLst>
+    <dgm:effectClrLst/>
+    <dgm:txLinClrLst/>
+    <dgm:txFillClrLst meth="repeat">
+      <a:schemeClr val="dk1"/>
+    </dgm:txFillClrLst>
+    <dgm:txEffectClrLst/>
+  </dgm:styleLbl>
+  <dgm:styleLbl name="revTx">
+    <dgm:fillClrLst meth="repeat">
+      <a:schemeClr val="lt1">
+        <a:alpha val="0"/>
+      </a:schemeClr>
+    </dgm:fillClrLst>
+    <dgm:linClrLst meth="repeat">
+      <a:schemeClr val="dk1">
+        <a:alpha val="0"/>
+      </a:schemeClr>
+    </dgm:linClrLst>
+    <dgm:effectClrLst/>
+    <dgm:txLinClrLst/>
+    <dgm:txFillClrLst meth="repeat">
+      <a:schemeClr val="tx1"/>
+    </dgm:txFillClrLst>
+    <dgm:txEffectClrLst/>
+  </dgm:styleLbl>
+</dgm:colorsDef>
+</file>
+
+<file path=ppt/diagrams/data1.xml><?xml version="1.0" encoding="utf-8"?>
+<dgm:dataModel xmlns:dgm="http://schemas.openxmlformats.org/drawingml/2006/diagram" xmlns:a="http://schemas.openxmlformats.org/drawingml/2006/main">
+  <dgm:ptLst>
+    <dgm:pt modelId="{800D7FE9-749E-4CE9-9E1E-CCE17ACDBEAA}" type="doc">
+      <dgm:prSet loTypeId="urn:microsoft.com/office/officeart/2005/8/layout/vList2" loCatId="list" qsTypeId="urn:microsoft.com/office/officeart/2005/8/quickstyle/simple1" qsCatId="simple" csTypeId="urn:microsoft.com/office/officeart/2005/8/colors/accent0_1" csCatId="mainScheme"/>
+      <dgm:spPr/>
+      <dgm:t>
+        <a:bodyPr/>
+        <a:lstStyle/>
+        <a:p>
+          <a:endParaRPr lang="de-DE"/>
+        </a:p>
+      </dgm:t>
+    </dgm:pt>
+    <dgm:pt modelId="{C177AD5E-E41D-4A44-943B-A76BD06D1291}">
+      <dgm:prSet/>
+      <dgm:spPr/>
+      <dgm:t>
+        <a:bodyPr/>
+        <a:lstStyle/>
+        <a:p>
+          <a:r>
+            <a:rPr lang="de-DE"/>
+            <a:t>Algorithmus – Ortsabhängiger Ant-Cycle</a:t>
+          </a:r>
+        </a:p>
+      </dgm:t>
+    </dgm:pt>
+    <dgm:pt modelId="{07104AC0-58C4-4AA2-B9ED-96BE960EE46F}" type="parTrans" cxnId="{99B12494-2D4B-44D9-841C-3D6EEE063812}">
+      <dgm:prSet/>
+      <dgm:spPr/>
+      <dgm:t>
+        <a:bodyPr/>
+        <a:lstStyle/>
+        <a:p>
+          <a:endParaRPr lang="de-DE"/>
+        </a:p>
+      </dgm:t>
+    </dgm:pt>
+    <dgm:pt modelId="{9A317D91-DB11-46C4-8388-3BE7D09DE298}" type="sibTrans" cxnId="{99B12494-2D4B-44D9-841C-3D6EEE063812}">
+      <dgm:prSet/>
+      <dgm:spPr/>
+      <dgm:t>
+        <a:bodyPr/>
+        <a:lstStyle/>
+        <a:p>
+          <a:endParaRPr lang="de-DE"/>
+        </a:p>
+      </dgm:t>
+    </dgm:pt>
+    <dgm:pt modelId="{06FBB6E6-F11B-4CEF-95C0-99A9F7E1D2D6}">
+      <dgm:prSet/>
+      <dgm:spPr/>
+      <dgm:t>
+        <a:bodyPr/>
+        <a:lstStyle/>
+        <a:p>
+          <a:r>
+            <a:rPr lang="de-DE"/>
+            <a:t>Problem-Generator</a:t>
+          </a:r>
+        </a:p>
+      </dgm:t>
+    </dgm:pt>
+    <dgm:pt modelId="{D6A7CD9A-A633-42C6-AE88-D8A47027F310}" type="parTrans" cxnId="{314D8F89-ED42-4FE7-8553-8DA391165D49}">
+      <dgm:prSet/>
+      <dgm:spPr/>
+      <dgm:t>
+        <a:bodyPr/>
+        <a:lstStyle/>
+        <a:p>
+          <a:endParaRPr lang="de-DE"/>
+        </a:p>
+      </dgm:t>
+    </dgm:pt>
+    <dgm:pt modelId="{BB89DBC5-411B-432E-A9D5-22A5D39464F7}" type="sibTrans" cxnId="{314D8F89-ED42-4FE7-8553-8DA391165D49}">
+      <dgm:prSet/>
+      <dgm:spPr/>
+      <dgm:t>
+        <a:bodyPr/>
+        <a:lstStyle/>
+        <a:p>
+          <a:endParaRPr lang="de-DE"/>
+        </a:p>
+      </dgm:t>
+    </dgm:pt>
+    <dgm:pt modelId="{B3C0FB98-695A-41AC-AF52-4E78131402DB}">
+      <dgm:prSet/>
+      <dgm:spPr/>
+      <dgm:t>
+        <a:bodyPr/>
+        <a:lstStyle/>
+        <a:p>
+          <a:r>
+            <a:rPr lang="de-DE" dirty="0"/>
+            <a:t>Ergebnisse Hard-Problem</a:t>
+          </a:r>
+        </a:p>
+      </dgm:t>
+    </dgm:pt>
+    <dgm:pt modelId="{5671C7B4-E8BD-4271-B0FF-0C3E8CF85D22}" type="parTrans" cxnId="{5DCE69B2-CD0C-4D8F-AC9D-A9DEBB7D1536}">
+      <dgm:prSet/>
+      <dgm:spPr/>
+      <dgm:t>
+        <a:bodyPr/>
+        <a:lstStyle/>
+        <a:p>
+          <a:endParaRPr lang="de-DE"/>
+        </a:p>
+      </dgm:t>
+    </dgm:pt>
+    <dgm:pt modelId="{CE94133D-B04E-48C4-90AC-AD50549716CD}" type="sibTrans" cxnId="{5DCE69B2-CD0C-4D8F-AC9D-A9DEBB7D1536}">
+      <dgm:prSet/>
+      <dgm:spPr/>
+      <dgm:t>
+        <a:bodyPr/>
+        <a:lstStyle/>
+        <a:p>
+          <a:endParaRPr lang="de-DE"/>
+        </a:p>
+      </dgm:t>
+    </dgm:pt>
+    <dgm:pt modelId="{628ADD88-4952-453F-9C40-ED8C3B57AFF1}">
+      <dgm:prSet/>
+      <dgm:spPr/>
+      <dgm:t>
+        <a:bodyPr/>
+        <a:lstStyle/>
+        <a:p>
+          <a:r>
+            <a:rPr lang="de-DE"/>
+            <a:t>Nutzwertvergleich</a:t>
+          </a:r>
+        </a:p>
+      </dgm:t>
+    </dgm:pt>
+    <dgm:pt modelId="{C41054D1-C66B-4BCE-8D3F-3FB439A3537C}" type="parTrans" cxnId="{1E0F2841-A9B9-4F04-9625-7497B448843C}">
+      <dgm:prSet/>
+      <dgm:spPr/>
+      <dgm:t>
+        <a:bodyPr/>
+        <a:lstStyle/>
+        <a:p>
+          <a:endParaRPr lang="de-DE"/>
+        </a:p>
+      </dgm:t>
+    </dgm:pt>
+    <dgm:pt modelId="{1C4EA421-FA81-46D4-88DC-6595EEB3A5A5}" type="sibTrans" cxnId="{1E0F2841-A9B9-4F04-9625-7497B448843C}">
+      <dgm:prSet/>
+      <dgm:spPr/>
+      <dgm:t>
+        <a:bodyPr/>
+        <a:lstStyle/>
+        <a:p>
+          <a:endParaRPr lang="de-DE"/>
+        </a:p>
+      </dgm:t>
+    </dgm:pt>
+    <dgm:pt modelId="{B7E73165-A0C4-4995-95A2-28C6C9773B40}">
+      <dgm:prSet/>
+      <dgm:spPr/>
+      <dgm:t>
+        <a:bodyPr/>
+        <a:lstStyle/>
+        <a:p>
+          <a:r>
+            <a:rPr lang="de-DE"/>
+            <a:t>Pheromonspur</a:t>
+          </a:r>
+        </a:p>
+      </dgm:t>
+    </dgm:pt>
+    <dgm:pt modelId="{C833A712-8E8D-4E69-A682-13D0A27B8FA8}" type="parTrans" cxnId="{80FD4E7A-2D08-4571-BACB-6D4BFDB7E315}">
+      <dgm:prSet/>
+      <dgm:spPr/>
+      <dgm:t>
+        <a:bodyPr/>
+        <a:lstStyle/>
+        <a:p>
+          <a:endParaRPr lang="de-DE"/>
+        </a:p>
+      </dgm:t>
+    </dgm:pt>
+    <dgm:pt modelId="{54537D83-848E-4C43-99B6-028FC3208CBA}" type="sibTrans" cxnId="{80FD4E7A-2D08-4571-BACB-6D4BFDB7E315}">
+      <dgm:prSet/>
+      <dgm:spPr/>
+      <dgm:t>
+        <a:bodyPr/>
+        <a:lstStyle/>
+        <a:p>
+          <a:endParaRPr lang="de-DE"/>
+        </a:p>
+      </dgm:t>
+    </dgm:pt>
+    <dgm:pt modelId="{F1BEA7EC-9D65-4841-8E46-7495D023AFD9}">
+      <dgm:prSet/>
+      <dgm:spPr/>
+      <dgm:t>
+        <a:bodyPr/>
+        <a:lstStyle/>
+        <a:p>
+          <a:r>
+            <a:rPr lang="de-DE"/>
+            <a:t>Item-Auswahl</a:t>
+          </a:r>
+        </a:p>
+      </dgm:t>
+    </dgm:pt>
+    <dgm:pt modelId="{6CE5F09F-A3C3-45D8-A40B-3632B605F8AD}" type="parTrans" cxnId="{0ADCD191-4555-449D-9DF8-E7145E8017D1}">
+      <dgm:prSet/>
+      <dgm:spPr/>
+      <dgm:t>
+        <a:bodyPr/>
+        <a:lstStyle/>
+        <a:p>
+          <a:endParaRPr lang="de-DE"/>
+        </a:p>
+      </dgm:t>
+    </dgm:pt>
+    <dgm:pt modelId="{0DB4D756-BC58-4DA1-A58D-42308A10ACB7}" type="sibTrans" cxnId="{0ADCD191-4555-449D-9DF8-E7145E8017D1}">
+      <dgm:prSet/>
+      <dgm:spPr/>
+      <dgm:t>
+        <a:bodyPr/>
+        <a:lstStyle/>
+        <a:p>
+          <a:endParaRPr lang="de-DE"/>
+        </a:p>
+      </dgm:t>
+    </dgm:pt>
+    <dgm:pt modelId="{3DCA34E9-2ECD-4833-B3C5-BA4BB919FF8D}">
+      <dgm:prSet/>
+      <dgm:spPr/>
+      <dgm:t>
+        <a:bodyPr/>
+        <a:lstStyle/>
+        <a:p>
+          <a:r>
+            <a:rPr lang="de-DE"/>
+            <a:t>Haupteffekt und Wechselwirkung</a:t>
+          </a:r>
+        </a:p>
+      </dgm:t>
+    </dgm:pt>
+    <dgm:pt modelId="{1457DB93-3AE4-4D8C-86B9-790EECF98110}" type="parTrans" cxnId="{1BECFD17-BA24-4FA7-9FD3-95CC856F9436}">
+      <dgm:prSet/>
+      <dgm:spPr/>
+      <dgm:t>
+        <a:bodyPr/>
+        <a:lstStyle/>
+        <a:p>
+          <a:endParaRPr lang="de-DE"/>
+        </a:p>
+      </dgm:t>
+    </dgm:pt>
+    <dgm:pt modelId="{C89AAC7F-5BD6-4ED4-BE4F-D97750AEBF7F}" type="sibTrans" cxnId="{1BECFD17-BA24-4FA7-9FD3-95CC856F9436}">
+      <dgm:prSet/>
+      <dgm:spPr/>
+      <dgm:t>
+        <a:bodyPr/>
+        <a:lstStyle/>
+        <a:p>
+          <a:endParaRPr lang="de-DE"/>
+        </a:p>
+      </dgm:t>
+    </dgm:pt>
+    <dgm:pt modelId="{BFAE950B-CE96-4897-B5BF-0940F8354B91}">
+      <dgm:prSet/>
+      <dgm:spPr/>
+      <dgm:t>
+        <a:bodyPr/>
+        <a:lstStyle/>
+        <a:p>
+          <a:r>
+            <a:rPr lang="de-DE"/>
+            <a:t>Ergebnisse Easy-Problem</a:t>
+          </a:r>
+        </a:p>
+      </dgm:t>
+    </dgm:pt>
+    <dgm:pt modelId="{C3322F8A-DFF9-4EDC-B692-1DDC616F9E4A}" type="parTrans" cxnId="{D3C8FA06-CCE3-4028-B372-80CB74119AC8}">
+      <dgm:prSet/>
+      <dgm:spPr/>
+      <dgm:t>
+        <a:bodyPr/>
+        <a:lstStyle/>
+        <a:p>
+          <a:endParaRPr lang="de-DE"/>
+        </a:p>
+      </dgm:t>
+    </dgm:pt>
+    <dgm:pt modelId="{5CF997EF-8F77-4AA0-815E-BDF7487F87DC}" type="sibTrans" cxnId="{D3C8FA06-CCE3-4028-B372-80CB74119AC8}">
+      <dgm:prSet/>
+      <dgm:spPr/>
+      <dgm:t>
+        <a:bodyPr/>
+        <a:lstStyle/>
+        <a:p>
+          <a:endParaRPr lang="de-DE"/>
+        </a:p>
+      </dgm:t>
+    </dgm:pt>
+    <dgm:pt modelId="{8A5D18AB-C670-403D-A9A5-BFEDC3087AAF}">
+      <dgm:prSet/>
+      <dgm:spPr/>
+      <dgm:t>
+        <a:bodyPr/>
+        <a:lstStyle/>
+        <a:p>
+          <a:r>
+            <a:rPr lang="de-DE"/>
+            <a:t>Fazit</a:t>
+          </a:r>
+        </a:p>
+      </dgm:t>
+    </dgm:pt>
+    <dgm:pt modelId="{FD24B781-4914-4BEF-86A9-D57FFD633579}" type="parTrans" cxnId="{1E2F15B5-AC13-433D-AC9F-A84EEC80DD7C}">
+      <dgm:prSet/>
+      <dgm:spPr/>
+      <dgm:t>
+        <a:bodyPr/>
+        <a:lstStyle/>
+        <a:p>
+          <a:endParaRPr lang="de-DE"/>
+        </a:p>
+      </dgm:t>
+    </dgm:pt>
+    <dgm:pt modelId="{5EE6298A-2073-4607-A918-05C8A6F51ED1}" type="sibTrans" cxnId="{1E2F15B5-AC13-433D-AC9F-A84EEC80DD7C}">
+      <dgm:prSet/>
+      <dgm:spPr/>
+      <dgm:t>
+        <a:bodyPr/>
+        <a:lstStyle/>
+        <a:p>
+          <a:endParaRPr lang="de-DE"/>
+        </a:p>
+      </dgm:t>
+    </dgm:pt>
+    <dgm:pt modelId="{10481495-EEDA-4728-9FA2-EFA61D9B4177}">
+      <dgm:prSet/>
+      <dgm:spPr/>
+      <dgm:t>
+        <a:bodyPr/>
+        <a:lstStyle/>
+        <a:p>
+          <a:r>
+            <a:rPr lang="de-DE"/>
+            <a:t>Parameter-Leitfaden für die Praxis</a:t>
+          </a:r>
+        </a:p>
+      </dgm:t>
+    </dgm:pt>
+    <dgm:pt modelId="{B9C32016-CFDB-41BB-8E52-8D8060435AC2}" type="parTrans" cxnId="{A1C52442-4AD5-4B00-856B-2849D4B9FC3D}">
+      <dgm:prSet/>
+      <dgm:spPr/>
+      <dgm:t>
+        <a:bodyPr/>
+        <a:lstStyle/>
+        <a:p>
+          <a:endParaRPr lang="de-DE"/>
+        </a:p>
+      </dgm:t>
+    </dgm:pt>
+    <dgm:pt modelId="{165658A7-9CB6-458C-BDE2-8C7D74B43A16}" type="sibTrans" cxnId="{A1C52442-4AD5-4B00-856B-2849D4B9FC3D}">
+      <dgm:prSet/>
+      <dgm:spPr/>
+      <dgm:t>
+        <a:bodyPr/>
+        <a:lstStyle/>
+        <a:p>
+          <a:endParaRPr lang="de-DE"/>
+        </a:p>
+      </dgm:t>
+    </dgm:pt>
+    <dgm:pt modelId="{C2E8EF22-AEEC-4526-BDE3-785DCE2BD2D0}" type="pres">
+      <dgm:prSet presAssocID="{800D7FE9-749E-4CE9-9E1E-CCE17ACDBEAA}" presName="linear" presStyleCnt="0">
+        <dgm:presLayoutVars>
+          <dgm:animLvl val="lvl"/>
+          <dgm:resizeHandles val="exact"/>
+        </dgm:presLayoutVars>
+      </dgm:prSet>
+      <dgm:spPr/>
+    </dgm:pt>
+    <dgm:pt modelId="{B8E3E36B-686F-4004-970D-1838ED294B9B}" type="pres">
+      <dgm:prSet presAssocID="{C177AD5E-E41D-4A44-943B-A76BD06D1291}" presName="parentText" presStyleLbl="node1" presStyleIdx="0" presStyleCnt="7">
+        <dgm:presLayoutVars>
+          <dgm:chMax val="0"/>
+          <dgm:bulletEnabled val="1"/>
+        </dgm:presLayoutVars>
+      </dgm:prSet>
+      <dgm:spPr/>
+    </dgm:pt>
+    <dgm:pt modelId="{D5A7FD0E-C853-4CEB-A98A-95F8529FBDC1}" type="pres">
+      <dgm:prSet presAssocID="{9A317D91-DB11-46C4-8388-3BE7D09DE298}" presName="spacer" presStyleCnt="0"/>
+      <dgm:spPr/>
+    </dgm:pt>
+    <dgm:pt modelId="{60D7AACB-3C6C-42FC-99D8-833AE7133870}" type="pres">
+      <dgm:prSet presAssocID="{06FBB6E6-F11B-4CEF-95C0-99A9F7E1D2D6}" presName="parentText" presStyleLbl="node1" presStyleIdx="1" presStyleCnt="7">
+        <dgm:presLayoutVars>
+          <dgm:chMax val="0"/>
+          <dgm:bulletEnabled val="1"/>
+        </dgm:presLayoutVars>
+      </dgm:prSet>
+      <dgm:spPr/>
+    </dgm:pt>
+    <dgm:pt modelId="{F4EE3944-D952-4405-B1CB-75AA76047674}" type="pres">
+      <dgm:prSet presAssocID="{BB89DBC5-411B-432E-A9D5-22A5D39464F7}" presName="spacer" presStyleCnt="0"/>
+      <dgm:spPr/>
+    </dgm:pt>
+    <dgm:pt modelId="{B4277D94-35C1-42EE-BB47-AFF23113111D}" type="pres">
+      <dgm:prSet presAssocID="{B3C0FB98-695A-41AC-AF52-4E78131402DB}" presName="parentText" presStyleLbl="node1" presStyleIdx="2" presStyleCnt="7">
+        <dgm:presLayoutVars>
+          <dgm:chMax val="0"/>
+          <dgm:bulletEnabled val="1"/>
+        </dgm:presLayoutVars>
+      </dgm:prSet>
+      <dgm:spPr/>
+    </dgm:pt>
+    <dgm:pt modelId="{E5529E41-BF8E-4FA7-97FE-9D3C2DF4128D}" type="pres">
+      <dgm:prSet presAssocID="{B3C0FB98-695A-41AC-AF52-4E78131402DB}" presName="childText" presStyleLbl="revTx" presStyleIdx="0" presStyleCnt="1">
+        <dgm:presLayoutVars>
+          <dgm:bulletEnabled val="1"/>
+        </dgm:presLayoutVars>
+      </dgm:prSet>
+      <dgm:spPr/>
+    </dgm:pt>
+    <dgm:pt modelId="{02E0E075-2021-4810-BC67-3A0BD4F38111}" type="pres">
+      <dgm:prSet presAssocID="{3DCA34E9-2ECD-4833-B3C5-BA4BB919FF8D}" presName="parentText" presStyleLbl="node1" presStyleIdx="3" presStyleCnt="7">
+        <dgm:presLayoutVars>
+          <dgm:chMax val="0"/>
+          <dgm:bulletEnabled val="1"/>
+        </dgm:presLayoutVars>
+      </dgm:prSet>
+      <dgm:spPr/>
+    </dgm:pt>
+    <dgm:pt modelId="{CC97D651-A6A3-4BDC-B8F1-2474F1D86598}" type="pres">
+      <dgm:prSet presAssocID="{C89AAC7F-5BD6-4ED4-BE4F-D97750AEBF7F}" presName="spacer" presStyleCnt="0"/>
+      <dgm:spPr/>
+    </dgm:pt>
+    <dgm:pt modelId="{11A28637-5368-4FF1-B2F8-C7F8B33535A5}" type="pres">
+      <dgm:prSet presAssocID="{BFAE950B-CE96-4897-B5BF-0940F8354B91}" presName="parentText" presStyleLbl="node1" presStyleIdx="4" presStyleCnt="7">
+        <dgm:presLayoutVars>
+          <dgm:chMax val="0"/>
+          <dgm:bulletEnabled val="1"/>
+        </dgm:presLayoutVars>
+      </dgm:prSet>
+      <dgm:spPr/>
+    </dgm:pt>
+    <dgm:pt modelId="{B2132FAF-8A02-4463-9928-767BE2134E6B}" type="pres">
+      <dgm:prSet presAssocID="{5CF997EF-8F77-4AA0-815E-BDF7487F87DC}" presName="spacer" presStyleCnt="0"/>
+      <dgm:spPr/>
+    </dgm:pt>
+    <dgm:pt modelId="{EED52188-F2CD-4EAF-91D9-870FF5114D47}" type="pres">
+      <dgm:prSet presAssocID="{8A5D18AB-C670-403D-A9A5-BFEDC3087AAF}" presName="parentText" presStyleLbl="node1" presStyleIdx="5" presStyleCnt="7">
+        <dgm:presLayoutVars>
+          <dgm:chMax val="0"/>
+          <dgm:bulletEnabled val="1"/>
+        </dgm:presLayoutVars>
+      </dgm:prSet>
+      <dgm:spPr/>
+    </dgm:pt>
+    <dgm:pt modelId="{4595EEED-664F-4AE1-917B-35AE3BB6F0DD}" type="pres">
+      <dgm:prSet presAssocID="{5EE6298A-2073-4607-A918-05C8A6F51ED1}" presName="spacer" presStyleCnt="0"/>
+      <dgm:spPr/>
+    </dgm:pt>
+    <dgm:pt modelId="{C53F4E56-5E90-49C3-91EE-246C4C1D3286}" type="pres">
+      <dgm:prSet presAssocID="{10481495-EEDA-4728-9FA2-EFA61D9B4177}" presName="parentText" presStyleLbl="node1" presStyleIdx="6" presStyleCnt="7">
+        <dgm:presLayoutVars>
+          <dgm:chMax val="0"/>
+          <dgm:bulletEnabled val="1"/>
+        </dgm:presLayoutVars>
+      </dgm:prSet>
+      <dgm:spPr/>
+    </dgm:pt>
+  </dgm:ptLst>
+  <dgm:cxnLst>
+    <dgm:cxn modelId="{D3C8FA06-CCE3-4028-B372-80CB74119AC8}" srcId="{800D7FE9-749E-4CE9-9E1E-CCE17ACDBEAA}" destId="{BFAE950B-CE96-4897-B5BF-0940F8354B91}" srcOrd="4" destOrd="0" parTransId="{C3322F8A-DFF9-4EDC-B692-1DDC616F9E4A}" sibTransId="{5CF997EF-8F77-4AA0-815E-BDF7487F87DC}"/>
+    <dgm:cxn modelId="{7E1D6407-487C-4D9F-8F5D-DD0EF9C44372}" type="presOf" srcId="{3DCA34E9-2ECD-4833-B3C5-BA4BB919FF8D}" destId="{02E0E075-2021-4810-BC67-3A0BD4F38111}" srcOrd="0" destOrd="0" presId="urn:microsoft.com/office/officeart/2005/8/layout/vList2"/>
+    <dgm:cxn modelId="{1BECFD17-BA24-4FA7-9FD3-95CC856F9436}" srcId="{800D7FE9-749E-4CE9-9E1E-CCE17ACDBEAA}" destId="{3DCA34E9-2ECD-4833-B3C5-BA4BB919FF8D}" srcOrd="3" destOrd="0" parTransId="{1457DB93-3AE4-4D8C-86B9-790EECF98110}" sibTransId="{C89AAC7F-5BD6-4ED4-BE4F-D97750AEBF7F}"/>
+    <dgm:cxn modelId="{9884235D-1372-45DE-BDE1-AB4AE39513A8}" type="presOf" srcId="{800D7FE9-749E-4CE9-9E1E-CCE17ACDBEAA}" destId="{C2E8EF22-AEEC-4526-BDE3-785DCE2BD2D0}" srcOrd="0" destOrd="0" presId="urn:microsoft.com/office/officeart/2005/8/layout/vList2"/>
+    <dgm:cxn modelId="{BD218260-2BE6-4AC5-8CEB-730233B7EBEA}" type="presOf" srcId="{06FBB6E6-F11B-4CEF-95C0-99A9F7E1D2D6}" destId="{60D7AACB-3C6C-42FC-99D8-833AE7133870}" srcOrd="0" destOrd="0" presId="urn:microsoft.com/office/officeart/2005/8/layout/vList2"/>
+    <dgm:cxn modelId="{1E0F2841-A9B9-4F04-9625-7497B448843C}" srcId="{B3C0FB98-695A-41AC-AF52-4E78131402DB}" destId="{628ADD88-4952-453F-9C40-ED8C3B57AFF1}" srcOrd="0" destOrd="0" parTransId="{C41054D1-C66B-4BCE-8D3F-3FB439A3537C}" sibTransId="{1C4EA421-FA81-46D4-88DC-6595EEB3A5A5}"/>
+    <dgm:cxn modelId="{A1C52442-4AD5-4B00-856B-2849D4B9FC3D}" srcId="{800D7FE9-749E-4CE9-9E1E-CCE17ACDBEAA}" destId="{10481495-EEDA-4728-9FA2-EFA61D9B4177}" srcOrd="6" destOrd="0" parTransId="{B9C32016-CFDB-41BB-8E52-8D8060435AC2}" sibTransId="{165658A7-9CB6-458C-BDE2-8C7D74B43A16}"/>
+    <dgm:cxn modelId="{80FD4E7A-2D08-4571-BACB-6D4BFDB7E315}" srcId="{B3C0FB98-695A-41AC-AF52-4E78131402DB}" destId="{B7E73165-A0C4-4995-95A2-28C6C9773B40}" srcOrd="1" destOrd="0" parTransId="{C833A712-8E8D-4E69-A682-13D0A27B8FA8}" sibTransId="{54537D83-848E-4C43-99B6-028FC3208CBA}"/>
+    <dgm:cxn modelId="{314D8F89-ED42-4FE7-8553-8DA391165D49}" srcId="{800D7FE9-749E-4CE9-9E1E-CCE17ACDBEAA}" destId="{06FBB6E6-F11B-4CEF-95C0-99A9F7E1D2D6}" srcOrd="1" destOrd="0" parTransId="{D6A7CD9A-A633-42C6-AE88-D8A47027F310}" sibTransId="{BB89DBC5-411B-432E-A9D5-22A5D39464F7}"/>
+    <dgm:cxn modelId="{0ADCD191-4555-449D-9DF8-E7145E8017D1}" srcId="{B3C0FB98-695A-41AC-AF52-4E78131402DB}" destId="{F1BEA7EC-9D65-4841-8E46-7495D023AFD9}" srcOrd="2" destOrd="0" parTransId="{6CE5F09F-A3C3-45D8-A40B-3632B605F8AD}" sibTransId="{0DB4D756-BC58-4DA1-A58D-42308A10ACB7}"/>
+    <dgm:cxn modelId="{99B12494-2D4B-44D9-841C-3D6EEE063812}" srcId="{800D7FE9-749E-4CE9-9E1E-CCE17ACDBEAA}" destId="{C177AD5E-E41D-4A44-943B-A76BD06D1291}" srcOrd="0" destOrd="0" parTransId="{07104AC0-58C4-4AA2-B9ED-96BE960EE46F}" sibTransId="{9A317D91-DB11-46C4-8388-3BE7D09DE298}"/>
+    <dgm:cxn modelId="{31B31398-178B-48FC-9825-8A3770FB6C42}" type="presOf" srcId="{628ADD88-4952-453F-9C40-ED8C3B57AFF1}" destId="{E5529E41-BF8E-4FA7-97FE-9D3C2DF4128D}" srcOrd="0" destOrd="0" presId="urn:microsoft.com/office/officeart/2005/8/layout/vList2"/>
+    <dgm:cxn modelId="{88928C99-CE14-4A70-A211-8BB7B20ED3BD}" type="presOf" srcId="{BFAE950B-CE96-4897-B5BF-0940F8354B91}" destId="{11A28637-5368-4FF1-B2F8-C7F8B33535A5}" srcOrd="0" destOrd="0" presId="urn:microsoft.com/office/officeart/2005/8/layout/vList2"/>
+    <dgm:cxn modelId="{78D763A1-2331-49B6-B08C-B55BA9B5308C}" type="presOf" srcId="{C177AD5E-E41D-4A44-943B-A76BD06D1291}" destId="{B8E3E36B-686F-4004-970D-1838ED294B9B}" srcOrd="0" destOrd="0" presId="urn:microsoft.com/office/officeart/2005/8/layout/vList2"/>
+    <dgm:cxn modelId="{A835F2AB-2B43-4E2D-BB49-940BDA587550}" type="presOf" srcId="{B3C0FB98-695A-41AC-AF52-4E78131402DB}" destId="{B4277D94-35C1-42EE-BB47-AFF23113111D}" srcOrd="0" destOrd="0" presId="urn:microsoft.com/office/officeart/2005/8/layout/vList2"/>
+    <dgm:cxn modelId="{58AE6FAD-894C-43DF-A4DA-C562DFB7786A}" type="presOf" srcId="{F1BEA7EC-9D65-4841-8E46-7495D023AFD9}" destId="{E5529E41-BF8E-4FA7-97FE-9D3C2DF4128D}" srcOrd="0" destOrd="2" presId="urn:microsoft.com/office/officeart/2005/8/layout/vList2"/>
+    <dgm:cxn modelId="{5DCE69B2-CD0C-4D8F-AC9D-A9DEBB7D1536}" srcId="{800D7FE9-749E-4CE9-9E1E-CCE17ACDBEAA}" destId="{B3C0FB98-695A-41AC-AF52-4E78131402DB}" srcOrd="2" destOrd="0" parTransId="{5671C7B4-E8BD-4271-B0FF-0C3E8CF85D22}" sibTransId="{CE94133D-B04E-48C4-90AC-AD50549716CD}"/>
+    <dgm:cxn modelId="{1E2F15B5-AC13-433D-AC9F-A84EEC80DD7C}" srcId="{800D7FE9-749E-4CE9-9E1E-CCE17ACDBEAA}" destId="{8A5D18AB-C670-403D-A9A5-BFEDC3087AAF}" srcOrd="5" destOrd="0" parTransId="{FD24B781-4914-4BEF-86A9-D57FFD633579}" sibTransId="{5EE6298A-2073-4607-A918-05C8A6F51ED1}"/>
+    <dgm:cxn modelId="{C98635CE-5866-4A16-ACA1-1C4E82452EA1}" type="presOf" srcId="{8A5D18AB-C670-403D-A9A5-BFEDC3087AAF}" destId="{EED52188-F2CD-4EAF-91D9-870FF5114D47}" srcOrd="0" destOrd="0" presId="urn:microsoft.com/office/officeart/2005/8/layout/vList2"/>
+    <dgm:cxn modelId="{AC4F60EA-171A-4558-9095-FD343F9C983B}" type="presOf" srcId="{10481495-EEDA-4728-9FA2-EFA61D9B4177}" destId="{C53F4E56-5E90-49C3-91EE-246C4C1D3286}" srcOrd="0" destOrd="0" presId="urn:microsoft.com/office/officeart/2005/8/layout/vList2"/>
+    <dgm:cxn modelId="{E8E959EA-F1E9-4280-BC65-2A1789DA9B10}" type="presOf" srcId="{B7E73165-A0C4-4995-95A2-28C6C9773B40}" destId="{E5529E41-BF8E-4FA7-97FE-9D3C2DF4128D}" srcOrd="0" destOrd="1" presId="urn:microsoft.com/office/officeart/2005/8/layout/vList2"/>
+    <dgm:cxn modelId="{C702654E-FD0F-4F39-8A6D-B053AAA61C74}" type="presParOf" srcId="{C2E8EF22-AEEC-4526-BDE3-785DCE2BD2D0}" destId="{B8E3E36B-686F-4004-970D-1838ED294B9B}" srcOrd="0" destOrd="0" presId="urn:microsoft.com/office/officeart/2005/8/layout/vList2"/>
+    <dgm:cxn modelId="{D3A7BAE0-0E17-437E-A61C-40CB5317D30B}" type="presParOf" srcId="{C2E8EF22-AEEC-4526-BDE3-785DCE2BD2D0}" destId="{D5A7FD0E-C853-4CEB-A98A-95F8529FBDC1}" srcOrd="1" destOrd="0" presId="urn:microsoft.com/office/officeart/2005/8/layout/vList2"/>
+    <dgm:cxn modelId="{184721E9-385F-4B47-B617-715BE03CF283}" type="presParOf" srcId="{C2E8EF22-AEEC-4526-BDE3-785DCE2BD2D0}" destId="{60D7AACB-3C6C-42FC-99D8-833AE7133870}" srcOrd="2" destOrd="0" presId="urn:microsoft.com/office/officeart/2005/8/layout/vList2"/>
+    <dgm:cxn modelId="{394F05DB-AAB0-4EC4-878D-96A4D0B50CEA}" type="presParOf" srcId="{C2E8EF22-AEEC-4526-BDE3-785DCE2BD2D0}" destId="{F4EE3944-D952-4405-B1CB-75AA76047674}" srcOrd="3" destOrd="0" presId="urn:microsoft.com/office/officeart/2005/8/layout/vList2"/>
+    <dgm:cxn modelId="{B8D1202F-C319-4397-8B99-4E893C742A54}" type="presParOf" srcId="{C2E8EF22-AEEC-4526-BDE3-785DCE2BD2D0}" destId="{B4277D94-35C1-42EE-BB47-AFF23113111D}" srcOrd="4" destOrd="0" presId="urn:microsoft.com/office/officeart/2005/8/layout/vList2"/>
+    <dgm:cxn modelId="{08F749DE-45DC-4719-A153-3229F8AEABF8}" type="presParOf" srcId="{C2E8EF22-AEEC-4526-BDE3-785DCE2BD2D0}" destId="{E5529E41-BF8E-4FA7-97FE-9D3C2DF4128D}" srcOrd="5" destOrd="0" presId="urn:microsoft.com/office/officeart/2005/8/layout/vList2"/>
+    <dgm:cxn modelId="{5C29529F-C8B7-4892-8ABB-B8AEAF975CCF}" type="presParOf" srcId="{C2E8EF22-AEEC-4526-BDE3-785DCE2BD2D0}" destId="{02E0E075-2021-4810-BC67-3A0BD4F38111}" srcOrd="6" destOrd="0" presId="urn:microsoft.com/office/officeart/2005/8/layout/vList2"/>
+    <dgm:cxn modelId="{321AD73B-2599-4559-A2D8-9F99EA352775}" type="presParOf" srcId="{C2E8EF22-AEEC-4526-BDE3-785DCE2BD2D0}" destId="{CC97D651-A6A3-4BDC-B8F1-2474F1D86598}" srcOrd="7" destOrd="0" presId="urn:microsoft.com/office/officeart/2005/8/layout/vList2"/>
+    <dgm:cxn modelId="{C6966881-3224-4714-B5BF-6C97C83F9229}" type="presParOf" srcId="{C2E8EF22-AEEC-4526-BDE3-785DCE2BD2D0}" destId="{11A28637-5368-4FF1-B2F8-C7F8B33535A5}" srcOrd="8" destOrd="0" presId="urn:microsoft.com/office/officeart/2005/8/layout/vList2"/>
+    <dgm:cxn modelId="{63668235-C0BC-46C7-9869-8CB116AE3602}" type="presParOf" srcId="{C2E8EF22-AEEC-4526-BDE3-785DCE2BD2D0}" destId="{B2132FAF-8A02-4463-9928-767BE2134E6B}" srcOrd="9" destOrd="0" presId="urn:microsoft.com/office/officeart/2005/8/layout/vList2"/>
+    <dgm:cxn modelId="{FEABCB4D-3021-48FD-8F3E-D36A45ED27F4}" type="presParOf" srcId="{C2E8EF22-AEEC-4526-BDE3-785DCE2BD2D0}" destId="{EED52188-F2CD-4EAF-91D9-870FF5114D47}" srcOrd="10" destOrd="0" presId="urn:microsoft.com/office/officeart/2005/8/layout/vList2"/>
+    <dgm:cxn modelId="{F926FC23-7AF8-4138-9ADE-3B56F3DB6C0F}" type="presParOf" srcId="{C2E8EF22-AEEC-4526-BDE3-785DCE2BD2D0}" destId="{4595EEED-664F-4AE1-917B-35AE3BB6F0DD}" srcOrd="11" destOrd="0" presId="urn:microsoft.com/office/officeart/2005/8/layout/vList2"/>
+    <dgm:cxn modelId="{B2D9A837-33E9-4D85-9945-BC7D888AE360}" type="presParOf" srcId="{C2E8EF22-AEEC-4526-BDE3-785DCE2BD2D0}" destId="{C53F4E56-5E90-49C3-91EE-246C4C1D3286}" srcOrd="12" destOrd="0" presId="urn:microsoft.com/office/officeart/2005/8/layout/vList2"/>
+  </dgm:cxnLst>
+  <dgm:bg/>
+  <dgm:whole/>
+  <dgm:extLst>
+    <a:ext uri="http://schemas.microsoft.com/office/drawing/2008/diagram">
+      <dsp:dataModelExt xmlns:dsp="http://schemas.microsoft.com/office/drawing/2008/diagram" relId="rId6" minVer="http://schemas.openxmlformats.org/drawingml/2006/diagram"/>
+    </a:ext>
+  </dgm:extLst>
+</dgm:dataModel>
+</file>
+
+<file path=ppt/diagrams/drawing1.xml><?xml version="1.0" encoding="utf-8"?>
+<dsp:drawing xmlns:dgm="http://schemas.openxmlformats.org/drawingml/2006/diagram" xmlns:dsp="http://schemas.microsoft.com/office/drawing/2008/diagram" xmlns:a="http://schemas.openxmlformats.org/drawingml/2006/main">
+  <dsp:spTree>
+    <dsp:nvGrpSpPr>
+      <dsp:cNvPr id="0" name=""/>
+      <dsp:cNvGrpSpPr/>
+    </dsp:nvGrpSpPr>
+    <dsp:grpSpPr/>
+    <dsp:sp modelId="{B8E3E36B-686F-4004-970D-1838ED294B9B}">
+      <dsp:nvSpPr>
+        <dsp:cNvPr id="0" name=""/>
+        <dsp:cNvSpPr/>
+      </dsp:nvSpPr>
+      <dsp:spPr>
+        <a:xfrm>
+          <a:off x="0" y="83467"/>
+          <a:ext cx="10515600" cy="491400"/>
+        </a:xfrm>
+        <a:prstGeom prst="roundRect">
+          <a:avLst/>
+        </a:prstGeom>
+        <a:solidFill>
+          <a:schemeClr val="lt1">
+            <a:hueOff val="0"/>
+            <a:satOff val="0"/>
+            <a:lumOff val="0"/>
+            <a:alphaOff val="0"/>
+          </a:schemeClr>
+        </a:solidFill>
+        <a:ln w="19050" cap="flat" cmpd="sng" algn="ctr">
+          <a:solidFill>
+            <a:schemeClr val="dk1">
+              <a:shade val="80000"/>
+              <a:hueOff val="0"/>
+              <a:satOff val="0"/>
+              <a:lumOff val="0"/>
+              <a:alphaOff val="0"/>
+            </a:schemeClr>
+          </a:solidFill>
+          <a:prstDash val="solid"/>
+          <a:miter lim="800000"/>
+        </a:ln>
+        <a:effectLst/>
+      </dsp:spPr>
+      <dsp:style>
+        <a:lnRef idx="2">
+          <a:scrgbClr r="0" g="0" b="0"/>
+        </a:lnRef>
+        <a:fillRef idx="1">
+          <a:scrgbClr r="0" g="0" b="0"/>
+        </a:fillRef>
+        <a:effectRef idx="0">
+          <a:scrgbClr r="0" g="0" b="0"/>
+        </a:effectRef>
+        <a:fontRef idx="minor">
+          <a:schemeClr val="lt1"/>
+        </a:fontRef>
+      </dsp:style>
+      <dsp:txBody>
+        <a:bodyPr spcFirstLastPara="0" vert="horz" wrap="square" lIns="76200" tIns="76200" rIns="76200" bIns="76200" numCol="1" spcCol="1270" anchor="ctr" anchorCtr="0">
+          <a:noAutofit/>
+        </a:bodyPr>
+        <a:lstStyle/>
+        <a:p>
+          <a:pPr marL="0" lvl="0" indent="0" algn="l" defTabSz="889000">
+            <a:lnSpc>
+              <a:spcPct val="90000"/>
+            </a:lnSpc>
+            <a:spcBef>
+              <a:spcPct val="0"/>
+            </a:spcBef>
+            <a:spcAft>
+              <a:spcPct val="35000"/>
+            </a:spcAft>
+            <a:buNone/>
+          </a:pPr>
+          <a:r>
+            <a:rPr lang="de-DE" sz="2000" kern="1200"/>
+            <a:t>Algorithmus – Ortsabhängiger Ant-Cycle</a:t>
+          </a:r>
+        </a:p>
+      </dsp:txBody>
+      <dsp:txXfrm>
+        <a:off x="23988" y="107455"/>
+        <a:ext cx="10467624" cy="443424"/>
+      </dsp:txXfrm>
+    </dsp:sp>
+    <dsp:sp modelId="{60D7AACB-3C6C-42FC-99D8-833AE7133870}">
+      <dsp:nvSpPr>
+        <dsp:cNvPr id="0" name=""/>
+        <dsp:cNvSpPr/>
+      </dsp:nvSpPr>
+      <dsp:spPr>
+        <a:xfrm>
+          <a:off x="0" y="632467"/>
+          <a:ext cx="10515600" cy="491400"/>
+        </a:xfrm>
+        <a:prstGeom prst="roundRect">
+          <a:avLst/>
+        </a:prstGeom>
+        <a:solidFill>
+          <a:schemeClr val="lt1">
+            <a:hueOff val="0"/>
+            <a:satOff val="0"/>
+            <a:lumOff val="0"/>
+            <a:alphaOff val="0"/>
+          </a:schemeClr>
+        </a:solidFill>
+        <a:ln w="19050" cap="flat" cmpd="sng" algn="ctr">
+          <a:solidFill>
+            <a:schemeClr val="dk1">
+              <a:shade val="80000"/>
+              <a:hueOff val="0"/>
+              <a:satOff val="0"/>
+              <a:lumOff val="0"/>
+              <a:alphaOff val="0"/>
+            </a:schemeClr>
+          </a:solidFill>
+          <a:prstDash val="solid"/>
+          <a:miter lim="800000"/>
+        </a:ln>
+        <a:effectLst/>
+      </dsp:spPr>
+      <dsp:style>
+        <a:lnRef idx="2">
+          <a:scrgbClr r="0" g="0" b="0"/>
+        </a:lnRef>
+        <a:fillRef idx="1">
+          <a:scrgbClr r="0" g="0" b="0"/>
+        </a:fillRef>
+        <a:effectRef idx="0">
+          <a:scrgbClr r="0" g="0" b="0"/>
+        </a:effectRef>
+        <a:fontRef idx="minor">
+          <a:schemeClr val="lt1"/>
+        </a:fontRef>
+      </dsp:style>
+      <dsp:txBody>
+        <a:bodyPr spcFirstLastPara="0" vert="horz" wrap="square" lIns="76200" tIns="76200" rIns="76200" bIns="76200" numCol="1" spcCol="1270" anchor="ctr" anchorCtr="0">
+          <a:noAutofit/>
+        </a:bodyPr>
+        <a:lstStyle/>
+        <a:p>
+          <a:pPr marL="0" lvl="0" indent="0" algn="l" defTabSz="889000">
+            <a:lnSpc>
+              <a:spcPct val="90000"/>
+            </a:lnSpc>
+            <a:spcBef>
+              <a:spcPct val="0"/>
+            </a:spcBef>
+            <a:spcAft>
+              <a:spcPct val="35000"/>
+            </a:spcAft>
+            <a:buNone/>
+          </a:pPr>
+          <a:r>
+            <a:rPr lang="de-DE" sz="2000" kern="1200"/>
+            <a:t>Problem-Generator</a:t>
+          </a:r>
+        </a:p>
+      </dsp:txBody>
+      <dsp:txXfrm>
+        <a:off x="23988" y="656455"/>
+        <a:ext cx="10467624" cy="443424"/>
+      </dsp:txXfrm>
+    </dsp:sp>
+    <dsp:sp modelId="{B4277D94-35C1-42EE-BB47-AFF23113111D}">
+      <dsp:nvSpPr>
+        <dsp:cNvPr id="0" name=""/>
+        <dsp:cNvSpPr/>
+      </dsp:nvSpPr>
+      <dsp:spPr>
+        <a:xfrm>
+          <a:off x="0" y="1181468"/>
+          <a:ext cx="10515600" cy="491400"/>
+        </a:xfrm>
+        <a:prstGeom prst="roundRect">
+          <a:avLst/>
+        </a:prstGeom>
+        <a:solidFill>
+          <a:schemeClr val="lt1">
+            <a:hueOff val="0"/>
+            <a:satOff val="0"/>
+            <a:lumOff val="0"/>
+            <a:alphaOff val="0"/>
+          </a:schemeClr>
+        </a:solidFill>
+        <a:ln w="19050" cap="flat" cmpd="sng" algn="ctr">
+          <a:solidFill>
+            <a:schemeClr val="dk1">
+              <a:shade val="80000"/>
+              <a:hueOff val="0"/>
+              <a:satOff val="0"/>
+              <a:lumOff val="0"/>
+              <a:alphaOff val="0"/>
+            </a:schemeClr>
+          </a:solidFill>
+          <a:prstDash val="solid"/>
+          <a:miter lim="800000"/>
+        </a:ln>
+        <a:effectLst/>
+      </dsp:spPr>
+      <dsp:style>
+        <a:lnRef idx="2">
+          <a:scrgbClr r="0" g="0" b="0"/>
+        </a:lnRef>
+        <a:fillRef idx="1">
+          <a:scrgbClr r="0" g="0" b="0"/>
+        </a:fillRef>
+        <a:effectRef idx="0">
+          <a:scrgbClr r="0" g="0" b="0"/>
+        </a:effectRef>
+        <a:fontRef idx="minor">
+          <a:schemeClr val="lt1"/>
+        </a:fontRef>
+      </dsp:style>
+      <dsp:txBody>
+        <a:bodyPr spcFirstLastPara="0" vert="horz" wrap="square" lIns="76200" tIns="76200" rIns="76200" bIns="76200" numCol="1" spcCol="1270" anchor="ctr" anchorCtr="0">
+          <a:noAutofit/>
+        </a:bodyPr>
+        <a:lstStyle/>
+        <a:p>
+          <a:pPr marL="0" lvl="0" indent="0" algn="l" defTabSz="889000">
+            <a:lnSpc>
+              <a:spcPct val="90000"/>
+            </a:lnSpc>
+            <a:spcBef>
+              <a:spcPct val="0"/>
+            </a:spcBef>
+            <a:spcAft>
+              <a:spcPct val="35000"/>
+            </a:spcAft>
+            <a:buNone/>
+          </a:pPr>
+          <a:r>
+            <a:rPr lang="de-DE" sz="2000" kern="1200" dirty="0"/>
+            <a:t>Ergebnisse Hard-Problem</a:t>
+          </a:r>
+        </a:p>
+      </dsp:txBody>
+      <dsp:txXfrm>
+        <a:off x="23988" y="1205456"/>
+        <a:ext cx="10467624" cy="443424"/>
+      </dsp:txXfrm>
+    </dsp:sp>
+    <dsp:sp modelId="{E5529E41-BF8E-4FA7-97FE-9D3C2DF4128D}">
+      <dsp:nvSpPr>
+        <dsp:cNvPr id="0" name=""/>
+        <dsp:cNvSpPr/>
+      </dsp:nvSpPr>
+      <dsp:spPr>
+        <a:xfrm>
+          <a:off x="0" y="1672868"/>
+          <a:ext cx="10515600" cy="828000"/>
+        </a:xfrm>
+        <a:prstGeom prst="rect">
+          <a:avLst/>
+        </a:prstGeom>
+        <a:noFill/>
+        <a:ln>
+          <a:noFill/>
+        </a:ln>
+        <a:effectLst/>
+      </dsp:spPr>
+      <dsp:style>
+        <a:lnRef idx="0">
+          <a:scrgbClr r="0" g="0" b="0"/>
+        </a:lnRef>
+        <a:fillRef idx="0">
+          <a:scrgbClr r="0" g="0" b="0"/>
+        </a:fillRef>
+        <a:effectRef idx="0">
+          <a:scrgbClr r="0" g="0" b="0"/>
+        </a:effectRef>
+        <a:fontRef idx="minor"/>
+      </dsp:style>
+      <dsp:txBody>
+        <a:bodyPr spcFirstLastPara="0" vert="horz" wrap="square" lIns="333870" tIns="25400" rIns="142240" bIns="25400" numCol="1" spcCol="1270" anchor="t" anchorCtr="0">
+          <a:noAutofit/>
+        </a:bodyPr>
+        <a:lstStyle/>
+        <a:p>
+          <a:pPr marL="171450" lvl="1" indent="-171450" algn="l" defTabSz="711200">
+            <a:lnSpc>
+              <a:spcPct val="90000"/>
+            </a:lnSpc>
+            <a:spcBef>
+              <a:spcPct val="0"/>
+            </a:spcBef>
+            <a:spcAft>
+              <a:spcPct val="20000"/>
+            </a:spcAft>
+            <a:buChar char="•"/>
+          </a:pPr>
+          <a:r>
+            <a:rPr lang="de-DE" sz="1600" kern="1200"/>
+            <a:t>Nutzwertvergleich</a:t>
+          </a:r>
+        </a:p>
+        <a:p>
+          <a:pPr marL="171450" lvl="1" indent="-171450" algn="l" defTabSz="711200">
+            <a:lnSpc>
+              <a:spcPct val="90000"/>
+            </a:lnSpc>
+            <a:spcBef>
+              <a:spcPct val="0"/>
+            </a:spcBef>
+            <a:spcAft>
+              <a:spcPct val="20000"/>
+            </a:spcAft>
+            <a:buChar char="•"/>
+          </a:pPr>
+          <a:r>
+            <a:rPr lang="de-DE" sz="1600" kern="1200"/>
+            <a:t>Pheromonspur</a:t>
+          </a:r>
+        </a:p>
+        <a:p>
+          <a:pPr marL="171450" lvl="1" indent="-171450" algn="l" defTabSz="711200">
+            <a:lnSpc>
+              <a:spcPct val="90000"/>
+            </a:lnSpc>
+            <a:spcBef>
+              <a:spcPct val="0"/>
+            </a:spcBef>
+            <a:spcAft>
+              <a:spcPct val="20000"/>
+            </a:spcAft>
+            <a:buChar char="•"/>
+          </a:pPr>
+          <a:r>
+            <a:rPr lang="de-DE" sz="1600" kern="1200"/>
+            <a:t>Item-Auswahl</a:t>
+          </a:r>
+        </a:p>
+      </dsp:txBody>
+      <dsp:txXfrm>
+        <a:off x="0" y="1672868"/>
+        <a:ext cx="10515600" cy="828000"/>
+      </dsp:txXfrm>
+    </dsp:sp>
+    <dsp:sp modelId="{02E0E075-2021-4810-BC67-3A0BD4F38111}">
+      <dsp:nvSpPr>
+        <dsp:cNvPr id="0" name=""/>
+        <dsp:cNvSpPr/>
+      </dsp:nvSpPr>
+      <dsp:spPr>
+        <a:xfrm>
+          <a:off x="0" y="2500868"/>
+          <a:ext cx="10515600" cy="491400"/>
+        </a:xfrm>
+        <a:prstGeom prst="roundRect">
+          <a:avLst/>
+        </a:prstGeom>
+        <a:solidFill>
+          <a:schemeClr val="lt1">
+            <a:hueOff val="0"/>
+            <a:satOff val="0"/>
+            <a:lumOff val="0"/>
+            <a:alphaOff val="0"/>
+          </a:schemeClr>
+        </a:solidFill>
+        <a:ln w="19050" cap="flat" cmpd="sng" algn="ctr">
+          <a:solidFill>
+            <a:schemeClr val="dk1">
+              <a:shade val="80000"/>
+              <a:hueOff val="0"/>
+              <a:satOff val="0"/>
+              <a:lumOff val="0"/>
+              <a:alphaOff val="0"/>
+            </a:schemeClr>
+          </a:solidFill>
+          <a:prstDash val="solid"/>
+          <a:miter lim="800000"/>
+        </a:ln>
+        <a:effectLst/>
+      </dsp:spPr>
+      <dsp:style>
+        <a:lnRef idx="2">
+          <a:scrgbClr r="0" g="0" b="0"/>
+        </a:lnRef>
+        <a:fillRef idx="1">
+          <a:scrgbClr r="0" g="0" b="0"/>
+        </a:fillRef>
+        <a:effectRef idx="0">
+          <a:scrgbClr r="0" g="0" b="0"/>
+        </a:effectRef>
+        <a:fontRef idx="minor">
+          <a:schemeClr val="lt1"/>
+        </a:fontRef>
+      </dsp:style>
+      <dsp:txBody>
+        <a:bodyPr spcFirstLastPara="0" vert="horz" wrap="square" lIns="76200" tIns="76200" rIns="76200" bIns="76200" numCol="1" spcCol="1270" anchor="ctr" anchorCtr="0">
+          <a:noAutofit/>
+        </a:bodyPr>
+        <a:lstStyle/>
+        <a:p>
+          <a:pPr marL="0" lvl="0" indent="0" algn="l" defTabSz="889000">
+            <a:lnSpc>
+              <a:spcPct val="90000"/>
+            </a:lnSpc>
+            <a:spcBef>
+              <a:spcPct val="0"/>
+            </a:spcBef>
+            <a:spcAft>
+              <a:spcPct val="35000"/>
+            </a:spcAft>
+            <a:buNone/>
+          </a:pPr>
+          <a:r>
+            <a:rPr lang="de-DE" sz="2000" kern="1200"/>
+            <a:t>Haupteffekt und Wechselwirkung</a:t>
+          </a:r>
+        </a:p>
+      </dsp:txBody>
+      <dsp:txXfrm>
+        <a:off x="23988" y="2524856"/>
+        <a:ext cx="10467624" cy="443424"/>
+      </dsp:txXfrm>
+    </dsp:sp>
+    <dsp:sp modelId="{11A28637-5368-4FF1-B2F8-C7F8B33535A5}">
+      <dsp:nvSpPr>
+        <dsp:cNvPr id="0" name=""/>
+        <dsp:cNvSpPr/>
+      </dsp:nvSpPr>
+      <dsp:spPr>
+        <a:xfrm>
+          <a:off x="0" y="3049868"/>
+          <a:ext cx="10515600" cy="491400"/>
+        </a:xfrm>
+        <a:prstGeom prst="roundRect">
+          <a:avLst/>
+        </a:prstGeom>
+        <a:solidFill>
+          <a:schemeClr val="lt1">
+            <a:hueOff val="0"/>
+            <a:satOff val="0"/>
+            <a:lumOff val="0"/>
+            <a:alphaOff val="0"/>
+          </a:schemeClr>
+        </a:solidFill>
+        <a:ln w="19050" cap="flat" cmpd="sng" algn="ctr">
+          <a:solidFill>
+            <a:schemeClr val="dk1">
+              <a:shade val="80000"/>
+              <a:hueOff val="0"/>
+              <a:satOff val="0"/>
+              <a:lumOff val="0"/>
+              <a:alphaOff val="0"/>
+            </a:schemeClr>
+          </a:solidFill>
+          <a:prstDash val="solid"/>
+          <a:miter lim="800000"/>
+        </a:ln>
+        <a:effectLst/>
+      </dsp:spPr>
+      <dsp:style>
+        <a:lnRef idx="2">
+          <a:scrgbClr r="0" g="0" b="0"/>
+        </a:lnRef>
+        <a:fillRef idx="1">
+          <a:scrgbClr r="0" g="0" b="0"/>
+        </a:fillRef>
+        <a:effectRef idx="0">
+          <a:scrgbClr r="0" g="0" b="0"/>
+        </a:effectRef>
+        <a:fontRef idx="minor">
+          <a:schemeClr val="lt1"/>
+        </a:fontRef>
+      </dsp:style>
+      <dsp:txBody>
+        <a:bodyPr spcFirstLastPara="0" vert="horz" wrap="square" lIns="76200" tIns="76200" rIns="76200" bIns="76200" numCol="1" spcCol="1270" anchor="ctr" anchorCtr="0">
+          <a:noAutofit/>
+        </a:bodyPr>
+        <a:lstStyle/>
+        <a:p>
+          <a:pPr marL="0" lvl="0" indent="0" algn="l" defTabSz="889000">
+            <a:lnSpc>
+              <a:spcPct val="90000"/>
+            </a:lnSpc>
+            <a:spcBef>
+              <a:spcPct val="0"/>
+            </a:spcBef>
+            <a:spcAft>
+              <a:spcPct val="35000"/>
+            </a:spcAft>
+            <a:buNone/>
+          </a:pPr>
+          <a:r>
+            <a:rPr lang="de-DE" sz="2000" kern="1200"/>
+            <a:t>Ergebnisse Easy-Problem</a:t>
+          </a:r>
+        </a:p>
+      </dsp:txBody>
+      <dsp:txXfrm>
+        <a:off x="23988" y="3073856"/>
+        <a:ext cx="10467624" cy="443424"/>
+      </dsp:txXfrm>
+    </dsp:sp>
+    <dsp:sp modelId="{EED52188-F2CD-4EAF-91D9-870FF5114D47}">
+      <dsp:nvSpPr>
+        <dsp:cNvPr id="0" name=""/>
+        <dsp:cNvSpPr/>
+      </dsp:nvSpPr>
+      <dsp:spPr>
+        <a:xfrm>
+          <a:off x="0" y="3598868"/>
+          <a:ext cx="10515600" cy="491400"/>
+        </a:xfrm>
+        <a:prstGeom prst="roundRect">
+          <a:avLst/>
+        </a:prstGeom>
+        <a:solidFill>
+          <a:schemeClr val="lt1">
+            <a:hueOff val="0"/>
+            <a:satOff val="0"/>
+            <a:lumOff val="0"/>
+            <a:alphaOff val="0"/>
+          </a:schemeClr>
+        </a:solidFill>
+        <a:ln w="19050" cap="flat" cmpd="sng" algn="ctr">
+          <a:solidFill>
+            <a:schemeClr val="dk1">
+              <a:shade val="80000"/>
+              <a:hueOff val="0"/>
+              <a:satOff val="0"/>
+              <a:lumOff val="0"/>
+              <a:alphaOff val="0"/>
+            </a:schemeClr>
+          </a:solidFill>
+          <a:prstDash val="solid"/>
+          <a:miter lim="800000"/>
+        </a:ln>
+        <a:effectLst/>
+      </dsp:spPr>
+      <dsp:style>
+        <a:lnRef idx="2">
+          <a:scrgbClr r="0" g="0" b="0"/>
+        </a:lnRef>
+        <a:fillRef idx="1">
+          <a:scrgbClr r="0" g="0" b="0"/>
+        </a:fillRef>
+        <a:effectRef idx="0">
+          <a:scrgbClr r="0" g="0" b="0"/>
+        </a:effectRef>
+        <a:fontRef idx="minor">
+          <a:schemeClr val="lt1"/>
+        </a:fontRef>
+      </dsp:style>
+      <dsp:txBody>
+        <a:bodyPr spcFirstLastPara="0" vert="horz" wrap="square" lIns="76200" tIns="76200" rIns="76200" bIns="76200" numCol="1" spcCol="1270" anchor="ctr" anchorCtr="0">
+          <a:noAutofit/>
+        </a:bodyPr>
+        <a:lstStyle/>
+        <a:p>
+          <a:pPr marL="0" lvl="0" indent="0" algn="l" defTabSz="889000">
+            <a:lnSpc>
+              <a:spcPct val="90000"/>
+            </a:lnSpc>
+            <a:spcBef>
+              <a:spcPct val="0"/>
+            </a:spcBef>
+            <a:spcAft>
+              <a:spcPct val="35000"/>
+            </a:spcAft>
+            <a:buNone/>
+          </a:pPr>
+          <a:r>
+            <a:rPr lang="de-DE" sz="2000" kern="1200"/>
+            <a:t>Fazit</a:t>
+          </a:r>
+        </a:p>
+      </dsp:txBody>
+      <dsp:txXfrm>
+        <a:off x="23988" y="3622856"/>
+        <a:ext cx="10467624" cy="443424"/>
+      </dsp:txXfrm>
+    </dsp:sp>
+    <dsp:sp modelId="{C53F4E56-5E90-49C3-91EE-246C4C1D3286}">
+      <dsp:nvSpPr>
+        <dsp:cNvPr id="0" name=""/>
+        <dsp:cNvSpPr/>
+      </dsp:nvSpPr>
+      <dsp:spPr>
+        <a:xfrm>
+          <a:off x="0" y="4147868"/>
+          <a:ext cx="10515600" cy="491400"/>
+        </a:xfrm>
+        <a:prstGeom prst="roundRect">
+          <a:avLst/>
+        </a:prstGeom>
+        <a:solidFill>
+          <a:schemeClr val="lt1">
+            <a:hueOff val="0"/>
+            <a:satOff val="0"/>
+            <a:lumOff val="0"/>
+            <a:alphaOff val="0"/>
+          </a:schemeClr>
+        </a:solidFill>
+        <a:ln w="19050" cap="flat" cmpd="sng" algn="ctr">
+          <a:solidFill>
+            <a:schemeClr val="dk1">
+              <a:shade val="80000"/>
+              <a:hueOff val="0"/>
+              <a:satOff val="0"/>
+              <a:lumOff val="0"/>
+              <a:alphaOff val="0"/>
+            </a:schemeClr>
+          </a:solidFill>
+          <a:prstDash val="solid"/>
+          <a:miter lim="800000"/>
+        </a:ln>
+        <a:effectLst/>
+      </dsp:spPr>
+      <dsp:style>
+        <a:lnRef idx="2">
+          <a:scrgbClr r="0" g="0" b="0"/>
+        </a:lnRef>
+        <a:fillRef idx="1">
+          <a:scrgbClr r="0" g="0" b="0"/>
+        </a:fillRef>
+        <a:effectRef idx="0">
+          <a:scrgbClr r="0" g="0" b="0"/>
+        </a:effectRef>
+        <a:fontRef idx="minor">
+          <a:schemeClr val="lt1"/>
+        </a:fontRef>
+      </dsp:style>
+      <dsp:txBody>
+        <a:bodyPr spcFirstLastPara="0" vert="horz" wrap="square" lIns="76200" tIns="76200" rIns="76200" bIns="76200" numCol="1" spcCol="1270" anchor="ctr" anchorCtr="0">
+          <a:noAutofit/>
+        </a:bodyPr>
+        <a:lstStyle/>
+        <a:p>
+          <a:pPr marL="0" lvl="0" indent="0" algn="l" defTabSz="889000">
+            <a:lnSpc>
+              <a:spcPct val="90000"/>
+            </a:lnSpc>
+            <a:spcBef>
+              <a:spcPct val="0"/>
+            </a:spcBef>
+            <a:spcAft>
+              <a:spcPct val="35000"/>
+            </a:spcAft>
+            <a:buNone/>
+          </a:pPr>
+          <a:r>
+            <a:rPr lang="de-DE" sz="2000" kern="1200"/>
+            <a:t>Parameter-Leitfaden für die Praxis</a:t>
+          </a:r>
+        </a:p>
+      </dsp:txBody>
+      <dsp:txXfrm>
+        <a:off x="23988" y="4171856"/>
+        <a:ext cx="10467624" cy="443424"/>
+      </dsp:txXfrm>
+    </dsp:sp>
+  </dsp:spTree>
+</dsp:drawing>
+</file>
+
+<file path=ppt/diagrams/layout1.xml><?xml version="1.0" encoding="utf-8"?>
+<dgm:layoutDef xmlns:dgm="http://schemas.openxmlformats.org/drawingml/2006/diagram" xmlns:a="http://schemas.openxmlformats.org/drawingml/2006/main" uniqueId="urn:microsoft.com/office/officeart/2005/8/layout/vList2">
+  <dgm:title val=""/>
+  <dgm:desc val=""/>
+  <dgm:catLst>
+    <dgm:cat type="list" pri="3000"/>
+    <dgm:cat type="convert" pri="1000"/>
+  </dgm:catLst>
+  <dgm:sampData>
+    <dgm:dataModel>
+      <dgm:ptLst>
+        <dgm:pt modelId="0" type="doc"/>
+        <dgm:pt modelId="1">
+          <dgm:prSet phldr="1"/>
+        </dgm:pt>
+        <dgm:pt modelId="11">
+          <dgm:prSet phldr="1"/>
+        </dgm:pt>
+        <dgm:pt modelId="2">
+          <dgm:prSet phldr="1"/>
+        </dgm:pt>
+        <dgm:pt modelId="21">
+          <dgm:prSet phldr="1"/>
+        </dgm:pt>
+      </dgm:ptLst>
+      <dgm:cxnLst>
+        <dgm:cxn modelId="4" srcId="0" destId="1" srcOrd="0" destOrd="0"/>
+        <dgm:cxn modelId="5" srcId="0" destId="2" srcOrd="1" destOrd="0"/>
+        <dgm:cxn modelId="12" srcId="1" destId="11" srcOrd="0" destOrd="0"/>
+        <dgm:cxn modelId="23" srcId="2" destId="21" srcOrd="0" destOrd="0"/>
+      </dgm:cxnLst>
+      <dgm:bg/>
+      <dgm:whole/>
+    </dgm:dataModel>
+  </dgm:sampData>
+  <dgm:styleData>
+    <dgm:dataModel>
+      <dgm:ptLst>
+        <dgm:pt modelId="0" type="doc"/>
+        <dgm:pt modelId="1"/>
+        <dgm:pt modelId="2"/>
+      </dgm:ptLst>
+      <dgm:cxnLst>
+        <dgm:cxn modelId="3" srcId="0" destId="1" srcOrd="0" destOrd="0"/>
+        <dgm:cxn modelId="4" srcId="0" destId="2" srcOrd="1" destOrd="0"/>
+      </dgm:cxnLst>
+      <dgm:bg/>
+      <dgm:whole/>
+    </dgm:dataModel>
+  </dgm:styleData>
+  <dgm:clrData>
+    <dgm:dataModel>
+      <dgm:ptLst>
+        <dgm:pt modelId="0" type="doc"/>
+        <dgm:pt modelId="1"/>
+        <dgm:pt modelId="2"/>
+        <dgm:pt modelId="3"/>
+        <dgm:pt modelId="4"/>
+      </dgm:ptLst>
+      <dgm:cxnLst>
+        <dgm:cxn modelId="5" srcId="0" destId="1" srcOrd="0" destOrd="0"/>
+        <dgm:cxn modelId="6" srcId="0" destId="2" srcOrd="1" destOrd="0"/>
+        <dgm:cxn modelId="7" srcId="0" destId="3" srcOrd="2" destOrd="0"/>
+        <dgm:cxn modelId="8" srcId="0" destId="4" srcOrd="3" destOrd="0"/>
+      </dgm:cxnLst>
+      <dgm:bg/>
+      <dgm:whole/>
+    </dgm:dataModel>
+  </dgm:clrData>
+  <dgm:layoutNode name="linear">
+    <dgm:varLst>
+      <dgm:animLvl val="lvl"/>
+      <dgm:resizeHandles val="exact"/>
+    </dgm:varLst>
+    <dgm:alg type="lin">
+      <dgm:param type="linDir" val="fromT"/>
+      <dgm:param type="vertAlign" val="mid"/>
+    </dgm:alg>
+    <dgm:shape xmlns:r="http://schemas.openxmlformats.org/officeDocument/2006/relationships" r:blip="">
+      <dgm:adjLst/>
+    </dgm:shape>
+    <dgm:presOf/>
+    <dgm:constrLst>
+      <dgm:constr type="w" for="ch" forName="parentText" refType="w"/>
+      <dgm:constr type="h" for="ch" forName="parentText" refType="primFontSz" refFor="ch" refForName="parentText" fact="0.52"/>
+      <dgm:constr type="w" for="ch" forName="childText" refType="w"/>
+      <dgm:constr type="h" for="ch" forName="childText" refType="primFontSz" refFor="ch" refForName="parentText" fact="0.46"/>
+      <dgm:constr type="h" for="ch" forName="parentText" op="equ"/>
+      <dgm:constr type="primFontSz" for="ch" forName="parentText" op="equ" val="65"/>
+      <dgm:constr type="primFontSz" for="ch" forName="childText" refType="primFontSz" refFor="ch" refForName="parentText" op="equ"/>
+      <dgm:constr type="h" for="ch" forName="spacer" refType="primFontSz" refFor="ch" refForName="parentText" fact="0.08"/>
+    </dgm:constrLst>
+    <dgm:ruleLst>
+      <dgm:rule type="primFontSz" for="ch" forName="parentText" val="5" fact="NaN" max="NaN"/>
+    </dgm:ruleLst>
+    <dgm:forEach name="Name0" axis="ch" ptType="node">
+      <dgm:layoutNode name="parentText" styleLbl="node1">
+        <dgm:varLst>
+          <dgm:chMax val="0"/>
+          <dgm:bulletEnabled val="1"/>
+        </dgm:varLst>
+        <dgm:alg type="tx">
+          <dgm:param type="parTxLTRAlign" val="l"/>
+          <dgm:param type="parTxRTLAlign" val="r"/>
+        </dgm:alg>
+        <dgm:shape xmlns:r="http://schemas.openxmlformats.org/officeDocument/2006/relationships" type="roundRect" r:blip="">
+          <dgm:adjLst/>
+        </dgm:shape>
+        <dgm:presOf axis="self"/>
+        <dgm:constrLst>
+          <dgm:constr type="tMarg" refType="primFontSz" fact="0.3"/>
+          <dgm:constr type="bMarg" refType="primFontSz" fact="0.3"/>
+          <dgm:constr type="lMarg" refType="primFontSz" fact="0.3"/>
+          <dgm:constr type="rMarg" refType="primFontSz" fact="0.3"/>
+        </dgm:constrLst>
+        <dgm:ruleLst>
+          <dgm:rule type="h" val="INF" fact="NaN" max="NaN"/>
+        </dgm:ruleLst>
+      </dgm:layoutNode>
+      <dgm:choose name="Name1">
+        <dgm:if name="Name2" axis="ch" ptType="node" func="cnt" op="gte" val="1">
+          <dgm:layoutNode name="childText" styleLbl="revTx">
+            <dgm:varLst>
+              <dgm:bulletEnabled val="1"/>
+            </dgm:varLst>
+            <dgm:alg type="tx">
+              <dgm:param type="stBulletLvl" val="1"/>
+              <dgm:param type="lnSpAfChP" val="20"/>
+            </dgm:alg>
+            <dgm:shape xmlns:r="http://schemas.openxmlformats.org/officeDocument/2006/relationships" type="rect" r:blip="">
+              <dgm:adjLst/>
+            </dgm:shape>
+            <dgm:presOf axis="des" ptType="node"/>
+            <dgm:constrLst>
+              <dgm:constr type="tMarg" refType="primFontSz" fact="0.1"/>
+              <dgm:constr type="bMarg" refType="primFontSz" fact="0.1"/>
+              <dgm:constr type="lMarg" refType="w" fact="0.09"/>
+            </dgm:constrLst>
+            <dgm:ruleLst>
+              <dgm:rule type="h" val="INF" fact="NaN" max="NaN"/>
+            </dgm:ruleLst>
+          </dgm:layoutNode>
+        </dgm:if>
+        <dgm:else name="Name3">
+          <dgm:choose name="Name4">
+            <dgm:if name="Name5" axis="par ch" ptType="doc node" func="cnt" op="gte" val="2">
+              <dgm:forEach name="Name6" axis="followSib" ptType="sibTrans" cnt="1">
+                <dgm:layoutNode name="spacer">
+                  <dgm:alg type="sp"/>
+                  <dgm:shape xmlns:r="http://schemas.openxmlformats.org/officeDocument/2006/relationships" r:blip="">
+                    <dgm:adjLst/>
+                  </dgm:shape>
+                  <dgm:presOf/>
+                  <dgm:constrLst/>
+                  <dgm:ruleLst/>
+                </dgm:layoutNode>
+              </dgm:forEach>
+            </dgm:if>
+            <dgm:else name="Name7"/>
+          </dgm:choose>
+        </dgm:else>
+      </dgm:choose>
+    </dgm:forEach>
+  </dgm:layoutNode>
+</dgm:layoutDef>
+</file>
+
+<file path=ppt/diagrams/quickStyle1.xml><?xml version="1.0" encoding="utf-8"?>
+<dgm:styleDef xmlns:dgm="http://schemas.openxmlformats.org/drawingml/2006/diagram" xmlns:a="http://schemas.openxmlformats.org/drawingml/2006/main" uniqueId="urn:microsoft.com/office/officeart/2005/8/quickstyle/simple1">
+  <dgm:title val=""/>
+  <dgm:desc val=""/>
+  <dgm:catLst>
+    <dgm:cat type="simple" pri="10100"/>
+  </dgm:catLst>
+  <dgm:scene3d>
+    <a:camera prst="orthographicFront"/>
+    <a:lightRig rig="threePt" dir="t"/>
+  </dgm:scene3d>
+  <dgm:styleLbl name="node0">
+    <dgm:scene3d>
+      <a:camera prst="orthographicFront"/>
+      <a:lightRig rig="threePt" dir="t"/>
+    </dgm:scene3d>
+    <dgm:sp3d/>
+    <dgm:txPr/>
+    <dgm:style>
+      <a:lnRef idx="2">
+        <a:scrgbClr r="0" g="0" b="0"/>
+      </a:lnRef>
+      <a:fillRef idx="1">
+        <a:scrgbClr r="0" g="0" b="0"/>
+      </a:fillRef>
+      <a:effectRef idx="0">
+        <a:scrgbClr r="0" g="0" b="0"/>
+      </a:effectRef>
+      <a:fontRef idx="minor">
+        <a:schemeClr val="lt1"/>
+      </a:fontRef>
+    </dgm:style>
+  </dgm:styleLbl>
+  <dgm:styleLbl name="lnNode1">
+    <dgm:scene3d>
+      <a:camera prst="orthographicFront"/>
+      <a:lightRig rig="threePt" dir="t"/>
+    </dgm:scene3d>
+    <dgm:sp3d/>
+    <dgm:txPr/>
+    <dgm:style>
+      <a:lnRef idx="2">
+        <a:scrgbClr r="0" g="0" b="0"/>
+      </a:lnRef>
+      <a:fillRef idx="1">
+        <a:scrgbClr r="0" g="0" b="0"/>
+      </a:fillRef>
+      <a:effectRef idx="0">
+        <a:scrgbClr r="0" g="0" b="0"/>
+      </a:effectRef>
+      <a:fontRef idx="minor">
+        <a:schemeClr val="lt1"/>
+      </a:fontRef>
+    </dgm:style>
+  </dgm:styleLbl>
+  <dgm:styleLbl name="vennNode1">
+    <dgm:scene3d>
+      <a:camera prst="orthographicFront"/>
+      <a:lightRig rig="threePt" dir="t"/>
+    </dgm:scene3d>
+    <dgm:sp3d/>
+    <dgm:txPr/>
+    <dgm:style>
+      <a:lnRef idx="2">
+        <a:scrgbClr r="0" g="0" b="0"/>
+      </a:lnRef>
+      <a:fillRef idx="1">
+        <a:scrgbClr r="0" g="0" b="0"/>
+      </a:fillRef>
+      <a:effectRef idx="0">
+        <a:scrgbClr r="0" g="0" b="0"/>
+      </a:effectRef>
+      <a:fontRef idx="minor">
+        <a:schemeClr val="tx1"/>
+      </a:fontRef>
+    </dgm:style>
+  </dgm:styleLbl>
+  <dgm:styleLbl name="alignNode1">
+    <dgm:scene3d>
+      <a:camera prst="orthographicFront"/>
+      <a:lightRig rig="threePt" dir="t"/>
+    </dgm:scene3d>
+    <dgm:sp3d/>
+    <dgm:txPr/>
+    <dgm:style>
+      <a:lnRef idx="2">
+        <a:scrgbClr r="0" g="0" b="0"/>
+      </a:lnRef>
+      <a:fillRef idx="1">
+        <a:scrgbClr r="0" g="0" b="0"/>
+      </a:fillRef>
+      <a:effectRef idx="0">
+        <a:scrgbClr r="0" g="0" b="0"/>
+      </a:effectRef>
+      <a:fontRef idx="minor">
+        <a:schemeClr val="lt1"/>
+      </a:fontRef>
+    </dgm:style>
+  </dgm:styleLbl>
+  <dgm:styleLbl name="node1">
+    <dgm:scene3d>
+      <a:camera prst="orthographicFront"/>
+      <a:lightRig rig="threePt" dir="t"/>
+    </dgm:scene3d>
+    <dgm:sp3d/>
+    <dgm:txPr/>
+    <dgm:style>
+      <a:lnRef idx="2">
+        <a:scrgbClr r="0" g="0" b="0"/>
+      </a:lnRef>
+      <a:fillRef idx="1">
+        <a:scrgbClr r="0" g="0" b="0"/>
+      </a:fillRef>
+      <a:effectRef idx="0">
+        <a:scrgbClr r="0" g="0" b="0"/>
+      </a:effectRef>
+      <a:fontRef idx="minor">
+        <a:schemeClr val="lt1"/>
+      </a:fontRef>
+    </dgm:style>
+  </dgm:styleLbl>
+  <dgm:styleLbl name="node2">
+    <dgm:scene3d>
+      <a:camera prst="orthographicFront"/>
+      <a:lightRig rig="threePt" dir="t"/>
+    </dgm:scene3d>
+    <dgm:sp3d/>
+    <dgm:txPr/>
+    <dgm:style>
+      <a:lnRef idx="2">
+        <a:scrgbClr r="0" g="0" b="0"/>
+      </a:lnRef>
+      <a:fillRef idx="1">
+        <a:scrgbClr r="0" g="0" b="0"/>
+      </a:fillRef>
+      <a:effectRef idx="0">
+        <a:scrgbClr r="0" g="0" b="0"/>
+      </a:effectRef>
+      <a:fontRef idx="minor">
+        <a:schemeClr val="lt1"/>
+      </a:fontRef>
+    </dgm:style>
+  </dgm:styleLbl>
+  <dgm:styleLbl name="node3">
+    <dgm:scene3d>
+      <a:camera prst="orthographicFront"/>
+      <a:lightRig rig="threePt" dir="t"/>
+    </dgm:scene3d>
+    <dgm:sp3d/>
+    <dgm:txPr/>
+    <dgm:style>
+      <a:lnRef idx="2">
+        <a:scrgbClr r="0" g="0" b="0"/>
+      </a:lnRef>
+      <a:fillRef idx="1">
+        <a:scrgbClr r="0" g="0" b="0"/>
+      </a:fillRef>
+      <a:effectRef idx="0">
+        <a:scrgbClr r="0" g="0" b="0"/>
+      </a:effectRef>
+      <a:fontRef idx="minor">
+        <a:schemeClr val="lt1"/>
+      </a:fontRef>
+    </dgm:style>
+  </dgm:styleLbl>
+  <dgm:styleLbl name="node4">
+    <dgm:scene3d>
+      <a:camera prst="orthographicFront"/>
+      <a:lightRig rig="threePt" dir="t"/>
+    </dgm:scene3d>
+    <dgm:sp3d/>
+    <dgm:txPr/>
+    <dgm:style>
+      <a:lnRef idx="2">
+        <a:scrgbClr r="0" g="0" b="0"/>
+      </a:lnRef>
+      <a:fillRef idx="1">
+        <a:scrgbClr r="0" g="0" b="0"/>
+      </a:fillRef>
+      <a:effectRef idx="0">
+        <a:scrgbClr r="0" g="0" b="0"/>
+      </a:effectRef>
+      <a:fontRef idx="minor">
+        <a:schemeClr val="lt1"/>
+      </a:fontRef>
+    </dgm:style>
+  </dgm:styleLbl>
+  <dgm:styleLbl name="fgImgPlace1">
+    <dgm:scene3d>
+      <a:camera prst="orthographicFront"/>
+      <a:lightRig rig="threePt" dir="t"/>
+    </dgm:scene3d>
+    <dgm:sp3d/>
+    <dgm:txPr/>
+    <dgm:style>
+      <a:lnRef idx="2">
+        <a:scrgbClr r="0" g="0" b="0"/>
+      </a:lnRef>
+      <a:fillRef idx="1">
+        <a:scrgbClr r="0" g="0" b="0"/>
+      </a:fillRef>
+      <a:effectRef idx="0">
+        <a:scrgbClr r="0" g="0" b="0"/>
+      </a:effectRef>
+      <a:fontRef idx="minor"/>
+    </dgm:style>
+  </dgm:styleLbl>
+  <dgm:styleLbl name="alignImgPlace1">
+    <dgm:scene3d>
+      <a:camera prst="orthographicFront"/>
+      <a:lightRig rig="threePt" dir="t"/>
+    </dgm:scene3d>
+    <dgm:sp3d/>
+    <dgm:txPr/>
+    <dgm:style>
+      <a:lnRef idx="2">
+        <a:scrgbClr r="0" g="0" b="0"/>
+      </a:lnRef>
+      <a:fillRef idx="1">
+        <a:scrgbClr r="0" g="0" b="0"/>
+      </a:fillRef>
+      <a:effectRef idx="0">
+        <a:scrgbClr r="0" g="0" b="0"/>
+      </a:effectRef>
+      <a:fontRef idx="minor"/>
+    </dgm:style>
+  </dgm:styleLbl>
+  <dgm:styleLbl name="bgImgPlace1">
+    <dgm:scene3d>
+      <a:camera prst="orthographicFront"/>
+      <a:lightRig rig="threePt" dir="t"/>
+    </dgm:scene3d>
+    <dgm:sp3d/>
+    <dgm:txPr/>
+    <dgm:style>
+      <a:lnRef idx="2">
+        <a:scrgbClr r="0" g="0" b="0"/>
+      </a:lnRef>
+      <a:fillRef idx="1">
+        <a:scrgbClr r="0" g="0" b="0"/>
+      </a:fillRef>
+      <a:effectRef idx="0">
+        <a:scrgbClr r="0" g="0" b="0"/>
+      </a:effectRef>
+      <a:fontRef idx="minor"/>
+    </dgm:style>
+  </dgm:styleLbl>
+  <dgm:styleLbl name="sibTrans2D1">
+    <dgm:scene3d>
+      <a:camera prst="orthographicFront"/>
+      <a:lightRig rig="threePt" dir="t"/>
+    </dgm:scene3d>
+    <dgm:sp3d/>
+    <dgm:txPr/>
+    <dgm:style>
+      <a:lnRef idx="0">
+        <a:scrgbClr r="0" g="0" b="0"/>
+      </a:lnRef>
+      <a:fillRef idx="1">
+        <a:scrgbClr r="0" g="0" b="0"/>
+      </a:fillRef>
+      <a:effectRef idx="0">
+        <a:scrgbClr r="0" g="0" b="0"/>
+      </a:effectRef>
+      <a:fontRef idx="minor">
+        <a:schemeClr val="lt1"/>
+      </a:fontRef>
+    </dgm:style>
+  </dgm:styleLbl>
+  <dgm:styleLbl name="fgSibTrans2D1">
+    <dgm:scene3d>
+      <a:camera prst="orthographicFront"/>
+      <a:lightRig rig="threePt" dir="t"/>
+    </dgm:scene3d>
+    <dgm:sp3d/>
+    <dgm:txPr/>
+    <dgm:style>
+      <a:lnRef idx="0">
+        <a:scrgbClr r="0" g="0" b="0"/>
+      </a:lnRef>
+      <a:fillRef idx="1">
+        <a:scrgbClr r="0" g="0" b="0"/>
+      </a:fillRef>
+      <a:effectRef idx="0">
+        <a:scrgbClr r="0" g="0" b="0"/>
+      </a:effectRef>
+      <a:fontRef idx="minor">
+        <a:schemeClr val="lt1"/>
+      </a:fontRef>
+    </dgm:style>
+  </dgm:styleLbl>
+  <dgm:styleLbl name="bgSibTrans2D1">
+    <dgm:scene3d>
+      <a:camera prst="orthographicFront"/>
+      <a:lightRig rig="threePt" dir="t"/>
+    </dgm:scene3d>
+    <dgm:sp3d/>
+    <dgm:txPr/>
+    <dgm:style>
+      <a:lnRef idx="0">
+        <a:scrgbClr r="0" g="0" b="0"/>
+      </a:lnRef>
+      <a:fillRef idx="1">
+        <a:scrgbClr r="0" g="0" b="0"/>
+      </a:fillRef>
+      <a:effectRef idx="0">
+        <a:scrgbClr r="0" g="0" b="0"/>
+      </a:effectRef>
+      <a:fontRef idx="minor">
+        <a:schemeClr val="lt1"/>
+      </a:fontRef>
+    </dgm:style>
+  </dgm:styleLbl>
+  <dgm:styleLbl name="sibTrans1D1">
+    <dgm:scene3d>
+      <a:camera prst="orthographicFront"/>
+      <a:lightRig rig="threePt" dir="t"/>
+    </dgm:scene3d>
+    <dgm:sp3d/>
+    <dgm:txPr/>
+    <dgm:style>
+      <a:lnRef idx="1">
+        <a:scrgbClr r="0" g="0" b="0"/>
+      </a:lnRef>
+      <a:fillRef idx="0">
+        <a:scrgbClr r="0" g="0" b="0"/>
+      </a:fillRef>
+      <a:effectRef idx="0">
+        <a:scrgbClr r="0" g="0" b="0"/>
+      </a:effectRef>
+      <a:fontRef idx="minor"/>
+    </dgm:style>
+  </dgm:styleLbl>
+  <dgm:styleLbl name="callout">
+    <dgm:scene3d>
+      <a:camera prst="orthographicFront"/>
+      <a:lightRig rig="threePt" dir="t"/>
+    </dgm:scene3d>
+    <dgm:sp3d/>
+    <dgm:txPr/>
+    <dgm:style>
+      <a:lnRef idx="2">
+        <a:scrgbClr r="0" g="0" b="0"/>
+      </a:lnRef>
+      <a:fillRef idx="1">
+        <a:scrgbClr r="0" g="0" b="0"/>
+      </a:fillRef>
+      <a:effectRef idx="0">
+        <a:scrgbClr r="0" g="0" b="0"/>
+      </a:effectRef>
+      <a:fontRef idx="minor"/>
+    </dgm:style>
+  </dgm:styleLbl>
+  <dgm:styleLbl name="asst0">
+    <dgm:scene3d>
+      <a:camera prst="orthographicFront"/>
+      <a:lightRig rig="threePt" dir="t"/>
+    </dgm:scene3d>
+    <dgm:sp3d/>
+    <dgm:txPr/>
+    <dgm:style>
+      <a:lnRef idx="2">
+        <a:scrgbClr r="0" g="0" b="0"/>
+      </a:lnRef>
+      <a:fillRef idx="1">
+        <a:scrgbClr r="0" g="0" b="0"/>
+      </a:fillRef>
+      <a:effectRef idx="0">
+        <a:scrgbClr r="0" g="0" b="0"/>
+      </a:effectRef>
+      <a:fontRef idx="minor">
+        <a:schemeClr val="lt1"/>
+      </a:fontRef>
+    </dgm:style>
+  </dgm:styleLbl>
+  <dgm:styleLbl name="asst1">
+    <dgm:scene3d>
+      <a:camera prst="orthographicFront"/>
+      <a:lightRig rig="threePt" dir="t"/>
+    </dgm:scene3d>
+    <dgm:sp3d/>
+    <dgm:txPr/>
+    <dgm:style>
+      <a:lnRef idx="2">
+        <a:scrgbClr r="0" g="0" b="0"/>
+      </a:lnRef>
+      <a:fillRef idx="1">
+        <a:scrgbClr r="0" g="0" b="0"/>
+      </a:fillRef>
+      <a:effectRef idx="0">
+        <a:scrgbClr r="0" g="0" b="0"/>
+      </a:effectRef>
+      <a:fontRef idx="minor">
+        <a:schemeClr val="lt1"/>
+      </a:fontRef>
+    </dgm:style>
+  </dgm:styleLbl>
+  <dgm:styleLbl name="asst2">
+    <dgm:scene3d>
+      <a:camera prst="orthographicFront"/>
+      <a:lightRig rig="threePt" dir="t"/>
+    </dgm:scene3d>
+    <dgm:sp3d/>
+    <dgm:txPr/>
+    <dgm:style>
+      <a:lnRef idx="2">
+        <a:scrgbClr r="0" g="0" b="0"/>
+      </a:lnRef>
+      <a:fillRef idx="1">
+        <a:scrgbClr r="0" g="0" b="0"/>
+      </a:fillRef>
+      <a:effectRef idx="0">
+        <a:scrgbClr r="0" g="0" b="0"/>
+      </a:effectRef>
+      <a:fontRef idx="minor">
+        <a:schemeClr val="lt1"/>
+      </a:fontRef>
+    </dgm:style>
+  </dgm:styleLbl>
+  <dgm:styleLbl name="asst3">
+    <dgm:scene3d>
+      <a:camera prst="orthographicFront"/>
+      <a:lightRig rig="threePt" dir="t"/>
+    </dgm:scene3d>
+    <dgm:sp3d/>
+    <dgm:txPr/>
+    <dgm:style>
+      <a:lnRef idx="2">
+        <a:scrgbClr r="0" g="0" b="0"/>
+      </a:lnRef>
+      <a:fillRef idx="1">
+        <a:scrgbClr r="0" g="0" b="0"/>
+      </a:fillRef>
+      <a:effectRef idx="0">
+        <a:scrgbClr r="0" g="0" b="0"/>
+      </a:effectRef>
+      <a:fontRef idx="minor">
+        <a:schemeClr val="lt1"/>
+      </a:fontRef>
+    </dgm:style>
+  </dgm:styleLbl>
+  <dgm:styleLbl name="asst4">
+    <dgm:scene3d>
+      <a:camera prst="orthographicFront"/>
+      <a:lightRig rig="threePt" dir="t"/>
+    </dgm:scene3d>
+    <dgm:sp3d/>
+    <dgm:txPr/>
+    <dgm:style>
+      <a:lnRef idx="2">
+        <a:scrgbClr r="0" g="0" b="0"/>
+      </a:lnRef>
+      <a:fillRef idx="1">
+        <a:scrgbClr r="0" g="0" b="0"/>
+      </a:fillRef>
+      <a:effectRef idx="0">
+        <a:scrgbClr r="0" g="0" b="0"/>
+      </a:effectRef>
+      <a:fontRef idx="minor">
+        <a:schemeClr val="lt1"/>
+      </a:fontRef>
+    </dgm:style>
+  </dgm:styleLbl>
+  <dgm:styleLbl name="parChTrans2D1">
+    <dgm:scene3d>
+      <a:camera prst="orthographicFront"/>
+      <a:lightRig rig="threePt" dir="t"/>
+    </dgm:scene3d>
+    <dgm:sp3d/>
+    <dgm:txPr/>
+    <dgm:style>
+      <a:lnRef idx="2">
+        <a:scrgbClr r="0" g="0" b="0"/>
+      </a:lnRef>
+      <a:fillRef idx="1">
+        <a:scrgbClr r="0" g="0" b="0"/>
+      </a:fillRef>
+      <a:effectRef idx="0">
+        <a:scrgbClr r="0" g="0" b="0"/>
+      </a:effectRef>
+      <a:fontRef idx="minor">
+        <a:schemeClr val="lt1"/>
+      </a:fontRef>
+    </dgm:style>
+  </dgm:styleLbl>
+  <dgm:styleLbl name="parChTrans2D2">
+    <dgm:scene3d>
+      <a:camera prst="orthographicFront"/>
+      <a:lightRig rig="threePt" dir="t"/>
+    </dgm:scene3d>
+    <dgm:sp3d/>
+    <dgm:txPr/>
+    <dgm:style>
+      <a:lnRef idx="2">
+        <a:scrgbClr r="0" g="0" b="0"/>
+      </a:lnRef>
+      <a:fillRef idx="1">
+        <a:scrgbClr r="0" g="0" b="0"/>
+      </a:fillRef>
+      <a:effectRef idx="0">
+        <a:scrgbClr r="0" g="0" b="0"/>
+      </a:effectRef>
+      <a:fontRef idx="minor">
+        <a:schemeClr val="lt1"/>
+      </a:fontRef>
+    </dgm:style>
+  </dgm:styleLbl>
+  <dgm:styleLbl name="parChTrans2D3">
+    <dgm:scene3d>
+      <a:camera prst="orthographicFront"/>
+      <a:lightRig rig="threePt" dir="t"/>
+    </dgm:scene3d>
+    <dgm:sp3d/>
+    <dgm:txPr/>
+    <dgm:style>
+      <a:lnRef idx="2">
+        <a:scrgbClr r="0" g="0" b="0"/>
+      </a:lnRef>
+      <a:fillRef idx="1">
+        <a:scrgbClr r="0" g="0" b="0"/>
+      </a:fillRef>
+      <a:effectRef idx="0">
+        <a:scrgbClr r="0" g="0" b="0"/>
+      </a:effectRef>
+      <a:fontRef idx="minor">
+        <a:schemeClr val="lt1"/>
+      </a:fontRef>
+    </dgm:style>
+  </dgm:styleLbl>
+  <dgm:styleLbl name="parChTrans2D4">
+    <dgm:scene3d>
+      <a:camera prst="orthographicFront"/>
+      <a:lightRig rig="threePt" dir="t"/>
+    </dgm:scene3d>
+    <dgm:sp3d/>
+    <dgm:txPr/>
+    <dgm:style>
+      <a:lnRef idx="2">
+        <a:scrgbClr r="0" g="0" b="0"/>
+      </a:lnRef>
+      <a:fillRef idx="1">
+        <a:scrgbClr r="0" g="0" b="0"/>
+      </a:fillRef>
+      <a:effectRef idx="0">
+        <a:scrgbClr r="0" g="0" b="0"/>
+      </a:effectRef>
+      <a:fontRef idx="minor">
+        <a:schemeClr val="lt1"/>
+      </a:fontRef>
+    </dgm:style>
+  </dgm:styleLbl>
+  <dgm:styleLbl name="parChTrans1D1">
+    <dgm:scene3d>
+      <a:camera prst="orthographicFront"/>
+      <a:lightRig rig="threePt" dir="t"/>
+    </dgm:scene3d>
+    <dgm:sp3d/>
+    <dgm:txPr/>
+    <dgm:style>
+      <a:lnRef idx="2">
+        <a:scrgbClr r="0" g="0" b="0"/>
+      </a:lnRef>
+      <a:fillRef idx="0">
+        <a:scrgbClr r="0" g="0" b="0"/>
+      </a:fillRef>
+      <a:effectRef idx="0">
+        <a:scrgbClr r="0" g="0" b="0"/>
+      </a:effectRef>
+      <a:fontRef idx="minor"/>
+    </dgm:style>
+  </dgm:styleLbl>
+  <dgm:styleLbl name="parChTrans1D2">
+    <dgm:scene3d>
+      <a:camera prst="orthographicFront"/>
+      <a:lightRig rig="threePt" dir="t"/>
+    </dgm:scene3d>
+    <dgm:sp3d/>
+    <dgm:txPr/>
+    <dgm:style>
+      <a:lnRef idx="2">
+        <a:scrgbClr r="0" g="0" b="0"/>
+      </a:lnRef>
+      <a:fillRef idx="0">
+        <a:scrgbClr r="0" g="0" b="0"/>
+      </a:fillRef>
+      <a:effectRef idx="0">
+        <a:scrgbClr r="0" g="0" b="0"/>
+      </a:effectRef>
+      <a:fontRef idx="minor"/>
+    </dgm:style>
+  </dgm:styleLbl>
+  <dgm:styleLbl name="parChTrans1D3">
+    <dgm:scene3d>
+      <a:camera prst="orthographicFront"/>
+      <a:lightRig rig="threePt" dir="t"/>
+    </dgm:scene3d>
+    <dgm:sp3d/>
+    <dgm:txPr/>
+    <dgm:style>
+      <a:lnRef idx="2">
+        <a:scrgbClr r="0" g="0" b="0"/>
+      </a:lnRef>
+      <a:fillRef idx="0">
+        <a:scrgbClr r="0" g="0" b="0"/>
+      </a:fillRef>
+      <a:effectRef idx="0">
+        <a:scrgbClr r="0" g="0" b="0"/>
+      </a:effectRef>
+      <a:fontRef idx="minor"/>
+    </dgm:style>
+  </dgm:styleLbl>
+  <dgm:styleLbl name="parChTrans1D4">
+    <dgm:scene3d>
+      <a:camera prst="orthographicFront"/>
+      <a:lightRig rig="threePt" dir="t"/>
+    </dgm:scene3d>
+    <dgm:sp3d/>
+    <dgm:txPr/>
+    <dgm:style>
+      <a:lnRef idx="2">
+        <a:scrgbClr r="0" g="0" b="0"/>
+      </a:lnRef>
+      <a:fillRef idx="0">
+        <a:scrgbClr r="0" g="0" b="0"/>
+      </a:fillRef>
+      <a:effectRef idx="0">
+        <a:scrgbClr r="0" g="0" b="0"/>
+      </a:effectRef>
+      <a:fontRef idx="minor"/>
+    </dgm:style>
+  </dgm:styleLbl>
+  <dgm:styleLbl name="fgAcc1">
+    <dgm:scene3d>
+      <a:camera prst="orthographicFront"/>
+      <a:lightRig rig="threePt" dir="t"/>
+    </dgm:scene3d>
+    <dgm:sp3d/>
+    <dgm:txPr/>
+    <dgm:style>
+      <a:lnRef idx="2">
+        <a:scrgbClr r="0" g="0" b="0"/>
+      </a:lnRef>
+      <a:fillRef idx="1">
+        <a:scrgbClr r="0" g="0" b="0"/>
+      </a:fillRef>
+      <a:effectRef idx="0">
+        <a:scrgbClr r="0" g="0" b="0"/>
+      </a:effectRef>
+      <a:fontRef idx="minor"/>
+    </dgm:style>
+  </dgm:styleLbl>
+  <dgm:styleLbl name="conFgAcc1">
+    <dgm:scene3d>
+      <a:camera prst="orthographicFront"/>
+      <a:lightRig rig="threePt" dir="t"/>
+    </dgm:scene3d>
+    <dgm:sp3d/>
+    <dgm:txPr/>
+    <dgm:style>
+      <a:lnRef idx="2">
+        <a:scrgbClr r="0" g="0" b="0"/>
+      </a:lnRef>
+      <a:fillRef idx="1">
+        <a:scrgbClr r="0" g="0" b="0"/>
+      </a:fillRef>
+      <a:effectRef idx="0">
+        <a:scrgbClr r="0" g="0" b="0"/>
+      </a:effectRef>
+      <a:fontRef idx="minor"/>
+    </dgm:style>
+  </dgm:styleLbl>
+  <dgm:styleLbl name="alignAcc1">
+    <dgm:scene3d>
+      <a:camera prst="orthographicFront"/>
+      <a:lightRig rig="threePt" dir="t"/>
+    </dgm:scene3d>
+    <dgm:sp3d/>
+    <dgm:txPr/>
+    <dgm:style>
+      <a:lnRef idx="2">
+        <a:scrgbClr r="0" g="0" b="0"/>
+      </a:lnRef>
+      <a:fillRef idx="1">
+        <a:scrgbClr r="0" g="0" b="0"/>
+      </a:fillRef>
+      <a:effectRef idx="0">
+        <a:scrgbClr r="0" g="0" b="0"/>
+      </a:effectRef>
+      <a:fontRef idx="minor"/>
+    </dgm:style>
+  </dgm:styleLbl>
+  <dgm:styleLbl name="trAlignAcc1">
+    <dgm:scene3d>
+      <a:camera prst="orthographicFront"/>
+      <a:lightRig rig="threePt" dir="t"/>
+    </dgm:scene3d>
+    <dgm:sp3d/>
+    <dgm:txPr/>
+    <dgm:style>
+      <a:lnRef idx="1">
+        <a:scrgbClr r="0" g="0" b="0"/>
+      </a:lnRef>
+      <a:fillRef idx="1">
+        <a:scrgbClr r="0" g="0" b="0"/>
+      </a:fillRef>
+      <a:effectRef idx="0">
+        <a:scrgbClr r="0" g="0" b="0"/>
+      </a:effectRef>
+      <a:fontRef idx="minor"/>
+    </dgm:style>
+  </dgm:styleLbl>
+  <dgm:styleLbl name="bgAcc1">
+    <dgm:scene3d>
+      <a:camera prst="orthographicFront"/>
+      <a:lightRig rig="threePt" dir="t"/>
+    </dgm:scene3d>
+    <dgm:sp3d/>
+    <dgm:txPr/>
+    <dgm:style>
+      <a:lnRef idx="2">
+        <a:scrgbClr r="0" g="0" b="0"/>
+      </a:lnRef>
+      <a:fillRef idx="1">
+        <a:scrgbClr r="0" g="0" b="0"/>
+      </a:fillRef>
+      <a:effectRef idx="0">
+        <a:scrgbClr r="0" g="0" b="0"/>
+      </a:effectRef>
+      <a:fontRef idx="minor"/>
+    </dgm:style>
+  </dgm:styleLbl>
+  <dgm:styleLbl name="solidFgAcc1">
+    <dgm:scene3d>
+      <a:camera prst="orthographicFront"/>
+      <a:lightRig rig="threePt" dir="t"/>
+    </dgm:scene3d>
+    <dgm:sp3d/>
+    <dgm:txPr/>
+    <dgm:style>
+      <a:lnRef idx="2">
+        <a:scrgbClr r="0" g="0" b="0"/>
+      </a:lnRef>
+      <a:fillRef idx="1">
+        <a:scrgbClr r="0" g="0" b="0"/>
+      </a:fillRef>
+      <a:effectRef idx="0">
+        <a:scrgbClr r="0" g="0" b="0"/>
+      </a:effectRef>
+      <a:fontRef idx="minor"/>
+    </dgm:style>
+  </dgm:styleLbl>
+  <dgm:styleLbl name="solidAlignAcc1">
+    <dgm:scene3d>
+      <a:camera prst="orthographicFront"/>
+      <a:lightRig rig="threePt" dir="t"/>
+    </dgm:scene3d>
+    <dgm:sp3d/>
+    <dgm:txPr/>
+    <dgm:style>
+      <a:lnRef idx="2">
+        <a:scrgbClr r="0" g="0" b="0"/>
+      </a:lnRef>
+      <a:fillRef idx="1">
+        <a:scrgbClr r="0" g="0" b="0"/>
+      </a:fillRef>
+      <a:effectRef idx="0">
+        <a:scrgbClr r="0" g="0" b="0"/>
+      </a:effectRef>
+      <a:fontRef idx="minor"/>
+    </dgm:style>
+  </dgm:styleLbl>
+  <dgm:styleLbl name="solidBgAcc1">
+    <dgm:scene3d>
+      <a:camera prst="orthographicFront"/>
+      <a:lightRig rig="threePt" dir="t"/>
+    </dgm:scene3d>
+    <dgm:sp3d/>
+    <dgm:txPr/>
+    <dgm:style>
+      <a:lnRef idx="2">
+        <a:scrgbClr r="0" g="0" b="0"/>
+      </a:lnRef>
+      <a:fillRef idx="1">
+        <a:scrgbClr r="0" g="0" b="0"/>
+      </a:fillRef>
+      <a:effectRef idx="0">
+        <a:scrgbClr r="0" g="0" b="0"/>
+      </a:effectRef>
+      <a:fontRef idx="minor"/>
+    </dgm:style>
+  </dgm:styleLbl>
+  <dgm:styleLbl name="fgAccFollowNode1">
+    <dgm:scene3d>
+      <a:camera prst="orthographicFront"/>
+      <a:lightRig rig="threePt" dir="t"/>
+    </dgm:scene3d>
+    <dgm:sp3d/>
+    <dgm:txPr/>
+    <dgm:style>
+      <a:lnRef idx="2">
+        <a:scrgbClr r="0" g="0" b="0"/>
+      </a:lnRef>
+      <a:fillRef idx="1">
+        <a:scrgbClr r="0" g="0" b="0"/>
+      </a:fillRef>
+      <a:effectRef idx="0">
+        <a:scrgbClr r="0" g="0" b="0"/>
+      </a:effectRef>
+      <a:fontRef idx="minor"/>
+    </dgm:style>
+  </dgm:styleLbl>
+  <dgm:styleLbl name="alignAccFollowNode1">
+    <dgm:scene3d>
+      <a:camera prst="orthographicFront"/>
+      <a:lightRig rig="threePt" dir="t"/>
+    </dgm:scene3d>
+    <dgm:sp3d/>
+    <dgm:txPr/>
+    <dgm:style>
+      <a:lnRef idx="2">
+        <a:scrgbClr r="0" g="0" b="0"/>
+      </a:lnRef>
+      <a:fillRef idx="1">
+        <a:scrgbClr r="0" g="0" b="0"/>
+      </a:fillRef>
+      <a:effectRef idx="0">
+        <a:scrgbClr r="0" g="0" b="0"/>
+      </a:effectRef>
+      <a:fontRef idx="minor"/>
+    </dgm:style>
+  </dgm:styleLbl>
+  <dgm:styleLbl name="bgAccFollowNode1">
+    <dgm:scene3d>
+      <a:camera prst="orthographicFront"/>
+      <a:lightRig rig="threePt" dir="t"/>
+    </dgm:scene3d>
+    <dgm:sp3d/>
+    <dgm:txPr/>
+    <dgm:style>
+      <a:lnRef idx="2">
+        <a:scrgbClr r="0" g="0" b="0"/>
+      </a:lnRef>
+      <a:fillRef idx="1">
+        <a:scrgbClr r="0" g="0" b="0"/>
+      </a:fillRef>
+      <a:effectRef idx="0">
+        <a:scrgbClr r="0" g="0" b="0"/>
+      </a:effectRef>
+      <a:fontRef idx="minor"/>
+    </dgm:style>
+  </dgm:styleLbl>
+  <dgm:styleLbl name="fgAcc0">
+    <dgm:scene3d>
+      <a:camera prst="orthographicFront"/>
+      <a:lightRig rig="threePt" dir="t"/>
+    </dgm:scene3d>
+    <dgm:sp3d/>
+    <dgm:txPr/>
+    <dgm:style>
+      <a:lnRef idx="2">
+        <a:scrgbClr r="0" g="0" b="0"/>
+      </a:lnRef>
+      <a:fillRef idx="1">
+        <a:scrgbClr r="0" g="0" b="0"/>
+      </a:fillRef>
+      <a:effectRef idx="0">
+        <a:scrgbClr r="0" g="0" b="0"/>
+      </a:effectRef>
+      <a:fontRef idx="minor"/>
+    </dgm:style>
+  </dgm:styleLbl>
+  <dgm:styleLbl name="fgAcc2">
+    <dgm:scene3d>
+      <a:camera prst="orthographicFront"/>
+      <a:lightRig rig="threePt" dir="t"/>
+    </dgm:scene3d>
+    <dgm:sp3d/>
+    <dgm:txPr/>
+    <dgm:style>
+      <a:lnRef idx="2">
+        <a:scrgbClr r="0" g="0" b="0"/>
+      </a:lnRef>
+      <a:fillRef idx="1">
+        <a:scrgbClr r="0" g="0" b="0"/>
+      </a:fillRef>
+      <a:effectRef idx="0">
+        <a:scrgbClr r="0" g="0" b="0"/>
+      </a:effectRef>
+      <a:fontRef idx="minor"/>
+    </dgm:style>
+  </dgm:styleLbl>
+  <dgm:styleLbl name="fgAcc3">
+    <dgm:scene3d>
+      <a:camera prst="orthographicFront"/>
+      <a:lightRig rig="threePt" dir="t"/>
+    </dgm:scene3d>
+    <dgm:sp3d/>
+    <dgm:txPr/>
+    <dgm:style>
+      <a:lnRef idx="2">
+        <a:scrgbClr r="0" g="0" b="0"/>
+      </a:lnRef>
+      <a:fillRef idx="1">
+        <a:scrgbClr r="0" g="0" b="0"/>
+      </a:fillRef>
+      <a:effectRef idx="0">
+        <a:scrgbClr r="0" g="0" b="0"/>
+      </a:effectRef>
+      <a:fontRef idx="minor"/>
+    </dgm:style>
+  </dgm:styleLbl>
+  <dgm:styleLbl name="fgAcc4">
+    <dgm:scene3d>
+      <a:camera prst="orthographicFront"/>
+      <a:lightRig rig="threePt" dir="t"/>
+    </dgm:scene3d>
+    <dgm:sp3d/>
+    <dgm:txPr/>
+    <dgm:style>
+      <a:lnRef idx="2">
+        <a:scrgbClr r="0" g="0" b="0"/>
+      </a:lnRef>
+      <a:fillRef idx="1">
+        <a:scrgbClr r="0" g="0" b="0"/>
+      </a:fillRef>
+      <a:effectRef idx="0">
+        <a:scrgbClr r="0" g="0" b="0"/>
+      </a:effectRef>
+      <a:fontRef idx="minor"/>
+    </dgm:style>
+  </dgm:styleLbl>
+  <dgm:styleLbl name="bgShp">
+    <dgm:scene3d>
+      <a:camera prst="orthographicFront"/>
+      <a:lightRig rig="threePt" dir="t"/>
+    </dgm:scene3d>
+    <dgm:sp3d/>
+    <dgm:txPr/>
+    <dgm:style>
+      <a:lnRef idx="0">
+        <a:scrgbClr r="0" g="0" b="0"/>
+      </a:lnRef>
+      <a:fillRef idx="1">
+        <a:scrgbClr r="0" g="0" b="0"/>
+      </a:fillRef>
+      <a:effectRef idx="0">
+        <a:scrgbClr r="0" g="0" b="0"/>
+      </a:effectRef>
+      <a:fontRef idx="minor"/>
+    </dgm:style>
+  </dgm:styleLbl>
+  <dgm:styleLbl name="dkBgShp">
+    <dgm:scene3d>
+      <a:camera prst="orthographicFront"/>
+      <a:lightRig rig="threePt" dir="t"/>
+    </dgm:scene3d>
+    <dgm:sp3d/>
+    <dgm:txPr/>
+    <dgm:style>
+      <a:lnRef idx="0">
+        <a:scrgbClr r="0" g="0" b="0"/>
+      </a:lnRef>
+      <a:fillRef idx="1">
+        <a:scrgbClr r="0" g="0" b="0"/>
+      </a:fillRef>
+      <a:effectRef idx="0">
+        <a:scrgbClr r="0" g="0" b="0"/>
+      </a:effectRef>
+      <a:fontRef idx="minor"/>
+    </dgm:style>
+  </dgm:styleLbl>
+  <dgm:styleLbl name="trBgShp">
+    <dgm:scene3d>
+      <a:camera prst="orthographicFront"/>
+      <a:lightRig rig="threePt" dir="t"/>
+    </dgm:scene3d>
+    <dgm:sp3d/>
+    <dgm:txPr/>
+    <dgm:style>
+      <a:lnRef idx="0">
+        <a:scrgbClr r="0" g="0" b="0"/>
+      </a:lnRef>
+      <a:fillRef idx="1">
+        <a:scrgbClr r="0" g="0" b="0"/>
+      </a:fillRef>
+      <a:effectRef idx="0">
+        <a:scrgbClr r="0" g="0" b="0"/>
+      </a:effectRef>
+      <a:fontRef idx="minor"/>
+    </dgm:style>
+  </dgm:styleLbl>
+  <dgm:styleLbl name="fgShp">
+    <dgm:scene3d>
+      <a:camera prst="orthographicFront"/>
+      <a:lightRig rig="threePt" dir="t"/>
+    </dgm:scene3d>
+    <dgm:sp3d/>
+    <dgm:txPr/>
+    <dgm:style>
+      <a:lnRef idx="2">
+        <a:scrgbClr r="0" g="0" b="0"/>
+      </a:lnRef>
+      <a:fillRef idx="1">
+        <a:scrgbClr r="0" g="0" b="0"/>
+      </a:fillRef>
+      <a:effectRef idx="0">
+        <a:scrgbClr r="0" g="0" b="0"/>
+      </a:effectRef>
+      <a:fontRef idx="minor"/>
+    </dgm:style>
+  </dgm:styleLbl>
+  <dgm:styleLbl name="revTx">
+    <dgm:scene3d>
+      <a:camera prst="orthographicFront"/>
+      <a:lightRig rig="threePt" dir="t"/>
+    </dgm:scene3d>
+    <dgm:sp3d/>
+    <dgm:txPr/>
+    <dgm:style>
+      <a:lnRef idx="0">
+        <a:scrgbClr r="0" g="0" b="0"/>
+      </a:lnRef>
+      <a:fillRef idx="0">
+        <a:scrgbClr r="0" g="0" b="0"/>
+      </a:fillRef>
+      <a:effectRef idx="0">
+        <a:scrgbClr r="0" g="0" b="0"/>
+      </a:effectRef>
+      <a:fontRef idx="minor"/>
+    </dgm:style>
+  </dgm:styleLbl>
+</dgm:styleDef>
 </file>
 
 <file path=ppt/notesMasters/notesMaster1.xml><?xml version="1.0" encoding="utf-8"?>
@@ -1207,6 +4501,90 @@
     </a:lvl9pPr>
   </p:notesStyle>
 </p:notesMaster>
+</file>
+
+<file path=ppt/notesSlides/notesSlide1.xml><?xml version="1.0" encoding="utf-8"?>
+<p:notes xmlns:a="http://schemas.openxmlformats.org/drawingml/2006/main" xmlns:r="http://schemas.openxmlformats.org/officeDocument/2006/relationships" xmlns:p="http://schemas.openxmlformats.org/presentationml/2006/main">
+  <p:cSld>
+    <p:spTree>
+      <p:nvGrpSpPr>
+        <p:cNvPr id="1" name=""/>
+        <p:cNvGrpSpPr/>
+        <p:nvPr/>
+      </p:nvGrpSpPr>
+      <p:grpSpPr>
+        <a:xfrm>
+          <a:off x="0" y="0"/>
+          <a:ext cx="0" cy="0"/>
+          <a:chOff x="0" y="0"/>
+          <a:chExt cx="0" cy="0"/>
+        </a:xfrm>
+      </p:grpSpPr>
+      <p:sp>
+        <p:nvSpPr>
+          <p:cNvPr id="2" name="Folienbildplatzhalter 1"/>
+          <p:cNvSpPr>
+            <a:spLocks noGrp="1" noRot="1" noChangeAspect="1"/>
+          </p:cNvSpPr>
+          <p:nvPr>
+            <p:ph type="sldImg"/>
+          </p:nvPr>
+        </p:nvSpPr>
+        <p:spPr/>
+      </p:sp>
+      <p:sp>
+        <p:nvSpPr>
+          <p:cNvPr id="3" name="Notizenplatzhalter 2"/>
+          <p:cNvSpPr>
+            <a:spLocks noGrp="1"/>
+          </p:cNvSpPr>
+          <p:nvPr>
+            <p:ph type="body" idx="1"/>
+          </p:nvPr>
+        </p:nvSpPr>
+        <p:spPr/>
+        <p:txBody>
+          <a:bodyPr/>
+          <a:lstStyle/>
+          <a:p>
+            <a:endParaRPr lang="de-DE" dirty="0"/>
+          </a:p>
+        </p:txBody>
+      </p:sp>
+      <p:sp>
+        <p:nvSpPr>
+          <p:cNvPr id="4" name="Foliennummernplatzhalter 3"/>
+          <p:cNvSpPr>
+            <a:spLocks noGrp="1"/>
+          </p:cNvSpPr>
+          <p:nvPr>
+            <p:ph type="sldNum" sz="quarter" idx="5"/>
+          </p:nvPr>
+        </p:nvSpPr>
+        <p:spPr/>
+        <p:txBody>
+          <a:bodyPr/>
+          <a:lstStyle/>
+          <a:p>
+            <a:fld id="{9D3B04BC-11A1-436E-82D8-12006A6BF312}" type="slidenum">
+              <a:rPr lang="de-DE" smtClean="0"/>
+              <a:t>5</a:t>
+            </a:fld>
+            <a:endParaRPr lang="de-DE"/>
+          </a:p>
+        </p:txBody>
+      </p:sp>
+    </p:spTree>
+    <p:extLst>
+      <p:ext uri="{BB962C8B-B14F-4D97-AF65-F5344CB8AC3E}">
+        <p14:creationId xmlns:p14="http://schemas.microsoft.com/office/powerpoint/2010/main" val="845365107"/>
+      </p:ext>
+    </p:extLst>
+  </p:cSld>
+  <p:clrMapOvr>
+    <a:masterClrMapping/>
+  </p:clrMapOvr>
+</p:notes>
 </file>
 
 <file path=ppt/slideLayouts/slideLayout1.xml><?xml version="1.0" encoding="utf-8"?>
@@ -4675,6 +8053,375 @@
           <p:cNvPr id="2" name="Titel 1">
             <a:extLst>
               <a:ext uri="{FF2B5EF4-FFF2-40B4-BE49-F238E27FC236}">
+                <a16:creationId xmlns:a16="http://schemas.microsoft.com/office/drawing/2014/main" id="{6BB030AB-786E-C531-12A7-749F70850164}"/>
+              </a:ext>
+            </a:extLst>
+          </p:cNvPr>
+          <p:cNvSpPr>
+            <a:spLocks noGrp="1"/>
+          </p:cNvSpPr>
+          <p:nvPr>
+            <p:ph type="title"/>
+          </p:nvPr>
+        </p:nvSpPr>
+        <p:spPr/>
+        <p:txBody>
+          <a:bodyPr/>
+          <a:lstStyle/>
+          <a:p>
+            <a:r>
+              <a:rPr lang="de-DE" dirty="0"/>
+              <a:t>Fazit</a:t>
+            </a:r>
+          </a:p>
+        </p:txBody>
+      </p:sp>
+      <mc:AlternateContent xmlns:mc="http://schemas.openxmlformats.org/markup-compatibility/2006">
+        <mc:Choice xmlns:a14="http://schemas.microsoft.com/office/drawing/2010/main" Requires="a14">
+          <p:sp>
+            <p:nvSpPr>
+              <p:cNvPr id="5" name="Textplatzhalter 4">
+                <a:extLst>
+                  <a:ext uri="{FF2B5EF4-FFF2-40B4-BE49-F238E27FC236}">
+                    <a16:creationId xmlns:a16="http://schemas.microsoft.com/office/drawing/2014/main" id="{874A7A65-C7F4-F6C9-5AE4-858DEE4E2960}"/>
+                  </a:ext>
+                </a:extLst>
+              </p:cNvPr>
+              <p:cNvSpPr>
+                <a:spLocks noGrp="1"/>
+              </p:cNvSpPr>
+              <p:nvPr>
+                <p:ph type="body" sz="quarter" idx="3"/>
+              </p:nvPr>
+            </p:nvSpPr>
+            <p:spPr/>
+            <p:txBody>
+              <a:bodyPr>
+                <a:normAutofit/>
+              </a:bodyPr>
+              <a:lstStyle/>
+              <a:p>
+                <a:r>
+                  <a:rPr lang="de-DE" sz="2800" dirty="0"/>
+                  <a:t>Einfluss eines großen </a:t>
+                </a:r>
+                <a14:m>
+                  <m:oMath xmlns:m="http://schemas.openxmlformats.org/officeDocument/2006/math">
+                    <m:r>
+                      <a:rPr lang="de-DE" sz="2800" i="1">
+                        <a:latin typeface="Cambria Math" panose="02040503050406030204" pitchFamily="18" charset="0"/>
+                        <a:ea typeface="Cambria Math" panose="02040503050406030204" pitchFamily="18" charset="0"/>
+                      </a:rPr>
+                      <m:t>𝛽</m:t>
+                    </m:r>
+                  </m:oMath>
+                </a14:m>
+                <a:endParaRPr lang="de-DE" sz="2800" dirty="0"/>
+              </a:p>
+            </p:txBody>
+          </p:sp>
+        </mc:Choice>
+        <mc:Fallback>
+          <p:sp>
+            <p:nvSpPr>
+              <p:cNvPr id="5" name="Textplatzhalter 4">
+                <a:extLst>
+                  <a:ext uri="{FF2B5EF4-FFF2-40B4-BE49-F238E27FC236}">
+                    <a16:creationId xmlns:a16="http://schemas.microsoft.com/office/drawing/2014/main" id="{874A7A65-C7F4-F6C9-5AE4-858DEE4E2960}"/>
+                  </a:ext>
+                </a:extLst>
+              </p:cNvPr>
+              <p:cNvSpPr>
+                <a:spLocks noGrp="1" noRot="1" noChangeAspect="1" noMove="1" noResize="1" noEditPoints="1" noAdjustHandles="1" noChangeArrowheads="1" noChangeShapeType="1" noTextEdit="1"/>
+              </p:cNvSpPr>
+              <p:nvPr>
+                <p:ph type="body" sz="quarter" idx="3"/>
+              </p:nvPr>
+            </p:nvSpPr>
+            <p:spPr>
+              <a:blipFill>
+                <a:blip r:embed="rId2"/>
+                <a:stretch>
+                  <a:fillRect l="-2471" b="-20741"/>
+                </a:stretch>
+              </a:blipFill>
+            </p:spPr>
+            <p:txBody>
+              <a:bodyPr/>
+              <a:lstStyle/>
+              <a:p>
+                <a:r>
+                  <a:rPr lang="de-DE">
+                    <a:noFill/>
+                  </a:rPr>
+                  <a:t> </a:t>
+                </a:r>
+              </a:p>
+            </p:txBody>
+          </p:sp>
+        </mc:Fallback>
+      </mc:AlternateContent>
+      <p:sp>
+        <p:nvSpPr>
+          <p:cNvPr id="6" name="Inhaltsplatzhalter 5">
+            <a:extLst>
+              <a:ext uri="{FF2B5EF4-FFF2-40B4-BE49-F238E27FC236}">
+                <a16:creationId xmlns:a16="http://schemas.microsoft.com/office/drawing/2014/main" id="{27CF4302-EE10-DEB8-57DC-0DE63F780452}"/>
+              </a:ext>
+            </a:extLst>
+          </p:cNvPr>
+          <p:cNvSpPr>
+            <a:spLocks noGrp="1"/>
+          </p:cNvSpPr>
+          <p:nvPr>
+            <p:ph sz="quarter" idx="4"/>
+          </p:nvPr>
+        </p:nvSpPr>
+        <p:spPr/>
+        <p:txBody>
+          <a:bodyPr>
+            <a:normAutofit/>
+          </a:bodyPr>
+          <a:lstStyle/>
+          <a:p>
+            <a:pPr>
+              <a:buFont typeface="Wingdings" panose="05000000000000000000" pitchFamily="2" charset="2"/>
+              <a:buChar char="§"/>
+            </a:pPr>
+            <a:r>
+              <a:rPr lang="de-DE" sz="2400" b="1" dirty="0"/>
+              <a:t>Ermöglicht Selektion zwischen Gegenständen mit minimalen Unterschieden (z. B. 1 und 0,999)</a:t>
+            </a:r>
+          </a:p>
+          <a:p>
+            <a:pPr>
+              <a:buFont typeface="Wingdings" panose="05000000000000000000" pitchFamily="2" charset="2"/>
+              <a:buChar char="§"/>
+            </a:pPr>
+            <a:r>
+              <a:rPr lang="de-DE" sz="2400" b="1" dirty="0"/>
+              <a:t>Verlust der Selektionsfähigkeit bei allgemein schlechteren Gegenständen (z. B. 0,1 und 0,0999)</a:t>
+            </a:r>
+          </a:p>
+          <a:p>
+            <a:pPr>
+              <a:buFont typeface="Wingdings" panose="05000000000000000000" pitchFamily="2" charset="2"/>
+              <a:buChar char="§"/>
+            </a:pPr>
+            <a:r>
+              <a:rPr lang="de-DE" sz="2400" b="1" dirty="0"/>
+              <a:t>Fokussierung auf Gegenstände mit hoher Attraktivität</a:t>
+            </a:r>
+          </a:p>
+          <a:p>
+            <a:endParaRPr lang="de-DE" sz="2400" b="1" dirty="0"/>
+          </a:p>
+        </p:txBody>
+      </p:sp>
+      <p:sp>
+        <p:nvSpPr>
+          <p:cNvPr id="7" name="Datumsplatzhalter 6">
+            <a:extLst>
+              <a:ext uri="{FF2B5EF4-FFF2-40B4-BE49-F238E27FC236}">
+                <a16:creationId xmlns:a16="http://schemas.microsoft.com/office/drawing/2014/main" id="{6B894B29-7047-1ACA-3353-24BCA1F292EB}"/>
+              </a:ext>
+            </a:extLst>
+          </p:cNvPr>
+          <p:cNvSpPr>
+            <a:spLocks noGrp="1"/>
+          </p:cNvSpPr>
+          <p:nvPr>
+            <p:ph type="dt" sz="half" idx="10"/>
+          </p:nvPr>
+        </p:nvSpPr>
+        <p:spPr/>
+        <p:txBody>
+          <a:bodyPr/>
+          <a:lstStyle/>
+          <a:p>
+            <a:r>
+              <a:rPr lang="de-DE" dirty="0"/>
+              <a:t>20.06.2026</a:t>
+            </a:r>
+          </a:p>
+        </p:txBody>
+      </p:sp>
+      <p:sp>
+        <p:nvSpPr>
+          <p:cNvPr id="8" name="Fußzeilenplatzhalter 7">
+            <a:extLst>
+              <a:ext uri="{FF2B5EF4-FFF2-40B4-BE49-F238E27FC236}">
+                <a16:creationId xmlns:a16="http://schemas.microsoft.com/office/drawing/2014/main" id="{5981A085-1E07-22DC-7050-E4D89C38BAD6}"/>
+              </a:ext>
+            </a:extLst>
+          </p:cNvPr>
+          <p:cNvSpPr>
+            <a:spLocks noGrp="1"/>
+          </p:cNvSpPr>
+          <p:nvPr>
+            <p:ph type="ftr" sz="quarter" idx="11"/>
+          </p:nvPr>
+        </p:nvSpPr>
+        <p:spPr/>
+        <p:txBody>
+          <a:bodyPr/>
+          <a:lstStyle/>
+          <a:p>
+            <a:r>
+              <a:rPr lang="de-DE"/>
+              <a:t>Niko Kläsener</a:t>
+            </a:r>
+          </a:p>
+        </p:txBody>
+      </p:sp>
+      <p:sp>
+        <p:nvSpPr>
+          <p:cNvPr id="9" name="Foliennummernplatzhalter 8">
+            <a:extLst>
+              <a:ext uri="{FF2B5EF4-FFF2-40B4-BE49-F238E27FC236}">
+                <a16:creationId xmlns:a16="http://schemas.microsoft.com/office/drawing/2014/main" id="{86C91C11-4729-3014-9DB3-AC8059C85536}"/>
+              </a:ext>
+            </a:extLst>
+          </p:cNvPr>
+          <p:cNvSpPr>
+            <a:spLocks noGrp="1"/>
+          </p:cNvSpPr>
+          <p:nvPr>
+            <p:ph type="sldNum" sz="quarter" idx="12"/>
+          </p:nvPr>
+        </p:nvSpPr>
+        <p:spPr/>
+        <p:txBody>
+          <a:bodyPr/>
+          <a:lstStyle/>
+          <a:p>
+            <a:fld id="{F20E45F0-5197-4D99-A0B0-CC09E9235134}" type="slidenum">
+              <a:rPr lang="de-DE" smtClean="0"/>
+              <a:t>10</a:t>
+            </a:fld>
+            <a:endParaRPr lang="de-DE" dirty="0"/>
+          </a:p>
+        </p:txBody>
+      </p:sp>
+      <p:sp>
+        <p:nvSpPr>
+          <p:cNvPr id="3" name="Textplatzhalter 2">
+            <a:extLst>
+              <a:ext uri="{FF2B5EF4-FFF2-40B4-BE49-F238E27FC236}">
+                <a16:creationId xmlns:a16="http://schemas.microsoft.com/office/drawing/2014/main" id="{F05D5584-C5F5-B21E-C1D6-CE5472F6A3BE}"/>
+              </a:ext>
+            </a:extLst>
+          </p:cNvPr>
+          <p:cNvSpPr>
+            <a:spLocks noGrp="1"/>
+          </p:cNvSpPr>
+          <p:nvPr>
+            <p:ph type="body" idx="1"/>
+          </p:nvPr>
+        </p:nvSpPr>
+        <p:spPr/>
+        <p:txBody>
+          <a:bodyPr>
+            <a:normAutofit/>
+          </a:bodyPr>
+          <a:lstStyle/>
+          <a:p>
+            <a:r>
+              <a:rPr lang="de-DE" sz="2800" dirty="0"/>
+              <a:t>Haupterkenntnis</a:t>
+            </a:r>
+          </a:p>
+        </p:txBody>
+      </p:sp>
+      <p:sp>
+        <p:nvSpPr>
+          <p:cNvPr id="4" name="Inhaltsplatzhalter 3">
+            <a:extLst>
+              <a:ext uri="{FF2B5EF4-FFF2-40B4-BE49-F238E27FC236}">
+                <a16:creationId xmlns:a16="http://schemas.microsoft.com/office/drawing/2014/main" id="{69979646-04D1-7A25-F6AA-E780620BB2CB}"/>
+              </a:ext>
+            </a:extLst>
+          </p:cNvPr>
+          <p:cNvSpPr>
+            <a:spLocks noGrp="1"/>
+          </p:cNvSpPr>
+          <p:nvPr>
+            <p:ph sz="half" idx="2"/>
+          </p:nvPr>
+        </p:nvSpPr>
+        <p:spPr/>
+        <p:txBody>
+          <a:bodyPr>
+            <a:normAutofit/>
+          </a:bodyPr>
+          <a:lstStyle/>
+          <a:p>
+            <a:pPr>
+              <a:buFont typeface="Wingdings" panose="05000000000000000000" pitchFamily="2" charset="2"/>
+              <a:buChar char="§"/>
+            </a:pPr>
+            <a:r>
+              <a:rPr lang="de-DE" sz="2400" b="1" dirty="0"/>
+              <a:t>Differenz zwischen bestem und schlechtestem Ergebnis beträgt 0,3 % beim Hard-Problem</a:t>
+            </a:r>
+          </a:p>
+          <a:p>
+            <a:pPr>
+              <a:buFont typeface="Wingdings" panose="05000000000000000000" pitchFamily="2" charset="2"/>
+              <a:buChar char="§"/>
+            </a:pPr>
+            <a:r>
+              <a:rPr lang="de-DE" sz="2400" b="1" dirty="0"/>
+              <a:t>Beim Easy-Problem: Stagnation der Konfiguration A</a:t>
+            </a:r>
+          </a:p>
+          <a:p>
+            <a:pPr>
+              <a:buFont typeface="Wingdings" panose="05000000000000000000" pitchFamily="2" charset="2"/>
+              <a:buChar char="§"/>
+            </a:pPr>
+            <a:r>
+              <a:rPr lang="de-DE" sz="2400" b="1" dirty="0"/>
+              <a:t>Konfiguration C zeigt allgemein das robusteste Suchverhalten</a:t>
+            </a:r>
+          </a:p>
+        </p:txBody>
+      </p:sp>
+    </p:spTree>
+    <p:extLst>
+      <p:ext uri="{BB962C8B-B14F-4D97-AF65-F5344CB8AC3E}">
+        <p14:creationId xmlns:p14="http://schemas.microsoft.com/office/powerpoint/2010/main" val="3694890744"/>
+      </p:ext>
+    </p:extLst>
+  </p:cSld>
+  <p:clrMapOvr>
+    <a:masterClrMapping/>
+  </p:clrMapOvr>
+</p:sld>
+</file>
+
+<file path=ppt/slides/slide11.xml><?xml version="1.0" encoding="utf-8"?>
+<p:sld xmlns:a="http://schemas.openxmlformats.org/drawingml/2006/main" xmlns:r="http://schemas.openxmlformats.org/officeDocument/2006/relationships" xmlns:p="http://schemas.openxmlformats.org/presentationml/2006/main">
+  <p:cSld>
+    <p:spTree>
+      <p:nvGrpSpPr>
+        <p:cNvPr id="1" name=""/>
+        <p:cNvGrpSpPr/>
+        <p:nvPr/>
+      </p:nvGrpSpPr>
+      <p:grpSpPr>
+        <a:xfrm>
+          <a:off x="0" y="0"/>
+          <a:ext cx="0" cy="0"/>
+          <a:chOff x="0" y="0"/>
+          <a:chExt cx="0" cy="0"/>
+        </a:xfrm>
+      </p:grpSpPr>
+      <p:sp>
+        <p:nvSpPr>
+          <p:cNvPr id="2" name="Titel 1">
+            <a:extLst>
+              <a:ext uri="{FF2B5EF4-FFF2-40B4-BE49-F238E27FC236}">
                 <a16:creationId xmlns:a16="http://schemas.microsoft.com/office/drawing/2014/main" id="{F9D8922C-F139-2635-23A2-E1682F48C7CF}"/>
               </a:ext>
             </a:extLst>
@@ -4718,11 +8465,13 @@
             </p:nvSpPr>
             <p:spPr/>
             <p:txBody>
-              <a:bodyPr/>
+              <a:bodyPr>
+                <a:normAutofit/>
+              </a:bodyPr>
               <a:lstStyle/>
               <a:p>
                 <a:r>
-                  <a:rPr lang="de-DE" dirty="0">
+                  <a:rPr lang="de-DE" sz="2800" dirty="0">
                     <a:ea typeface="Cambria Math" panose="02040503050406030204" pitchFamily="18" charset="0"/>
                   </a:rPr>
                   <a:t>Wahl von </a:t>
@@ -4730,7 +8479,7 @@
                 <a14:m>
                   <m:oMath xmlns:m="http://schemas.openxmlformats.org/officeDocument/2006/math">
                     <m:r>
-                      <a:rPr lang="de-DE" i="1" smtClean="0">
+                      <a:rPr lang="de-DE" sz="2800" i="1" smtClean="0">
                         <a:latin typeface="Cambria Math" panose="02040503050406030204" pitchFamily="18" charset="0"/>
                         <a:ea typeface="Cambria Math" panose="02040503050406030204" pitchFamily="18" charset="0"/>
                       </a:rPr>
@@ -4739,13 +8488,13 @@
                   </m:oMath>
                 </a14:m>
                 <a:r>
-                  <a:rPr lang="de-DE" dirty="0"/>
+                  <a:rPr lang="de-DE" sz="2800" dirty="0"/>
                   <a:t> und </a:t>
                 </a:r>
                 <a14:m>
                   <m:oMath xmlns:m="http://schemas.openxmlformats.org/officeDocument/2006/math">
                     <m:r>
-                      <a:rPr lang="de-DE" i="1" smtClean="0">
+                      <a:rPr lang="de-DE" sz="2800" i="1" smtClean="0">
                         <a:latin typeface="Cambria Math" panose="02040503050406030204" pitchFamily="18" charset="0"/>
                         <a:ea typeface="Cambria Math" panose="02040503050406030204" pitchFamily="18" charset="0"/>
                       </a:rPr>
@@ -4753,7 +8502,7 @@
                     </m:r>
                   </m:oMath>
                 </a14:m>
-                <a:endParaRPr lang="de-DE" dirty="0"/>
+                <a:endParaRPr lang="de-DE" sz="2800" dirty="0"/>
               </a:p>
             </p:txBody>
           </p:sp>
@@ -4779,7 +8528,7 @@
               <a:blipFill>
                 <a:blip r:embed="rId2"/>
                 <a:stretch>
-                  <a:fillRect l="-1891" b="-17778"/>
+                  <a:fillRect l="-2482" b="-20741"/>
                 </a:stretch>
               </a:blipFill>
             </p:spPr>
@@ -4818,17 +8567,18 @@
             </p:nvSpPr>
             <p:spPr/>
             <p:txBody>
-              <a:bodyPr/>
+              <a:bodyPr>
+                <a:normAutofit/>
+              </a:bodyPr>
               <a:lstStyle/>
               <a:p>
-                <a:pPr>
-                  <a:buFont typeface="Wingdings" panose="05000000000000000000" pitchFamily="2" charset="2"/>
-                  <a:buChar char="§"/>
+                <a:pPr marL="0" indent="0">
+                  <a:buNone/>
                 </a:pPr>
                 <a14:m>
                   <m:oMath xmlns:m="http://schemas.openxmlformats.org/officeDocument/2006/math">
                     <m:r>
-                      <a:rPr lang="de-DE" i="1" smtClean="0">
+                      <a:rPr lang="de-DE" b="1" i="1" smtClean="0">
                         <a:latin typeface="Cambria Math" panose="02040503050406030204" pitchFamily="18" charset="0"/>
                         <a:ea typeface="Cambria Math" panose="02040503050406030204" pitchFamily="18" charset="0"/>
                       </a:rPr>
@@ -4837,7 +8587,7 @@
                   </m:oMath>
                 </a14:m>
                 <a:r>
-                  <a:rPr lang="de-DE" dirty="0"/>
+                  <a:rPr lang="de-DE" b="1" dirty="0"/>
                   <a:t> Bereiche [1 bis 2]</a:t>
                 </a:r>
               </a:p>
@@ -4847,17 +8597,17 @@
                   <a:buChar char="§"/>
                 </a:pPr>
                 <a:r>
-                  <a:rPr lang="de-DE" dirty="0"/>
+                  <a:rPr lang="de-DE" b="1" dirty="0"/>
                   <a:t>Groß </a:t>
                 </a:r>
                 <a:r>
-                  <a:rPr lang="de-DE" dirty="0">
+                  <a:rPr lang="de-DE" b="1" dirty="0">
                     <a:cs typeface="Courier New" panose="02070309020205020404" pitchFamily="49" charset="0"/>
                   </a:rPr>
                   <a:t>→ </a:t>
                 </a:r>
                 <a:r>
-                  <a:rPr lang="de-DE" dirty="0"/>
+                  <a:rPr lang="de-DE" b="1" dirty="0"/>
                   <a:t>Schnelle Konvergenz (einfache Probleme)</a:t>
                 </a:r>
               </a:p>
@@ -4867,29 +8617,36 @@
                   <a:buChar char="§"/>
                 </a:pPr>
                 <a:r>
-                  <a:rPr lang="de-DE" dirty="0"/>
+                  <a:rPr lang="de-DE" b="1" dirty="0"/>
                   <a:t>Klein </a:t>
                 </a:r>
                 <a:r>
-                  <a:rPr lang="de-DE" dirty="0">
+                  <a:rPr lang="de-DE" b="1" dirty="0">
                     <a:cs typeface="Courier New" panose="02070309020205020404" pitchFamily="49" charset="0"/>
                   </a:rPr>
-                  <a:t>→ </a:t>
+                  <a:t>→ M</a:t>
                 </a:r>
                 <a:r>
-                  <a:rPr lang="de-DE" dirty="0"/>
-                  <a:t>mehr Exploration (komplexer Probleme)</a:t>
+                  <a:rPr lang="de-DE" b="1" dirty="0"/>
+                  <a:t>ehr Exploration </a:t>
+                </a:r>
+                <a:r>
+                  <a:rPr lang="de-DE" b="1"/>
+                  <a:t>(komplexe </a:t>
+                </a:r>
+                <a:r>
+                  <a:rPr lang="de-DE" b="1" dirty="0"/>
+                  <a:t>Probleme)</a:t>
                 </a:r>
               </a:p>
               <a:p>
-                <a:pPr>
-                  <a:buFont typeface="Wingdings" panose="05000000000000000000" pitchFamily="2" charset="2"/>
-                  <a:buChar char="§"/>
+                <a:pPr marL="0" indent="0">
+                  <a:buNone/>
                 </a:pPr>
                 <a14:m>
                   <m:oMath xmlns:m="http://schemas.openxmlformats.org/officeDocument/2006/math">
                     <m:r>
-                      <a:rPr lang="de-DE" i="1">
+                      <a:rPr lang="de-DE" b="1" i="1">
                         <a:latin typeface="Cambria Math" panose="02040503050406030204" pitchFamily="18" charset="0"/>
                         <a:ea typeface="Cambria Math" panose="02040503050406030204" pitchFamily="18" charset="0"/>
                       </a:rPr>
@@ -4898,7 +8655,7 @@
                   </m:oMath>
                 </a14:m>
                 <a:r>
-                  <a:rPr lang="de-DE" dirty="0"/>
+                  <a:rPr lang="de-DE" b="1" dirty="0"/>
                   <a:t> Bereiche [2 bis 5]</a:t>
                 </a:r>
               </a:p>
@@ -4908,18 +8665,18 @@
                   <a:buChar char="§"/>
                 </a:pPr>
                 <a:r>
-                  <a:rPr lang="de-DE" dirty="0"/>
+                  <a:rPr lang="de-DE" b="1" dirty="0"/>
                   <a:t>Groß </a:t>
                 </a:r>
                 <a:r>
-                  <a:rPr lang="de-DE" dirty="0">
+                  <a:rPr lang="de-DE" b="1" dirty="0">
                     <a:cs typeface="Courier New" panose="02070309020205020404" pitchFamily="49" charset="0"/>
                   </a:rPr>
                   <a:t>→  </a:t>
                 </a:r>
                 <a:r>
-                  <a:rPr lang="de-DE" dirty="0"/>
-                  <a:t>Hoher Selektionsdruck (kleine Effizienzunterschieden)</a:t>
+                  <a:rPr lang="de-DE" b="1" dirty="0"/>
+                  <a:t>Hoher Selektionsdruck (kleine Effizienzunterschiede)</a:t>
                 </a:r>
               </a:p>
               <a:p>
@@ -4928,18 +8685,18 @@
                   <a:buChar char="§"/>
                 </a:pPr>
                 <a:r>
-                  <a:rPr lang="de-DE" dirty="0"/>
+                  <a:rPr lang="de-DE" b="1" dirty="0"/>
                   <a:t>Klein </a:t>
                 </a:r>
                 <a:r>
-                  <a:rPr lang="de-DE" dirty="0">
+                  <a:rPr lang="de-DE" b="1" dirty="0">
                     <a:cs typeface="Courier New" panose="02070309020205020404" pitchFamily="49" charset="0"/>
                   </a:rPr>
                   <a:t>→</a:t>
                 </a:r>
                 <a:r>
-                  <a:rPr lang="de-DE" dirty="0"/>
-                  <a:t> mehr Exploration</a:t>
+                  <a:rPr lang="de-DE" b="1" dirty="0"/>
+                  <a:t> Mehr Exploration</a:t>
                 </a:r>
               </a:p>
             </p:txBody>
@@ -4966,7 +8723,7 @@
               <a:blipFill>
                 <a:blip r:embed="rId3"/>
                 <a:stretch>
-                  <a:fillRect t="-2980" b="-166"/>
+                  <a:fillRect t="-2980" r="-2009" b="-166"/>
                 </a:stretch>
               </a:blipFill>
             </p:spPr>
@@ -5003,11 +8760,13 @@
         </p:nvSpPr>
         <p:spPr/>
         <p:txBody>
-          <a:bodyPr/>
+          <a:bodyPr>
+            <a:noAutofit/>
+          </a:bodyPr>
           <a:lstStyle/>
           <a:p>
             <a:r>
-              <a:rPr lang="de-DE" dirty="0"/>
+              <a:rPr lang="de-DE" sz="2800" dirty="0"/>
               <a:t>Wahl von Gruppengröße und Verdunstungsrate</a:t>
             </a:r>
           </a:p>
@@ -5029,18 +8788,50 @@
             <p:ph sz="quarter" idx="4"/>
           </p:nvPr>
         </p:nvSpPr>
-        <p:spPr/>
+        <p:spPr>
+          <a:xfrm>
+            <a:off x="6172199" y="2505075"/>
+            <a:ext cx="5457825" cy="3684588"/>
+          </a:xfrm>
+        </p:spPr>
         <p:txBody>
-          <a:bodyPr/>
+          <a:bodyPr>
+            <a:normAutofit/>
+          </a:bodyPr>
           <a:lstStyle/>
+          <a:p>
+            <a:pPr marL="0" indent="0">
+              <a:buNone/>
+            </a:pPr>
+            <a:r>
+              <a:rPr lang="de-DE" b="1" dirty="0"/>
+              <a:t>Gruppengröße</a:t>
+            </a:r>
+          </a:p>
+          <a:p>
+            <a:pPr lvl="1">
+              <a:buFont typeface="Wingdings" panose="05000000000000000000" pitchFamily="2" charset="2"/>
+              <a:buChar char="§"/>
+            </a:pPr>
+            <a:r>
+              <a:rPr lang="de-DE" b="1" dirty="0"/>
+              <a:t>Große Gruppen bringen mehr Varianz pro Iteration, sind aber rechenintensiver</a:t>
+            </a:r>
+          </a:p>
           <a:p>
             <a:pPr>
               <a:buFont typeface="Wingdings" panose="05000000000000000000" pitchFamily="2" charset="2"/>
               <a:buChar char="§"/>
             </a:pPr>
-            <a:r>
-              <a:rPr lang="de-DE" dirty="0"/>
-              <a:t>Gruppengröße</a:t>
+            <a:endParaRPr lang="de-DE" b="1" dirty="0"/>
+          </a:p>
+          <a:p>
+            <a:pPr marL="0" indent="0">
+              <a:buNone/>
+            </a:pPr>
+            <a:r>
+              <a:rPr lang="de-DE" b="1" dirty="0"/>
+              <a:t>Verdunstungsrate</a:t>
             </a:r>
           </a:p>
           <a:p>
@@ -5049,24 +8840,8 @@
               <a:buChar char="§"/>
             </a:pPr>
             <a:r>
-              <a:rPr lang="de-DE" dirty="0"/>
-              <a:t>Große Gruppen bringen </a:t>
-            </a:r>
-            <a:r>
-              <a:rPr lang="de-DE" dirty="0">
-                <a:cs typeface="Courier New" panose="02070309020205020404" pitchFamily="49" charset="0"/>
-              </a:rPr>
-              <a:t>mehr Varianz pro Iteration aber Rechenintensiver</a:t>
-            </a:r>
-          </a:p>
-          <a:p>
-            <a:pPr>
-              <a:buFont typeface="Wingdings" panose="05000000000000000000" pitchFamily="2" charset="2"/>
-              <a:buChar char="§"/>
-            </a:pPr>
-            <a:r>
-              <a:rPr lang="de-DE" dirty="0"/>
-              <a:t>Verdunstungsrate</a:t>
+              <a:rPr lang="de-DE" b="1" dirty="0"/>
+              <a:t>Hoch → Mehr Exploration</a:t>
             </a:r>
           </a:p>
           <a:p>
@@ -5075,23 +8850,12 @@
               <a:buChar char="§"/>
             </a:pPr>
             <a:r>
-              <a:rPr lang="de-DE" dirty="0">
-                <a:cs typeface="Courier New" panose="02070309020205020404" pitchFamily="49" charset="0"/>
-              </a:rPr>
-              <a:t>Groß → mehr Exploration</a:t>
-            </a:r>
-          </a:p>
-          <a:p>
-            <a:pPr lvl="1">
-              <a:buFont typeface="Wingdings" panose="05000000000000000000" pitchFamily="2" charset="2"/>
-              <a:buChar char="§"/>
-            </a:pPr>
-            <a:r>
-              <a:rPr lang="de-DE" dirty="0">
-                <a:cs typeface="Courier New" panose="02070309020205020404" pitchFamily="49" charset="0"/>
-              </a:rPr>
-              <a:t>Klein → schnellere Konvergenz</a:t>
-            </a:r>
+              <a:rPr lang="de-DE" b="1" dirty="0"/>
+              <a:t>Niedrig → Schnellere Konvergenz</a:t>
+            </a:r>
+            <a:endParaRPr lang="de-DE" b="1" dirty="0">
+              <a:cs typeface="Courier New" panose="02070309020205020404" pitchFamily="49" charset="0"/>
+            </a:endParaRPr>
           </a:p>
         </p:txBody>
       </p:sp>
@@ -5117,8 +8881,8 @@
           <a:lstStyle/>
           <a:p>
             <a:r>
-              <a:rPr lang="de-DE"/>
-              <a:t>22.03.2025</a:t>
+              <a:rPr lang="de-DE" dirty="0"/>
+              <a:t>20.06.2026</a:t>
             </a:r>
           </a:p>
         </p:txBody>
@@ -5174,7 +8938,7 @@
           <a:p>
             <a:fld id="{F20E45F0-5197-4D99-A0B0-CC09E9235134}" type="slidenum">
               <a:rPr lang="de-DE" smtClean="0"/>
-              <a:t>10</a:t>
+              <a:t>11</a:t>
             </a:fld>
             <a:endParaRPr lang="de-DE"/>
           </a:p>
@@ -5193,7 +8957,7 @@
 </p:sld>
 </file>
 
-<file path=ppt/slides/slide11.xml><?xml version="1.0" encoding="utf-8"?>
+<file path=ppt/slides/slide12.xml><?xml version="1.0" encoding="utf-8"?>
 <p:sld xmlns:a="http://schemas.openxmlformats.org/drawingml/2006/main" xmlns:r="http://schemas.openxmlformats.org/officeDocument/2006/relationships" xmlns:p="http://schemas.openxmlformats.org/presentationml/2006/main">
   <p:cSld>
     <p:spTree>
@@ -5298,7 +9062,7 @@
           <p:cNvPr id="2" name="Titel 1">
             <a:extLst>
               <a:ext uri="{FF2B5EF4-FFF2-40B4-BE49-F238E27FC236}">
-                <a16:creationId xmlns:a16="http://schemas.microsoft.com/office/drawing/2014/main" id="{24BE5F3B-E5A3-3B61-1565-BD3142A65EE2}"/>
+                <a16:creationId xmlns:a16="http://schemas.microsoft.com/office/drawing/2014/main" id="{ABC52B9C-6788-2245-06B9-34B408CC6566}"/>
               </a:ext>
             </a:extLst>
           </p:cNvPr>
@@ -5316,17 +9080,48 @@
           <a:p>
             <a:r>
               <a:rPr lang="de-DE" dirty="0"/>
-              <a:t>Ortsabhängiger Ant-Cycle Algorithmus</a:t>
+              <a:t>Inhaltsverzeichnis</a:t>
             </a:r>
           </a:p>
         </p:txBody>
       </p:sp>
+      <p:graphicFrame>
+        <p:nvGraphicFramePr>
+          <p:cNvPr id="7" name="Inhaltsplatzhalter 6">
+            <a:extLst>
+              <a:ext uri="{FF2B5EF4-FFF2-40B4-BE49-F238E27FC236}">
+                <a16:creationId xmlns:a16="http://schemas.microsoft.com/office/drawing/2014/main" id="{15F904F0-89E1-6A1F-16BC-6D123450547E}"/>
+              </a:ext>
+            </a:extLst>
+          </p:cNvPr>
+          <p:cNvGraphicFramePr>
+            <a:graphicFrameLocks noGrp="1"/>
+          </p:cNvGraphicFramePr>
+          <p:nvPr>
+            <p:ph idx="1"/>
+            <p:extLst>
+              <p:ext uri="{D42A27DB-BD31-4B8C-83A1-F6EECF244321}">
+                <p14:modId xmlns:p14="http://schemas.microsoft.com/office/powerpoint/2010/main" val="3299480029"/>
+              </p:ext>
+            </p:extLst>
+          </p:nvPr>
+        </p:nvGraphicFramePr>
+        <p:xfrm>
+          <a:off x="838200" y="1454227"/>
+          <a:ext cx="10515600" cy="4722736"/>
+        </p:xfrm>
+        <a:graphic>
+          <a:graphicData uri="http://schemas.openxmlformats.org/drawingml/2006/diagram">
+            <dgm:relIds xmlns:dgm="http://schemas.openxmlformats.org/drawingml/2006/diagram" xmlns:r="http://schemas.openxmlformats.org/officeDocument/2006/relationships" r:dm="rId2" r:lo="rId3" r:qs="rId4" r:cs="rId5"/>
+          </a:graphicData>
+        </a:graphic>
+      </p:graphicFrame>
       <p:sp>
         <p:nvSpPr>
           <p:cNvPr id="4" name="Datumsplatzhalter 3">
             <a:extLst>
               <a:ext uri="{FF2B5EF4-FFF2-40B4-BE49-F238E27FC236}">
-                <a16:creationId xmlns:a16="http://schemas.microsoft.com/office/drawing/2014/main" id="{1419ED52-81D0-EE21-5D00-FADC1EFF0FD8}"/>
+                <a16:creationId xmlns:a16="http://schemas.microsoft.com/office/drawing/2014/main" id="{32B41879-BE78-2348-320D-BC8C88A10760}"/>
               </a:ext>
             </a:extLst>
           </p:cNvPr>
@@ -5343,10 +9138,9 @@
           <a:lstStyle/>
           <a:p>
             <a:r>
-              <a:rPr lang="de-DE"/>
+              <a:rPr lang="de-DE" dirty="0"/>
               <a:t>20.06.2026</a:t>
             </a:r>
-            <a:endParaRPr lang="de-DE" dirty="0"/>
           </a:p>
         </p:txBody>
       </p:sp>
@@ -5355,7 +9149,7 @@
           <p:cNvPr id="5" name="Fußzeilenplatzhalter 4">
             <a:extLst>
               <a:ext uri="{FF2B5EF4-FFF2-40B4-BE49-F238E27FC236}">
-                <a16:creationId xmlns:a16="http://schemas.microsoft.com/office/drawing/2014/main" id="{4B86595D-937A-33F9-036F-70B78D29DB24}"/>
+                <a16:creationId xmlns:a16="http://schemas.microsoft.com/office/drawing/2014/main" id="{7905E73F-C8A2-688C-A1EA-86FF0ECC3A1D}"/>
               </a:ext>
             </a:extLst>
           </p:cNvPr>
@@ -5383,7 +9177,7 @@
           <p:cNvPr id="6" name="Foliennummernplatzhalter 5">
             <a:extLst>
               <a:ext uri="{FF2B5EF4-FFF2-40B4-BE49-F238E27FC236}">
-                <a16:creationId xmlns:a16="http://schemas.microsoft.com/office/drawing/2014/main" id="{CC58F452-653A-3F47-A4B5-8B41D2D4D307}"/>
+                <a16:creationId xmlns:a16="http://schemas.microsoft.com/office/drawing/2014/main" id="{65542306-1193-7968-D5B1-036BCE10D143}"/>
               </a:ext>
             </a:extLst>
           </p:cNvPr>
@@ -5402,6 +9196,149 @@
             <a:fld id="{F20E45F0-5197-4D99-A0B0-CC09E9235134}" type="slidenum">
               <a:rPr lang="de-DE" smtClean="0"/>
               <a:t>2</a:t>
+            </a:fld>
+            <a:endParaRPr lang="de-DE"/>
+          </a:p>
+        </p:txBody>
+      </p:sp>
+    </p:spTree>
+    <p:extLst>
+      <p:ext uri="{BB962C8B-B14F-4D97-AF65-F5344CB8AC3E}">
+        <p14:creationId xmlns:p14="http://schemas.microsoft.com/office/powerpoint/2010/main" val="699465919"/>
+      </p:ext>
+    </p:extLst>
+  </p:cSld>
+  <p:clrMapOvr>
+    <a:masterClrMapping/>
+  </p:clrMapOvr>
+</p:sld>
+</file>
+
+<file path=ppt/slides/slide3.xml><?xml version="1.0" encoding="utf-8"?>
+<p:sld xmlns:a="http://schemas.openxmlformats.org/drawingml/2006/main" xmlns:r="http://schemas.openxmlformats.org/officeDocument/2006/relationships" xmlns:p="http://schemas.openxmlformats.org/presentationml/2006/main">
+  <p:cSld>
+    <p:spTree>
+      <p:nvGrpSpPr>
+        <p:cNvPr id="1" name=""/>
+        <p:cNvGrpSpPr/>
+        <p:nvPr/>
+      </p:nvGrpSpPr>
+      <p:grpSpPr>
+        <a:xfrm>
+          <a:off x="0" y="0"/>
+          <a:ext cx="0" cy="0"/>
+          <a:chOff x="0" y="0"/>
+          <a:chExt cx="0" cy="0"/>
+        </a:xfrm>
+      </p:grpSpPr>
+      <p:sp>
+        <p:nvSpPr>
+          <p:cNvPr id="2" name="Titel 1">
+            <a:extLst>
+              <a:ext uri="{FF2B5EF4-FFF2-40B4-BE49-F238E27FC236}">
+                <a16:creationId xmlns:a16="http://schemas.microsoft.com/office/drawing/2014/main" id="{24BE5F3B-E5A3-3B61-1565-BD3142A65EE2}"/>
+              </a:ext>
+            </a:extLst>
+          </p:cNvPr>
+          <p:cNvSpPr>
+            <a:spLocks noGrp="1"/>
+          </p:cNvSpPr>
+          <p:nvPr>
+            <p:ph type="title"/>
+          </p:nvPr>
+        </p:nvSpPr>
+        <p:spPr/>
+        <p:txBody>
+          <a:bodyPr/>
+          <a:lstStyle/>
+          <a:p>
+            <a:r>
+              <a:rPr lang="de-DE" dirty="0"/>
+              <a:t>Ortsabhängiger Ant-Cycle Algorithmus</a:t>
+            </a:r>
+          </a:p>
+        </p:txBody>
+      </p:sp>
+      <p:sp>
+        <p:nvSpPr>
+          <p:cNvPr id="4" name="Datumsplatzhalter 3">
+            <a:extLst>
+              <a:ext uri="{FF2B5EF4-FFF2-40B4-BE49-F238E27FC236}">
+                <a16:creationId xmlns:a16="http://schemas.microsoft.com/office/drawing/2014/main" id="{1419ED52-81D0-EE21-5D00-FADC1EFF0FD8}"/>
+              </a:ext>
+            </a:extLst>
+          </p:cNvPr>
+          <p:cNvSpPr>
+            <a:spLocks noGrp="1"/>
+          </p:cNvSpPr>
+          <p:nvPr>
+            <p:ph type="dt" sz="half" idx="10"/>
+          </p:nvPr>
+        </p:nvSpPr>
+        <p:spPr/>
+        <p:txBody>
+          <a:bodyPr/>
+          <a:lstStyle/>
+          <a:p>
+            <a:r>
+              <a:rPr lang="de-DE" dirty="0"/>
+              <a:t>20.06.2026</a:t>
+            </a:r>
+          </a:p>
+        </p:txBody>
+      </p:sp>
+      <p:sp>
+        <p:nvSpPr>
+          <p:cNvPr id="5" name="Fußzeilenplatzhalter 4">
+            <a:extLst>
+              <a:ext uri="{FF2B5EF4-FFF2-40B4-BE49-F238E27FC236}">
+                <a16:creationId xmlns:a16="http://schemas.microsoft.com/office/drawing/2014/main" id="{4B86595D-937A-33F9-036F-70B78D29DB24}"/>
+              </a:ext>
+            </a:extLst>
+          </p:cNvPr>
+          <p:cNvSpPr>
+            <a:spLocks noGrp="1"/>
+          </p:cNvSpPr>
+          <p:nvPr>
+            <p:ph type="ftr" sz="quarter" idx="11"/>
+          </p:nvPr>
+        </p:nvSpPr>
+        <p:spPr/>
+        <p:txBody>
+          <a:bodyPr/>
+          <a:lstStyle/>
+          <a:p>
+            <a:r>
+              <a:rPr lang="de-DE"/>
+              <a:t>Niko Kläsener</a:t>
+            </a:r>
+          </a:p>
+        </p:txBody>
+      </p:sp>
+      <p:sp>
+        <p:nvSpPr>
+          <p:cNvPr id="6" name="Foliennummernplatzhalter 5">
+            <a:extLst>
+              <a:ext uri="{FF2B5EF4-FFF2-40B4-BE49-F238E27FC236}">
+                <a16:creationId xmlns:a16="http://schemas.microsoft.com/office/drawing/2014/main" id="{CC58F452-653A-3F47-A4B5-8B41D2D4D307}"/>
+              </a:ext>
+            </a:extLst>
+          </p:cNvPr>
+          <p:cNvSpPr>
+            <a:spLocks noGrp="1"/>
+          </p:cNvSpPr>
+          <p:nvPr>
+            <p:ph type="sldNum" sz="quarter" idx="12"/>
+          </p:nvPr>
+        </p:nvSpPr>
+        <p:spPr/>
+        <p:txBody>
+          <a:bodyPr/>
+          <a:lstStyle/>
+          <a:p>
+            <a:fld id="{F20E45F0-5197-4D99-A0B0-CC09E9235134}" type="slidenum">
+              <a:rPr lang="de-DE" smtClean="0"/>
+              <a:t>3</a:t>
             </a:fld>
             <a:endParaRPr lang="de-DE"/>
           </a:p>
@@ -5423,7 +9360,7 @@
             </p:nvSpPr>
             <p:spPr>
               <a:xfrm>
-                <a:off x="3360698" y="3590762"/>
+                <a:off x="3360352" y="3238032"/>
                 <a:ext cx="5523820" cy="1510222"/>
               </a:xfrm>
               <a:prstGeom prst="rect">
@@ -5818,7 +9755,7 @@
             </p:nvSpPr>
             <p:spPr>
               <a:xfrm>
-                <a:off x="3360698" y="3590762"/>
+                <a:off x="3360352" y="3238032"/>
                 <a:ext cx="5523820" cy="1510222"/>
               </a:xfrm>
               <a:prstGeom prst="rect">
@@ -5860,8 +9797,8 @@
         </p:nvSpPr>
         <p:spPr>
           <a:xfrm>
-            <a:off x="767675" y="4975351"/>
-            <a:ext cx="3059748" cy="1200329"/>
+            <a:off x="47923" y="5226723"/>
+            <a:ext cx="5714962" cy="1200329"/>
           </a:xfrm>
           <a:prstGeom prst="rect">
             <a:avLst/>
@@ -5889,27 +9826,27 @@
           <a:p>
             <a:r>
               <a:rPr lang="de-DE" sz="2400" dirty="0"/>
-              <a:t>Alle möglichen Items:</a:t>
-            </a:r>
-          </a:p>
-          <a:p>
-            <a:pPr marL="342900" indent="-342900">
+              <a:t>Alle möglichen Items (Kandidatenmenge):</a:t>
+            </a:r>
+          </a:p>
+          <a:p>
+            <a:pPr marL="285750" indent="-285750">
               <a:buFont typeface="Wingdings" panose="05000000000000000000" pitchFamily="2" charset="2"/>
               <a:buChar char="§"/>
             </a:pPr>
             <a:r>
               <a:rPr lang="de-DE" sz="2400" dirty="0"/>
-              <a:t>nicht im Rucksack</a:t>
-            </a:r>
-          </a:p>
-          <a:p>
-            <a:pPr marL="342900" indent="-342900">
+              <a:t>Nicht im Rucksack</a:t>
+            </a:r>
+          </a:p>
+          <a:p>
+            <a:pPr marL="285750" indent="-285750">
               <a:buFont typeface="Wingdings" panose="05000000000000000000" pitchFamily="2" charset="2"/>
               <a:buChar char="§"/>
             </a:pPr>
             <a:r>
               <a:rPr lang="de-DE" sz="2400" dirty="0"/>
-              <a:t>nicht zu groß</a:t>
+              <a:t>Nicht zu groß</a:t>
             </a:r>
           </a:p>
         </p:txBody>
@@ -6271,7 +10208,7 @@
         <p:spPr>
           <a:xfrm>
             <a:off x="9339812" y="3717463"/>
-            <a:ext cx="2683042" cy="830997"/>
+            <a:ext cx="2518813" cy="1200329"/>
           </a:xfrm>
           <a:prstGeom prst="rect">
             <a:avLst/>
@@ -6292,20 +10229,20 @@
           </a:fontRef>
         </p:style>
         <p:txBody>
-          <a:bodyPr wrap="none" rtlCol="0">
+          <a:bodyPr wrap="square" rtlCol="0">
             <a:spAutoFit/>
           </a:bodyPr>
           <a:lstStyle/>
           <a:p>
             <a:r>
               <a:rPr lang="de-DE" sz="2400" dirty="0"/>
-              <a:t>Sensitivität auf die </a:t>
+              <a:t>Sensitivität gegenüber </a:t>
             </a:r>
           </a:p>
           <a:p>
             <a:r>
               <a:rPr lang="de-DE" sz="2400" dirty="0"/>
-              <a:t>Heuristik</a:t>
+              <a:t>der Heuristik</a:t>
             </a:r>
           </a:p>
         </p:txBody>
@@ -6325,7 +10262,7 @@
         <p:spPr>
           <a:xfrm>
             <a:off x="6362305" y="1445302"/>
-            <a:ext cx="2120309" cy="1200329"/>
+            <a:ext cx="2248295" cy="1200329"/>
           </a:xfrm>
           <a:prstGeom prst="rect">
             <a:avLst/>
@@ -6353,19 +10290,13 @@
           <a:p>
             <a:r>
               <a:rPr lang="de-DE" sz="2400" dirty="0"/>
-              <a:t>Sensitivität auf die </a:t>
-            </a:r>
-          </a:p>
-          <a:p>
-            <a:r>
-              <a:rPr lang="de-DE" sz="2400" dirty="0"/>
-              <a:t>Pheromone</a:t>
+              <a:t>Sensitivität   gegenüber den Pheromonen</a:t>
             </a:r>
           </a:p>
         </p:txBody>
       </p:sp>
-      <mc:AlternateContent xmlns:mc="http://schemas.openxmlformats.org/markup-compatibility/2006" xmlns:a14="http://schemas.microsoft.com/office/drawing/2010/main">
-        <mc:Choice Requires="a14">
+      <mc:AlternateContent xmlns:mc="http://schemas.openxmlformats.org/markup-compatibility/2006">
+        <mc:Choice xmlns:a14="http://schemas.microsoft.com/office/drawing/2010/main" Requires="a14">
           <p:sp>
             <p:nvSpPr>
               <p:cNvPr id="13" name="Textfeld 12">
@@ -6381,7 +10312,7 @@
             <p:spPr>
               <a:xfrm>
                 <a:off x="29563" y="1445302"/>
-                <a:ext cx="5788752" cy="1419556"/>
+                <a:ext cx="5788752" cy="1399101"/>
               </a:xfrm>
               <a:prstGeom prst="rect">
                 <a:avLst/>
@@ -6451,264 +10382,262 @@
                         </a:rPr>
                         <m:t>←</m:t>
                       </m:r>
+                      <m:sSub>
+                        <m:sSubPr>
+                          <m:ctrlPr>
+                            <a:rPr lang="de-DE" sz="2400" i="1">
+                              <a:latin typeface="Cambria Math" panose="02040503050406030204" pitchFamily="18" charset="0"/>
+                            </a:rPr>
+                          </m:ctrlPr>
+                        </m:sSubPr>
+                        <m:e>
+                          <m:r>
+                            <a:rPr lang="de-DE" sz="2400" i="1">
+                              <a:latin typeface="Cambria Math" panose="02040503050406030204" pitchFamily="18" charset="0"/>
+                            </a:rPr>
+                            <m:t>𝜏</m:t>
+                          </m:r>
+                        </m:e>
+                        <m:sub>
+                          <m:r>
+                            <a:rPr lang="de-DE" sz="2400" i="1">
+                              <a:latin typeface="Cambria Math" panose="02040503050406030204" pitchFamily="18" charset="0"/>
+                            </a:rPr>
+                            <m:t>𝑖</m:t>
+                          </m:r>
+                        </m:sub>
+                      </m:sSub>
+                      <m:r>
+                        <a:rPr lang="de-DE" sz="2400" b="0" i="1" smtClean="0">
+                          <a:latin typeface="Cambria Math" panose="02040503050406030204" pitchFamily="18" charset="0"/>
+                        </a:rPr>
+                        <m:t>∗</m:t>
+                      </m:r>
                       <m:d>
                         <m:dPr>
-                          <m:begChr m:val="["/>
-                          <m:endChr m:val="]"/>
                           <m:ctrlPr>
-                            <a:rPr lang="de-DE" sz="2400" i="1" smtClean="0">
+                            <a:rPr lang="de-DE" sz="2400" b="0" i="1" smtClean="0">
                               <a:latin typeface="Cambria Math" panose="02040503050406030204" pitchFamily="18" charset="0"/>
                             </a:rPr>
                           </m:ctrlPr>
                         </m:dPr>
                         <m:e>
-                          <m:sSub>
-                            <m:sSubPr>
+                          <m:r>
+                            <a:rPr lang="de-DE" sz="2400" b="0" i="1" smtClean="0">
+                              <a:latin typeface="Cambria Math" panose="02040503050406030204" pitchFamily="18" charset="0"/>
+                            </a:rPr>
+                            <m:t>1−</m:t>
+                          </m:r>
+                          <m:r>
+                            <a:rPr lang="de-DE" sz="2400" b="0" i="1" smtClean="0">
+                              <a:latin typeface="Cambria Math" panose="02040503050406030204" pitchFamily="18" charset="0"/>
+                              <a:ea typeface="Cambria Math" panose="02040503050406030204" pitchFamily="18" charset="0"/>
+                            </a:rPr>
+                            <m:t>𝜌</m:t>
+                          </m:r>
+                        </m:e>
+                      </m:d>
+                      <m:r>
+                        <a:rPr lang="de-DE" sz="2400" b="0" i="1" smtClean="0">
+                          <a:latin typeface="Cambria Math" panose="02040503050406030204" pitchFamily="18" charset="0"/>
+                          <a:ea typeface="Cambria Math" panose="02040503050406030204" pitchFamily="18" charset="0"/>
+                        </a:rPr>
+                        <m:t>+</m:t>
+                      </m:r>
+                      <m:nary>
+                        <m:naryPr>
+                          <m:chr m:val="∑"/>
+                          <m:supHide m:val="on"/>
+                          <m:ctrlPr>
+                            <a:rPr lang="de-DE" sz="2400" i="1">
+                              <a:latin typeface="Cambria Math" panose="02040503050406030204" pitchFamily="18" charset="0"/>
+                            </a:rPr>
+                          </m:ctrlPr>
+                        </m:naryPr>
+                        <m:sub>
+                          <m:r>
+                            <a:rPr lang="de-DE" sz="2400" i="1">
+                              <a:latin typeface="Cambria Math" panose="02040503050406030204" pitchFamily="18" charset="0"/>
+                            </a:rPr>
+                            <m:t>𝑘</m:t>
+                          </m:r>
+                          <m:r>
+                            <a:rPr lang="de-DE" sz="2400" i="1">
+                              <a:latin typeface="Cambria Math" panose="02040503050406030204" pitchFamily="18" charset="0"/>
+                            </a:rPr>
+                            <m:t>∈</m:t>
+                          </m:r>
+                          <m:r>
+                            <m:rPr>
+                              <m:nor/>
+                            </m:rPr>
+                            <a:rPr lang="de-DE" sz="2400">
+                              <a:latin typeface="Cambria Math" panose="02040503050406030204" pitchFamily="18" charset="0"/>
+                            </a:rPr>
+                            <m:t>A</m:t>
+                          </m:r>
+                          <m:r>
+                            <a:rPr lang="de-DE" sz="2400" i="1">
+                              <a:latin typeface="Cambria Math" panose="02040503050406030204" pitchFamily="18" charset="0"/>
+                            </a:rPr>
+                            <m:t>𝑛𝑡</m:t>
+                          </m:r>
+                        </m:sub>
+                        <m:sup/>
+                        <m:e>
+                          <m:f>
+                            <m:fPr>
                               <m:ctrlPr>
                                 <a:rPr lang="de-DE" sz="2400" i="1">
                                   <a:latin typeface="Cambria Math" panose="02040503050406030204" pitchFamily="18" charset="0"/>
                                 </a:rPr>
                               </m:ctrlPr>
-                            </m:sSubPr>
-                            <m:e>
-                              <m:r>
-                                <a:rPr lang="de-DE" sz="2400" i="1">
-                                  <a:latin typeface="Cambria Math" panose="02040503050406030204" pitchFamily="18" charset="0"/>
-                                </a:rPr>
-                                <m:t>𝜏</m:t>
-                              </m:r>
-                            </m:e>
-                            <m:sub>
-                              <m:r>
-                                <a:rPr lang="de-DE" sz="2400" i="1">
-                                  <a:latin typeface="Cambria Math" panose="02040503050406030204" pitchFamily="18" charset="0"/>
-                                </a:rPr>
-                                <m:t>𝑖</m:t>
-                              </m:r>
-                            </m:sub>
-                          </m:sSub>
-                          <m:r>
-                            <a:rPr lang="de-DE" sz="2400" i="1">
-                              <a:latin typeface="Cambria Math" panose="02040503050406030204" pitchFamily="18" charset="0"/>
-                            </a:rPr>
-                            <m:t>+</m:t>
-                          </m:r>
-                          <m:nary>
-                            <m:naryPr>
-                              <m:chr m:val="∑"/>
-                              <m:supHide m:val="on"/>
-                              <m:ctrlPr>
-                                <a:rPr lang="de-DE" sz="2400" i="1">
-                                  <a:latin typeface="Cambria Math" panose="02040503050406030204" pitchFamily="18" charset="0"/>
-                                </a:rPr>
-                              </m:ctrlPr>
-                            </m:naryPr>
-                            <m:sub>
-                              <m:r>
-                                <a:rPr lang="de-DE" sz="2400" i="1">
-                                  <a:latin typeface="Cambria Math" panose="02040503050406030204" pitchFamily="18" charset="0"/>
-                                </a:rPr>
-                                <m:t>𝑘</m:t>
-                              </m:r>
-                              <m:r>
-                                <a:rPr lang="de-DE" sz="2400" i="1">
-                                  <a:latin typeface="Cambria Math" panose="02040503050406030204" pitchFamily="18" charset="0"/>
-                                </a:rPr>
-                                <m:t>∈</m:t>
-                              </m:r>
-                              <m:r>
-                                <m:rPr>
-                                  <m:nor/>
-                                </m:rPr>
-                                <a:rPr lang="de-DE" sz="2400">
-                                  <a:latin typeface="Cambria Math" panose="02040503050406030204" pitchFamily="18" charset="0"/>
-                                </a:rPr>
-                                <m:t>A</m:t>
-                              </m:r>
-                              <m:r>
-                                <a:rPr lang="de-DE" sz="2400" i="1">
-                                  <a:latin typeface="Cambria Math" panose="02040503050406030204" pitchFamily="18" charset="0"/>
-                                </a:rPr>
-                                <m:t>𝑛𝑡</m:t>
-                              </m:r>
-                            </m:sub>
-                            <m:sup/>
-                            <m:e>
-                              <m:f>
-                                <m:fPr>
+                            </m:fPr>
+                            <m:num>
+                              <m:sSub>
+                                <m:sSubPr>
                                   <m:ctrlPr>
                                     <a:rPr lang="de-DE" sz="2400" i="1">
                                       <a:latin typeface="Cambria Math" panose="02040503050406030204" pitchFamily="18" charset="0"/>
                                     </a:rPr>
                                   </m:ctrlPr>
-                                </m:fPr>
-                                <m:num>
-                                  <m:sSub>
-                                    <m:sSubPr>
+                                </m:sSubPr>
+                                <m:e>
+                                  <m:r>
+                                    <m:rPr>
+                                      <m:nor/>
+                                    </m:rPr>
+                                    <a:rPr lang="de-DE" sz="2400">
+                                      <a:latin typeface="Cambria Math" panose="02040503050406030204" pitchFamily="18" charset="0"/>
+                                    </a:rPr>
+                                    <m:t>Total</m:t>
+                                  </m:r>
+                                  <m:r>
+                                    <m:rPr>
+                                      <m:nor/>
+                                    </m:rPr>
+                                    <a:rPr lang="de-DE" sz="2400">
+                                      <a:latin typeface="Cambria Math" panose="02040503050406030204" pitchFamily="18" charset="0"/>
+                                    </a:rPr>
+                                    <m:t> </m:t>
+                                  </m:r>
+                                  <m:r>
+                                    <a:rPr lang="de-DE" sz="2400" i="1">
+                                      <a:latin typeface="Cambria Math" panose="02040503050406030204" pitchFamily="18" charset="0"/>
+                                    </a:rPr>
+                                    <m:t>𝑣</m:t>
+                                  </m:r>
+                                </m:e>
+                                <m:sub>
+                                  <m:r>
+                                    <a:rPr lang="de-DE" sz="2400" i="1">
+                                      <a:latin typeface="Cambria Math" panose="02040503050406030204" pitchFamily="18" charset="0"/>
+                                    </a:rPr>
+                                    <m:t>𝑘</m:t>
+                                  </m:r>
+                                </m:sub>
+                              </m:sSub>
+                            </m:num>
+                            <m:den>
+                              <m:func>
+                                <m:funcPr>
+                                  <m:ctrlPr>
+                                    <a:rPr lang="de-DE" sz="2400" i="1">
+                                      <a:latin typeface="Cambria Math" panose="02040503050406030204" pitchFamily="18" charset="0"/>
+                                    </a:rPr>
+                                  </m:ctrlPr>
+                                </m:funcPr>
+                                <m:fName>
+                                  <m:limLow>
+                                    <m:limLowPr>
                                       <m:ctrlPr>
                                         <a:rPr lang="de-DE" sz="2400" i="1">
                                           <a:latin typeface="Cambria Math" panose="02040503050406030204" pitchFamily="18" charset="0"/>
                                         </a:rPr>
                                       </m:ctrlPr>
-                                    </m:sSubPr>
+                                    </m:limLowPr>
                                     <m:e>
                                       <m:r>
                                         <m:rPr>
-                                          <m:nor/>
+                                          <m:sty m:val="p"/>
                                         </m:rPr>
                                         <a:rPr lang="de-DE" sz="2400">
                                           <a:latin typeface="Cambria Math" panose="02040503050406030204" pitchFamily="18" charset="0"/>
                                         </a:rPr>
-                                        <m:t>Total</m:t>
-                                      </m:r>
-                                      <m:r>
-                                        <m:rPr>
-                                          <m:nor/>
-                                        </m:rPr>
-                                        <a:rPr lang="de-DE" sz="2400">
-                                          <a:latin typeface="Cambria Math" panose="02040503050406030204" pitchFamily="18" charset="0"/>
-                                        </a:rPr>
-                                        <m:t> </m:t>
-                                      </m:r>
-                                      <m:r>
-                                        <a:rPr lang="de-DE" sz="2400" i="1">
-                                          <a:latin typeface="Cambria Math" panose="02040503050406030204" pitchFamily="18" charset="0"/>
-                                        </a:rPr>
-                                        <m:t>𝑣</m:t>
+                                        <m:t>max</m:t>
                                       </m:r>
                                     </m:e>
-                                    <m:sub>
+                                    <m:lim>
                                       <m:r>
                                         <a:rPr lang="de-DE" sz="2400" i="1">
                                           <a:latin typeface="Cambria Math" panose="02040503050406030204" pitchFamily="18" charset="0"/>
                                         </a:rPr>
                                         <m:t>𝑘</m:t>
                                       </m:r>
-                                    </m:sub>
-                                  </m:sSub>
-                                </m:num>
-                                <m:den>
-                                  <m:func>
-                                    <m:funcPr>
+                                    </m:lim>
+                                  </m:limLow>
+                                </m:fName>
+                                <m:e>
+                                  <m:d>
+                                    <m:dPr>
                                       <m:ctrlPr>
                                         <a:rPr lang="de-DE" sz="2400" i="1">
                                           <a:latin typeface="Cambria Math" panose="02040503050406030204" pitchFamily="18" charset="0"/>
                                         </a:rPr>
                                       </m:ctrlPr>
-                                    </m:funcPr>
-                                    <m:fName>
-                                      <m:limLow>
-                                        <m:limLowPr>
+                                    </m:dPr>
+                                    <m:e>
+                                      <m:sSub>
+                                        <m:sSubPr>
                                           <m:ctrlPr>
                                             <a:rPr lang="de-DE" sz="2400" i="1">
                                               <a:latin typeface="Cambria Math" panose="02040503050406030204" pitchFamily="18" charset="0"/>
                                             </a:rPr>
                                           </m:ctrlPr>
-                                        </m:limLowPr>
+                                        </m:sSubPr>
                                         <m:e>
                                           <m:r>
                                             <m:rPr>
-                                              <m:sty m:val="p"/>
+                                              <m:nor/>
                                             </m:rPr>
                                             <a:rPr lang="de-DE" sz="2400">
                                               <a:latin typeface="Cambria Math" panose="02040503050406030204" pitchFamily="18" charset="0"/>
                                             </a:rPr>
-                                            <m:t>max</m:t>
+                                            <m:t>Total</m:t>
+                                          </m:r>
+                                          <m:r>
+                                            <m:rPr>
+                                              <m:nor/>
+                                            </m:rPr>
+                                            <a:rPr lang="de-DE" sz="2400">
+                                              <a:latin typeface="Cambria Math" panose="02040503050406030204" pitchFamily="18" charset="0"/>
+                                            </a:rPr>
+                                            <m:t> </m:t>
+                                          </m:r>
+                                          <m:r>
+                                            <a:rPr lang="de-DE" sz="2400" i="1">
+                                              <a:latin typeface="Cambria Math" panose="02040503050406030204" pitchFamily="18" charset="0"/>
+                                            </a:rPr>
+                                            <m:t>𝑣</m:t>
                                           </m:r>
                                         </m:e>
-                                        <m:lim>
+                                        <m:sub>
                                           <m:r>
                                             <a:rPr lang="de-DE" sz="2400" i="1">
                                               <a:latin typeface="Cambria Math" panose="02040503050406030204" pitchFamily="18" charset="0"/>
                                             </a:rPr>
                                             <m:t>𝑘</m:t>
                                           </m:r>
-                                        </m:lim>
-                                      </m:limLow>
-                                    </m:fName>
-                                    <m:e>
-                                      <m:d>
-                                        <m:dPr>
-                                          <m:ctrlPr>
-                                            <a:rPr lang="de-DE" sz="2400" i="1">
-                                              <a:latin typeface="Cambria Math" panose="02040503050406030204" pitchFamily="18" charset="0"/>
-                                            </a:rPr>
-                                          </m:ctrlPr>
-                                        </m:dPr>
-                                        <m:e>
-                                          <m:sSub>
-                                            <m:sSubPr>
-                                              <m:ctrlPr>
-                                                <a:rPr lang="de-DE" sz="2400" i="1">
-                                                  <a:latin typeface="Cambria Math" panose="02040503050406030204" pitchFamily="18" charset="0"/>
-                                                </a:rPr>
-                                              </m:ctrlPr>
-                                            </m:sSubPr>
-                                            <m:e>
-                                              <m:r>
-                                                <m:rPr>
-                                                  <m:nor/>
-                                                </m:rPr>
-                                                <a:rPr lang="de-DE" sz="2400">
-                                                  <a:latin typeface="Cambria Math" panose="02040503050406030204" pitchFamily="18" charset="0"/>
-                                                </a:rPr>
-                                                <m:t>Total</m:t>
-                                              </m:r>
-                                              <m:r>
-                                                <m:rPr>
-                                                  <m:nor/>
-                                                </m:rPr>
-                                                <a:rPr lang="de-DE" sz="2400">
-                                                  <a:latin typeface="Cambria Math" panose="02040503050406030204" pitchFamily="18" charset="0"/>
-                                                </a:rPr>
-                                                <m:t> </m:t>
-                                              </m:r>
-                                              <m:r>
-                                                <a:rPr lang="de-DE" sz="2400" i="1">
-                                                  <a:latin typeface="Cambria Math" panose="02040503050406030204" pitchFamily="18" charset="0"/>
-                                                </a:rPr>
-                                                <m:t>𝑣</m:t>
-                                              </m:r>
-                                            </m:e>
-                                            <m:sub>
-                                              <m:r>
-                                                <a:rPr lang="de-DE" sz="2400" i="1">
-                                                  <a:latin typeface="Cambria Math" panose="02040503050406030204" pitchFamily="18" charset="0"/>
-                                                </a:rPr>
-                                                <m:t>𝑘</m:t>
-                                              </m:r>
-                                            </m:sub>
-                                          </m:sSub>
-                                        </m:e>
-                                      </m:d>
+                                        </m:sub>
+                                      </m:sSub>
                                     </m:e>
-                                  </m:func>
-                                </m:den>
-                              </m:f>
-                            </m:e>
-                          </m:nary>
+                                  </m:d>
+                                </m:e>
+                              </m:func>
+                            </m:den>
+                          </m:f>
                         </m:e>
-                      </m:d>
-                      <m:r>
-                        <a:rPr lang="de-DE" sz="2400" b="0" i="1" smtClean="0">
-                          <a:latin typeface="Cambria Math" panose="02040503050406030204" pitchFamily="18" charset="0"/>
-                        </a:rPr>
-                        <m:t>∗(1−</m:t>
-                      </m:r>
-                      <m:r>
-                        <a:rPr lang="de-DE" sz="2400" b="0" i="1" smtClean="0">
-                          <a:latin typeface="Cambria Math" panose="02040503050406030204" pitchFamily="18" charset="0"/>
-                          <a:ea typeface="Cambria Math" panose="02040503050406030204" pitchFamily="18" charset="0"/>
-                        </a:rPr>
-                        <m:t>𝜌</m:t>
-                      </m:r>
-                      <m:r>
-                        <a:rPr lang="de-DE" sz="2400" b="0" i="1" smtClean="0">
-                          <a:latin typeface="Cambria Math" panose="02040503050406030204" pitchFamily="18" charset="0"/>
-                          <a:ea typeface="Cambria Math" panose="02040503050406030204" pitchFamily="18" charset="0"/>
-                        </a:rPr>
-                        <m:t>)</m:t>
-                      </m:r>
+                      </m:nary>
                     </m:oMath>
                   </m:oMathPara>
                 </a14:m>
@@ -6717,7 +10646,7 @@
             </p:txBody>
           </p:sp>
         </mc:Choice>
-        <mc:Fallback xmlns="">
+        <mc:Fallback>
           <p:sp>
             <p:nvSpPr>
               <p:cNvPr id="13" name="Textfeld 12">
@@ -6735,7 +10664,7 @@
             <p:spPr>
               <a:xfrm>
                 <a:off x="29563" y="1445302"/>
-                <a:ext cx="5788752" cy="1419556"/>
+                <a:ext cx="5788752" cy="1399101"/>
               </a:xfrm>
               <a:prstGeom prst="rect">
                 <a:avLst/>
@@ -6743,7 +10672,7 @@
               <a:blipFill>
                 <a:blip r:embed="rId4"/>
                 <a:stretch>
-                  <a:fillRect l="-1576" t="-2966"/>
+                  <a:fillRect l="-1576" t="-3004"/>
                 </a:stretch>
               </a:blipFill>
             </p:spPr>
@@ -6779,8 +10708,8 @@
         </p:nvCxnSpPr>
         <p:spPr>
           <a:xfrm>
-            <a:off x="2923939" y="2864858"/>
-            <a:ext cx="2514836" cy="878593"/>
+            <a:off x="2923939" y="2844403"/>
+            <a:ext cx="2570256" cy="729681"/>
           </a:xfrm>
           <a:prstGeom prst="line">
             <a:avLst/>
@@ -6827,8 +10756,8 @@
         </p:nvCxnSpPr>
         <p:spPr>
           <a:xfrm flipH="1">
-            <a:off x="6295973" y="2645631"/>
-            <a:ext cx="1126487" cy="945131"/>
+            <a:off x="6362305" y="2645631"/>
+            <a:ext cx="1124148" cy="653153"/>
           </a:xfrm>
           <a:prstGeom prst="line">
             <a:avLst/>
@@ -6875,8 +10804,8 @@
         </p:nvCxnSpPr>
         <p:spPr>
           <a:xfrm flipH="1">
-            <a:off x="7207253" y="2456730"/>
-            <a:ext cx="2132559" cy="1197548"/>
+            <a:off x="7191375" y="2456730"/>
+            <a:ext cx="2148437" cy="852549"/>
           </a:xfrm>
           <a:prstGeom prst="line">
             <a:avLst/>
@@ -6922,8 +10851,8 @@
         </p:nvCxnSpPr>
         <p:spPr>
           <a:xfrm flipH="1" flipV="1">
-            <a:off x="7820025" y="3787748"/>
-            <a:ext cx="1609725" cy="248162"/>
+            <a:off x="7800975" y="3457292"/>
+            <a:ext cx="1519610" cy="260171"/>
           </a:xfrm>
           <a:prstGeom prst="line">
             <a:avLst/>
@@ -6964,14 +10893,14 @@
           </p:cNvPr>
           <p:cNvCxnSpPr>
             <a:cxnSpLocks/>
-            <a:stCxn id="8" idx="3"/>
+            <a:stCxn id="8" idx="0"/>
           </p:cNvCxnSpPr>
           <p:nvPr/>
         </p:nvCxnSpPr>
         <p:spPr>
           <a:xfrm flipV="1">
-            <a:off x="3827423" y="5100984"/>
-            <a:ext cx="1763752" cy="474532"/>
+            <a:off x="2905404" y="4748254"/>
+            <a:ext cx="2781021" cy="478469"/>
           </a:xfrm>
           <a:prstGeom prst="line">
             <a:avLst/>
@@ -7014,256 +10943,6 @@
 </p:sld>
 </file>
 
-<file path=ppt/slides/slide3.xml><?xml version="1.0" encoding="utf-8"?>
-<p:sld xmlns:a="http://schemas.openxmlformats.org/drawingml/2006/main" xmlns:r="http://schemas.openxmlformats.org/officeDocument/2006/relationships" xmlns:p="http://schemas.openxmlformats.org/presentationml/2006/main">
-  <p:cSld>
-    <p:spTree>
-      <p:nvGrpSpPr>
-        <p:cNvPr id="1" name=""/>
-        <p:cNvGrpSpPr/>
-        <p:nvPr/>
-      </p:nvGrpSpPr>
-      <p:grpSpPr>
-        <a:xfrm>
-          <a:off x="0" y="0"/>
-          <a:ext cx="0" cy="0"/>
-          <a:chOff x="0" y="0"/>
-          <a:chExt cx="0" cy="0"/>
-        </a:xfrm>
-      </p:grpSpPr>
-      <p:sp>
-        <p:nvSpPr>
-          <p:cNvPr id="2" name="Titel 1">
-            <a:extLst>
-              <a:ext uri="{FF2B5EF4-FFF2-40B4-BE49-F238E27FC236}">
-                <a16:creationId xmlns:a16="http://schemas.microsoft.com/office/drawing/2014/main" id="{211B614C-40F6-C498-5107-17FB1AFB2B8A}"/>
-              </a:ext>
-            </a:extLst>
-          </p:cNvPr>
-          <p:cNvSpPr>
-            <a:spLocks noGrp="1"/>
-          </p:cNvSpPr>
-          <p:nvPr>
-            <p:ph type="title"/>
-          </p:nvPr>
-        </p:nvSpPr>
-        <p:spPr/>
-        <p:txBody>
-          <a:bodyPr/>
-          <a:lstStyle/>
-          <a:p>
-            <a:r>
-              <a:rPr lang="de-DE" dirty="0"/>
-              <a:t>Problem-Generator</a:t>
-            </a:r>
-          </a:p>
-        </p:txBody>
-      </p:sp>
-      <p:sp>
-        <p:nvSpPr>
-          <p:cNvPr id="4" name="Datumsplatzhalter 3">
-            <a:extLst>
-              <a:ext uri="{FF2B5EF4-FFF2-40B4-BE49-F238E27FC236}">
-                <a16:creationId xmlns:a16="http://schemas.microsoft.com/office/drawing/2014/main" id="{5DB3D164-0EB1-FB4B-1102-8F2A17C66EE5}"/>
-              </a:ext>
-            </a:extLst>
-          </p:cNvPr>
-          <p:cNvSpPr>
-            <a:spLocks noGrp="1"/>
-          </p:cNvSpPr>
-          <p:nvPr>
-            <p:ph type="dt" sz="half" idx="10"/>
-          </p:nvPr>
-        </p:nvSpPr>
-        <p:spPr/>
-        <p:txBody>
-          <a:bodyPr/>
-          <a:lstStyle/>
-          <a:p>
-            <a:r>
-              <a:rPr lang="de-DE"/>
-              <a:t>22.03.2025</a:t>
-            </a:r>
-          </a:p>
-        </p:txBody>
-      </p:sp>
-      <p:sp>
-        <p:nvSpPr>
-          <p:cNvPr id="5" name="Fußzeilenplatzhalter 4">
-            <a:extLst>
-              <a:ext uri="{FF2B5EF4-FFF2-40B4-BE49-F238E27FC236}">
-                <a16:creationId xmlns:a16="http://schemas.microsoft.com/office/drawing/2014/main" id="{4498CC8F-4127-E6BF-ED03-887761699D0E}"/>
-              </a:ext>
-            </a:extLst>
-          </p:cNvPr>
-          <p:cNvSpPr>
-            <a:spLocks noGrp="1"/>
-          </p:cNvSpPr>
-          <p:nvPr>
-            <p:ph type="ftr" sz="quarter" idx="11"/>
-          </p:nvPr>
-        </p:nvSpPr>
-        <p:spPr/>
-        <p:txBody>
-          <a:bodyPr/>
-          <a:lstStyle/>
-          <a:p>
-            <a:r>
-              <a:rPr lang="de-DE"/>
-              <a:t>Niko Kläsener</a:t>
-            </a:r>
-          </a:p>
-        </p:txBody>
-      </p:sp>
-      <p:sp>
-        <p:nvSpPr>
-          <p:cNvPr id="6" name="Foliennummernplatzhalter 5">
-            <a:extLst>
-              <a:ext uri="{FF2B5EF4-FFF2-40B4-BE49-F238E27FC236}">
-                <a16:creationId xmlns:a16="http://schemas.microsoft.com/office/drawing/2014/main" id="{99AAA3CA-DAD6-5E1C-AD47-006922CFBBF7}"/>
-              </a:ext>
-            </a:extLst>
-          </p:cNvPr>
-          <p:cNvSpPr>
-            <a:spLocks noGrp="1"/>
-          </p:cNvSpPr>
-          <p:nvPr>
-            <p:ph type="sldNum" sz="quarter" idx="12"/>
-          </p:nvPr>
-        </p:nvSpPr>
-        <p:spPr/>
-        <p:txBody>
-          <a:bodyPr/>
-          <a:lstStyle/>
-          <a:p>
-            <a:fld id="{F20E45F0-5197-4D99-A0B0-CC09E9235134}" type="slidenum">
-              <a:rPr lang="de-DE" smtClean="0"/>
-              <a:t>3</a:t>
-            </a:fld>
-            <a:endParaRPr lang="de-DE"/>
-          </a:p>
-        </p:txBody>
-      </p:sp>
-      <p:pic>
-        <p:nvPicPr>
-          <p:cNvPr id="10" name="Inhaltsplatzhalter 9">
-            <a:extLst>
-              <a:ext uri="{FF2B5EF4-FFF2-40B4-BE49-F238E27FC236}">
-                <a16:creationId xmlns:a16="http://schemas.microsoft.com/office/drawing/2014/main" id="{FACAB858-83F7-44BF-B251-E7805A2A1602}"/>
-              </a:ext>
-            </a:extLst>
-          </p:cNvPr>
-          <p:cNvPicPr>
-            <a:picLocks noGrp="1" noChangeAspect="1"/>
-          </p:cNvPicPr>
-          <p:nvPr>
-            <p:ph idx="1"/>
-          </p:nvPr>
-        </p:nvPicPr>
-        <p:blipFill>
-          <a:blip r:embed="rId2">
-            <a:extLst>
-              <a:ext uri="{28A0092B-C50C-407E-A947-70E740481C1C}">
-                <a14:useLocalDpi xmlns:a14="http://schemas.microsoft.com/office/drawing/2010/main" val="0"/>
-              </a:ext>
-            </a:extLst>
-          </a:blip>
-          <a:srcRect/>
-          <a:stretch/>
-        </p:blipFill>
-        <p:spPr>
-          <a:xfrm>
-            <a:off x="4105275" y="1390650"/>
-            <a:ext cx="8086725" cy="4505462"/>
-          </a:xfrm>
-          <a:prstGeom prst="rect">
-            <a:avLst/>
-          </a:prstGeom>
-        </p:spPr>
-      </p:pic>
-      <p:sp>
-        <p:nvSpPr>
-          <p:cNvPr id="3" name="Textfeld 2">
-            <a:extLst>
-              <a:ext uri="{FF2B5EF4-FFF2-40B4-BE49-F238E27FC236}">
-                <a16:creationId xmlns:a16="http://schemas.microsoft.com/office/drawing/2014/main" id="{F984959B-3B96-707C-C5CF-921F9260BFDE}"/>
-              </a:ext>
-            </a:extLst>
-          </p:cNvPr>
-          <p:cNvSpPr txBox="1"/>
-          <p:nvPr/>
-        </p:nvSpPr>
-        <p:spPr>
-          <a:xfrm>
-            <a:off x="933450" y="2136338"/>
-            <a:ext cx="2838450" cy="2585323"/>
-          </a:xfrm>
-          <a:prstGeom prst="rect">
-            <a:avLst/>
-          </a:prstGeom>
-          <a:noFill/>
-        </p:spPr>
-        <p:txBody>
-          <a:bodyPr wrap="square" rtlCol="0">
-            <a:spAutoFit/>
-          </a:bodyPr>
-          <a:lstStyle/>
-          <a:p>
-            <a:pPr marL="285750" indent="-285750">
-              <a:buFont typeface="Wingdings" panose="05000000000000000000" pitchFamily="2" charset="2"/>
-              <a:buChar char="§"/>
-            </a:pPr>
-            <a:r>
-              <a:rPr lang="de-DE" b="1" dirty="0"/>
-              <a:t>Exponentielle Problemstruktur</a:t>
-            </a:r>
-          </a:p>
-          <a:p>
-            <a:pPr marL="285750" indent="-285750">
-              <a:buFont typeface="Wingdings" panose="05000000000000000000" pitchFamily="2" charset="2"/>
-              <a:buChar char="§"/>
-            </a:pPr>
-            <a:r>
-              <a:rPr lang="de-DE" b="1" dirty="0"/>
-              <a:t>Verführung durch hohe Effizienz (Kleinstgegenstände)</a:t>
-            </a:r>
-          </a:p>
-          <a:p>
-            <a:pPr marL="285750" indent="-285750">
-              <a:buFont typeface="Wingdings" panose="05000000000000000000" pitchFamily="2" charset="2"/>
-              <a:buChar char="§"/>
-            </a:pPr>
-            <a:r>
-              <a:rPr lang="de-DE" b="1" dirty="0"/>
-              <a:t>Extrem hoher Selektionsdruck</a:t>
-            </a:r>
-            <a:r>
-              <a:rPr lang="de-DE" dirty="0"/>
-              <a:t> </a:t>
-            </a:r>
-            <a:br>
-              <a:rPr lang="de-DE" dirty="0"/>
-            </a:br>
-            <a:r>
-              <a:rPr lang="de-DE" b="1" dirty="0"/>
-              <a:t>(Winzige Effizienzunterschiede)</a:t>
-            </a:r>
-          </a:p>
-        </p:txBody>
-      </p:sp>
-    </p:spTree>
-    <p:extLst>
-      <p:ext uri="{BB962C8B-B14F-4D97-AF65-F5344CB8AC3E}">
-        <p14:creationId xmlns:p14="http://schemas.microsoft.com/office/powerpoint/2010/main" val="1562465697"/>
-      </p:ext>
-    </p:extLst>
-  </p:cSld>
-  <p:clrMapOvr>
-    <a:masterClrMapping/>
-  </p:clrMapOvr>
-</p:sld>
-</file>
-
 <file path=ppt/slides/slide4.xml><?xml version="1.0" encoding="utf-8"?>
 <p:sld xmlns:a="http://schemas.openxmlformats.org/drawingml/2006/main" xmlns:r="http://schemas.openxmlformats.org/officeDocument/2006/relationships" xmlns:p="http://schemas.openxmlformats.org/presentationml/2006/main">
   <p:cSld>
@@ -7286,7 +10965,7 @@
           <p:cNvPr id="2" name="Titel 1">
             <a:extLst>
               <a:ext uri="{FF2B5EF4-FFF2-40B4-BE49-F238E27FC236}">
-                <a16:creationId xmlns:a16="http://schemas.microsoft.com/office/drawing/2014/main" id="{1E94E426-77E3-D9B2-5685-3FEAC25AD1A5}"/>
+                <a16:creationId xmlns:a16="http://schemas.microsoft.com/office/drawing/2014/main" id="{211B614C-40F6-C498-5107-17FB1AFB2B8A}"/>
               </a:ext>
             </a:extLst>
           </p:cNvPr>
@@ -7304,17 +10983,102 @@
           <a:p>
             <a:r>
               <a:rPr lang="de-DE" dirty="0"/>
-              <a:t>Nutzwertvergleich Hard-Problem</a:t>
-            </a:r>
+              <a:t>Problem-Generator</a:t>
+            </a:r>
+          </a:p>
+        </p:txBody>
+      </p:sp>
+      <p:sp>
+        <p:nvSpPr>
+          <p:cNvPr id="4" name="Datumsplatzhalter 3">
+            <a:extLst>
+              <a:ext uri="{FF2B5EF4-FFF2-40B4-BE49-F238E27FC236}">
+                <a16:creationId xmlns:a16="http://schemas.microsoft.com/office/drawing/2014/main" id="{5DB3D164-0EB1-FB4B-1102-8F2A17C66EE5}"/>
+              </a:ext>
+            </a:extLst>
+          </p:cNvPr>
+          <p:cNvSpPr>
+            <a:spLocks noGrp="1"/>
+          </p:cNvSpPr>
+          <p:nvPr>
+            <p:ph type="dt" sz="half" idx="10"/>
+          </p:nvPr>
+        </p:nvSpPr>
+        <p:spPr/>
+        <p:txBody>
+          <a:bodyPr/>
+          <a:lstStyle/>
+          <a:p>
+            <a:r>
+              <a:rPr lang="de-DE" dirty="0"/>
+              <a:t>20.06.2026</a:t>
+            </a:r>
+          </a:p>
+        </p:txBody>
+      </p:sp>
+      <p:sp>
+        <p:nvSpPr>
+          <p:cNvPr id="5" name="Fußzeilenplatzhalter 4">
+            <a:extLst>
+              <a:ext uri="{FF2B5EF4-FFF2-40B4-BE49-F238E27FC236}">
+                <a16:creationId xmlns:a16="http://schemas.microsoft.com/office/drawing/2014/main" id="{4498CC8F-4127-E6BF-ED03-887761699D0E}"/>
+              </a:ext>
+            </a:extLst>
+          </p:cNvPr>
+          <p:cNvSpPr>
+            <a:spLocks noGrp="1"/>
+          </p:cNvSpPr>
+          <p:nvPr>
+            <p:ph type="ftr" sz="quarter" idx="11"/>
+          </p:nvPr>
+        </p:nvSpPr>
+        <p:spPr/>
+        <p:txBody>
+          <a:bodyPr/>
+          <a:lstStyle/>
+          <a:p>
+            <a:r>
+              <a:rPr lang="de-DE"/>
+              <a:t>Niko Kläsener</a:t>
+            </a:r>
+          </a:p>
+        </p:txBody>
+      </p:sp>
+      <p:sp>
+        <p:nvSpPr>
+          <p:cNvPr id="6" name="Foliennummernplatzhalter 5">
+            <a:extLst>
+              <a:ext uri="{FF2B5EF4-FFF2-40B4-BE49-F238E27FC236}">
+                <a16:creationId xmlns:a16="http://schemas.microsoft.com/office/drawing/2014/main" id="{99AAA3CA-DAD6-5E1C-AD47-006922CFBBF7}"/>
+              </a:ext>
+            </a:extLst>
+          </p:cNvPr>
+          <p:cNvSpPr>
+            <a:spLocks noGrp="1"/>
+          </p:cNvSpPr>
+          <p:nvPr>
+            <p:ph type="sldNum" sz="quarter" idx="12"/>
+          </p:nvPr>
+        </p:nvSpPr>
+        <p:spPr/>
+        <p:txBody>
+          <a:bodyPr/>
+          <a:lstStyle/>
+          <a:p>
+            <a:fld id="{F20E45F0-5197-4D99-A0B0-CC09E9235134}" type="slidenum">
+              <a:rPr lang="de-DE" smtClean="0"/>
+              <a:t>4</a:t>
+            </a:fld>
+            <a:endParaRPr lang="de-DE"/>
           </a:p>
         </p:txBody>
       </p:sp>
       <p:pic>
         <p:nvPicPr>
-          <p:cNvPr id="8" name="Inhaltsplatzhalter 7">
+          <p:cNvPr id="10" name="Inhaltsplatzhalter 9">
             <a:extLst>
               <a:ext uri="{FF2B5EF4-FFF2-40B4-BE49-F238E27FC236}">
-                <a16:creationId xmlns:a16="http://schemas.microsoft.com/office/drawing/2014/main" id="{4DAC7E66-EB2C-45E1-5D4F-7CAE9DCE4400}"/>
+                <a16:creationId xmlns:a16="http://schemas.microsoft.com/office/drawing/2014/main" id="{FACAB858-83F7-44BF-B251-E7805A2A1602}"/>
               </a:ext>
             </a:extLst>
           </p:cNvPr>
@@ -7327,6 +11091,160 @@
         </p:nvPicPr>
         <p:blipFill>
           <a:blip r:embed="rId2">
+            <a:extLst>
+              <a:ext uri="{28A0092B-C50C-407E-A947-70E740481C1C}">
+                <a14:useLocalDpi xmlns:a14="http://schemas.microsoft.com/office/drawing/2010/main" val="0"/>
+              </a:ext>
+            </a:extLst>
+          </a:blip>
+          <a:srcRect/>
+          <a:stretch/>
+        </p:blipFill>
+        <p:spPr>
+          <a:xfrm>
+            <a:off x="4105275" y="1390650"/>
+            <a:ext cx="8086725" cy="4505462"/>
+          </a:xfrm>
+          <a:prstGeom prst="rect">
+            <a:avLst/>
+          </a:prstGeom>
+        </p:spPr>
+      </p:pic>
+      <p:sp>
+        <p:nvSpPr>
+          <p:cNvPr id="3" name="Textfeld 2">
+            <a:extLst>
+              <a:ext uri="{FF2B5EF4-FFF2-40B4-BE49-F238E27FC236}">
+                <a16:creationId xmlns:a16="http://schemas.microsoft.com/office/drawing/2014/main" id="{F984959B-3B96-707C-C5CF-921F9260BFDE}"/>
+              </a:ext>
+            </a:extLst>
+          </p:cNvPr>
+          <p:cNvSpPr txBox="1"/>
+          <p:nvPr/>
+        </p:nvSpPr>
+        <p:spPr>
+          <a:xfrm>
+            <a:off x="476249" y="2160000"/>
+            <a:ext cx="3762375" cy="3416320"/>
+          </a:xfrm>
+          <a:prstGeom prst="rect">
+            <a:avLst/>
+          </a:prstGeom>
+          <a:noFill/>
+        </p:spPr>
+        <p:txBody>
+          <a:bodyPr wrap="square" rtlCol="0">
+            <a:spAutoFit/>
+          </a:bodyPr>
+          <a:lstStyle/>
+          <a:p>
+            <a:pPr marL="285750" indent="-285750">
+              <a:buFont typeface="Wingdings" panose="05000000000000000000" pitchFamily="2" charset="2"/>
+              <a:buChar char="§"/>
+            </a:pPr>
+            <a:r>
+              <a:rPr lang="de-DE" sz="2400" b="1" dirty="0"/>
+              <a:t>Exponentielle Problemstruktur</a:t>
+            </a:r>
+          </a:p>
+          <a:p>
+            <a:pPr marL="285750" indent="-285750">
+              <a:buFont typeface="Wingdings" panose="05000000000000000000" pitchFamily="2" charset="2"/>
+              <a:buChar char="§"/>
+            </a:pPr>
+            <a:r>
+              <a:rPr lang="de-DE" sz="2400" b="1" dirty="0"/>
+              <a:t>Verführung durch hohe Effizienz (Kleinstgegenstände)</a:t>
+            </a:r>
+          </a:p>
+          <a:p>
+            <a:pPr marL="285750" indent="-285750">
+              <a:buFont typeface="Wingdings" panose="05000000000000000000" pitchFamily="2" charset="2"/>
+              <a:buChar char="§"/>
+            </a:pPr>
+            <a:r>
+              <a:rPr lang="de-DE" sz="2400" b="1" dirty="0"/>
+              <a:t>Extrem hoher Selektionsdruck (winzige Effizienzunterschiede)</a:t>
+            </a:r>
+          </a:p>
+        </p:txBody>
+      </p:sp>
+    </p:spTree>
+    <p:extLst>
+      <p:ext uri="{BB962C8B-B14F-4D97-AF65-F5344CB8AC3E}">
+        <p14:creationId xmlns:p14="http://schemas.microsoft.com/office/powerpoint/2010/main" val="1562465697"/>
+      </p:ext>
+    </p:extLst>
+  </p:cSld>
+  <p:clrMapOvr>
+    <a:masterClrMapping/>
+  </p:clrMapOvr>
+</p:sld>
+</file>
+
+<file path=ppt/slides/slide5.xml><?xml version="1.0" encoding="utf-8"?>
+<p:sld xmlns:a="http://schemas.openxmlformats.org/drawingml/2006/main" xmlns:r="http://schemas.openxmlformats.org/officeDocument/2006/relationships" xmlns:p="http://schemas.openxmlformats.org/presentationml/2006/main">
+  <p:cSld>
+    <p:spTree>
+      <p:nvGrpSpPr>
+        <p:cNvPr id="1" name=""/>
+        <p:cNvGrpSpPr/>
+        <p:nvPr/>
+      </p:nvGrpSpPr>
+      <p:grpSpPr>
+        <a:xfrm>
+          <a:off x="0" y="0"/>
+          <a:ext cx="0" cy="0"/>
+          <a:chOff x="0" y="0"/>
+          <a:chExt cx="0" cy="0"/>
+        </a:xfrm>
+      </p:grpSpPr>
+      <p:sp>
+        <p:nvSpPr>
+          <p:cNvPr id="2" name="Titel 1">
+            <a:extLst>
+              <a:ext uri="{FF2B5EF4-FFF2-40B4-BE49-F238E27FC236}">
+                <a16:creationId xmlns:a16="http://schemas.microsoft.com/office/drawing/2014/main" id="{1E94E426-77E3-D9B2-5685-3FEAC25AD1A5}"/>
+              </a:ext>
+            </a:extLst>
+          </p:cNvPr>
+          <p:cNvSpPr>
+            <a:spLocks noGrp="1"/>
+          </p:cNvSpPr>
+          <p:nvPr>
+            <p:ph type="title"/>
+          </p:nvPr>
+        </p:nvSpPr>
+        <p:spPr/>
+        <p:txBody>
+          <a:bodyPr/>
+          <a:lstStyle/>
+          <a:p>
+            <a:r>
+              <a:rPr lang="de-DE" dirty="0"/>
+              <a:t>Nutzwertvergleich Hard-Problem</a:t>
+            </a:r>
+          </a:p>
+        </p:txBody>
+      </p:sp>
+      <p:pic>
+        <p:nvPicPr>
+          <p:cNvPr id="8" name="Inhaltsplatzhalter 7">
+            <a:extLst>
+              <a:ext uri="{FF2B5EF4-FFF2-40B4-BE49-F238E27FC236}">
+                <a16:creationId xmlns:a16="http://schemas.microsoft.com/office/drawing/2014/main" id="{4DAC7E66-EB2C-45E1-5D4F-7CAE9DCE4400}"/>
+              </a:ext>
+            </a:extLst>
+          </p:cNvPr>
+          <p:cNvPicPr>
+            <a:picLocks noGrp="1" noChangeAspect="1"/>
+          </p:cNvPicPr>
+          <p:nvPr>
+            <p:ph idx="1"/>
+          </p:nvPr>
+        </p:nvPicPr>
+        <p:blipFill>
+          <a:blip r:embed="rId3">
             <a:extLst>
               <a:ext uri="{28A0092B-C50C-407E-A947-70E740481C1C}">
                 <a14:useLocalDpi xmlns:a14="http://schemas.microsoft.com/office/drawing/2010/main" val="0"/>
@@ -7368,8 +11286,8 @@
           <a:lstStyle/>
           <a:p>
             <a:r>
-              <a:rPr lang="de-DE"/>
-              <a:t>22.03.2025</a:t>
+              <a:rPr lang="de-DE" dirty="0"/>
+              <a:t>20.06.2026</a:t>
             </a:r>
           </a:p>
         </p:txBody>
@@ -7425,149 +11343,683 @@
           <a:p>
             <a:fld id="{F20E45F0-5197-4D99-A0B0-CC09E9235134}" type="slidenum">
               <a:rPr lang="de-DE" smtClean="0"/>
-              <a:t>4</a:t>
+              <a:t>5</a:t>
             </a:fld>
             <a:endParaRPr lang="de-DE"/>
           </a:p>
         </p:txBody>
       </p:sp>
-      <p:sp>
-        <p:nvSpPr>
-          <p:cNvPr id="3" name="Textfeld 2">
-            <a:extLst>
-              <a:ext uri="{FF2B5EF4-FFF2-40B4-BE49-F238E27FC236}">
-                <a16:creationId xmlns:a16="http://schemas.microsoft.com/office/drawing/2014/main" id="{03B229CE-C208-3B6E-0937-5F9A9A7AA444}"/>
-              </a:ext>
-            </a:extLst>
-          </p:cNvPr>
-          <p:cNvSpPr txBox="1"/>
-          <p:nvPr/>
-        </p:nvSpPr>
-        <p:spPr>
-          <a:xfrm>
-            <a:off x="8153400" y="2606109"/>
-            <a:ext cx="2990850" cy="1200329"/>
-          </a:xfrm>
-          <a:prstGeom prst="rect">
-            <a:avLst/>
-          </a:prstGeom>
-          <a:noFill/>
-        </p:spPr>
-        <p:txBody>
-          <a:bodyPr wrap="square" rtlCol="0">
-            <a:spAutoFit/>
-          </a:bodyPr>
-          <a:lstStyle/>
-          <a:p>
-            <a:r>
-              <a:rPr lang="de-DE" b="1" dirty="0"/>
-              <a:t>Hard-Problem:</a:t>
-            </a:r>
-          </a:p>
-          <a:p>
-            <a:pPr marL="285750" indent="-285750">
-              <a:buFont typeface="Wingdings" panose="05000000000000000000" pitchFamily="2" charset="2"/>
-              <a:buChar char="§"/>
-            </a:pPr>
-            <a:r>
-              <a:rPr lang="de-DE" b="1" dirty="0"/>
-              <a:t>800 Items</a:t>
-            </a:r>
-          </a:p>
-          <a:p>
-            <a:pPr marL="285750" indent="-285750">
-              <a:buFont typeface="Wingdings" panose="05000000000000000000" pitchFamily="2" charset="2"/>
-              <a:buChar char="§"/>
-            </a:pPr>
-            <a:r>
-              <a:rPr lang="de-DE" b="1" dirty="0"/>
-              <a:t>1.000.000 Kapazität</a:t>
-            </a:r>
-          </a:p>
-          <a:p>
-            <a:pPr marL="285750" indent="-285750">
-              <a:buFont typeface="Wingdings" panose="05000000000000000000" pitchFamily="2" charset="2"/>
-              <a:buChar char="§"/>
-            </a:pPr>
-            <a:r>
-              <a:rPr lang="de-DE" b="1" dirty="0"/>
-              <a:t>14 Gruppen</a:t>
-            </a:r>
-          </a:p>
-        </p:txBody>
-      </p:sp>
-      <p:sp>
-        <p:nvSpPr>
-          <p:cNvPr id="7" name="Textfeld 6">
-            <a:extLst>
-              <a:ext uri="{FF2B5EF4-FFF2-40B4-BE49-F238E27FC236}">
-                <a16:creationId xmlns:a16="http://schemas.microsoft.com/office/drawing/2014/main" id="{6FF04FC2-856E-1509-998A-C8DF92BD91DF}"/>
-              </a:ext>
-            </a:extLst>
-          </p:cNvPr>
-          <p:cNvSpPr txBox="1"/>
-          <p:nvPr/>
-        </p:nvSpPr>
-        <p:spPr>
-          <a:xfrm>
-            <a:off x="8153400" y="4240600"/>
-            <a:ext cx="3409950" cy="1477328"/>
-          </a:xfrm>
-          <a:prstGeom prst="rect">
-            <a:avLst/>
-          </a:prstGeom>
-          <a:noFill/>
-        </p:spPr>
-        <p:txBody>
-          <a:bodyPr wrap="square" rtlCol="0">
-            <a:spAutoFit/>
-          </a:bodyPr>
-          <a:lstStyle/>
-          <a:p>
-            <a:r>
-              <a:rPr lang="de-DE" b="1" dirty="0"/>
-              <a:t>Ergebnis:</a:t>
-            </a:r>
-          </a:p>
-          <a:p>
-            <a:pPr marL="285750" indent="-285750">
-              <a:buFont typeface="Wingdings" panose="05000000000000000000" pitchFamily="2" charset="2"/>
-              <a:buChar char="§"/>
-            </a:pPr>
-            <a:r>
-              <a:rPr lang="de-DE" b="1" dirty="0"/>
-              <a:t>Beste: 	99,91%</a:t>
-            </a:r>
-          </a:p>
-          <a:p>
-            <a:pPr marL="285750" indent="-285750">
-              <a:buFont typeface="Wingdings" panose="05000000000000000000" pitchFamily="2" charset="2"/>
-              <a:buChar char="§"/>
-            </a:pPr>
-            <a:r>
-              <a:rPr lang="de-DE" b="1" dirty="0"/>
-              <a:t>Mittlere: 	99,76%</a:t>
-            </a:r>
-          </a:p>
-          <a:p>
-            <a:pPr marL="285750" indent="-285750">
-              <a:buFont typeface="Wingdings" panose="05000000000000000000" pitchFamily="2" charset="2"/>
-              <a:buChar char="§"/>
-            </a:pPr>
-            <a:r>
-              <a:rPr lang="de-DE" b="1" dirty="0"/>
-              <a:t>Schlechteste:	99,61%</a:t>
-            </a:r>
-          </a:p>
-          <a:p>
-            <a:pPr marL="285750" indent="-285750">
-              <a:buFont typeface="Wingdings" panose="05000000000000000000" pitchFamily="2" charset="2"/>
-              <a:buChar char="§"/>
-            </a:pPr>
-            <a:endParaRPr lang="de-DE" dirty="0"/>
-          </a:p>
-        </p:txBody>
-      </p:sp>
+      <mc:AlternateContent xmlns:mc="http://schemas.openxmlformats.org/markup-compatibility/2006">
+        <mc:Choice xmlns:a14="http://schemas.microsoft.com/office/drawing/2010/main" Requires="a14">
+          <p:sp>
+            <p:nvSpPr>
+              <p:cNvPr id="3" name="Textfeld 2">
+                <a:extLst>
+                  <a:ext uri="{FF2B5EF4-FFF2-40B4-BE49-F238E27FC236}">
+                    <a16:creationId xmlns:a16="http://schemas.microsoft.com/office/drawing/2014/main" id="{03B229CE-C208-3B6E-0937-5F9A9A7AA444}"/>
+                  </a:ext>
+                </a:extLst>
+              </p:cNvPr>
+              <p:cNvSpPr txBox="1"/>
+              <p:nvPr/>
+            </p:nvSpPr>
+            <p:spPr>
+              <a:xfrm>
+                <a:off x="7672918" y="2160000"/>
+                <a:ext cx="4419032" cy="4339650"/>
+              </a:xfrm>
+              <a:prstGeom prst="rect">
+                <a:avLst/>
+              </a:prstGeom>
+              <a:noFill/>
+            </p:spPr>
+            <p:txBody>
+              <a:bodyPr wrap="square" rtlCol="0">
+                <a:spAutoFit/>
+              </a:bodyPr>
+              <a:lstStyle/>
+              <a:p>
+                <a:r>
+                  <a:rPr lang="de-DE" sz="2400" b="1" dirty="0"/>
+                  <a:t>Hard-Problem:</a:t>
+                </a:r>
+              </a:p>
+              <a:p>
+                <a:pPr marL="285750" indent="-285750">
+                  <a:buFont typeface="Wingdings" panose="05000000000000000000" pitchFamily="2" charset="2"/>
+                  <a:buChar char="§"/>
+                </a:pPr>
+                <a:r>
+                  <a:rPr lang="de-DE" sz="2400" b="1" dirty="0"/>
+                  <a:t>800 Items</a:t>
+                </a:r>
+              </a:p>
+              <a:p>
+                <a:pPr marL="285750" indent="-285750">
+                  <a:buFont typeface="Wingdings" panose="05000000000000000000" pitchFamily="2" charset="2"/>
+                  <a:buChar char="§"/>
+                </a:pPr>
+                <a:r>
+                  <a:rPr lang="de-DE" sz="2400" b="1" dirty="0"/>
+                  <a:t>1.000.000 Kapazität</a:t>
+                </a:r>
+              </a:p>
+              <a:p>
+                <a:pPr marL="285750" indent="-285750">
+                  <a:buFont typeface="Wingdings" panose="05000000000000000000" pitchFamily="2" charset="2"/>
+                  <a:buChar char="§"/>
+                </a:pPr>
+                <a:r>
+                  <a:rPr lang="de-DE" sz="2400" b="1" dirty="0"/>
+                  <a:t>14 Gruppen</a:t>
+                </a:r>
+              </a:p>
+              <a:p>
+                <a:r>
+                  <a:rPr lang="de-DE" sz="2400" b="1" dirty="0"/>
+                  <a:t>Konfigurationen:</a:t>
+                </a:r>
+              </a:p>
+              <a:p>
+                <a:pPr marL="342900" indent="-342900">
+                  <a:buFont typeface="Wingdings" panose="05000000000000000000" pitchFamily="2" charset="2"/>
+                  <a:buChar char="§"/>
+                </a:pPr>
+                <a:r>
+                  <a:rPr lang="de-DE" sz="2000" b="1" dirty="0"/>
+                  <a:t>A: </a:t>
+                </a:r>
+                <a14:m>
+                  <m:oMath xmlns:m="http://schemas.openxmlformats.org/officeDocument/2006/math">
+                    <m:r>
+                      <a:rPr lang="de-DE" sz="2000" b="1" i="1" smtClean="0">
+                        <a:latin typeface="Cambria Math" panose="02040503050406030204" pitchFamily="18" charset="0"/>
+                        <a:ea typeface="Cambria Math" panose="02040503050406030204" pitchFamily="18" charset="0"/>
+                      </a:rPr>
+                      <m:t>𝛂</m:t>
+                    </m:r>
+                    <m:r>
+                      <a:rPr lang="de-DE" sz="2000" b="1" i="1">
+                        <a:latin typeface="Cambria Math" panose="02040503050406030204" pitchFamily="18" charset="0"/>
+                      </a:rPr>
+                      <m:t>:</m:t>
+                    </m:r>
+                    <m:r>
+                      <a:rPr lang="de-DE" sz="2000" b="1" i="1">
+                        <a:latin typeface="Cambria Math" panose="02040503050406030204" pitchFamily="18" charset="0"/>
+                      </a:rPr>
+                      <m:t>𝟏</m:t>
+                    </m:r>
+                    <m:r>
+                      <a:rPr lang="de-DE" sz="2000" b="1" i="1">
+                        <a:latin typeface="Cambria Math" panose="02040503050406030204" pitchFamily="18" charset="0"/>
+                      </a:rPr>
+                      <m:t>,</m:t>
+                    </m:r>
+                    <m:r>
+                      <a:rPr lang="de-DE" sz="2000" b="1" i="1">
+                        <a:latin typeface="Cambria Math" panose="02040503050406030204" pitchFamily="18" charset="0"/>
+                      </a:rPr>
+                      <m:t>𝟑</m:t>
+                    </m:r>
+                    <m:r>
+                      <a:rPr lang="de-DE" sz="2000" b="1" i="1" smtClean="0">
+                        <a:latin typeface="Cambria Math" panose="02040503050406030204" pitchFamily="18" charset="0"/>
+                      </a:rPr>
+                      <m:t>  </m:t>
+                    </m:r>
+                    <m:r>
+                      <a:rPr lang="de-DE" sz="2000" b="1" i="1">
+                        <a:latin typeface="Cambria Math" panose="02040503050406030204" pitchFamily="18" charset="0"/>
+                        <a:ea typeface="Cambria Math" panose="02040503050406030204" pitchFamily="18" charset="0"/>
+                      </a:rPr>
+                      <m:t>𝜷</m:t>
+                    </m:r>
+                    <m:r>
+                      <a:rPr lang="de-DE" sz="2000" b="1" i="1">
+                        <a:latin typeface="Cambria Math" panose="02040503050406030204" pitchFamily="18" charset="0"/>
+                        <a:ea typeface="Cambria Math" panose="02040503050406030204" pitchFamily="18" charset="0"/>
+                      </a:rPr>
+                      <m:t>:</m:t>
+                    </m:r>
+                    <m:r>
+                      <a:rPr lang="de-DE" sz="2000" b="1" i="1">
+                        <a:latin typeface="Cambria Math" panose="02040503050406030204" pitchFamily="18" charset="0"/>
+                        <a:ea typeface="Cambria Math" panose="02040503050406030204" pitchFamily="18" charset="0"/>
+                      </a:rPr>
+                      <m:t>𝟐𝟓</m:t>
+                    </m:r>
+                    <m:r>
+                      <a:rPr lang="de-DE" sz="2000" b="1" i="1">
+                        <a:latin typeface="Cambria Math" panose="02040503050406030204" pitchFamily="18" charset="0"/>
+                        <a:ea typeface="Cambria Math" panose="02040503050406030204" pitchFamily="18" charset="0"/>
+                      </a:rPr>
+                      <m:t>,</m:t>
+                    </m:r>
+                    <m:r>
+                      <a:rPr lang="de-DE" sz="2000" b="1" i="1">
+                        <a:latin typeface="Cambria Math" panose="02040503050406030204" pitchFamily="18" charset="0"/>
+                        <a:ea typeface="Cambria Math" panose="02040503050406030204" pitchFamily="18" charset="0"/>
+                      </a:rPr>
+                      <m:t>𝟎</m:t>
+                    </m:r>
+                    <m:r>
+                      <a:rPr lang="de-DE" sz="2000" b="1" i="1" smtClean="0">
+                        <a:latin typeface="Cambria Math" panose="02040503050406030204" pitchFamily="18" charset="0"/>
+                        <a:ea typeface="Cambria Math" panose="02040503050406030204" pitchFamily="18" charset="0"/>
+                      </a:rPr>
+                      <m:t>  </m:t>
+                    </m:r>
+                    <m:r>
+                      <a:rPr lang="de-DE" sz="2000" b="1" i="1">
+                        <a:latin typeface="Cambria Math" panose="02040503050406030204" pitchFamily="18" charset="0"/>
+                        <a:ea typeface="Cambria Math" panose="02040503050406030204" pitchFamily="18" charset="0"/>
+                      </a:rPr>
+                      <m:t>𝝆</m:t>
+                    </m:r>
+                    <m:r>
+                      <a:rPr lang="de-DE" sz="2000" b="1" i="1">
+                        <a:latin typeface="Cambria Math" panose="02040503050406030204" pitchFamily="18" charset="0"/>
+                        <a:ea typeface="Cambria Math" panose="02040503050406030204" pitchFamily="18" charset="0"/>
+                      </a:rPr>
+                      <m:t>:</m:t>
+                    </m:r>
+                    <m:r>
+                      <a:rPr lang="de-DE" sz="2000" b="1" i="1">
+                        <a:latin typeface="Cambria Math" panose="02040503050406030204" pitchFamily="18" charset="0"/>
+                        <a:ea typeface="Cambria Math" panose="02040503050406030204" pitchFamily="18" charset="0"/>
+                      </a:rPr>
+                      <m:t>𝟎</m:t>
+                    </m:r>
+                    <m:r>
+                      <a:rPr lang="de-DE" sz="2000" b="1" i="1">
+                        <a:latin typeface="Cambria Math" panose="02040503050406030204" pitchFamily="18" charset="0"/>
+                        <a:ea typeface="Cambria Math" panose="02040503050406030204" pitchFamily="18" charset="0"/>
+                      </a:rPr>
+                      <m:t>.</m:t>
+                    </m:r>
+                    <m:r>
+                      <a:rPr lang="de-DE" sz="2000" b="1" i="1">
+                        <a:latin typeface="Cambria Math" panose="02040503050406030204" pitchFamily="18" charset="0"/>
+                        <a:ea typeface="Cambria Math" panose="02040503050406030204" pitchFamily="18" charset="0"/>
+                      </a:rPr>
+                      <m:t>𝟑𝟓</m:t>
+                    </m:r>
+                    <m:r>
+                      <a:rPr lang="de-DE" sz="2000" b="1" i="1">
+                        <a:latin typeface="Cambria Math" panose="02040503050406030204" pitchFamily="18" charset="0"/>
+                        <a:ea typeface="Cambria Math" panose="02040503050406030204" pitchFamily="18" charset="0"/>
+                      </a:rPr>
+                      <m:t>  </m:t>
+                    </m:r>
+                    <m:r>
+                      <a:rPr lang="de-DE" sz="2000" b="1" i="1">
+                        <a:latin typeface="Cambria Math" panose="02040503050406030204" pitchFamily="18" charset="0"/>
+                        <a:ea typeface="Cambria Math" panose="02040503050406030204" pitchFamily="18" charset="0"/>
+                      </a:rPr>
+                      <m:t>𝑮</m:t>
+                    </m:r>
+                    <m:r>
+                      <a:rPr lang="de-DE" sz="2000" b="1" i="1">
+                        <a:latin typeface="Cambria Math" panose="02040503050406030204" pitchFamily="18" charset="0"/>
+                        <a:ea typeface="Cambria Math" panose="02040503050406030204" pitchFamily="18" charset="0"/>
+                      </a:rPr>
+                      <m:t>:</m:t>
+                    </m:r>
+                    <m:r>
+                      <a:rPr lang="de-DE" sz="2000" b="1" i="1">
+                        <a:latin typeface="Cambria Math" panose="02040503050406030204" pitchFamily="18" charset="0"/>
+                        <a:ea typeface="Cambria Math" panose="02040503050406030204" pitchFamily="18" charset="0"/>
+                      </a:rPr>
+                      <m:t>𝟏𝟕𝟓</m:t>
+                    </m:r>
+                  </m:oMath>
+                </a14:m>
+                <a:endParaRPr lang="de-DE" sz="2000" b="1" dirty="0">
+                  <a:ea typeface="Cambria Math" panose="02040503050406030204" pitchFamily="18" charset="0"/>
+                </a:endParaRPr>
+              </a:p>
+              <a:p>
+                <a:pPr marL="342900" indent="-342900">
+                  <a:buFont typeface="Wingdings" panose="05000000000000000000" pitchFamily="2" charset="2"/>
+                  <a:buChar char="§"/>
+                </a:pPr>
+                <a:r>
+                  <a:rPr lang="de-DE" sz="2000" b="1" dirty="0"/>
+                  <a:t>B:</a:t>
+                </a:r>
+                <a14:m>
+                  <m:oMath xmlns:m="http://schemas.openxmlformats.org/officeDocument/2006/math">
+                    <m:r>
+                      <a:rPr lang="de-DE" sz="2000" b="1" i="0" smtClean="0">
+                        <a:latin typeface="Cambria Math" panose="02040503050406030204" pitchFamily="18" charset="0"/>
+                        <a:ea typeface="Cambria Math" panose="02040503050406030204" pitchFamily="18" charset="0"/>
+                      </a:rPr>
+                      <m:t> </m:t>
+                    </m:r>
+                    <m:r>
+                      <a:rPr lang="de-DE" sz="2000" b="1" i="1">
+                        <a:latin typeface="Cambria Math" panose="02040503050406030204" pitchFamily="18" charset="0"/>
+                        <a:ea typeface="Cambria Math" panose="02040503050406030204" pitchFamily="18" charset="0"/>
+                      </a:rPr>
+                      <m:t>𝛂</m:t>
+                    </m:r>
+                    <m:r>
+                      <a:rPr lang="de-DE" sz="2000" b="1" i="1">
+                        <a:latin typeface="Cambria Math" panose="02040503050406030204" pitchFamily="18" charset="0"/>
+                      </a:rPr>
+                      <m:t>:</m:t>
+                    </m:r>
+                    <m:r>
+                      <a:rPr lang="de-DE" sz="2000" b="1" i="1">
+                        <a:latin typeface="Cambria Math" panose="02040503050406030204" pitchFamily="18" charset="0"/>
+                      </a:rPr>
+                      <m:t>𝟏</m:t>
+                    </m:r>
+                    <m:r>
+                      <a:rPr lang="de-DE" sz="2000" b="1" i="1">
+                        <a:latin typeface="Cambria Math" panose="02040503050406030204" pitchFamily="18" charset="0"/>
+                      </a:rPr>
+                      <m:t>,</m:t>
+                    </m:r>
+                    <m:r>
+                      <a:rPr lang="de-DE" sz="2000" b="1" i="1" smtClean="0">
+                        <a:latin typeface="Cambria Math" panose="02040503050406030204" pitchFamily="18" charset="0"/>
+                      </a:rPr>
+                      <m:t>𝟏</m:t>
+                    </m:r>
+                    <m:r>
+                      <a:rPr lang="de-DE" sz="2000" b="1" i="1">
+                        <a:latin typeface="Cambria Math" panose="02040503050406030204" pitchFamily="18" charset="0"/>
+                      </a:rPr>
+                      <m:t> </m:t>
+                    </m:r>
+                    <m:r>
+                      <a:rPr lang="de-DE" sz="2000" b="1" i="1" smtClean="0">
+                        <a:latin typeface="Cambria Math" panose="02040503050406030204" pitchFamily="18" charset="0"/>
+                      </a:rPr>
+                      <m:t> </m:t>
+                    </m:r>
+                    <m:r>
+                      <a:rPr lang="de-DE" sz="2000" b="1" i="1">
+                        <a:latin typeface="Cambria Math" panose="02040503050406030204" pitchFamily="18" charset="0"/>
+                        <a:ea typeface="Cambria Math" panose="02040503050406030204" pitchFamily="18" charset="0"/>
+                      </a:rPr>
+                      <m:t>𝜷</m:t>
+                    </m:r>
+                    <m:r>
+                      <a:rPr lang="de-DE" sz="2000" b="1" i="1">
+                        <a:latin typeface="Cambria Math" panose="02040503050406030204" pitchFamily="18" charset="0"/>
+                        <a:ea typeface="Cambria Math" panose="02040503050406030204" pitchFamily="18" charset="0"/>
+                      </a:rPr>
+                      <m:t>:</m:t>
+                    </m:r>
+                    <m:r>
+                      <a:rPr lang="de-DE" sz="2000" b="1" i="1" smtClean="0">
+                        <a:latin typeface="Cambria Math" panose="02040503050406030204" pitchFamily="18" charset="0"/>
+                        <a:ea typeface="Cambria Math" panose="02040503050406030204" pitchFamily="18" charset="0"/>
+                      </a:rPr>
+                      <m:t>𝟖</m:t>
+                    </m:r>
+                    <m:r>
+                      <a:rPr lang="de-DE" sz="2000" b="1" i="1">
+                        <a:latin typeface="Cambria Math" panose="02040503050406030204" pitchFamily="18" charset="0"/>
+                        <a:ea typeface="Cambria Math" panose="02040503050406030204" pitchFamily="18" charset="0"/>
+                      </a:rPr>
+                      <m:t>,</m:t>
+                    </m:r>
+                    <m:r>
+                      <a:rPr lang="de-DE" sz="2000" b="1" i="1">
+                        <a:latin typeface="Cambria Math" panose="02040503050406030204" pitchFamily="18" charset="0"/>
+                        <a:ea typeface="Cambria Math" panose="02040503050406030204" pitchFamily="18" charset="0"/>
+                      </a:rPr>
+                      <m:t>𝟎</m:t>
+                    </m:r>
+                    <m:r>
+                      <a:rPr lang="de-DE" sz="2000" b="1" i="1">
+                        <a:latin typeface="Cambria Math" panose="02040503050406030204" pitchFamily="18" charset="0"/>
+                        <a:ea typeface="Cambria Math" panose="02040503050406030204" pitchFamily="18" charset="0"/>
+                      </a:rPr>
+                      <m:t>     </m:t>
+                    </m:r>
+                    <m:r>
+                      <a:rPr lang="de-DE" sz="2000" b="1" i="1">
+                        <a:latin typeface="Cambria Math" panose="02040503050406030204" pitchFamily="18" charset="0"/>
+                        <a:ea typeface="Cambria Math" panose="02040503050406030204" pitchFamily="18" charset="0"/>
+                      </a:rPr>
+                      <m:t>𝝆</m:t>
+                    </m:r>
+                    <m:r>
+                      <a:rPr lang="de-DE" sz="2000" b="1" i="1">
+                        <a:latin typeface="Cambria Math" panose="02040503050406030204" pitchFamily="18" charset="0"/>
+                        <a:ea typeface="Cambria Math" panose="02040503050406030204" pitchFamily="18" charset="0"/>
+                      </a:rPr>
+                      <m:t>:</m:t>
+                    </m:r>
+                    <m:r>
+                      <a:rPr lang="de-DE" sz="2000" b="1" i="1">
+                        <a:latin typeface="Cambria Math" panose="02040503050406030204" pitchFamily="18" charset="0"/>
+                        <a:ea typeface="Cambria Math" panose="02040503050406030204" pitchFamily="18" charset="0"/>
+                      </a:rPr>
+                      <m:t>𝟎</m:t>
+                    </m:r>
+                    <m:r>
+                      <a:rPr lang="de-DE" sz="2000" b="1" i="1">
+                        <a:latin typeface="Cambria Math" panose="02040503050406030204" pitchFamily="18" charset="0"/>
+                        <a:ea typeface="Cambria Math" panose="02040503050406030204" pitchFamily="18" charset="0"/>
+                      </a:rPr>
+                      <m:t>.</m:t>
+                    </m:r>
+                    <m:r>
+                      <a:rPr lang="de-DE" sz="2000" b="1" i="1" smtClean="0">
+                        <a:latin typeface="Cambria Math" panose="02040503050406030204" pitchFamily="18" charset="0"/>
+                        <a:ea typeface="Cambria Math" panose="02040503050406030204" pitchFamily="18" charset="0"/>
+                      </a:rPr>
+                      <m:t>𝟒</m:t>
+                    </m:r>
+                    <m:r>
+                      <a:rPr lang="de-DE" sz="2000" b="1" i="1">
+                        <a:latin typeface="Cambria Math" panose="02040503050406030204" pitchFamily="18" charset="0"/>
+                        <a:ea typeface="Cambria Math" panose="02040503050406030204" pitchFamily="18" charset="0"/>
+                      </a:rPr>
+                      <m:t> </m:t>
+                    </m:r>
+                    <m:r>
+                      <a:rPr lang="de-DE" sz="2000" b="1" i="1" smtClean="0">
+                        <a:latin typeface="Cambria Math" panose="02040503050406030204" pitchFamily="18" charset="0"/>
+                        <a:ea typeface="Cambria Math" panose="02040503050406030204" pitchFamily="18" charset="0"/>
+                      </a:rPr>
+                      <m:t>   </m:t>
+                    </m:r>
+                    <m:r>
+                      <a:rPr lang="de-DE" sz="2000" b="1" i="1">
+                        <a:latin typeface="Cambria Math" panose="02040503050406030204" pitchFamily="18" charset="0"/>
+                        <a:ea typeface="Cambria Math" panose="02040503050406030204" pitchFamily="18" charset="0"/>
+                      </a:rPr>
+                      <m:t>𝑮</m:t>
+                    </m:r>
+                    <m:r>
+                      <a:rPr lang="de-DE" sz="2000" b="1" i="1">
+                        <a:latin typeface="Cambria Math" panose="02040503050406030204" pitchFamily="18" charset="0"/>
+                        <a:ea typeface="Cambria Math" panose="02040503050406030204" pitchFamily="18" charset="0"/>
+                      </a:rPr>
+                      <m:t>:</m:t>
+                    </m:r>
+                    <m:r>
+                      <a:rPr lang="de-DE" sz="2000" b="1" i="1" smtClean="0">
+                        <a:latin typeface="Cambria Math" panose="02040503050406030204" pitchFamily="18" charset="0"/>
+                        <a:ea typeface="Cambria Math" panose="02040503050406030204" pitchFamily="18" charset="0"/>
+                      </a:rPr>
+                      <m:t>𝟗𝟎</m:t>
+                    </m:r>
+                  </m:oMath>
+                </a14:m>
+                <a:endParaRPr lang="de-DE" sz="2000" b="1" dirty="0">
+                  <a:ea typeface="Cambria Math" panose="02040503050406030204" pitchFamily="18" charset="0"/>
+                </a:endParaRPr>
+              </a:p>
+              <a:p>
+                <a:pPr marL="342900" indent="-342900">
+                  <a:buFont typeface="Wingdings" panose="05000000000000000000" pitchFamily="2" charset="2"/>
+                  <a:buChar char="§"/>
+                </a:pPr>
+                <a:r>
+                  <a:rPr lang="de-DE" sz="2000" b="1" dirty="0"/>
+                  <a:t>C:</a:t>
+                </a:r>
+                <a14:m>
+                  <m:oMath xmlns:m="http://schemas.openxmlformats.org/officeDocument/2006/math">
+                    <m:r>
+                      <a:rPr lang="de-DE" sz="2000" b="1" i="0" smtClean="0">
+                        <a:latin typeface="Cambria Math" panose="02040503050406030204" pitchFamily="18" charset="0"/>
+                        <a:ea typeface="Cambria Math" panose="02040503050406030204" pitchFamily="18" charset="0"/>
+                      </a:rPr>
+                      <m:t> </m:t>
+                    </m:r>
+                    <m:r>
+                      <a:rPr lang="de-DE" sz="2000" b="1" i="1">
+                        <a:latin typeface="Cambria Math" panose="02040503050406030204" pitchFamily="18" charset="0"/>
+                        <a:ea typeface="Cambria Math" panose="02040503050406030204" pitchFamily="18" charset="0"/>
+                      </a:rPr>
+                      <m:t>𝛂</m:t>
+                    </m:r>
+                    <m:r>
+                      <a:rPr lang="de-DE" sz="2000" b="1" i="1">
+                        <a:latin typeface="Cambria Math" panose="02040503050406030204" pitchFamily="18" charset="0"/>
+                      </a:rPr>
+                      <m:t>:</m:t>
+                    </m:r>
+                    <m:r>
+                      <a:rPr lang="de-DE" sz="2000" b="1" i="1">
+                        <a:latin typeface="Cambria Math" panose="02040503050406030204" pitchFamily="18" charset="0"/>
+                      </a:rPr>
+                      <m:t>𝟏</m:t>
+                    </m:r>
+                    <m:r>
+                      <a:rPr lang="de-DE" sz="2000" b="1" i="1">
+                        <a:latin typeface="Cambria Math" panose="02040503050406030204" pitchFamily="18" charset="0"/>
+                      </a:rPr>
+                      <m:t>,</m:t>
+                    </m:r>
+                    <m:r>
+                      <a:rPr lang="de-DE" sz="2000" b="1" i="1" smtClean="0">
+                        <a:latin typeface="Cambria Math" panose="02040503050406030204" pitchFamily="18" charset="0"/>
+                      </a:rPr>
+                      <m:t>𝟎</m:t>
+                    </m:r>
+                    <m:r>
+                      <a:rPr lang="de-DE" sz="2000" b="1" i="1">
+                        <a:latin typeface="Cambria Math" panose="02040503050406030204" pitchFamily="18" charset="0"/>
+                      </a:rPr>
+                      <m:t> </m:t>
+                    </m:r>
+                    <m:r>
+                      <a:rPr lang="de-DE" sz="2000" b="1" i="1" smtClean="0">
+                        <a:latin typeface="Cambria Math" panose="02040503050406030204" pitchFamily="18" charset="0"/>
+                      </a:rPr>
+                      <m:t> </m:t>
+                    </m:r>
+                    <m:r>
+                      <a:rPr lang="de-DE" sz="2000" b="1" i="1">
+                        <a:latin typeface="Cambria Math" panose="02040503050406030204" pitchFamily="18" charset="0"/>
+                        <a:ea typeface="Cambria Math" panose="02040503050406030204" pitchFamily="18" charset="0"/>
+                      </a:rPr>
+                      <m:t>𝜷</m:t>
+                    </m:r>
+                    <m:r>
+                      <a:rPr lang="de-DE" sz="2000" b="1" i="1">
+                        <a:latin typeface="Cambria Math" panose="02040503050406030204" pitchFamily="18" charset="0"/>
+                        <a:ea typeface="Cambria Math" panose="02040503050406030204" pitchFamily="18" charset="0"/>
+                      </a:rPr>
+                      <m:t>:</m:t>
+                    </m:r>
+                    <m:r>
+                      <a:rPr lang="de-DE" sz="2000" b="1" i="1" smtClean="0">
+                        <a:latin typeface="Cambria Math" panose="02040503050406030204" pitchFamily="18" charset="0"/>
+                        <a:ea typeface="Cambria Math" panose="02040503050406030204" pitchFamily="18" charset="0"/>
+                      </a:rPr>
+                      <m:t>𝟒</m:t>
+                    </m:r>
+                    <m:r>
+                      <a:rPr lang="de-DE" sz="2000" b="1" i="1">
+                        <a:latin typeface="Cambria Math" panose="02040503050406030204" pitchFamily="18" charset="0"/>
+                        <a:ea typeface="Cambria Math" panose="02040503050406030204" pitchFamily="18" charset="0"/>
+                      </a:rPr>
+                      <m:t>,</m:t>
+                    </m:r>
+                    <m:r>
+                      <a:rPr lang="de-DE" sz="2000" b="1" i="1">
+                        <a:latin typeface="Cambria Math" panose="02040503050406030204" pitchFamily="18" charset="0"/>
+                        <a:ea typeface="Cambria Math" panose="02040503050406030204" pitchFamily="18" charset="0"/>
+                      </a:rPr>
+                      <m:t>𝟎</m:t>
+                    </m:r>
+                    <m:r>
+                      <a:rPr lang="de-DE" sz="2000" b="1" i="1">
+                        <a:latin typeface="Cambria Math" panose="02040503050406030204" pitchFamily="18" charset="0"/>
+                        <a:ea typeface="Cambria Math" panose="02040503050406030204" pitchFamily="18" charset="0"/>
+                      </a:rPr>
+                      <m:t>     </m:t>
+                    </m:r>
+                    <m:r>
+                      <a:rPr lang="de-DE" sz="2000" b="1" i="1">
+                        <a:latin typeface="Cambria Math" panose="02040503050406030204" pitchFamily="18" charset="0"/>
+                        <a:ea typeface="Cambria Math" panose="02040503050406030204" pitchFamily="18" charset="0"/>
+                      </a:rPr>
+                      <m:t>𝝆</m:t>
+                    </m:r>
+                    <m:r>
+                      <a:rPr lang="de-DE" sz="2000" b="1" i="1">
+                        <a:latin typeface="Cambria Math" panose="02040503050406030204" pitchFamily="18" charset="0"/>
+                        <a:ea typeface="Cambria Math" panose="02040503050406030204" pitchFamily="18" charset="0"/>
+                      </a:rPr>
+                      <m:t>:</m:t>
+                    </m:r>
+                    <m:r>
+                      <a:rPr lang="de-DE" sz="2000" b="1" i="1">
+                        <a:latin typeface="Cambria Math" panose="02040503050406030204" pitchFamily="18" charset="0"/>
+                        <a:ea typeface="Cambria Math" panose="02040503050406030204" pitchFamily="18" charset="0"/>
+                      </a:rPr>
+                      <m:t>𝟎</m:t>
+                    </m:r>
+                    <m:r>
+                      <a:rPr lang="de-DE" sz="2000" b="1" i="1">
+                        <a:latin typeface="Cambria Math" panose="02040503050406030204" pitchFamily="18" charset="0"/>
+                        <a:ea typeface="Cambria Math" panose="02040503050406030204" pitchFamily="18" charset="0"/>
+                      </a:rPr>
+                      <m:t>.</m:t>
+                    </m:r>
+                    <m:r>
+                      <a:rPr lang="de-DE" sz="2000" b="1" i="1" smtClean="0">
+                        <a:latin typeface="Cambria Math" panose="02040503050406030204" pitchFamily="18" charset="0"/>
+                        <a:ea typeface="Cambria Math" panose="02040503050406030204" pitchFamily="18" charset="0"/>
+                      </a:rPr>
+                      <m:t>𝟐</m:t>
+                    </m:r>
+                    <m:r>
+                      <a:rPr lang="de-DE" sz="2000" b="1" i="1">
+                        <a:latin typeface="Cambria Math" panose="02040503050406030204" pitchFamily="18" charset="0"/>
+                        <a:ea typeface="Cambria Math" panose="02040503050406030204" pitchFamily="18" charset="0"/>
+                      </a:rPr>
+                      <m:t> </m:t>
+                    </m:r>
+                    <m:r>
+                      <a:rPr lang="de-DE" sz="2000" b="1" i="1" smtClean="0">
+                        <a:latin typeface="Cambria Math" panose="02040503050406030204" pitchFamily="18" charset="0"/>
+                        <a:ea typeface="Cambria Math" panose="02040503050406030204" pitchFamily="18" charset="0"/>
+                      </a:rPr>
+                      <m:t>  </m:t>
+                    </m:r>
+                    <m:r>
+                      <a:rPr lang="de-DE" sz="2000" b="1" i="1">
+                        <a:latin typeface="Cambria Math" panose="02040503050406030204" pitchFamily="18" charset="0"/>
+                        <a:ea typeface="Cambria Math" panose="02040503050406030204" pitchFamily="18" charset="0"/>
+                      </a:rPr>
+                      <m:t>𝑮</m:t>
+                    </m:r>
+                    <m:r>
+                      <a:rPr lang="de-DE" sz="2000" b="1" i="1">
+                        <a:latin typeface="Cambria Math" panose="02040503050406030204" pitchFamily="18" charset="0"/>
+                        <a:ea typeface="Cambria Math" panose="02040503050406030204" pitchFamily="18" charset="0"/>
+                      </a:rPr>
+                      <m:t>:</m:t>
+                    </m:r>
+                    <m:r>
+                      <a:rPr lang="de-DE" sz="2000" b="1" i="1" smtClean="0">
+                        <a:latin typeface="Cambria Math" panose="02040503050406030204" pitchFamily="18" charset="0"/>
+                        <a:ea typeface="Cambria Math" panose="02040503050406030204" pitchFamily="18" charset="0"/>
+                      </a:rPr>
+                      <m:t>𝟒𝟎</m:t>
+                    </m:r>
+                  </m:oMath>
+                </a14:m>
+                <a:endParaRPr lang="de-DE" sz="2400" b="1" dirty="0"/>
+              </a:p>
+              <a:p>
+                <a:r>
+                  <a:rPr lang="de-DE" sz="2400" b="1" dirty="0"/>
+                  <a:t>Ergebnis:</a:t>
+                </a:r>
+              </a:p>
+              <a:p>
+                <a:pPr marL="285750" indent="-285750">
+                  <a:buFont typeface="Wingdings" panose="05000000000000000000" pitchFamily="2" charset="2"/>
+                  <a:buChar char="§"/>
+                </a:pPr>
+                <a:r>
+                  <a:rPr lang="de-DE" sz="2400" b="1" dirty="0"/>
+                  <a:t>Konfiguration A : 	99,91 %</a:t>
+                </a:r>
+              </a:p>
+              <a:p>
+                <a:pPr marL="285750" indent="-285750">
+                  <a:buFont typeface="Wingdings" panose="05000000000000000000" pitchFamily="2" charset="2"/>
+                  <a:buChar char="§"/>
+                </a:pPr>
+                <a:r>
+                  <a:rPr lang="de-DE" sz="2400" b="1" dirty="0"/>
+                  <a:t>Konfiguration B: 	99,76 %</a:t>
+                </a:r>
+              </a:p>
+              <a:p>
+                <a:pPr marL="285750" indent="-285750">
+                  <a:buFont typeface="Wingdings" panose="05000000000000000000" pitchFamily="2" charset="2"/>
+                  <a:buChar char="§"/>
+                </a:pPr>
+                <a:r>
+                  <a:rPr lang="de-DE" sz="2400" b="1" dirty="0"/>
+                  <a:t>Konfiguration C: 	99,61 %</a:t>
+                </a:r>
+                <a:endParaRPr lang="de-DE" sz="2400" dirty="0"/>
+              </a:p>
+            </p:txBody>
+          </p:sp>
+        </mc:Choice>
+        <mc:Fallback>
+          <p:sp>
+            <p:nvSpPr>
+              <p:cNvPr id="3" name="Textfeld 2">
+                <a:extLst>
+                  <a:ext uri="{FF2B5EF4-FFF2-40B4-BE49-F238E27FC236}">
+                    <a16:creationId xmlns:a16="http://schemas.microsoft.com/office/drawing/2014/main" id="{03B229CE-C208-3B6E-0937-5F9A9A7AA444}"/>
+                  </a:ext>
+                </a:extLst>
+              </p:cNvPr>
+              <p:cNvSpPr txBox="1">
+                <a:spLocks noRot="1" noChangeAspect="1" noMove="1" noResize="1" noEditPoints="1" noAdjustHandles="1" noChangeArrowheads="1" noChangeShapeType="1" noTextEdit="1"/>
+              </p:cNvSpPr>
+              <p:nvPr/>
+            </p:nvSpPr>
+            <p:spPr>
+              <a:xfrm>
+                <a:off x="7672918" y="2160000"/>
+                <a:ext cx="4419032" cy="4339650"/>
+              </a:xfrm>
+              <a:prstGeom prst="rect">
+                <a:avLst/>
+              </a:prstGeom>
+              <a:blipFill>
+                <a:blip r:embed="rId4"/>
+                <a:stretch>
+                  <a:fillRect l="-2207" t="-1124" b="-2247"/>
+                </a:stretch>
+              </a:blipFill>
+            </p:spPr>
+            <p:txBody>
+              <a:bodyPr/>
+              <a:lstStyle/>
+              <a:p>
+                <a:r>
+                  <a:rPr lang="de-DE">
+                    <a:noFill/>
+                  </a:rPr>
+                  <a:t> </a:t>
+                </a:r>
+              </a:p>
+            </p:txBody>
+          </p:sp>
+        </mc:Fallback>
+      </mc:AlternateContent>
     </p:spTree>
     <p:extLst>
       <p:ext uri="{BB962C8B-B14F-4D97-AF65-F5344CB8AC3E}">
@@ -7581,7 +12033,7 @@
 </p:sld>
 </file>
 
-<file path=ppt/slides/slide5.xml><?xml version="1.0" encoding="utf-8"?>
+<file path=ppt/slides/slide6.xml><?xml version="1.0" encoding="utf-8"?>
 <p:sld xmlns:a="http://schemas.openxmlformats.org/drawingml/2006/main" xmlns:r="http://schemas.openxmlformats.org/officeDocument/2006/relationships" xmlns:p="http://schemas.openxmlformats.org/presentationml/2006/main">
   <p:cSld>
     <p:spTree>
@@ -7695,8 +12147,8 @@
           <a:lstStyle/>
           <a:p>
             <a:r>
-              <a:rPr lang="de-DE"/>
-              <a:t>22.03.2025</a:t>
+              <a:rPr lang="de-DE" dirty="0"/>
+              <a:t>20.06.2026</a:t>
             </a:r>
           </a:p>
         </p:txBody>
@@ -7752,7 +12204,7 @@
           <a:p>
             <a:fld id="{F20E45F0-5197-4D99-A0B0-CC09E9235134}" type="slidenum">
               <a:rPr lang="de-DE" smtClean="0"/>
-              <a:t>5</a:t>
+              <a:t>6</a:t>
             </a:fld>
             <a:endParaRPr lang="de-DE"/>
           </a:p>
@@ -7772,8 +12224,8 @@
         </p:nvSpPr>
         <p:spPr>
           <a:xfrm>
-            <a:off x="8153400" y="2606109"/>
-            <a:ext cx="3200400" cy="2308324"/>
+            <a:off x="7920000" y="2160000"/>
+            <a:ext cx="4500600" cy="3046988"/>
           </a:xfrm>
           <a:prstGeom prst="rect">
             <a:avLst/>
@@ -7787,8 +12239,8 @@
           <a:lstStyle/>
           <a:p>
             <a:r>
-              <a:rPr lang="de-DE" b="1" dirty="0"/>
-              <a:t>Beste: </a:t>
+              <a:rPr lang="de-DE" sz="2400" b="1" dirty="0"/>
+              <a:t>Konfiguration A:</a:t>
             </a:r>
           </a:p>
           <a:p>
@@ -7797,7 +12249,7 @@
               <a:buChar char="§"/>
             </a:pPr>
             <a:r>
-              <a:rPr lang="de-DE" b="1" dirty="0"/>
+              <a:rPr lang="de-DE" sz="2400" b="1" dirty="0"/>
               <a:t>Fokussiert auf die Kleinstgegenstände</a:t>
             </a:r>
           </a:p>
@@ -7807,17 +12259,27 @@
               <a:buChar char="§"/>
             </a:pPr>
             <a:r>
-              <a:rPr lang="de-DE" b="1" dirty="0"/>
-              <a:t>hohes Stagnationsrisiko</a:t>
-            </a:r>
-          </a:p>
-          <a:p>
-            <a:endParaRPr lang="de-DE" b="1" dirty="0"/>
-          </a:p>
-          <a:p>
-            <a:r>
-              <a:rPr lang="de-DE" b="1" dirty="0"/>
-              <a:t>Schlechteste:</a:t>
+              <a:rPr lang="de-DE" sz="2400" b="1" dirty="0"/>
+              <a:t>Hohes Stagnationsrisiko</a:t>
+            </a:r>
+          </a:p>
+          <a:p>
+            <a:endParaRPr lang="de-DE" sz="2400" b="1" dirty="0"/>
+          </a:p>
+          <a:p>
+            <a:r>
+              <a:rPr lang="de-DE" sz="2400" b="1" dirty="0"/>
+              <a:t>Konfiguration C: </a:t>
+            </a:r>
+          </a:p>
+          <a:p>
+            <a:pPr marL="342900" indent="-342900">
+              <a:buFont typeface="Wingdings" panose="05000000000000000000" pitchFamily="2" charset="2"/>
+              <a:buChar char="§"/>
+            </a:pPr>
+            <a:r>
+              <a:rPr lang="de-DE" sz="2400" b="1" dirty="0"/>
+              <a:t>Mehr Exploration</a:t>
             </a:r>
           </a:p>
           <a:p>
@@ -7826,22 +12288,8 @@
               <a:buChar char="§"/>
             </a:pPr>
             <a:r>
-              <a:rPr lang="de-DE" b="1" dirty="0"/>
-              <a:t> mehr Exploration</a:t>
-            </a:r>
-          </a:p>
-          <a:p>
-            <a:pPr marL="285750" indent="-285750">
-              <a:buFont typeface="Wingdings" panose="05000000000000000000" pitchFamily="2" charset="2"/>
-              <a:buChar char="§"/>
-            </a:pPr>
-            <a:r>
-              <a:rPr lang="de-DE" dirty="0"/>
-              <a:t> </a:t>
-            </a:r>
-            <a:r>
-              <a:rPr lang="de-DE" b="1" dirty="0"/>
-              <a:t>stabileres Suchverhalten</a:t>
+              <a:rPr lang="de-DE" sz="2400" b="1" dirty="0"/>
+              <a:t>Robustestes Suchverhalten</a:t>
             </a:r>
           </a:p>
         </p:txBody>
@@ -7850,186 +12298,6 @@
     <p:extLst>
       <p:ext uri="{BB962C8B-B14F-4D97-AF65-F5344CB8AC3E}">
         <p14:creationId xmlns:p14="http://schemas.microsoft.com/office/powerpoint/2010/main" val="1467630395"/>
-      </p:ext>
-    </p:extLst>
-  </p:cSld>
-  <p:clrMapOvr>
-    <a:masterClrMapping/>
-  </p:clrMapOvr>
-</p:sld>
-</file>
-
-<file path=ppt/slides/slide6.xml><?xml version="1.0" encoding="utf-8"?>
-<p:sld xmlns:a="http://schemas.openxmlformats.org/drawingml/2006/main" xmlns:r="http://schemas.openxmlformats.org/officeDocument/2006/relationships" xmlns:p="http://schemas.openxmlformats.org/presentationml/2006/main">
-  <p:cSld>
-    <p:spTree>
-      <p:nvGrpSpPr>
-        <p:cNvPr id="1" name=""/>
-        <p:cNvGrpSpPr/>
-        <p:nvPr/>
-      </p:nvGrpSpPr>
-      <p:grpSpPr>
-        <a:xfrm>
-          <a:off x="0" y="0"/>
-          <a:ext cx="0" cy="0"/>
-          <a:chOff x="0" y="0"/>
-          <a:chExt cx="0" cy="0"/>
-        </a:xfrm>
-      </p:grpSpPr>
-      <p:sp>
-        <p:nvSpPr>
-          <p:cNvPr id="2" name="Titel 1">
-            <a:extLst>
-              <a:ext uri="{FF2B5EF4-FFF2-40B4-BE49-F238E27FC236}">
-                <a16:creationId xmlns:a16="http://schemas.microsoft.com/office/drawing/2014/main" id="{DE86CDD5-F3A8-1E49-03B4-ABAC4E69630F}"/>
-              </a:ext>
-            </a:extLst>
-          </p:cNvPr>
-          <p:cNvSpPr>
-            <a:spLocks noGrp="1"/>
-          </p:cNvSpPr>
-          <p:nvPr>
-            <p:ph type="title"/>
-          </p:nvPr>
-        </p:nvSpPr>
-        <p:spPr/>
-        <p:txBody>
-          <a:bodyPr/>
-          <a:lstStyle/>
-          <a:p>
-            <a:r>
-              <a:rPr lang="de-DE" dirty="0"/>
-              <a:t>Item-Auswahl Hard-Problem</a:t>
-            </a:r>
-          </a:p>
-        </p:txBody>
-      </p:sp>
-      <p:pic>
-        <p:nvPicPr>
-          <p:cNvPr id="8" name="Inhaltsplatzhalter 7">
-            <a:extLst>
-              <a:ext uri="{FF2B5EF4-FFF2-40B4-BE49-F238E27FC236}">
-                <a16:creationId xmlns:a16="http://schemas.microsoft.com/office/drawing/2014/main" id="{CCD849A5-AE97-5B6A-16ED-2BC4C72CF5BC}"/>
-              </a:ext>
-            </a:extLst>
-          </p:cNvPr>
-          <p:cNvPicPr>
-            <a:picLocks noGrp="1" noChangeAspect="1"/>
-          </p:cNvPicPr>
-          <p:nvPr>
-            <p:ph idx="1"/>
-          </p:nvPr>
-        </p:nvPicPr>
-        <p:blipFill>
-          <a:blip r:embed="rId2">
-            <a:extLst>
-              <a:ext uri="{28A0092B-C50C-407E-A947-70E740481C1C}">
-                <a14:useLocalDpi xmlns:a14="http://schemas.microsoft.com/office/drawing/2010/main" val="0"/>
-              </a:ext>
-            </a:extLst>
-          </a:blip>
-          <a:srcRect/>
-          <a:stretch/>
-        </p:blipFill>
-        <p:spPr>
-          <a:xfrm>
-            <a:off x="1059100" y="1825625"/>
-            <a:ext cx="10073799" cy="4351338"/>
-          </a:xfrm>
-          <a:prstGeom prst="rect">
-            <a:avLst/>
-          </a:prstGeom>
-        </p:spPr>
-      </p:pic>
-      <p:sp>
-        <p:nvSpPr>
-          <p:cNvPr id="4" name="Datumsplatzhalter 3">
-            <a:extLst>
-              <a:ext uri="{FF2B5EF4-FFF2-40B4-BE49-F238E27FC236}">
-                <a16:creationId xmlns:a16="http://schemas.microsoft.com/office/drawing/2014/main" id="{E50407AF-A5BD-50CE-FDF3-BF40706A411F}"/>
-              </a:ext>
-            </a:extLst>
-          </p:cNvPr>
-          <p:cNvSpPr>
-            <a:spLocks noGrp="1"/>
-          </p:cNvSpPr>
-          <p:nvPr>
-            <p:ph type="dt" sz="half" idx="10"/>
-          </p:nvPr>
-        </p:nvSpPr>
-        <p:spPr/>
-        <p:txBody>
-          <a:bodyPr/>
-          <a:lstStyle/>
-          <a:p>
-            <a:r>
-              <a:rPr lang="de-DE"/>
-              <a:t>22.03.2025</a:t>
-            </a:r>
-          </a:p>
-        </p:txBody>
-      </p:sp>
-      <p:sp>
-        <p:nvSpPr>
-          <p:cNvPr id="5" name="Fußzeilenplatzhalter 4">
-            <a:extLst>
-              <a:ext uri="{FF2B5EF4-FFF2-40B4-BE49-F238E27FC236}">
-                <a16:creationId xmlns:a16="http://schemas.microsoft.com/office/drawing/2014/main" id="{7411A53B-319E-FD54-9E3B-908627BD44F5}"/>
-              </a:ext>
-            </a:extLst>
-          </p:cNvPr>
-          <p:cNvSpPr>
-            <a:spLocks noGrp="1"/>
-          </p:cNvSpPr>
-          <p:nvPr>
-            <p:ph type="ftr" sz="quarter" idx="11"/>
-          </p:nvPr>
-        </p:nvSpPr>
-        <p:spPr/>
-        <p:txBody>
-          <a:bodyPr/>
-          <a:lstStyle/>
-          <a:p>
-            <a:r>
-              <a:rPr lang="de-DE"/>
-              <a:t>Niko Kläsener</a:t>
-            </a:r>
-          </a:p>
-        </p:txBody>
-      </p:sp>
-      <p:sp>
-        <p:nvSpPr>
-          <p:cNvPr id="6" name="Foliennummernplatzhalter 5">
-            <a:extLst>
-              <a:ext uri="{FF2B5EF4-FFF2-40B4-BE49-F238E27FC236}">
-                <a16:creationId xmlns:a16="http://schemas.microsoft.com/office/drawing/2014/main" id="{FE1E8DB6-4C98-C632-D75C-05F38D93E9EB}"/>
-              </a:ext>
-            </a:extLst>
-          </p:cNvPr>
-          <p:cNvSpPr>
-            <a:spLocks noGrp="1"/>
-          </p:cNvSpPr>
-          <p:nvPr>
-            <p:ph type="sldNum" sz="quarter" idx="12"/>
-          </p:nvPr>
-        </p:nvSpPr>
-        <p:spPr/>
-        <p:txBody>
-          <a:bodyPr/>
-          <a:lstStyle/>
-          <a:p>
-            <a:fld id="{F20E45F0-5197-4D99-A0B0-CC09E9235134}" type="slidenum">
-              <a:rPr lang="de-DE" smtClean="0"/>
-              <a:t>6</a:t>
-            </a:fld>
-            <a:endParaRPr lang="de-DE"/>
-          </a:p>
-        </p:txBody>
-      </p:sp>
-    </p:spTree>
-    <p:extLst>
-      <p:ext uri="{BB962C8B-B14F-4D97-AF65-F5344CB8AC3E}">
-        <p14:creationId xmlns:p14="http://schemas.microsoft.com/office/powerpoint/2010/main" val="937536178"/>
       </p:ext>
     </p:extLst>
   </p:cSld>
@@ -8061,6 +12329,186 @@
           <p:cNvPr id="2" name="Titel 1">
             <a:extLst>
               <a:ext uri="{FF2B5EF4-FFF2-40B4-BE49-F238E27FC236}">
+                <a16:creationId xmlns:a16="http://schemas.microsoft.com/office/drawing/2014/main" id="{DE86CDD5-F3A8-1E49-03B4-ABAC4E69630F}"/>
+              </a:ext>
+            </a:extLst>
+          </p:cNvPr>
+          <p:cNvSpPr>
+            <a:spLocks noGrp="1"/>
+          </p:cNvSpPr>
+          <p:nvPr>
+            <p:ph type="title"/>
+          </p:nvPr>
+        </p:nvSpPr>
+        <p:spPr/>
+        <p:txBody>
+          <a:bodyPr/>
+          <a:lstStyle/>
+          <a:p>
+            <a:r>
+              <a:rPr lang="de-DE" dirty="0"/>
+              <a:t>Item-Auswahl Hard-Problem</a:t>
+            </a:r>
+          </a:p>
+        </p:txBody>
+      </p:sp>
+      <p:pic>
+        <p:nvPicPr>
+          <p:cNvPr id="8" name="Inhaltsplatzhalter 7">
+            <a:extLst>
+              <a:ext uri="{FF2B5EF4-FFF2-40B4-BE49-F238E27FC236}">
+                <a16:creationId xmlns:a16="http://schemas.microsoft.com/office/drawing/2014/main" id="{CCD849A5-AE97-5B6A-16ED-2BC4C72CF5BC}"/>
+              </a:ext>
+            </a:extLst>
+          </p:cNvPr>
+          <p:cNvPicPr>
+            <a:picLocks noGrp="1" noChangeAspect="1"/>
+          </p:cNvPicPr>
+          <p:nvPr>
+            <p:ph idx="1"/>
+          </p:nvPr>
+        </p:nvPicPr>
+        <p:blipFill>
+          <a:blip r:embed="rId2">
+            <a:extLst>
+              <a:ext uri="{28A0092B-C50C-407E-A947-70E740481C1C}">
+                <a14:useLocalDpi xmlns:a14="http://schemas.microsoft.com/office/drawing/2010/main" val="0"/>
+              </a:ext>
+            </a:extLst>
+          </a:blip>
+          <a:srcRect/>
+          <a:stretch/>
+        </p:blipFill>
+        <p:spPr>
+          <a:xfrm>
+            <a:off x="1059100" y="1825625"/>
+            <a:ext cx="10073799" cy="4351338"/>
+          </a:xfrm>
+          <a:prstGeom prst="rect">
+            <a:avLst/>
+          </a:prstGeom>
+        </p:spPr>
+      </p:pic>
+      <p:sp>
+        <p:nvSpPr>
+          <p:cNvPr id="4" name="Datumsplatzhalter 3">
+            <a:extLst>
+              <a:ext uri="{FF2B5EF4-FFF2-40B4-BE49-F238E27FC236}">
+                <a16:creationId xmlns:a16="http://schemas.microsoft.com/office/drawing/2014/main" id="{E50407AF-A5BD-50CE-FDF3-BF40706A411F}"/>
+              </a:ext>
+            </a:extLst>
+          </p:cNvPr>
+          <p:cNvSpPr>
+            <a:spLocks noGrp="1"/>
+          </p:cNvSpPr>
+          <p:nvPr>
+            <p:ph type="dt" sz="half" idx="10"/>
+          </p:nvPr>
+        </p:nvSpPr>
+        <p:spPr/>
+        <p:txBody>
+          <a:bodyPr/>
+          <a:lstStyle/>
+          <a:p>
+            <a:r>
+              <a:rPr lang="de-DE" dirty="0"/>
+              <a:t>20.06.2026</a:t>
+            </a:r>
+          </a:p>
+        </p:txBody>
+      </p:sp>
+      <p:sp>
+        <p:nvSpPr>
+          <p:cNvPr id="5" name="Fußzeilenplatzhalter 4">
+            <a:extLst>
+              <a:ext uri="{FF2B5EF4-FFF2-40B4-BE49-F238E27FC236}">
+                <a16:creationId xmlns:a16="http://schemas.microsoft.com/office/drawing/2014/main" id="{7411A53B-319E-FD54-9E3B-908627BD44F5}"/>
+              </a:ext>
+            </a:extLst>
+          </p:cNvPr>
+          <p:cNvSpPr>
+            <a:spLocks noGrp="1"/>
+          </p:cNvSpPr>
+          <p:nvPr>
+            <p:ph type="ftr" sz="quarter" idx="11"/>
+          </p:nvPr>
+        </p:nvSpPr>
+        <p:spPr/>
+        <p:txBody>
+          <a:bodyPr/>
+          <a:lstStyle/>
+          <a:p>
+            <a:r>
+              <a:rPr lang="de-DE"/>
+              <a:t>Niko Kläsener</a:t>
+            </a:r>
+          </a:p>
+        </p:txBody>
+      </p:sp>
+      <p:sp>
+        <p:nvSpPr>
+          <p:cNvPr id="6" name="Foliennummernplatzhalter 5">
+            <a:extLst>
+              <a:ext uri="{FF2B5EF4-FFF2-40B4-BE49-F238E27FC236}">
+                <a16:creationId xmlns:a16="http://schemas.microsoft.com/office/drawing/2014/main" id="{FE1E8DB6-4C98-C632-D75C-05F38D93E9EB}"/>
+              </a:ext>
+            </a:extLst>
+          </p:cNvPr>
+          <p:cNvSpPr>
+            <a:spLocks noGrp="1"/>
+          </p:cNvSpPr>
+          <p:nvPr>
+            <p:ph type="sldNum" sz="quarter" idx="12"/>
+          </p:nvPr>
+        </p:nvSpPr>
+        <p:spPr/>
+        <p:txBody>
+          <a:bodyPr/>
+          <a:lstStyle/>
+          <a:p>
+            <a:fld id="{F20E45F0-5197-4D99-A0B0-CC09E9235134}" type="slidenum">
+              <a:rPr lang="de-DE" smtClean="0"/>
+              <a:t>7</a:t>
+            </a:fld>
+            <a:endParaRPr lang="de-DE"/>
+          </a:p>
+        </p:txBody>
+      </p:sp>
+    </p:spTree>
+    <p:extLst>
+      <p:ext uri="{BB962C8B-B14F-4D97-AF65-F5344CB8AC3E}">
+        <p14:creationId xmlns:p14="http://schemas.microsoft.com/office/powerpoint/2010/main" val="937536178"/>
+      </p:ext>
+    </p:extLst>
+  </p:cSld>
+  <p:clrMapOvr>
+    <a:masterClrMapping/>
+  </p:clrMapOvr>
+</p:sld>
+</file>
+
+<file path=ppt/slides/slide8.xml><?xml version="1.0" encoding="utf-8"?>
+<p:sld xmlns:a="http://schemas.openxmlformats.org/drawingml/2006/main" xmlns:r="http://schemas.openxmlformats.org/officeDocument/2006/relationships" xmlns:p="http://schemas.openxmlformats.org/presentationml/2006/main">
+  <p:cSld>
+    <p:spTree>
+      <p:nvGrpSpPr>
+        <p:cNvPr id="1" name=""/>
+        <p:cNvGrpSpPr/>
+        <p:nvPr/>
+      </p:nvGrpSpPr>
+      <p:grpSpPr>
+        <a:xfrm>
+          <a:off x="0" y="0"/>
+          <a:ext cx="0" cy="0"/>
+          <a:chOff x="0" y="0"/>
+          <a:chExt cx="0" cy="0"/>
+        </a:xfrm>
+      </p:grpSpPr>
+      <p:sp>
+        <p:nvSpPr>
+          <p:cNvPr id="2" name="Titel 1">
+            <a:extLst>
+              <a:ext uri="{FF2B5EF4-FFF2-40B4-BE49-F238E27FC236}">
                 <a16:creationId xmlns:a16="http://schemas.microsoft.com/office/drawing/2014/main" id="{4DC433D2-17BA-BB4F-88B0-0F9E964EEB21}"/>
               </a:ext>
             </a:extLst>
@@ -8180,8 +12628,8 @@
           <a:lstStyle/>
           <a:p>
             <a:r>
-              <a:rPr lang="de-DE"/>
-              <a:t>22.03.2025</a:t>
+              <a:rPr lang="de-DE" dirty="0"/>
+              <a:t>20.06.2026</a:t>
             </a:r>
           </a:p>
         </p:txBody>
@@ -8237,7 +12685,7 @@
           <a:p>
             <a:fld id="{F20E45F0-5197-4D99-A0B0-CC09E9235134}" type="slidenum">
               <a:rPr lang="de-DE" smtClean="0"/>
-              <a:t>7</a:t>
+              <a:t>8</a:t>
             </a:fld>
             <a:endParaRPr lang="de-DE"/>
           </a:p>
@@ -8256,7 +12704,7 @@
 </p:sld>
 </file>
 
-<file path=ppt/slides/slide8.xml><?xml version="1.0" encoding="utf-8"?>
+<file path=ppt/slides/slide9.xml><?xml version="1.0" encoding="utf-8"?>
 <p:sld xmlns:a="http://schemas.openxmlformats.org/drawingml/2006/main" xmlns:r="http://schemas.openxmlformats.org/officeDocument/2006/relationships" xmlns:p="http://schemas.openxmlformats.org/presentationml/2006/main">
   <p:cSld>
     <p:spTree>
@@ -8366,8 +12814,8 @@
           <a:lstStyle/>
           <a:p>
             <a:r>
-              <a:rPr lang="de-DE"/>
-              <a:t>22.03.2025</a:t>
+              <a:rPr lang="de-DE" dirty="0"/>
+              <a:t>20.06.2026</a:t>
             </a:r>
           </a:p>
         </p:txBody>
@@ -8423,7 +12871,7 @@
           <a:p>
             <a:fld id="{F20E45F0-5197-4D99-A0B0-CC09E9235134}" type="slidenum">
               <a:rPr lang="de-DE" smtClean="0"/>
-              <a:t>8</a:t>
+              <a:t>9</a:t>
             </a:fld>
             <a:endParaRPr lang="de-DE"/>
           </a:p>
@@ -8443,8 +12891,8 @@
         </p:nvSpPr>
         <p:spPr>
           <a:xfrm>
-            <a:off x="8153400" y="2606109"/>
-            <a:ext cx="2990850" cy="1200329"/>
+            <a:off x="7920000" y="2160000"/>
+            <a:ext cx="4272000" cy="3416320"/>
           </a:xfrm>
           <a:prstGeom prst="rect">
             <a:avLst/>
@@ -8458,7 +12906,7 @@
           <a:lstStyle/>
           <a:p>
             <a:r>
-              <a:rPr lang="de-DE" b="1" dirty="0"/>
+              <a:rPr lang="de-DE" sz="2400" b="1" dirty="0"/>
               <a:t>Easy-Problem:</a:t>
             </a:r>
           </a:p>
@@ -8468,7 +12916,7 @@
               <a:buChar char="§"/>
             </a:pPr>
             <a:r>
-              <a:rPr lang="de-DE" b="1" dirty="0"/>
+              <a:rPr lang="de-DE" sz="2400" b="1" dirty="0"/>
               <a:t>400 Items</a:t>
             </a:r>
           </a:p>
@@ -8478,7 +12926,7 @@
               <a:buChar char="§"/>
             </a:pPr>
             <a:r>
-              <a:rPr lang="de-DE" b="1" dirty="0"/>
+              <a:rPr lang="de-DE" sz="2400" b="1" dirty="0"/>
               <a:t>1.000.000 Kapazität</a:t>
             </a:r>
           </a:p>
@@ -8488,81 +12936,36 @@
               <a:buChar char="§"/>
             </a:pPr>
             <a:r>
-              <a:rPr lang="de-DE" b="1" dirty="0"/>
+              <a:rPr lang="de-DE" sz="2400" b="1" dirty="0"/>
               <a:t>4 Gruppen</a:t>
             </a:r>
           </a:p>
-        </p:txBody>
-      </p:sp>
-      <p:sp>
-        <p:nvSpPr>
-          <p:cNvPr id="7" name="Textfeld 6">
-            <a:extLst>
-              <a:ext uri="{FF2B5EF4-FFF2-40B4-BE49-F238E27FC236}">
-                <a16:creationId xmlns:a16="http://schemas.microsoft.com/office/drawing/2014/main" id="{95B4E1EB-B5BB-3FBA-04AE-035423E7056E}"/>
-              </a:ext>
-            </a:extLst>
-          </p:cNvPr>
-          <p:cNvSpPr txBox="1"/>
-          <p:nvPr/>
-        </p:nvSpPr>
-        <p:spPr>
-          <a:xfrm>
-            <a:off x="8153400" y="4240600"/>
-            <a:ext cx="3409950" cy="1477328"/>
-          </a:xfrm>
-          <a:prstGeom prst="rect">
-            <a:avLst/>
-          </a:prstGeom>
-          <a:noFill/>
-        </p:spPr>
-        <p:txBody>
-          <a:bodyPr wrap="square" rtlCol="0">
-            <a:spAutoFit/>
-          </a:bodyPr>
-          <a:lstStyle/>
-          <a:p>
-            <a:r>
-              <a:rPr lang="de-DE" b="1" dirty="0"/>
+          <a:p>
+            <a:endParaRPr lang="de-DE" sz="2400" b="1" dirty="0"/>
+          </a:p>
+          <a:p>
+            <a:r>
+              <a:rPr lang="de-DE" sz="2400" b="1" dirty="0"/>
               <a:t>Ergebnis:</a:t>
             </a:r>
           </a:p>
           <a:p>
-            <a:pPr marL="285750" indent="-285750">
-              <a:buFont typeface="Wingdings" panose="05000000000000000000" pitchFamily="2" charset="2"/>
-              <a:buChar char="§"/>
-            </a:pPr>
-            <a:r>
-              <a:rPr lang="de-DE" b="1" dirty="0"/>
-              <a:t>Beste: 	99,91%</a:t>
-            </a:r>
-          </a:p>
-          <a:p>
-            <a:pPr marL="285750" indent="-285750">
-              <a:buFont typeface="Wingdings" panose="05000000000000000000" pitchFamily="2" charset="2"/>
-              <a:buChar char="§"/>
-            </a:pPr>
-            <a:r>
-              <a:rPr lang="de-DE" b="1" dirty="0"/>
-              <a:t>Mittlere: 	99,96%</a:t>
-            </a:r>
-          </a:p>
-          <a:p>
-            <a:pPr marL="285750" indent="-285750">
-              <a:buFont typeface="Wingdings" panose="05000000000000000000" pitchFamily="2" charset="2"/>
-              <a:buChar char="§"/>
-            </a:pPr>
-            <a:r>
-              <a:rPr lang="de-DE" b="1" dirty="0"/>
-              <a:t>Schlechteste:	99,66%</a:t>
-            </a:r>
-          </a:p>
-          <a:p>
-            <a:pPr marL="285750" indent="-285750">
-              <a:buFont typeface="Wingdings" panose="05000000000000000000" pitchFamily="2" charset="2"/>
-              <a:buChar char="§"/>
-            </a:pPr>
-            <a:endParaRPr lang="de-DE" dirty="0"/>
+            <a:r>
+              <a:rPr lang="de-DE" sz="2400" b="1" dirty="0"/>
+              <a:t>Konfiguration A: 	99,91 %</a:t>
+            </a:r>
+          </a:p>
+          <a:p>
+            <a:r>
+              <a:rPr lang="de-DE" sz="2400" b="1" dirty="0"/>
+              <a:t>Konfiguration B: 	99,96 %</a:t>
+            </a:r>
+          </a:p>
+          <a:p>
+            <a:r>
+              <a:rPr lang="de-DE" sz="2400" b="1" dirty="0"/>
+              <a:t>Konfiguration C: 	99,66 %</a:t>
+            </a:r>
           </a:p>
         </p:txBody>
       </p:sp>
@@ -8570,383 +12973,6 @@
     <p:extLst>
       <p:ext uri="{BB962C8B-B14F-4D97-AF65-F5344CB8AC3E}">
         <p14:creationId xmlns:p14="http://schemas.microsoft.com/office/powerpoint/2010/main" val="284479213"/>
-      </p:ext>
-    </p:extLst>
-  </p:cSld>
-  <p:clrMapOvr>
-    <a:masterClrMapping/>
-  </p:clrMapOvr>
-</p:sld>
-</file>
-
-<file path=ppt/slides/slide9.xml><?xml version="1.0" encoding="utf-8"?>
-<p:sld xmlns:a="http://schemas.openxmlformats.org/drawingml/2006/main" xmlns:r="http://schemas.openxmlformats.org/officeDocument/2006/relationships" xmlns:p="http://schemas.openxmlformats.org/presentationml/2006/main">
-  <p:cSld>
-    <p:spTree>
-      <p:nvGrpSpPr>
-        <p:cNvPr id="1" name=""/>
-        <p:cNvGrpSpPr/>
-        <p:nvPr/>
-      </p:nvGrpSpPr>
-      <p:grpSpPr>
-        <a:xfrm>
-          <a:off x="0" y="0"/>
-          <a:ext cx="0" cy="0"/>
-          <a:chOff x="0" y="0"/>
-          <a:chExt cx="0" cy="0"/>
-        </a:xfrm>
-      </p:grpSpPr>
-      <p:sp>
-        <p:nvSpPr>
-          <p:cNvPr id="2" name="Titel 1">
-            <a:extLst>
-              <a:ext uri="{FF2B5EF4-FFF2-40B4-BE49-F238E27FC236}">
-                <a16:creationId xmlns:a16="http://schemas.microsoft.com/office/drawing/2014/main" id="{6BB030AB-786E-C531-12A7-749F70850164}"/>
-              </a:ext>
-            </a:extLst>
-          </p:cNvPr>
-          <p:cNvSpPr>
-            <a:spLocks noGrp="1"/>
-          </p:cNvSpPr>
-          <p:nvPr>
-            <p:ph type="title"/>
-          </p:nvPr>
-        </p:nvSpPr>
-        <p:spPr/>
-        <p:txBody>
-          <a:bodyPr/>
-          <a:lstStyle/>
-          <a:p>
-            <a:r>
-              <a:rPr lang="de-DE" dirty="0"/>
-              <a:t>Fazit</a:t>
-            </a:r>
-          </a:p>
-        </p:txBody>
-      </p:sp>
-      <mc:AlternateContent xmlns:mc="http://schemas.openxmlformats.org/markup-compatibility/2006">
-        <mc:Choice xmlns:a14="http://schemas.microsoft.com/office/drawing/2010/main" Requires="a14">
-          <p:sp>
-            <p:nvSpPr>
-              <p:cNvPr id="5" name="Textplatzhalter 4">
-                <a:extLst>
-                  <a:ext uri="{FF2B5EF4-FFF2-40B4-BE49-F238E27FC236}">
-                    <a16:creationId xmlns:a16="http://schemas.microsoft.com/office/drawing/2014/main" id="{874A7A65-C7F4-F6C9-5AE4-858DEE4E2960}"/>
-                  </a:ext>
-                </a:extLst>
-              </p:cNvPr>
-              <p:cNvSpPr>
-                <a:spLocks noGrp="1"/>
-              </p:cNvSpPr>
-              <p:nvPr>
-                <p:ph type="body" sz="quarter" idx="3"/>
-              </p:nvPr>
-            </p:nvSpPr>
-            <p:spPr/>
-            <p:txBody>
-              <a:bodyPr/>
-              <a:lstStyle/>
-              <a:p>
-                <a:r>
-                  <a:rPr lang="de-DE" dirty="0"/>
-                  <a:t>Einfluss vom Großen </a:t>
-                </a:r>
-                <a14:m>
-                  <m:oMath xmlns:m="http://schemas.openxmlformats.org/officeDocument/2006/math">
-                    <m:r>
-                      <a:rPr lang="de-DE" i="1">
-                        <a:latin typeface="Cambria Math" panose="02040503050406030204" pitchFamily="18" charset="0"/>
-                        <a:ea typeface="Cambria Math" panose="02040503050406030204" pitchFamily="18" charset="0"/>
-                      </a:rPr>
-                      <m:t>𝛽</m:t>
-                    </m:r>
-                  </m:oMath>
-                </a14:m>
-                <a:endParaRPr lang="de-DE" dirty="0"/>
-              </a:p>
-            </p:txBody>
-          </p:sp>
-        </mc:Choice>
-        <mc:Fallback>
-          <p:sp>
-            <p:nvSpPr>
-              <p:cNvPr id="5" name="Textplatzhalter 4">
-                <a:extLst>
-                  <a:ext uri="{FF2B5EF4-FFF2-40B4-BE49-F238E27FC236}">
-                    <a16:creationId xmlns:a16="http://schemas.microsoft.com/office/drawing/2014/main" id="{874A7A65-C7F4-F6C9-5AE4-858DEE4E2960}"/>
-                  </a:ext>
-                </a:extLst>
-              </p:cNvPr>
-              <p:cNvSpPr>
-                <a:spLocks noGrp="1" noRot="1" noChangeAspect="1" noMove="1" noResize="1" noEditPoints="1" noAdjustHandles="1" noChangeArrowheads="1" noChangeShapeType="1" noTextEdit="1"/>
-              </p:cNvSpPr>
-              <p:nvPr>
-                <p:ph type="body" sz="quarter" idx="3"/>
-              </p:nvPr>
-            </p:nvSpPr>
-            <p:spPr>
-              <a:blipFill>
-                <a:blip r:embed="rId2"/>
-                <a:stretch>
-                  <a:fillRect l="-1882" b="-17778"/>
-                </a:stretch>
-              </a:blipFill>
-            </p:spPr>
-            <p:txBody>
-              <a:bodyPr/>
-              <a:lstStyle/>
-              <a:p>
-                <a:r>
-                  <a:rPr lang="de-DE">
-                    <a:noFill/>
-                  </a:rPr>
-                  <a:t> </a:t>
-                </a:r>
-              </a:p>
-            </p:txBody>
-          </p:sp>
-        </mc:Fallback>
-      </mc:AlternateContent>
-      <p:sp>
-        <p:nvSpPr>
-          <p:cNvPr id="6" name="Inhaltsplatzhalter 5">
-            <a:extLst>
-              <a:ext uri="{FF2B5EF4-FFF2-40B4-BE49-F238E27FC236}">
-                <a16:creationId xmlns:a16="http://schemas.microsoft.com/office/drawing/2014/main" id="{27CF4302-EE10-DEB8-57DC-0DE63F780452}"/>
-              </a:ext>
-            </a:extLst>
-          </p:cNvPr>
-          <p:cNvSpPr>
-            <a:spLocks noGrp="1"/>
-          </p:cNvSpPr>
-          <p:nvPr>
-            <p:ph sz="quarter" idx="4"/>
-          </p:nvPr>
-        </p:nvSpPr>
-        <p:spPr/>
-        <p:txBody>
-          <a:bodyPr>
-            <a:normAutofit lnSpcReduction="10000"/>
-          </a:bodyPr>
-          <a:lstStyle/>
-          <a:p>
-            <a:r>
-              <a:rPr lang="de-DE" dirty="0"/>
-              <a:t>Ermöglicht Selektion zwischen Gegenständen mit minimalen unterschieden (z.B. 1 und 0,999)</a:t>
-            </a:r>
-          </a:p>
-          <a:p>
-            <a:pPr>
-              <a:buFont typeface="Wingdings" panose="05000000000000000000" pitchFamily="2" charset="2"/>
-              <a:buChar char="§"/>
-            </a:pPr>
-            <a:r>
-              <a:rPr lang="de-DE" dirty="0"/>
-              <a:t>Verlust der Selektion Fähigkeit bei allgemein schlechteren Gegenständen (z.B. 0,1 und 0,0999)</a:t>
-            </a:r>
-          </a:p>
-          <a:p>
-            <a:pPr>
-              <a:buFont typeface="Wingdings" panose="05000000000000000000" pitchFamily="2" charset="2"/>
-              <a:buChar char="§"/>
-            </a:pPr>
-            <a:r>
-              <a:rPr lang="de-DE" dirty="0"/>
-              <a:t>Fokussierung auf Gegenständen mit hoher Attraktivität </a:t>
-            </a:r>
-          </a:p>
-          <a:p>
-            <a:endParaRPr lang="de-DE" dirty="0"/>
-          </a:p>
-        </p:txBody>
-      </p:sp>
-      <p:sp>
-        <p:nvSpPr>
-          <p:cNvPr id="7" name="Datumsplatzhalter 6">
-            <a:extLst>
-              <a:ext uri="{FF2B5EF4-FFF2-40B4-BE49-F238E27FC236}">
-                <a16:creationId xmlns:a16="http://schemas.microsoft.com/office/drawing/2014/main" id="{6B894B29-7047-1ACA-3353-24BCA1F292EB}"/>
-              </a:ext>
-            </a:extLst>
-          </p:cNvPr>
-          <p:cNvSpPr>
-            <a:spLocks noGrp="1"/>
-          </p:cNvSpPr>
-          <p:nvPr>
-            <p:ph type="dt" sz="half" idx="10"/>
-          </p:nvPr>
-        </p:nvSpPr>
-        <p:spPr/>
-        <p:txBody>
-          <a:bodyPr/>
-          <a:lstStyle/>
-          <a:p>
-            <a:r>
-              <a:rPr lang="de-DE"/>
-              <a:t>22.03.2025</a:t>
-            </a:r>
-          </a:p>
-        </p:txBody>
-      </p:sp>
-      <p:sp>
-        <p:nvSpPr>
-          <p:cNvPr id="8" name="Fußzeilenplatzhalter 7">
-            <a:extLst>
-              <a:ext uri="{FF2B5EF4-FFF2-40B4-BE49-F238E27FC236}">
-                <a16:creationId xmlns:a16="http://schemas.microsoft.com/office/drawing/2014/main" id="{5981A085-1E07-22DC-7050-E4D89C38BAD6}"/>
-              </a:ext>
-            </a:extLst>
-          </p:cNvPr>
-          <p:cNvSpPr>
-            <a:spLocks noGrp="1"/>
-          </p:cNvSpPr>
-          <p:nvPr>
-            <p:ph type="ftr" sz="quarter" idx="11"/>
-          </p:nvPr>
-        </p:nvSpPr>
-        <p:spPr/>
-        <p:txBody>
-          <a:bodyPr/>
-          <a:lstStyle/>
-          <a:p>
-            <a:r>
-              <a:rPr lang="de-DE"/>
-              <a:t>Niko Kläsener</a:t>
-            </a:r>
-          </a:p>
-        </p:txBody>
-      </p:sp>
-      <p:sp>
-        <p:nvSpPr>
-          <p:cNvPr id="9" name="Foliennummernplatzhalter 8">
-            <a:extLst>
-              <a:ext uri="{FF2B5EF4-FFF2-40B4-BE49-F238E27FC236}">
-                <a16:creationId xmlns:a16="http://schemas.microsoft.com/office/drawing/2014/main" id="{86C91C11-4729-3014-9DB3-AC8059C85536}"/>
-              </a:ext>
-            </a:extLst>
-          </p:cNvPr>
-          <p:cNvSpPr>
-            <a:spLocks noGrp="1"/>
-          </p:cNvSpPr>
-          <p:nvPr>
-            <p:ph type="sldNum" sz="quarter" idx="12"/>
-          </p:nvPr>
-        </p:nvSpPr>
-        <p:spPr/>
-        <p:txBody>
-          <a:bodyPr/>
-          <a:lstStyle/>
-          <a:p>
-            <a:fld id="{F20E45F0-5197-4D99-A0B0-CC09E9235134}" type="slidenum">
-              <a:rPr lang="de-DE" smtClean="0"/>
-              <a:t>9</a:t>
-            </a:fld>
-            <a:endParaRPr lang="de-DE" dirty="0"/>
-          </a:p>
-        </p:txBody>
-      </p:sp>
-      <p:sp>
-        <p:nvSpPr>
-          <p:cNvPr id="3" name="Textplatzhalter 2">
-            <a:extLst>
-              <a:ext uri="{FF2B5EF4-FFF2-40B4-BE49-F238E27FC236}">
-                <a16:creationId xmlns:a16="http://schemas.microsoft.com/office/drawing/2014/main" id="{F05D5584-C5F5-B21E-C1D6-CE5472F6A3BE}"/>
-              </a:ext>
-            </a:extLst>
-          </p:cNvPr>
-          <p:cNvSpPr>
-            <a:spLocks noGrp="1"/>
-          </p:cNvSpPr>
-          <p:nvPr>
-            <p:ph type="body" idx="1"/>
-          </p:nvPr>
-        </p:nvSpPr>
-        <p:spPr/>
-        <p:txBody>
-          <a:bodyPr/>
-          <a:lstStyle/>
-          <a:p>
-            <a:r>
-              <a:rPr lang="de-DE" dirty="0"/>
-              <a:t>Haupterkenntnis</a:t>
-            </a:r>
-          </a:p>
-        </p:txBody>
-      </p:sp>
-      <p:sp>
-        <p:nvSpPr>
-          <p:cNvPr id="4" name="Inhaltsplatzhalter 3">
-            <a:extLst>
-              <a:ext uri="{FF2B5EF4-FFF2-40B4-BE49-F238E27FC236}">
-                <a16:creationId xmlns:a16="http://schemas.microsoft.com/office/drawing/2014/main" id="{69979646-04D1-7A25-F6AA-E780620BB2CB}"/>
-              </a:ext>
-            </a:extLst>
-          </p:cNvPr>
-          <p:cNvSpPr>
-            <a:spLocks noGrp="1"/>
-          </p:cNvSpPr>
-          <p:nvPr>
-            <p:ph sz="half" idx="2"/>
-          </p:nvPr>
-        </p:nvSpPr>
-        <p:spPr/>
-        <p:txBody>
-          <a:bodyPr>
-            <a:normAutofit lnSpcReduction="10000"/>
-          </a:bodyPr>
-          <a:lstStyle/>
-          <a:p>
-            <a:pPr>
-              <a:buFont typeface="Wingdings" panose="05000000000000000000" pitchFamily="2" charset="2"/>
-              <a:buChar char="§"/>
-            </a:pPr>
-            <a:r>
-              <a:rPr lang="de-DE" dirty="0"/>
-              <a:t>Differenz zwischen der besten und schlechtesten Konfiguration 0,3% beim Hard-Problem</a:t>
-            </a:r>
-          </a:p>
-          <a:p>
-            <a:pPr>
-              <a:buFont typeface="Wingdings" panose="05000000000000000000" pitchFamily="2" charset="2"/>
-              <a:buChar char="§"/>
-            </a:pPr>
-            <a:r>
-              <a:rPr lang="de-DE" dirty="0"/>
-              <a:t>Beim Easy Problem Stagnation der besten Konfiguration</a:t>
-            </a:r>
-          </a:p>
-          <a:p>
-            <a:pPr>
-              <a:buFont typeface="Wingdings" panose="05000000000000000000" pitchFamily="2" charset="2"/>
-              <a:buChar char="§"/>
-            </a:pPr>
-            <a:r>
-              <a:rPr lang="de-DE" dirty="0"/>
-              <a:t>Schlechteste Konfiguration zeigt allgemein das beste und stabilste Suchverhalten </a:t>
-            </a:r>
-          </a:p>
-          <a:p>
-            <a:pPr>
-              <a:buFont typeface="Wingdings" panose="05000000000000000000" pitchFamily="2" charset="2"/>
-              <a:buChar char="§"/>
-            </a:pPr>
-            <a:endParaRPr lang="de-DE" b="0" dirty="0">
-              <a:ea typeface="Cambria Math" panose="02040503050406030204" pitchFamily="18" charset="0"/>
-            </a:endParaRPr>
-          </a:p>
-          <a:p>
-            <a:pPr lvl="1">
-              <a:buFont typeface="Wingdings" panose="05000000000000000000" pitchFamily="2" charset="2"/>
-              <a:buChar char="§"/>
-            </a:pPr>
-            <a:endParaRPr lang="de-DE" dirty="0"/>
-          </a:p>
-        </p:txBody>
-      </p:sp>
-    </p:spTree>
-    <p:extLst>
-      <p:ext uri="{BB962C8B-B14F-4D97-AF65-F5344CB8AC3E}">
-        <p14:creationId xmlns:p14="http://schemas.microsoft.com/office/powerpoint/2010/main" val="3694890744"/>
       </p:ext>
     </p:extLst>
   </p:cSld>
@@ -9584,4 +13610,24 @@
     </a:ext>
   </a:extLst>
 </a:theme>
+</file>
+
+<file path=ppt/webextensions/taskpanes.xml><?xml version="1.0" encoding="utf-8"?>
+<wetp:taskpanes xmlns:wetp="http://schemas.microsoft.com/office/webextensions/taskpanes/2010/11">
+  <wetp:taskpane dockstate="right" visibility="0" width="350" row="0">
+    <wetp:webextensionref xmlns:r="http://schemas.openxmlformats.org/officeDocument/2006/relationships" r:id="rId1"/>
+  </wetp:taskpane>
+</wetp:taskpanes>
+</file>
+
+<file path=ppt/webextensions/webextension1.xml><?xml version="1.0" encoding="utf-8"?>
+<we:webextension xmlns:we="http://schemas.microsoft.com/office/webextensions/webextension/2010/11" id="{09127936-6F16-4D1A-8384-99A894F167E5}">
+  <we:reference id="wa200007130" version="1.0.0.1" store="de-DE" storeType="OMEX"/>
+  <we:alternateReferences>
+    <we:reference id="WA200007130" version="1.0.0.1" store="WA200007130" storeType="OMEX"/>
+  </we:alternateReferences>
+  <we:properties/>
+  <we:bindings/>
+  <we:snapshot xmlns:r="http://schemas.openxmlformats.org/officeDocument/2006/relationships"/>
+</we:webextension>
 </file>